--- a/images/juno bug logo.pptx
+++ b/images/juno bug logo.pptx
@@ -6,8 +6,9 @@
   </p:sldMasterIdLst>
   <p:sldIdLst>
     <p:sldId id="256" r:id="rId2"/>
-    <p:sldId id="258" r:id="rId3"/>
-    <p:sldId id="257" r:id="rId4"/>
+    <p:sldId id="259" r:id="rId3"/>
+    <p:sldId id="258" r:id="rId4"/>
+    <p:sldId id="257" r:id="rId5"/>
   </p:sldIdLst>
   <p:sldSz cx="12192000" cy="6858000"/>
   <p:notesSz cx="6858000" cy="9144000"/>
@@ -106,6 +107,11 @@
       </a:defRPr>
     </a:lvl9pPr>
   </p:defaultTextStyle>
+  <p:extLst>
+    <p:ext uri="{EFAFB233-063F-42B5-8137-9DF3F51BA10A}">
+      <p15:sldGuideLst xmlns:p15="http://schemas.microsoft.com/office/powerpoint/2012/main"/>
+    </p:ext>
+  </p:extLst>
 </p:presentation>
 </file>
 
@@ -258,7 +264,7 @@
           <a:p>
             <a:fld id="{9B1631A4-210E-4433-975B-A06E388530ED}" type="datetimeFigureOut">
               <a:rPr lang="en-NZ" smtClean="0"/>
-              <a:t>28/07/2026</a:t>
+              <a:t>3/08/2026</a:t>
             </a:fld>
             <a:endParaRPr lang="en-NZ"/>
           </a:p>
@@ -458,7 +464,7 @@
           <a:p>
             <a:fld id="{9B1631A4-210E-4433-975B-A06E388530ED}" type="datetimeFigureOut">
               <a:rPr lang="en-NZ" smtClean="0"/>
-              <a:t>28/07/2026</a:t>
+              <a:t>3/08/2026</a:t>
             </a:fld>
             <a:endParaRPr lang="en-NZ"/>
           </a:p>
@@ -668,7 +674,7 @@
           <a:p>
             <a:fld id="{9B1631A4-210E-4433-975B-A06E388530ED}" type="datetimeFigureOut">
               <a:rPr lang="en-NZ" smtClean="0"/>
-              <a:t>28/07/2026</a:t>
+              <a:t>3/08/2026</a:t>
             </a:fld>
             <a:endParaRPr lang="en-NZ"/>
           </a:p>
@@ -868,7 +874,7 @@
           <a:p>
             <a:fld id="{9B1631A4-210E-4433-975B-A06E388530ED}" type="datetimeFigureOut">
               <a:rPr lang="en-NZ" smtClean="0"/>
-              <a:t>28/07/2026</a:t>
+              <a:t>3/08/2026</a:t>
             </a:fld>
             <a:endParaRPr lang="en-NZ"/>
           </a:p>
@@ -1144,7 +1150,7 @@
           <a:p>
             <a:fld id="{9B1631A4-210E-4433-975B-A06E388530ED}" type="datetimeFigureOut">
               <a:rPr lang="en-NZ" smtClean="0"/>
-              <a:t>28/07/2026</a:t>
+              <a:t>3/08/2026</a:t>
             </a:fld>
             <a:endParaRPr lang="en-NZ"/>
           </a:p>
@@ -1412,7 +1418,7 @@
           <a:p>
             <a:fld id="{9B1631A4-210E-4433-975B-A06E388530ED}" type="datetimeFigureOut">
               <a:rPr lang="en-NZ" smtClean="0"/>
-              <a:t>28/07/2026</a:t>
+              <a:t>3/08/2026</a:t>
             </a:fld>
             <a:endParaRPr lang="en-NZ"/>
           </a:p>
@@ -1827,7 +1833,7 @@
           <a:p>
             <a:fld id="{9B1631A4-210E-4433-975B-A06E388530ED}" type="datetimeFigureOut">
               <a:rPr lang="en-NZ" smtClean="0"/>
-              <a:t>28/07/2026</a:t>
+              <a:t>3/08/2026</a:t>
             </a:fld>
             <a:endParaRPr lang="en-NZ"/>
           </a:p>
@@ -1969,7 +1975,7 @@
           <a:p>
             <a:fld id="{9B1631A4-210E-4433-975B-A06E388530ED}" type="datetimeFigureOut">
               <a:rPr lang="en-NZ" smtClean="0"/>
-              <a:t>28/07/2026</a:t>
+              <a:t>3/08/2026</a:t>
             </a:fld>
             <a:endParaRPr lang="en-NZ"/>
           </a:p>
@@ -2082,7 +2088,7 @@
           <a:p>
             <a:fld id="{9B1631A4-210E-4433-975B-A06E388530ED}" type="datetimeFigureOut">
               <a:rPr lang="en-NZ" smtClean="0"/>
-              <a:t>28/07/2026</a:t>
+              <a:t>3/08/2026</a:t>
             </a:fld>
             <a:endParaRPr lang="en-NZ"/>
           </a:p>
@@ -2395,7 +2401,7 @@
           <a:p>
             <a:fld id="{9B1631A4-210E-4433-975B-A06E388530ED}" type="datetimeFigureOut">
               <a:rPr lang="en-NZ" smtClean="0"/>
-              <a:t>28/07/2026</a:t>
+              <a:t>3/08/2026</a:t>
             </a:fld>
             <a:endParaRPr lang="en-NZ"/>
           </a:p>
@@ -2684,7 +2690,7 @@
           <a:p>
             <a:fld id="{9B1631A4-210E-4433-975B-A06E388530ED}" type="datetimeFigureOut">
               <a:rPr lang="en-NZ" smtClean="0"/>
-              <a:t>28/07/2026</a:t>
+              <a:t>3/08/2026</a:t>
             </a:fld>
             <a:endParaRPr lang="en-NZ"/>
           </a:p>
@@ -2927,7 +2933,7 @@
           <a:p>
             <a:fld id="{9B1631A4-210E-4433-975B-A06E388530ED}" type="datetimeFigureOut">
               <a:rPr lang="en-NZ" smtClean="0"/>
-              <a:t>28/07/2026</a:t>
+              <a:t>3/08/2026</a:t>
             </a:fld>
             <a:endParaRPr lang="en-NZ"/>
           </a:p>
@@ -5954,6 +5960,3684 @@
           <a:chExt cx="0" cy="0"/>
         </a:xfrm>
       </p:grpSpPr>
+      <p:grpSp>
+        <p:nvGrpSpPr>
+          <p:cNvPr id="57" name="Group 56">
+            <a:extLst>
+              <a:ext uri="{FF2B5EF4-FFF2-40B4-BE49-F238E27FC236}">
+                <a16:creationId xmlns:a16="http://schemas.microsoft.com/office/drawing/2014/main" id="{988F41C7-96E9-B1B0-BD1A-2229AF08CA52}"/>
+              </a:ext>
+            </a:extLst>
+          </p:cNvPr>
+          <p:cNvGrpSpPr/>
+          <p:nvPr/>
+        </p:nvGrpSpPr>
+        <p:grpSpPr>
+          <a:xfrm>
+            <a:off x="2997047" y="1438300"/>
+            <a:ext cx="3430714" cy="3810000"/>
+            <a:chOff x="2997047" y="1438300"/>
+            <a:chExt cx="3430714" cy="3810000"/>
+          </a:xfrm>
+        </p:grpSpPr>
+        <p:pic>
+          <p:nvPicPr>
+            <p:cNvPr id="5" name="Picture 4">
+              <a:extLst>
+                <a:ext uri="{FF2B5EF4-FFF2-40B4-BE49-F238E27FC236}">
+                  <a16:creationId xmlns:a16="http://schemas.microsoft.com/office/drawing/2014/main" id="{AC7E09D6-8441-95CB-87F7-9BE8988B88D1}"/>
+                </a:ext>
+              </a:extLst>
+            </p:cNvPr>
+            <p:cNvPicPr>
+              <a:picLocks noChangeAspect="1"/>
+            </p:cNvPicPr>
+            <p:nvPr/>
+          </p:nvPicPr>
+          <p:blipFill>
+            <a:blip r:embed="rId2">
+              <a:extLst>
+                <a:ext uri="{28A0092B-C50C-407E-A947-70E740481C1C}">
+                  <a14:useLocalDpi xmlns:a14="http://schemas.microsoft.com/office/drawing/2010/main" val="0"/>
+                </a:ext>
+              </a:extLst>
+            </a:blip>
+            <a:srcRect l="15788" r="16127"/>
+            <a:stretch>
+              <a:fillRect/>
+            </a:stretch>
+          </p:blipFill>
+          <p:spPr>
+            <a:xfrm>
+              <a:off x="3424072" y="1438300"/>
+              <a:ext cx="2594042" cy="3810000"/>
+            </a:xfrm>
+            <a:prstGeom prst="rect">
+              <a:avLst/>
+            </a:prstGeom>
+          </p:spPr>
+        </p:pic>
+        <p:grpSp>
+          <p:nvGrpSpPr>
+            <p:cNvPr id="41" name="Group 40">
+              <a:extLst>
+                <a:ext uri="{FF2B5EF4-FFF2-40B4-BE49-F238E27FC236}">
+                  <a16:creationId xmlns:a16="http://schemas.microsoft.com/office/drawing/2014/main" id="{B54CDE45-AA30-46C0-812D-E089F7441D8C}"/>
+                </a:ext>
+              </a:extLst>
+            </p:cNvPr>
+            <p:cNvGrpSpPr/>
+            <p:nvPr/>
+          </p:nvGrpSpPr>
+          <p:grpSpPr>
+            <a:xfrm>
+              <a:off x="5677461" y="2176091"/>
+              <a:ext cx="750300" cy="2737251"/>
+              <a:chOff x="5677461" y="2176091"/>
+              <a:chExt cx="750300" cy="2737251"/>
+            </a:xfrm>
+          </p:grpSpPr>
+          <p:sp>
+            <p:nvSpPr>
+              <p:cNvPr id="9" name="Oval 15">
+                <a:extLst>
+                  <a:ext uri="{FF2B5EF4-FFF2-40B4-BE49-F238E27FC236}">
+                    <a16:creationId xmlns:a16="http://schemas.microsoft.com/office/drawing/2014/main" id="{5F2E84E8-6A21-9898-2478-5E700516272C}"/>
+                  </a:ext>
+                </a:extLst>
+              </p:cNvPr>
+              <p:cNvSpPr/>
+              <p:nvPr/>
+            </p:nvSpPr>
+            <p:spPr>
+              <a:xfrm rot="1439914" flipH="1">
+                <a:off x="5873621" y="3072463"/>
+                <a:ext cx="358584" cy="83907"/>
+              </a:xfrm>
+              <a:custGeom>
+                <a:avLst/>
+                <a:gdLst>
+                  <a:gd name="csX0" fmla="*/ 0 w 525294"/>
+                  <a:gd name="csY0" fmla="*/ 94034 h 188068"/>
+                  <a:gd name="csX1" fmla="*/ 262647 w 525294"/>
+                  <a:gd name="csY1" fmla="*/ 0 h 188068"/>
+                  <a:gd name="csX2" fmla="*/ 525294 w 525294"/>
+                  <a:gd name="csY2" fmla="*/ 94034 h 188068"/>
+                  <a:gd name="csX3" fmla="*/ 262647 w 525294"/>
+                  <a:gd name="csY3" fmla="*/ 188068 h 188068"/>
+                  <a:gd name="csX4" fmla="*/ 0 w 525294"/>
+                  <a:gd name="csY4" fmla="*/ 94034 h 188068"/>
+                  <a:gd name="csX0" fmla="*/ 0 w 623481"/>
+                  <a:gd name="csY0" fmla="*/ 94831 h 189220"/>
+                  <a:gd name="csX1" fmla="*/ 262647 w 623481"/>
+                  <a:gd name="csY1" fmla="*/ 797 h 189220"/>
+                  <a:gd name="csX2" fmla="*/ 623481 w 623481"/>
+                  <a:gd name="csY2" fmla="*/ 65276 h 189220"/>
+                  <a:gd name="csX3" fmla="*/ 262647 w 623481"/>
+                  <a:gd name="csY3" fmla="*/ 188865 h 189220"/>
+                  <a:gd name="csX4" fmla="*/ 0 w 623481"/>
+                  <a:gd name="csY4" fmla="*/ 94831 h 189220"/>
+                </a:gdLst>
+                <a:ahLst/>
+                <a:cxnLst>
+                  <a:cxn ang="0">
+                    <a:pos x="csX0" y="csY0"/>
+                  </a:cxn>
+                  <a:cxn ang="0">
+                    <a:pos x="csX1" y="csY1"/>
+                  </a:cxn>
+                  <a:cxn ang="0">
+                    <a:pos x="csX2" y="csY2"/>
+                  </a:cxn>
+                  <a:cxn ang="0">
+                    <a:pos x="csX3" y="csY3"/>
+                  </a:cxn>
+                  <a:cxn ang="0">
+                    <a:pos x="csX4" y="csY4"/>
+                  </a:cxn>
+                </a:cxnLst>
+                <a:rect l="l" t="t" r="r" b="b"/>
+                <a:pathLst>
+                  <a:path w="623481" h="189220">
+                    <a:moveTo>
+                      <a:pt x="0" y="94831"/>
+                    </a:moveTo>
+                    <a:cubicBezTo>
+                      <a:pt x="0" y="42897"/>
+                      <a:pt x="158734" y="5723"/>
+                      <a:pt x="262647" y="797"/>
+                    </a:cubicBezTo>
+                    <a:cubicBezTo>
+                      <a:pt x="366560" y="-4129"/>
+                      <a:pt x="623481" y="13342"/>
+                      <a:pt x="623481" y="65276"/>
+                    </a:cubicBezTo>
+                    <a:cubicBezTo>
+                      <a:pt x="623481" y="117210"/>
+                      <a:pt x="366560" y="183939"/>
+                      <a:pt x="262647" y="188865"/>
+                    </a:cubicBezTo>
+                    <a:cubicBezTo>
+                      <a:pt x="158734" y="193791"/>
+                      <a:pt x="0" y="146765"/>
+                      <a:pt x="0" y="94831"/>
+                    </a:cubicBezTo>
+                    <a:close/>
+                  </a:path>
+                </a:pathLst>
+              </a:custGeom>
+              <a:solidFill>
+                <a:schemeClr val="accent6">
+                  <a:lumMod val="75000"/>
+                </a:schemeClr>
+              </a:solidFill>
+              <a:ln>
+                <a:solidFill>
+                  <a:schemeClr val="accent6">
+                    <a:lumMod val="75000"/>
+                  </a:schemeClr>
+                </a:solidFill>
+              </a:ln>
+            </p:spPr>
+            <p:style>
+              <a:lnRef idx="2">
+                <a:schemeClr val="accent6">
+                  <a:shade val="15000"/>
+                </a:schemeClr>
+              </a:lnRef>
+              <a:fillRef idx="1">
+                <a:schemeClr val="accent6"/>
+              </a:fillRef>
+              <a:effectRef idx="0">
+                <a:schemeClr val="accent6"/>
+              </a:effectRef>
+              <a:fontRef idx="minor">
+                <a:schemeClr val="lt1"/>
+              </a:fontRef>
+            </p:style>
+            <p:txBody>
+              <a:bodyPr rtlCol="0" anchor="ctr"/>
+              <a:lstStyle/>
+              <a:p>
+                <a:pPr algn="ctr"/>
+                <a:endParaRPr lang="en-NZ"/>
+              </a:p>
+            </p:txBody>
+          </p:sp>
+          <p:sp>
+            <p:nvSpPr>
+              <p:cNvPr id="10" name="Oval 15">
+                <a:extLst>
+                  <a:ext uri="{FF2B5EF4-FFF2-40B4-BE49-F238E27FC236}">
+                    <a16:creationId xmlns:a16="http://schemas.microsoft.com/office/drawing/2014/main" id="{4B48606F-EE2B-D250-BC8F-A8C139DF2424}"/>
+                  </a:ext>
+                </a:extLst>
+              </p:cNvPr>
+              <p:cNvSpPr/>
+              <p:nvPr/>
+            </p:nvSpPr>
+            <p:spPr>
+              <a:xfrm rot="1297676" flipH="1">
+                <a:off x="5677461" y="2648054"/>
+                <a:ext cx="336104" cy="93295"/>
+              </a:xfrm>
+              <a:custGeom>
+                <a:avLst/>
+                <a:gdLst>
+                  <a:gd name="csX0" fmla="*/ 0 w 525294"/>
+                  <a:gd name="csY0" fmla="*/ 94034 h 188068"/>
+                  <a:gd name="csX1" fmla="*/ 262647 w 525294"/>
+                  <a:gd name="csY1" fmla="*/ 0 h 188068"/>
+                  <a:gd name="csX2" fmla="*/ 525294 w 525294"/>
+                  <a:gd name="csY2" fmla="*/ 94034 h 188068"/>
+                  <a:gd name="csX3" fmla="*/ 262647 w 525294"/>
+                  <a:gd name="csY3" fmla="*/ 188068 h 188068"/>
+                  <a:gd name="csX4" fmla="*/ 0 w 525294"/>
+                  <a:gd name="csY4" fmla="*/ 94034 h 188068"/>
+                  <a:gd name="csX0" fmla="*/ 0 w 623481"/>
+                  <a:gd name="csY0" fmla="*/ 94831 h 189220"/>
+                  <a:gd name="csX1" fmla="*/ 262647 w 623481"/>
+                  <a:gd name="csY1" fmla="*/ 797 h 189220"/>
+                  <a:gd name="csX2" fmla="*/ 623481 w 623481"/>
+                  <a:gd name="csY2" fmla="*/ 65276 h 189220"/>
+                  <a:gd name="csX3" fmla="*/ 262647 w 623481"/>
+                  <a:gd name="csY3" fmla="*/ 188865 h 189220"/>
+                  <a:gd name="csX4" fmla="*/ 0 w 623481"/>
+                  <a:gd name="csY4" fmla="*/ 94831 h 189220"/>
+                </a:gdLst>
+                <a:ahLst/>
+                <a:cxnLst>
+                  <a:cxn ang="0">
+                    <a:pos x="csX0" y="csY0"/>
+                  </a:cxn>
+                  <a:cxn ang="0">
+                    <a:pos x="csX1" y="csY1"/>
+                  </a:cxn>
+                  <a:cxn ang="0">
+                    <a:pos x="csX2" y="csY2"/>
+                  </a:cxn>
+                  <a:cxn ang="0">
+                    <a:pos x="csX3" y="csY3"/>
+                  </a:cxn>
+                  <a:cxn ang="0">
+                    <a:pos x="csX4" y="csY4"/>
+                  </a:cxn>
+                </a:cxnLst>
+                <a:rect l="l" t="t" r="r" b="b"/>
+                <a:pathLst>
+                  <a:path w="623481" h="189220">
+                    <a:moveTo>
+                      <a:pt x="0" y="94831"/>
+                    </a:moveTo>
+                    <a:cubicBezTo>
+                      <a:pt x="0" y="42897"/>
+                      <a:pt x="158734" y="5723"/>
+                      <a:pt x="262647" y="797"/>
+                    </a:cubicBezTo>
+                    <a:cubicBezTo>
+                      <a:pt x="366560" y="-4129"/>
+                      <a:pt x="623481" y="13342"/>
+                      <a:pt x="623481" y="65276"/>
+                    </a:cubicBezTo>
+                    <a:cubicBezTo>
+                      <a:pt x="623481" y="117210"/>
+                      <a:pt x="366560" y="183939"/>
+                      <a:pt x="262647" y="188865"/>
+                    </a:cubicBezTo>
+                    <a:cubicBezTo>
+                      <a:pt x="158734" y="193791"/>
+                      <a:pt x="0" y="146765"/>
+                      <a:pt x="0" y="94831"/>
+                    </a:cubicBezTo>
+                    <a:close/>
+                  </a:path>
+                </a:pathLst>
+              </a:custGeom>
+              <a:solidFill>
+                <a:schemeClr val="accent6">
+                  <a:lumMod val="75000"/>
+                </a:schemeClr>
+              </a:solidFill>
+              <a:ln>
+                <a:solidFill>
+                  <a:schemeClr val="accent6">
+                    <a:lumMod val="75000"/>
+                  </a:schemeClr>
+                </a:solidFill>
+              </a:ln>
+            </p:spPr>
+            <p:style>
+              <a:lnRef idx="2">
+                <a:schemeClr val="accent6">
+                  <a:shade val="15000"/>
+                </a:schemeClr>
+              </a:lnRef>
+              <a:fillRef idx="1">
+                <a:schemeClr val="accent6"/>
+              </a:fillRef>
+              <a:effectRef idx="0">
+                <a:schemeClr val="accent6"/>
+              </a:effectRef>
+              <a:fontRef idx="minor">
+                <a:schemeClr val="lt1"/>
+              </a:fontRef>
+            </p:style>
+            <p:txBody>
+              <a:bodyPr rtlCol="0" anchor="ctr"/>
+              <a:lstStyle/>
+              <a:p>
+                <a:pPr algn="ctr"/>
+                <a:endParaRPr lang="en-NZ"/>
+              </a:p>
+            </p:txBody>
+          </p:sp>
+          <p:sp>
+            <p:nvSpPr>
+              <p:cNvPr id="11" name="Oval 15">
+                <a:extLst>
+                  <a:ext uri="{FF2B5EF4-FFF2-40B4-BE49-F238E27FC236}">
+                    <a16:creationId xmlns:a16="http://schemas.microsoft.com/office/drawing/2014/main" id="{D24CD304-9A32-F514-D87D-48B673967EFB}"/>
+                  </a:ext>
+                </a:extLst>
+              </p:cNvPr>
+              <p:cNvSpPr/>
+              <p:nvPr/>
+            </p:nvSpPr>
+            <p:spPr>
+              <a:xfrm rot="16971223">
+                <a:off x="6035007" y="2816575"/>
+                <a:ext cx="428121" cy="76467"/>
+              </a:xfrm>
+              <a:custGeom>
+                <a:avLst/>
+                <a:gdLst>
+                  <a:gd name="csX0" fmla="*/ 0 w 525294"/>
+                  <a:gd name="csY0" fmla="*/ 94034 h 188068"/>
+                  <a:gd name="csX1" fmla="*/ 262647 w 525294"/>
+                  <a:gd name="csY1" fmla="*/ 0 h 188068"/>
+                  <a:gd name="csX2" fmla="*/ 525294 w 525294"/>
+                  <a:gd name="csY2" fmla="*/ 94034 h 188068"/>
+                  <a:gd name="csX3" fmla="*/ 262647 w 525294"/>
+                  <a:gd name="csY3" fmla="*/ 188068 h 188068"/>
+                  <a:gd name="csX4" fmla="*/ 0 w 525294"/>
+                  <a:gd name="csY4" fmla="*/ 94034 h 188068"/>
+                  <a:gd name="csX0" fmla="*/ 0 w 623481"/>
+                  <a:gd name="csY0" fmla="*/ 94831 h 189220"/>
+                  <a:gd name="csX1" fmla="*/ 262647 w 623481"/>
+                  <a:gd name="csY1" fmla="*/ 797 h 189220"/>
+                  <a:gd name="csX2" fmla="*/ 623481 w 623481"/>
+                  <a:gd name="csY2" fmla="*/ 65276 h 189220"/>
+                  <a:gd name="csX3" fmla="*/ 262647 w 623481"/>
+                  <a:gd name="csY3" fmla="*/ 188865 h 189220"/>
+                  <a:gd name="csX4" fmla="*/ 0 w 623481"/>
+                  <a:gd name="csY4" fmla="*/ 94831 h 189220"/>
+                </a:gdLst>
+                <a:ahLst/>
+                <a:cxnLst>
+                  <a:cxn ang="0">
+                    <a:pos x="csX0" y="csY0"/>
+                  </a:cxn>
+                  <a:cxn ang="0">
+                    <a:pos x="csX1" y="csY1"/>
+                  </a:cxn>
+                  <a:cxn ang="0">
+                    <a:pos x="csX2" y="csY2"/>
+                  </a:cxn>
+                  <a:cxn ang="0">
+                    <a:pos x="csX3" y="csY3"/>
+                  </a:cxn>
+                  <a:cxn ang="0">
+                    <a:pos x="csX4" y="csY4"/>
+                  </a:cxn>
+                </a:cxnLst>
+                <a:rect l="l" t="t" r="r" b="b"/>
+                <a:pathLst>
+                  <a:path w="623481" h="189220">
+                    <a:moveTo>
+                      <a:pt x="0" y="94831"/>
+                    </a:moveTo>
+                    <a:cubicBezTo>
+                      <a:pt x="0" y="42897"/>
+                      <a:pt x="158734" y="5723"/>
+                      <a:pt x="262647" y="797"/>
+                    </a:cubicBezTo>
+                    <a:cubicBezTo>
+                      <a:pt x="366560" y="-4129"/>
+                      <a:pt x="623481" y="13342"/>
+                      <a:pt x="623481" y="65276"/>
+                    </a:cubicBezTo>
+                    <a:cubicBezTo>
+                      <a:pt x="623481" y="117210"/>
+                      <a:pt x="366560" y="183939"/>
+                      <a:pt x="262647" y="188865"/>
+                    </a:cubicBezTo>
+                    <a:cubicBezTo>
+                      <a:pt x="158734" y="193791"/>
+                      <a:pt x="0" y="146765"/>
+                      <a:pt x="0" y="94831"/>
+                    </a:cubicBezTo>
+                    <a:close/>
+                  </a:path>
+                </a:pathLst>
+              </a:custGeom>
+              <a:solidFill>
+                <a:schemeClr val="accent6">
+                  <a:lumMod val="75000"/>
+                </a:schemeClr>
+              </a:solidFill>
+              <a:ln>
+                <a:solidFill>
+                  <a:schemeClr val="accent6">
+                    <a:lumMod val="75000"/>
+                  </a:schemeClr>
+                </a:solidFill>
+              </a:ln>
+            </p:spPr>
+            <p:style>
+              <a:lnRef idx="2">
+                <a:schemeClr val="accent6">
+                  <a:shade val="15000"/>
+                </a:schemeClr>
+              </a:lnRef>
+              <a:fillRef idx="1">
+                <a:schemeClr val="accent6"/>
+              </a:fillRef>
+              <a:effectRef idx="0">
+                <a:schemeClr val="accent6"/>
+              </a:effectRef>
+              <a:fontRef idx="minor">
+                <a:schemeClr val="lt1"/>
+              </a:fontRef>
+            </p:style>
+            <p:txBody>
+              <a:bodyPr rtlCol="0" anchor="ctr"/>
+              <a:lstStyle/>
+              <a:p>
+                <a:pPr algn="ctr"/>
+                <a:endParaRPr lang="en-NZ"/>
+              </a:p>
+            </p:txBody>
+          </p:sp>
+          <p:sp>
+            <p:nvSpPr>
+              <p:cNvPr id="12" name="Oval 15">
+                <a:extLst>
+                  <a:ext uri="{FF2B5EF4-FFF2-40B4-BE49-F238E27FC236}">
+                    <a16:creationId xmlns:a16="http://schemas.microsoft.com/office/drawing/2014/main" id="{D7D3338A-C6EE-D5B4-014C-2B4D81442A74}"/>
+                  </a:ext>
+                </a:extLst>
+              </p:cNvPr>
+              <p:cNvSpPr/>
+              <p:nvPr/>
+            </p:nvSpPr>
+            <p:spPr>
+              <a:xfrm rot="16672422">
+                <a:off x="5925138" y="2645257"/>
+                <a:ext cx="384004" cy="76570"/>
+              </a:xfrm>
+              <a:custGeom>
+                <a:avLst/>
+                <a:gdLst>
+                  <a:gd name="csX0" fmla="*/ 0 w 525294"/>
+                  <a:gd name="csY0" fmla="*/ 94034 h 188068"/>
+                  <a:gd name="csX1" fmla="*/ 262647 w 525294"/>
+                  <a:gd name="csY1" fmla="*/ 0 h 188068"/>
+                  <a:gd name="csX2" fmla="*/ 525294 w 525294"/>
+                  <a:gd name="csY2" fmla="*/ 94034 h 188068"/>
+                  <a:gd name="csX3" fmla="*/ 262647 w 525294"/>
+                  <a:gd name="csY3" fmla="*/ 188068 h 188068"/>
+                  <a:gd name="csX4" fmla="*/ 0 w 525294"/>
+                  <a:gd name="csY4" fmla="*/ 94034 h 188068"/>
+                  <a:gd name="csX0" fmla="*/ 0 w 623481"/>
+                  <a:gd name="csY0" fmla="*/ 94831 h 189220"/>
+                  <a:gd name="csX1" fmla="*/ 262647 w 623481"/>
+                  <a:gd name="csY1" fmla="*/ 797 h 189220"/>
+                  <a:gd name="csX2" fmla="*/ 623481 w 623481"/>
+                  <a:gd name="csY2" fmla="*/ 65276 h 189220"/>
+                  <a:gd name="csX3" fmla="*/ 262647 w 623481"/>
+                  <a:gd name="csY3" fmla="*/ 188865 h 189220"/>
+                  <a:gd name="csX4" fmla="*/ 0 w 623481"/>
+                  <a:gd name="csY4" fmla="*/ 94831 h 189220"/>
+                </a:gdLst>
+                <a:ahLst/>
+                <a:cxnLst>
+                  <a:cxn ang="0">
+                    <a:pos x="csX0" y="csY0"/>
+                  </a:cxn>
+                  <a:cxn ang="0">
+                    <a:pos x="csX1" y="csY1"/>
+                  </a:cxn>
+                  <a:cxn ang="0">
+                    <a:pos x="csX2" y="csY2"/>
+                  </a:cxn>
+                  <a:cxn ang="0">
+                    <a:pos x="csX3" y="csY3"/>
+                  </a:cxn>
+                  <a:cxn ang="0">
+                    <a:pos x="csX4" y="csY4"/>
+                  </a:cxn>
+                </a:cxnLst>
+                <a:rect l="l" t="t" r="r" b="b"/>
+                <a:pathLst>
+                  <a:path w="623481" h="189220">
+                    <a:moveTo>
+                      <a:pt x="0" y="94831"/>
+                    </a:moveTo>
+                    <a:cubicBezTo>
+                      <a:pt x="0" y="42897"/>
+                      <a:pt x="158734" y="5723"/>
+                      <a:pt x="262647" y="797"/>
+                    </a:cubicBezTo>
+                    <a:cubicBezTo>
+                      <a:pt x="366560" y="-4129"/>
+                      <a:pt x="623481" y="13342"/>
+                      <a:pt x="623481" y="65276"/>
+                    </a:cubicBezTo>
+                    <a:cubicBezTo>
+                      <a:pt x="623481" y="117210"/>
+                      <a:pt x="366560" y="183939"/>
+                      <a:pt x="262647" y="188865"/>
+                    </a:cubicBezTo>
+                    <a:cubicBezTo>
+                      <a:pt x="158734" y="193791"/>
+                      <a:pt x="0" y="146765"/>
+                      <a:pt x="0" y="94831"/>
+                    </a:cubicBezTo>
+                    <a:close/>
+                  </a:path>
+                </a:pathLst>
+              </a:custGeom>
+              <a:solidFill>
+                <a:schemeClr val="accent6">
+                  <a:lumMod val="75000"/>
+                </a:schemeClr>
+              </a:solidFill>
+              <a:ln>
+                <a:solidFill>
+                  <a:schemeClr val="accent6">
+                    <a:lumMod val="75000"/>
+                  </a:schemeClr>
+                </a:solidFill>
+              </a:ln>
+            </p:spPr>
+            <p:style>
+              <a:lnRef idx="2">
+                <a:schemeClr val="accent6">
+                  <a:shade val="15000"/>
+                </a:schemeClr>
+              </a:lnRef>
+              <a:fillRef idx="1">
+                <a:schemeClr val="accent6"/>
+              </a:fillRef>
+              <a:effectRef idx="0">
+                <a:schemeClr val="accent6"/>
+              </a:effectRef>
+              <a:fontRef idx="minor">
+                <a:schemeClr val="lt1"/>
+              </a:fontRef>
+            </p:style>
+            <p:txBody>
+              <a:bodyPr rtlCol="0" anchor="ctr"/>
+              <a:lstStyle/>
+              <a:p>
+                <a:pPr algn="ctr"/>
+                <a:endParaRPr lang="en-NZ"/>
+              </a:p>
+            </p:txBody>
+          </p:sp>
+          <p:sp>
+            <p:nvSpPr>
+              <p:cNvPr id="13" name="Oval 15">
+                <a:extLst>
+                  <a:ext uri="{FF2B5EF4-FFF2-40B4-BE49-F238E27FC236}">
+                    <a16:creationId xmlns:a16="http://schemas.microsoft.com/office/drawing/2014/main" id="{307DDED2-445E-4E5F-B7FC-333245FB2F1F}"/>
+                  </a:ext>
+                </a:extLst>
+              </p:cNvPr>
+              <p:cNvSpPr/>
+              <p:nvPr/>
+            </p:nvSpPr>
+            <p:spPr>
+              <a:xfrm rot="14162025">
+                <a:off x="5581911" y="2324390"/>
+                <a:ext cx="367317" cy="70720"/>
+              </a:xfrm>
+              <a:custGeom>
+                <a:avLst/>
+                <a:gdLst>
+                  <a:gd name="csX0" fmla="*/ 0 w 525294"/>
+                  <a:gd name="csY0" fmla="*/ 94034 h 188068"/>
+                  <a:gd name="csX1" fmla="*/ 262647 w 525294"/>
+                  <a:gd name="csY1" fmla="*/ 0 h 188068"/>
+                  <a:gd name="csX2" fmla="*/ 525294 w 525294"/>
+                  <a:gd name="csY2" fmla="*/ 94034 h 188068"/>
+                  <a:gd name="csX3" fmla="*/ 262647 w 525294"/>
+                  <a:gd name="csY3" fmla="*/ 188068 h 188068"/>
+                  <a:gd name="csX4" fmla="*/ 0 w 525294"/>
+                  <a:gd name="csY4" fmla="*/ 94034 h 188068"/>
+                  <a:gd name="csX0" fmla="*/ 0 w 623481"/>
+                  <a:gd name="csY0" fmla="*/ 94831 h 189220"/>
+                  <a:gd name="csX1" fmla="*/ 262647 w 623481"/>
+                  <a:gd name="csY1" fmla="*/ 797 h 189220"/>
+                  <a:gd name="csX2" fmla="*/ 623481 w 623481"/>
+                  <a:gd name="csY2" fmla="*/ 65276 h 189220"/>
+                  <a:gd name="csX3" fmla="*/ 262647 w 623481"/>
+                  <a:gd name="csY3" fmla="*/ 188865 h 189220"/>
+                  <a:gd name="csX4" fmla="*/ 0 w 623481"/>
+                  <a:gd name="csY4" fmla="*/ 94831 h 189220"/>
+                </a:gdLst>
+                <a:ahLst/>
+                <a:cxnLst>
+                  <a:cxn ang="0">
+                    <a:pos x="csX0" y="csY0"/>
+                  </a:cxn>
+                  <a:cxn ang="0">
+                    <a:pos x="csX1" y="csY1"/>
+                  </a:cxn>
+                  <a:cxn ang="0">
+                    <a:pos x="csX2" y="csY2"/>
+                  </a:cxn>
+                  <a:cxn ang="0">
+                    <a:pos x="csX3" y="csY3"/>
+                  </a:cxn>
+                  <a:cxn ang="0">
+                    <a:pos x="csX4" y="csY4"/>
+                  </a:cxn>
+                </a:cxnLst>
+                <a:rect l="l" t="t" r="r" b="b"/>
+                <a:pathLst>
+                  <a:path w="623481" h="189220">
+                    <a:moveTo>
+                      <a:pt x="0" y="94831"/>
+                    </a:moveTo>
+                    <a:cubicBezTo>
+                      <a:pt x="0" y="42897"/>
+                      <a:pt x="158734" y="5723"/>
+                      <a:pt x="262647" y="797"/>
+                    </a:cubicBezTo>
+                    <a:cubicBezTo>
+                      <a:pt x="366560" y="-4129"/>
+                      <a:pt x="623481" y="13342"/>
+                      <a:pt x="623481" y="65276"/>
+                    </a:cubicBezTo>
+                    <a:cubicBezTo>
+                      <a:pt x="623481" y="117210"/>
+                      <a:pt x="366560" y="183939"/>
+                      <a:pt x="262647" y="188865"/>
+                    </a:cubicBezTo>
+                    <a:cubicBezTo>
+                      <a:pt x="158734" y="193791"/>
+                      <a:pt x="0" y="146765"/>
+                      <a:pt x="0" y="94831"/>
+                    </a:cubicBezTo>
+                    <a:close/>
+                  </a:path>
+                </a:pathLst>
+              </a:custGeom>
+              <a:solidFill>
+                <a:schemeClr val="accent6">
+                  <a:lumMod val="75000"/>
+                </a:schemeClr>
+              </a:solidFill>
+              <a:ln>
+                <a:solidFill>
+                  <a:schemeClr val="accent6">
+                    <a:lumMod val="75000"/>
+                  </a:schemeClr>
+                </a:solidFill>
+              </a:ln>
+            </p:spPr>
+            <p:style>
+              <a:lnRef idx="2">
+                <a:schemeClr val="accent6">
+                  <a:shade val="15000"/>
+                </a:schemeClr>
+              </a:lnRef>
+              <a:fillRef idx="1">
+                <a:schemeClr val="accent6"/>
+              </a:fillRef>
+              <a:effectRef idx="0">
+                <a:schemeClr val="accent6"/>
+              </a:effectRef>
+              <a:fontRef idx="minor">
+                <a:schemeClr val="lt1"/>
+              </a:fontRef>
+            </p:style>
+            <p:txBody>
+              <a:bodyPr rtlCol="0" anchor="ctr"/>
+              <a:lstStyle/>
+              <a:p>
+                <a:pPr algn="ctr"/>
+                <a:endParaRPr lang="en-NZ"/>
+              </a:p>
+            </p:txBody>
+          </p:sp>
+          <p:sp>
+            <p:nvSpPr>
+              <p:cNvPr id="14" name="Oval 15">
+                <a:extLst>
+                  <a:ext uri="{FF2B5EF4-FFF2-40B4-BE49-F238E27FC236}">
+                    <a16:creationId xmlns:a16="http://schemas.microsoft.com/office/drawing/2014/main" id="{7B5E1C3C-210C-9516-8755-2640F9550CFF}"/>
+                  </a:ext>
+                </a:extLst>
+              </p:cNvPr>
+              <p:cNvSpPr/>
+              <p:nvPr/>
+            </p:nvSpPr>
+            <p:spPr>
+              <a:xfrm rot="2313172" flipH="1">
+                <a:off x="5906204" y="3935761"/>
+                <a:ext cx="368562" cy="86250"/>
+              </a:xfrm>
+              <a:custGeom>
+                <a:avLst/>
+                <a:gdLst>
+                  <a:gd name="csX0" fmla="*/ 0 w 525294"/>
+                  <a:gd name="csY0" fmla="*/ 94034 h 188068"/>
+                  <a:gd name="csX1" fmla="*/ 262647 w 525294"/>
+                  <a:gd name="csY1" fmla="*/ 0 h 188068"/>
+                  <a:gd name="csX2" fmla="*/ 525294 w 525294"/>
+                  <a:gd name="csY2" fmla="*/ 94034 h 188068"/>
+                  <a:gd name="csX3" fmla="*/ 262647 w 525294"/>
+                  <a:gd name="csY3" fmla="*/ 188068 h 188068"/>
+                  <a:gd name="csX4" fmla="*/ 0 w 525294"/>
+                  <a:gd name="csY4" fmla="*/ 94034 h 188068"/>
+                  <a:gd name="csX0" fmla="*/ 0 w 623481"/>
+                  <a:gd name="csY0" fmla="*/ 94831 h 189220"/>
+                  <a:gd name="csX1" fmla="*/ 262647 w 623481"/>
+                  <a:gd name="csY1" fmla="*/ 797 h 189220"/>
+                  <a:gd name="csX2" fmla="*/ 623481 w 623481"/>
+                  <a:gd name="csY2" fmla="*/ 65276 h 189220"/>
+                  <a:gd name="csX3" fmla="*/ 262647 w 623481"/>
+                  <a:gd name="csY3" fmla="*/ 188865 h 189220"/>
+                  <a:gd name="csX4" fmla="*/ 0 w 623481"/>
+                  <a:gd name="csY4" fmla="*/ 94831 h 189220"/>
+                </a:gdLst>
+                <a:ahLst/>
+                <a:cxnLst>
+                  <a:cxn ang="0">
+                    <a:pos x="csX0" y="csY0"/>
+                  </a:cxn>
+                  <a:cxn ang="0">
+                    <a:pos x="csX1" y="csY1"/>
+                  </a:cxn>
+                  <a:cxn ang="0">
+                    <a:pos x="csX2" y="csY2"/>
+                  </a:cxn>
+                  <a:cxn ang="0">
+                    <a:pos x="csX3" y="csY3"/>
+                  </a:cxn>
+                  <a:cxn ang="0">
+                    <a:pos x="csX4" y="csY4"/>
+                  </a:cxn>
+                </a:cxnLst>
+                <a:rect l="l" t="t" r="r" b="b"/>
+                <a:pathLst>
+                  <a:path w="623481" h="189220">
+                    <a:moveTo>
+                      <a:pt x="0" y="94831"/>
+                    </a:moveTo>
+                    <a:cubicBezTo>
+                      <a:pt x="0" y="42897"/>
+                      <a:pt x="158734" y="5723"/>
+                      <a:pt x="262647" y="797"/>
+                    </a:cubicBezTo>
+                    <a:cubicBezTo>
+                      <a:pt x="366560" y="-4129"/>
+                      <a:pt x="623481" y="13342"/>
+                      <a:pt x="623481" y="65276"/>
+                    </a:cubicBezTo>
+                    <a:cubicBezTo>
+                      <a:pt x="623481" y="117210"/>
+                      <a:pt x="366560" y="183939"/>
+                      <a:pt x="262647" y="188865"/>
+                    </a:cubicBezTo>
+                    <a:cubicBezTo>
+                      <a:pt x="158734" y="193791"/>
+                      <a:pt x="0" y="146765"/>
+                      <a:pt x="0" y="94831"/>
+                    </a:cubicBezTo>
+                    <a:close/>
+                  </a:path>
+                </a:pathLst>
+              </a:custGeom>
+              <a:solidFill>
+                <a:schemeClr val="accent6">
+                  <a:lumMod val="75000"/>
+                </a:schemeClr>
+              </a:solidFill>
+              <a:ln>
+                <a:solidFill>
+                  <a:schemeClr val="accent6">
+                    <a:lumMod val="75000"/>
+                  </a:schemeClr>
+                </a:solidFill>
+              </a:ln>
+            </p:spPr>
+            <p:style>
+              <a:lnRef idx="2">
+                <a:schemeClr val="accent6">
+                  <a:shade val="15000"/>
+                </a:schemeClr>
+              </a:lnRef>
+              <a:fillRef idx="1">
+                <a:schemeClr val="accent6"/>
+              </a:fillRef>
+              <a:effectRef idx="0">
+                <a:schemeClr val="accent6"/>
+              </a:effectRef>
+              <a:fontRef idx="minor">
+                <a:schemeClr val="lt1"/>
+              </a:fontRef>
+            </p:style>
+            <p:txBody>
+              <a:bodyPr rtlCol="0" anchor="ctr"/>
+              <a:lstStyle/>
+              <a:p>
+                <a:pPr algn="ctr"/>
+                <a:endParaRPr lang="en-NZ"/>
+              </a:p>
+            </p:txBody>
+          </p:sp>
+          <p:sp>
+            <p:nvSpPr>
+              <p:cNvPr id="16" name="Oval 15">
+                <a:extLst>
+                  <a:ext uri="{FF2B5EF4-FFF2-40B4-BE49-F238E27FC236}">
+                    <a16:creationId xmlns:a16="http://schemas.microsoft.com/office/drawing/2014/main" id="{A87DD1C5-A39D-F682-658F-CCA892157DB1}"/>
+                  </a:ext>
+                </a:extLst>
+              </p:cNvPr>
+              <p:cNvSpPr/>
+              <p:nvPr/>
+            </p:nvSpPr>
+            <p:spPr>
+              <a:xfrm rot="2313172" flipH="1">
+                <a:off x="5988751" y="3323709"/>
+                <a:ext cx="291208" cy="92887"/>
+              </a:xfrm>
+              <a:custGeom>
+                <a:avLst/>
+                <a:gdLst>
+                  <a:gd name="csX0" fmla="*/ 0 w 525294"/>
+                  <a:gd name="csY0" fmla="*/ 94034 h 188068"/>
+                  <a:gd name="csX1" fmla="*/ 262647 w 525294"/>
+                  <a:gd name="csY1" fmla="*/ 0 h 188068"/>
+                  <a:gd name="csX2" fmla="*/ 525294 w 525294"/>
+                  <a:gd name="csY2" fmla="*/ 94034 h 188068"/>
+                  <a:gd name="csX3" fmla="*/ 262647 w 525294"/>
+                  <a:gd name="csY3" fmla="*/ 188068 h 188068"/>
+                  <a:gd name="csX4" fmla="*/ 0 w 525294"/>
+                  <a:gd name="csY4" fmla="*/ 94034 h 188068"/>
+                  <a:gd name="csX0" fmla="*/ 0 w 623481"/>
+                  <a:gd name="csY0" fmla="*/ 94831 h 189220"/>
+                  <a:gd name="csX1" fmla="*/ 262647 w 623481"/>
+                  <a:gd name="csY1" fmla="*/ 797 h 189220"/>
+                  <a:gd name="csX2" fmla="*/ 623481 w 623481"/>
+                  <a:gd name="csY2" fmla="*/ 65276 h 189220"/>
+                  <a:gd name="csX3" fmla="*/ 262647 w 623481"/>
+                  <a:gd name="csY3" fmla="*/ 188865 h 189220"/>
+                  <a:gd name="csX4" fmla="*/ 0 w 623481"/>
+                  <a:gd name="csY4" fmla="*/ 94831 h 189220"/>
+                </a:gdLst>
+                <a:ahLst/>
+                <a:cxnLst>
+                  <a:cxn ang="0">
+                    <a:pos x="csX0" y="csY0"/>
+                  </a:cxn>
+                  <a:cxn ang="0">
+                    <a:pos x="csX1" y="csY1"/>
+                  </a:cxn>
+                  <a:cxn ang="0">
+                    <a:pos x="csX2" y="csY2"/>
+                  </a:cxn>
+                  <a:cxn ang="0">
+                    <a:pos x="csX3" y="csY3"/>
+                  </a:cxn>
+                  <a:cxn ang="0">
+                    <a:pos x="csX4" y="csY4"/>
+                  </a:cxn>
+                </a:cxnLst>
+                <a:rect l="l" t="t" r="r" b="b"/>
+                <a:pathLst>
+                  <a:path w="623481" h="189220">
+                    <a:moveTo>
+                      <a:pt x="0" y="94831"/>
+                    </a:moveTo>
+                    <a:cubicBezTo>
+                      <a:pt x="0" y="42897"/>
+                      <a:pt x="158734" y="5723"/>
+                      <a:pt x="262647" y="797"/>
+                    </a:cubicBezTo>
+                    <a:cubicBezTo>
+                      <a:pt x="366560" y="-4129"/>
+                      <a:pt x="623481" y="13342"/>
+                      <a:pt x="623481" y="65276"/>
+                    </a:cubicBezTo>
+                    <a:cubicBezTo>
+                      <a:pt x="623481" y="117210"/>
+                      <a:pt x="366560" y="183939"/>
+                      <a:pt x="262647" y="188865"/>
+                    </a:cubicBezTo>
+                    <a:cubicBezTo>
+                      <a:pt x="158734" y="193791"/>
+                      <a:pt x="0" y="146765"/>
+                      <a:pt x="0" y="94831"/>
+                    </a:cubicBezTo>
+                    <a:close/>
+                  </a:path>
+                </a:pathLst>
+              </a:custGeom>
+              <a:solidFill>
+                <a:schemeClr val="accent6">
+                  <a:lumMod val="75000"/>
+                </a:schemeClr>
+              </a:solidFill>
+              <a:ln>
+                <a:solidFill>
+                  <a:schemeClr val="accent6">
+                    <a:lumMod val="75000"/>
+                  </a:schemeClr>
+                </a:solidFill>
+              </a:ln>
+            </p:spPr>
+            <p:style>
+              <a:lnRef idx="2">
+                <a:schemeClr val="accent6">
+                  <a:shade val="15000"/>
+                </a:schemeClr>
+              </a:lnRef>
+              <a:fillRef idx="1">
+                <a:schemeClr val="accent6"/>
+              </a:fillRef>
+              <a:effectRef idx="0">
+                <a:schemeClr val="accent6"/>
+              </a:effectRef>
+              <a:fontRef idx="minor">
+                <a:schemeClr val="lt1"/>
+              </a:fontRef>
+            </p:style>
+            <p:txBody>
+              <a:bodyPr rtlCol="0" anchor="ctr"/>
+              <a:lstStyle/>
+              <a:p>
+                <a:pPr algn="ctr"/>
+                <a:endParaRPr lang="en-NZ"/>
+              </a:p>
+            </p:txBody>
+          </p:sp>
+          <p:sp>
+            <p:nvSpPr>
+              <p:cNvPr id="17" name="Oval 15">
+                <a:extLst>
+                  <a:ext uri="{FF2B5EF4-FFF2-40B4-BE49-F238E27FC236}">
+                    <a16:creationId xmlns:a16="http://schemas.microsoft.com/office/drawing/2014/main" id="{933A393D-9973-AA86-FE02-CB612DB39D30}"/>
+                  </a:ext>
+                </a:extLst>
+              </p:cNvPr>
+              <p:cNvSpPr/>
+              <p:nvPr/>
+            </p:nvSpPr>
+            <p:spPr>
+              <a:xfrm rot="17214883">
+                <a:off x="6115209" y="3106268"/>
+                <a:ext cx="428121" cy="76467"/>
+              </a:xfrm>
+              <a:custGeom>
+                <a:avLst/>
+                <a:gdLst>
+                  <a:gd name="csX0" fmla="*/ 0 w 525294"/>
+                  <a:gd name="csY0" fmla="*/ 94034 h 188068"/>
+                  <a:gd name="csX1" fmla="*/ 262647 w 525294"/>
+                  <a:gd name="csY1" fmla="*/ 0 h 188068"/>
+                  <a:gd name="csX2" fmla="*/ 525294 w 525294"/>
+                  <a:gd name="csY2" fmla="*/ 94034 h 188068"/>
+                  <a:gd name="csX3" fmla="*/ 262647 w 525294"/>
+                  <a:gd name="csY3" fmla="*/ 188068 h 188068"/>
+                  <a:gd name="csX4" fmla="*/ 0 w 525294"/>
+                  <a:gd name="csY4" fmla="*/ 94034 h 188068"/>
+                  <a:gd name="csX0" fmla="*/ 0 w 623481"/>
+                  <a:gd name="csY0" fmla="*/ 94831 h 189220"/>
+                  <a:gd name="csX1" fmla="*/ 262647 w 623481"/>
+                  <a:gd name="csY1" fmla="*/ 797 h 189220"/>
+                  <a:gd name="csX2" fmla="*/ 623481 w 623481"/>
+                  <a:gd name="csY2" fmla="*/ 65276 h 189220"/>
+                  <a:gd name="csX3" fmla="*/ 262647 w 623481"/>
+                  <a:gd name="csY3" fmla="*/ 188865 h 189220"/>
+                  <a:gd name="csX4" fmla="*/ 0 w 623481"/>
+                  <a:gd name="csY4" fmla="*/ 94831 h 189220"/>
+                </a:gdLst>
+                <a:ahLst/>
+                <a:cxnLst>
+                  <a:cxn ang="0">
+                    <a:pos x="csX0" y="csY0"/>
+                  </a:cxn>
+                  <a:cxn ang="0">
+                    <a:pos x="csX1" y="csY1"/>
+                  </a:cxn>
+                  <a:cxn ang="0">
+                    <a:pos x="csX2" y="csY2"/>
+                  </a:cxn>
+                  <a:cxn ang="0">
+                    <a:pos x="csX3" y="csY3"/>
+                  </a:cxn>
+                  <a:cxn ang="0">
+                    <a:pos x="csX4" y="csY4"/>
+                  </a:cxn>
+                </a:cxnLst>
+                <a:rect l="l" t="t" r="r" b="b"/>
+                <a:pathLst>
+                  <a:path w="623481" h="189220">
+                    <a:moveTo>
+                      <a:pt x="0" y="94831"/>
+                    </a:moveTo>
+                    <a:cubicBezTo>
+                      <a:pt x="0" y="42897"/>
+                      <a:pt x="158734" y="5723"/>
+                      <a:pt x="262647" y="797"/>
+                    </a:cubicBezTo>
+                    <a:cubicBezTo>
+                      <a:pt x="366560" y="-4129"/>
+                      <a:pt x="623481" y="13342"/>
+                      <a:pt x="623481" y="65276"/>
+                    </a:cubicBezTo>
+                    <a:cubicBezTo>
+                      <a:pt x="623481" y="117210"/>
+                      <a:pt x="366560" y="183939"/>
+                      <a:pt x="262647" y="188865"/>
+                    </a:cubicBezTo>
+                    <a:cubicBezTo>
+                      <a:pt x="158734" y="193791"/>
+                      <a:pt x="0" y="146765"/>
+                      <a:pt x="0" y="94831"/>
+                    </a:cubicBezTo>
+                    <a:close/>
+                  </a:path>
+                </a:pathLst>
+              </a:custGeom>
+              <a:solidFill>
+                <a:schemeClr val="accent6">
+                  <a:lumMod val="75000"/>
+                </a:schemeClr>
+              </a:solidFill>
+              <a:ln>
+                <a:solidFill>
+                  <a:schemeClr val="accent6">
+                    <a:lumMod val="75000"/>
+                  </a:schemeClr>
+                </a:solidFill>
+              </a:ln>
+            </p:spPr>
+            <p:style>
+              <a:lnRef idx="2">
+                <a:schemeClr val="accent6">
+                  <a:shade val="15000"/>
+                </a:schemeClr>
+              </a:lnRef>
+              <a:fillRef idx="1">
+                <a:schemeClr val="accent6"/>
+              </a:fillRef>
+              <a:effectRef idx="0">
+                <a:schemeClr val="accent6"/>
+              </a:effectRef>
+              <a:fontRef idx="minor">
+                <a:schemeClr val="lt1"/>
+              </a:fontRef>
+            </p:style>
+            <p:txBody>
+              <a:bodyPr rtlCol="0" anchor="ctr"/>
+              <a:lstStyle/>
+              <a:p>
+                <a:pPr algn="ctr"/>
+                <a:endParaRPr lang="en-NZ"/>
+              </a:p>
+            </p:txBody>
+          </p:sp>
+          <p:sp>
+            <p:nvSpPr>
+              <p:cNvPr id="30" name="Freeform: Shape 29">
+                <a:extLst>
+                  <a:ext uri="{FF2B5EF4-FFF2-40B4-BE49-F238E27FC236}">
+                    <a16:creationId xmlns:a16="http://schemas.microsoft.com/office/drawing/2014/main" id="{2BACC278-1E5D-65E3-DE6B-73C8F5EAF8E5}"/>
+                  </a:ext>
+                </a:extLst>
+              </p:cNvPr>
+              <p:cNvSpPr/>
+              <p:nvPr/>
+            </p:nvSpPr>
+            <p:spPr>
+              <a:xfrm>
+                <a:off x="5799213" y="2487912"/>
+                <a:ext cx="477954" cy="2425430"/>
+              </a:xfrm>
+              <a:custGeom>
+                <a:avLst/>
+                <a:gdLst>
+                  <a:gd name="csX0" fmla="*/ 32425 w 477954"/>
+                  <a:gd name="csY0" fmla="*/ 0 h 2425430"/>
+                  <a:gd name="csX1" fmla="*/ 239949 w 477954"/>
+                  <a:gd name="csY1" fmla="*/ 272374 h 2425430"/>
+                  <a:gd name="csX2" fmla="*/ 453957 w 477954"/>
+                  <a:gd name="csY2" fmla="*/ 791183 h 2425430"/>
+                  <a:gd name="csX3" fmla="*/ 453957 w 477954"/>
+                  <a:gd name="csY3" fmla="*/ 1543455 h 2425430"/>
+                  <a:gd name="csX4" fmla="*/ 285344 w 477954"/>
+                  <a:gd name="csY4" fmla="*/ 2049293 h 2425430"/>
+                  <a:gd name="csX5" fmla="*/ 0 w 477954"/>
+                  <a:gd name="csY5" fmla="*/ 2425430 h 2425430"/>
+                  <a:gd name="csX6" fmla="*/ 0 w 477954"/>
+                  <a:gd name="csY6" fmla="*/ 2425430 h 2425430"/>
+                </a:gdLst>
+                <a:ahLst/>
+                <a:cxnLst>
+                  <a:cxn ang="0">
+                    <a:pos x="csX0" y="csY0"/>
+                  </a:cxn>
+                  <a:cxn ang="0">
+                    <a:pos x="csX1" y="csY1"/>
+                  </a:cxn>
+                  <a:cxn ang="0">
+                    <a:pos x="csX2" y="csY2"/>
+                  </a:cxn>
+                  <a:cxn ang="0">
+                    <a:pos x="csX3" y="csY3"/>
+                  </a:cxn>
+                  <a:cxn ang="0">
+                    <a:pos x="csX4" y="csY4"/>
+                  </a:cxn>
+                  <a:cxn ang="0">
+                    <a:pos x="csX5" y="csY5"/>
+                  </a:cxn>
+                  <a:cxn ang="0">
+                    <a:pos x="csX6" y="csY6"/>
+                  </a:cxn>
+                </a:cxnLst>
+                <a:rect l="l" t="t" r="r" b="b"/>
+                <a:pathLst>
+                  <a:path w="477954" h="2425430">
+                    <a:moveTo>
+                      <a:pt x="32425" y="0"/>
+                    </a:moveTo>
+                    <a:cubicBezTo>
+                      <a:pt x="101059" y="70255"/>
+                      <a:pt x="169694" y="140510"/>
+                      <a:pt x="239949" y="272374"/>
+                    </a:cubicBezTo>
+                    <a:cubicBezTo>
+                      <a:pt x="310204" y="404238"/>
+                      <a:pt x="418289" y="579336"/>
+                      <a:pt x="453957" y="791183"/>
+                    </a:cubicBezTo>
+                    <a:cubicBezTo>
+                      <a:pt x="489625" y="1003030"/>
+                      <a:pt x="482059" y="1333770"/>
+                      <a:pt x="453957" y="1543455"/>
+                    </a:cubicBezTo>
+                    <a:cubicBezTo>
+                      <a:pt x="425855" y="1753140"/>
+                      <a:pt x="361003" y="1902297"/>
+                      <a:pt x="285344" y="2049293"/>
+                    </a:cubicBezTo>
+                    <a:cubicBezTo>
+                      <a:pt x="209685" y="2196289"/>
+                      <a:pt x="0" y="2425430"/>
+                      <a:pt x="0" y="2425430"/>
+                    </a:cubicBezTo>
+                    <a:lnTo>
+                      <a:pt x="0" y="2425430"/>
+                    </a:lnTo>
+                  </a:path>
+                </a:pathLst>
+              </a:custGeom>
+              <a:noFill/>
+            </p:spPr>
+            <p:style>
+              <a:lnRef idx="2">
+                <a:schemeClr val="accent1">
+                  <a:shade val="15000"/>
+                </a:schemeClr>
+              </a:lnRef>
+              <a:fillRef idx="1">
+                <a:schemeClr val="accent1"/>
+              </a:fillRef>
+              <a:effectRef idx="0">
+                <a:schemeClr val="accent1"/>
+              </a:effectRef>
+              <a:fontRef idx="minor">
+                <a:schemeClr val="lt1"/>
+              </a:fontRef>
+            </p:style>
+            <p:txBody>
+              <a:bodyPr rtlCol="0" anchor="ctr"/>
+              <a:lstStyle/>
+              <a:p>
+                <a:pPr algn="ctr"/>
+                <a:endParaRPr lang="en-NZ"/>
+              </a:p>
+            </p:txBody>
+          </p:sp>
+          <p:sp>
+            <p:nvSpPr>
+              <p:cNvPr id="32" name="Oval 15">
+                <a:extLst>
+                  <a:ext uri="{FF2B5EF4-FFF2-40B4-BE49-F238E27FC236}">
+                    <a16:creationId xmlns:a16="http://schemas.microsoft.com/office/drawing/2014/main" id="{83E489AA-317F-AF71-A035-AB2F80606D29}"/>
+                  </a:ext>
+                </a:extLst>
+              </p:cNvPr>
+              <p:cNvSpPr/>
+              <p:nvPr/>
+            </p:nvSpPr>
+            <p:spPr>
+              <a:xfrm rot="1297676" flipH="1" flipV="1">
+                <a:off x="5798965" y="2887846"/>
+                <a:ext cx="336104" cy="74353"/>
+              </a:xfrm>
+              <a:custGeom>
+                <a:avLst/>
+                <a:gdLst>
+                  <a:gd name="csX0" fmla="*/ 0 w 525294"/>
+                  <a:gd name="csY0" fmla="*/ 94034 h 188068"/>
+                  <a:gd name="csX1" fmla="*/ 262647 w 525294"/>
+                  <a:gd name="csY1" fmla="*/ 0 h 188068"/>
+                  <a:gd name="csX2" fmla="*/ 525294 w 525294"/>
+                  <a:gd name="csY2" fmla="*/ 94034 h 188068"/>
+                  <a:gd name="csX3" fmla="*/ 262647 w 525294"/>
+                  <a:gd name="csY3" fmla="*/ 188068 h 188068"/>
+                  <a:gd name="csX4" fmla="*/ 0 w 525294"/>
+                  <a:gd name="csY4" fmla="*/ 94034 h 188068"/>
+                  <a:gd name="csX0" fmla="*/ 0 w 623481"/>
+                  <a:gd name="csY0" fmla="*/ 94831 h 189220"/>
+                  <a:gd name="csX1" fmla="*/ 262647 w 623481"/>
+                  <a:gd name="csY1" fmla="*/ 797 h 189220"/>
+                  <a:gd name="csX2" fmla="*/ 623481 w 623481"/>
+                  <a:gd name="csY2" fmla="*/ 65276 h 189220"/>
+                  <a:gd name="csX3" fmla="*/ 262647 w 623481"/>
+                  <a:gd name="csY3" fmla="*/ 188865 h 189220"/>
+                  <a:gd name="csX4" fmla="*/ 0 w 623481"/>
+                  <a:gd name="csY4" fmla="*/ 94831 h 189220"/>
+                </a:gdLst>
+                <a:ahLst/>
+                <a:cxnLst>
+                  <a:cxn ang="0">
+                    <a:pos x="csX0" y="csY0"/>
+                  </a:cxn>
+                  <a:cxn ang="0">
+                    <a:pos x="csX1" y="csY1"/>
+                  </a:cxn>
+                  <a:cxn ang="0">
+                    <a:pos x="csX2" y="csY2"/>
+                  </a:cxn>
+                  <a:cxn ang="0">
+                    <a:pos x="csX3" y="csY3"/>
+                  </a:cxn>
+                  <a:cxn ang="0">
+                    <a:pos x="csX4" y="csY4"/>
+                  </a:cxn>
+                </a:cxnLst>
+                <a:rect l="l" t="t" r="r" b="b"/>
+                <a:pathLst>
+                  <a:path w="623481" h="189220">
+                    <a:moveTo>
+                      <a:pt x="0" y="94831"/>
+                    </a:moveTo>
+                    <a:cubicBezTo>
+                      <a:pt x="0" y="42897"/>
+                      <a:pt x="158734" y="5723"/>
+                      <a:pt x="262647" y="797"/>
+                    </a:cubicBezTo>
+                    <a:cubicBezTo>
+                      <a:pt x="366560" y="-4129"/>
+                      <a:pt x="623481" y="13342"/>
+                      <a:pt x="623481" y="65276"/>
+                    </a:cubicBezTo>
+                    <a:cubicBezTo>
+                      <a:pt x="623481" y="117210"/>
+                      <a:pt x="366560" y="183939"/>
+                      <a:pt x="262647" y="188865"/>
+                    </a:cubicBezTo>
+                    <a:cubicBezTo>
+                      <a:pt x="158734" y="193791"/>
+                      <a:pt x="0" y="146765"/>
+                      <a:pt x="0" y="94831"/>
+                    </a:cubicBezTo>
+                    <a:close/>
+                  </a:path>
+                </a:pathLst>
+              </a:custGeom>
+              <a:solidFill>
+                <a:schemeClr val="accent6">
+                  <a:lumMod val="75000"/>
+                </a:schemeClr>
+              </a:solidFill>
+              <a:ln>
+                <a:solidFill>
+                  <a:schemeClr val="accent6">
+                    <a:lumMod val="75000"/>
+                  </a:schemeClr>
+                </a:solidFill>
+              </a:ln>
+            </p:spPr>
+            <p:style>
+              <a:lnRef idx="2">
+                <a:schemeClr val="accent6">
+                  <a:shade val="15000"/>
+                </a:schemeClr>
+              </a:lnRef>
+              <a:fillRef idx="1">
+                <a:schemeClr val="accent6"/>
+              </a:fillRef>
+              <a:effectRef idx="0">
+                <a:schemeClr val="accent6"/>
+              </a:effectRef>
+              <a:fontRef idx="minor">
+                <a:schemeClr val="lt1"/>
+              </a:fontRef>
+            </p:style>
+            <p:txBody>
+              <a:bodyPr rtlCol="0" anchor="ctr"/>
+              <a:lstStyle/>
+              <a:p>
+                <a:pPr algn="ctr"/>
+                <a:endParaRPr lang="en-NZ"/>
+              </a:p>
+            </p:txBody>
+          </p:sp>
+          <p:sp>
+            <p:nvSpPr>
+              <p:cNvPr id="34" name="Oval 15">
+                <a:extLst>
+                  <a:ext uri="{FF2B5EF4-FFF2-40B4-BE49-F238E27FC236}">
+                    <a16:creationId xmlns:a16="http://schemas.microsoft.com/office/drawing/2014/main" id="{80D1BDD5-71B9-1DBD-30D5-9316D6960DA5}"/>
+                  </a:ext>
+                </a:extLst>
+              </p:cNvPr>
+              <p:cNvSpPr/>
+              <p:nvPr/>
+            </p:nvSpPr>
+            <p:spPr>
+              <a:xfrm rot="2313172" flipH="1">
+                <a:off x="5931238" y="3687580"/>
+                <a:ext cx="368562" cy="86250"/>
+              </a:xfrm>
+              <a:custGeom>
+                <a:avLst/>
+                <a:gdLst>
+                  <a:gd name="csX0" fmla="*/ 0 w 525294"/>
+                  <a:gd name="csY0" fmla="*/ 94034 h 188068"/>
+                  <a:gd name="csX1" fmla="*/ 262647 w 525294"/>
+                  <a:gd name="csY1" fmla="*/ 0 h 188068"/>
+                  <a:gd name="csX2" fmla="*/ 525294 w 525294"/>
+                  <a:gd name="csY2" fmla="*/ 94034 h 188068"/>
+                  <a:gd name="csX3" fmla="*/ 262647 w 525294"/>
+                  <a:gd name="csY3" fmla="*/ 188068 h 188068"/>
+                  <a:gd name="csX4" fmla="*/ 0 w 525294"/>
+                  <a:gd name="csY4" fmla="*/ 94034 h 188068"/>
+                  <a:gd name="csX0" fmla="*/ 0 w 623481"/>
+                  <a:gd name="csY0" fmla="*/ 94831 h 189220"/>
+                  <a:gd name="csX1" fmla="*/ 262647 w 623481"/>
+                  <a:gd name="csY1" fmla="*/ 797 h 189220"/>
+                  <a:gd name="csX2" fmla="*/ 623481 w 623481"/>
+                  <a:gd name="csY2" fmla="*/ 65276 h 189220"/>
+                  <a:gd name="csX3" fmla="*/ 262647 w 623481"/>
+                  <a:gd name="csY3" fmla="*/ 188865 h 189220"/>
+                  <a:gd name="csX4" fmla="*/ 0 w 623481"/>
+                  <a:gd name="csY4" fmla="*/ 94831 h 189220"/>
+                </a:gdLst>
+                <a:ahLst/>
+                <a:cxnLst>
+                  <a:cxn ang="0">
+                    <a:pos x="csX0" y="csY0"/>
+                  </a:cxn>
+                  <a:cxn ang="0">
+                    <a:pos x="csX1" y="csY1"/>
+                  </a:cxn>
+                  <a:cxn ang="0">
+                    <a:pos x="csX2" y="csY2"/>
+                  </a:cxn>
+                  <a:cxn ang="0">
+                    <a:pos x="csX3" y="csY3"/>
+                  </a:cxn>
+                  <a:cxn ang="0">
+                    <a:pos x="csX4" y="csY4"/>
+                  </a:cxn>
+                </a:cxnLst>
+                <a:rect l="l" t="t" r="r" b="b"/>
+                <a:pathLst>
+                  <a:path w="623481" h="189220">
+                    <a:moveTo>
+                      <a:pt x="0" y="94831"/>
+                    </a:moveTo>
+                    <a:cubicBezTo>
+                      <a:pt x="0" y="42897"/>
+                      <a:pt x="158734" y="5723"/>
+                      <a:pt x="262647" y="797"/>
+                    </a:cubicBezTo>
+                    <a:cubicBezTo>
+                      <a:pt x="366560" y="-4129"/>
+                      <a:pt x="623481" y="13342"/>
+                      <a:pt x="623481" y="65276"/>
+                    </a:cubicBezTo>
+                    <a:cubicBezTo>
+                      <a:pt x="623481" y="117210"/>
+                      <a:pt x="366560" y="183939"/>
+                      <a:pt x="262647" y="188865"/>
+                    </a:cubicBezTo>
+                    <a:cubicBezTo>
+                      <a:pt x="158734" y="193791"/>
+                      <a:pt x="0" y="146765"/>
+                      <a:pt x="0" y="94831"/>
+                    </a:cubicBezTo>
+                    <a:close/>
+                  </a:path>
+                </a:pathLst>
+              </a:custGeom>
+              <a:solidFill>
+                <a:schemeClr val="accent6">
+                  <a:lumMod val="75000"/>
+                </a:schemeClr>
+              </a:solidFill>
+              <a:ln>
+                <a:solidFill>
+                  <a:schemeClr val="accent6">
+                    <a:lumMod val="75000"/>
+                  </a:schemeClr>
+                </a:solidFill>
+              </a:ln>
+            </p:spPr>
+            <p:style>
+              <a:lnRef idx="2">
+                <a:schemeClr val="accent6">
+                  <a:shade val="15000"/>
+                </a:schemeClr>
+              </a:lnRef>
+              <a:fillRef idx="1">
+                <a:schemeClr val="accent6"/>
+              </a:fillRef>
+              <a:effectRef idx="0">
+                <a:schemeClr val="accent6"/>
+              </a:effectRef>
+              <a:fontRef idx="minor">
+                <a:schemeClr val="lt1"/>
+              </a:fontRef>
+            </p:style>
+            <p:txBody>
+              <a:bodyPr rtlCol="0" anchor="ctr"/>
+              <a:lstStyle/>
+              <a:p>
+                <a:pPr algn="ctr"/>
+                <a:endParaRPr lang="en-NZ"/>
+              </a:p>
+            </p:txBody>
+          </p:sp>
+          <p:sp>
+            <p:nvSpPr>
+              <p:cNvPr id="36" name="Oval 15">
+                <a:extLst>
+                  <a:ext uri="{FF2B5EF4-FFF2-40B4-BE49-F238E27FC236}">
+                    <a16:creationId xmlns:a16="http://schemas.microsoft.com/office/drawing/2014/main" id="{8E3D0049-B1FC-EBA0-605F-F1FBFA3E1BEA}"/>
+                  </a:ext>
+                </a:extLst>
+              </p:cNvPr>
+              <p:cNvSpPr/>
+              <p:nvPr/>
+            </p:nvSpPr>
+            <p:spPr>
+              <a:xfrm rot="16599564">
+                <a:off x="5800619" y="2388447"/>
+                <a:ext cx="384004" cy="76570"/>
+              </a:xfrm>
+              <a:custGeom>
+                <a:avLst/>
+                <a:gdLst>
+                  <a:gd name="csX0" fmla="*/ 0 w 525294"/>
+                  <a:gd name="csY0" fmla="*/ 94034 h 188068"/>
+                  <a:gd name="csX1" fmla="*/ 262647 w 525294"/>
+                  <a:gd name="csY1" fmla="*/ 0 h 188068"/>
+                  <a:gd name="csX2" fmla="*/ 525294 w 525294"/>
+                  <a:gd name="csY2" fmla="*/ 94034 h 188068"/>
+                  <a:gd name="csX3" fmla="*/ 262647 w 525294"/>
+                  <a:gd name="csY3" fmla="*/ 188068 h 188068"/>
+                  <a:gd name="csX4" fmla="*/ 0 w 525294"/>
+                  <a:gd name="csY4" fmla="*/ 94034 h 188068"/>
+                  <a:gd name="csX0" fmla="*/ 0 w 623481"/>
+                  <a:gd name="csY0" fmla="*/ 94831 h 189220"/>
+                  <a:gd name="csX1" fmla="*/ 262647 w 623481"/>
+                  <a:gd name="csY1" fmla="*/ 797 h 189220"/>
+                  <a:gd name="csX2" fmla="*/ 623481 w 623481"/>
+                  <a:gd name="csY2" fmla="*/ 65276 h 189220"/>
+                  <a:gd name="csX3" fmla="*/ 262647 w 623481"/>
+                  <a:gd name="csY3" fmla="*/ 188865 h 189220"/>
+                  <a:gd name="csX4" fmla="*/ 0 w 623481"/>
+                  <a:gd name="csY4" fmla="*/ 94831 h 189220"/>
+                </a:gdLst>
+                <a:ahLst/>
+                <a:cxnLst>
+                  <a:cxn ang="0">
+                    <a:pos x="csX0" y="csY0"/>
+                  </a:cxn>
+                  <a:cxn ang="0">
+                    <a:pos x="csX1" y="csY1"/>
+                  </a:cxn>
+                  <a:cxn ang="0">
+                    <a:pos x="csX2" y="csY2"/>
+                  </a:cxn>
+                  <a:cxn ang="0">
+                    <a:pos x="csX3" y="csY3"/>
+                  </a:cxn>
+                  <a:cxn ang="0">
+                    <a:pos x="csX4" y="csY4"/>
+                  </a:cxn>
+                </a:cxnLst>
+                <a:rect l="l" t="t" r="r" b="b"/>
+                <a:pathLst>
+                  <a:path w="623481" h="189220">
+                    <a:moveTo>
+                      <a:pt x="0" y="94831"/>
+                    </a:moveTo>
+                    <a:cubicBezTo>
+                      <a:pt x="0" y="42897"/>
+                      <a:pt x="158734" y="5723"/>
+                      <a:pt x="262647" y="797"/>
+                    </a:cubicBezTo>
+                    <a:cubicBezTo>
+                      <a:pt x="366560" y="-4129"/>
+                      <a:pt x="623481" y="13342"/>
+                      <a:pt x="623481" y="65276"/>
+                    </a:cubicBezTo>
+                    <a:cubicBezTo>
+                      <a:pt x="623481" y="117210"/>
+                      <a:pt x="366560" y="183939"/>
+                      <a:pt x="262647" y="188865"/>
+                    </a:cubicBezTo>
+                    <a:cubicBezTo>
+                      <a:pt x="158734" y="193791"/>
+                      <a:pt x="0" y="146765"/>
+                      <a:pt x="0" y="94831"/>
+                    </a:cubicBezTo>
+                    <a:close/>
+                  </a:path>
+                </a:pathLst>
+              </a:custGeom>
+              <a:solidFill>
+                <a:schemeClr val="accent6">
+                  <a:lumMod val="75000"/>
+                </a:schemeClr>
+              </a:solidFill>
+              <a:ln>
+                <a:solidFill>
+                  <a:schemeClr val="accent6">
+                    <a:lumMod val="75000"/>
+                  </a:schemeClr>
+                </a:solidFill>
+              </a:ln>
+            </p:spPr>
+            <p:style>
+              <a:lnRef idx="2">
+                <a:schemeClr val="accent6">
+                  <a:shade val="15000"/>
+                </a:schemeClr>
+              </a:lnRef>
+              <a:fillRef idx="1">
+                <a:schemeClr val="accent6"/>
+              </a:fillRef>
+              <a:effectRef idx="0">
+                <a:schemeClr val="accent6"/>
+              </a:effectRef>
+              <a:fontRef idx="minor">
+                <a:schemeClr val="lt1"/>
+              </a:fontRef>
+            </p:style>
+            <p:txBody>
+              <a:bodyPr rtlCol="0" anchor="ctr"/>
+              <a:lstStyle/>
+              <a:p>
+                <a:pPr algn="ctr"/>
+                <a:endParaRPr lang="en-NZ"/>
+              </a:p>
+            </p:txBody>
+          </p:sp>
+          <p:sp>
+            <p:nvSpPr>
+              <p:cNvPr id="38" name="Oval 15">
+                <a:extLst>
+                  <a:ext uri="{FF2B5EF4-FFF2-40B4-BE49-F238E27FC236}">
+                    <a16:creationId xmlns:a16="http://schemas.microsoft.com/office/drawing/2014/main" id="{0307720A-F418-F4C6-1B9A-C52287454FF2}"/>
+                  </a:ext>
+                </a:extLst>
+              </p:cNvPr>
+              <p:cNvSpPr/>
+              <p:nvPr/>
+            </p:nvSpPr>
+            <p:spPr>
+              <a:xfrm rot="17720721">
+                <a:off x="6162584" y="3440791"/>
+                <a:ext cx="428121" cy="76467"/>
+              </a:xfrm>
+              <a:custGeom>
+                <a:avLst/>
+                <a:gdLst>
+                  <a:gd name="csX0" fmla="*/ 0 w 525294"/>
+                  <a:gd name="csY0" fmla="*/ 94034 h 188068"/>
+                  <a:gd name="csX1" fmla="*/ 262647 w 525294"/>
+                  <a:gd name="csY1" fmla="*/ 0 h 188068"/>
+                  <a:gd name="csX2" fmla="*/ 525294 w 525294"/>
+                  <a:gd name="csY2" fmla="*/ 94034 h 188068"/>
+                  <a:gd name="csX3" fmla="*/ 262647 w 525294"/>
+                  <a:gd name="csY3" fmla="*/ 188068 h 188068"/>
+                  <a:gd name="csX4" fmla="*/ 0 w 525294"/>
+                  <a:gd name="csY4" fmla="*/ 94034 h 188068"/>
+                  <a:gd name="csX0" fmla="*/ 0 w 623481"/>
+                  <a:gd name="csY0" fmla="*/ 94831 h 189220"/>
+                  <a:gd name="csX1" fmla="*/ 262647 w 623481"/>
+                  <a:gd name="csY1" fmla="*/ 797 h 189220"/>
+                  <a:gd name="csX2" fmla="*/ 623481 w 623481"/>
+                  <a:gd name="csY2" fmla="*/ 65276 h 189220"/>
+                  <a:gd name="csX3" fmla="*/ 262647 w 623481"/>
+                  <a:gd name="csY3" fmla="*/ 188865 h 189220"/>
+                  <a:gd name="csX4" fmla="*/ 0 w 623481"/>
+                  <a:gd name="csY4" fmla="*/ 94831 h 189220"/>
+                </a:gdLst>
+                <a:ahLst/>
+                <a:cxnLst>
+                  <a:cxn ang="0">
+                    <a:pos x="csX0" y="csY0"/>
+                  </a:cxn>
+                  <a:cxn ang="0">
+                    <a:pos x="csX1" y="csY1"/>
+                  </a:cxn>
+                  <a:cxn ang="0">
+                    <a:pos x="csX2" y="csY2"/>
+                  </a:cxn>
+                  <a:cxn ang="0">
+                    <a:pos x="csX3" y="csY3"/>
+                  </a:cxn>
+                  <a:cxn ang="0">
+                    <a:pos x="csX4" y="csY4"/>
+                  </a:cxn>
+                </a:cxnLst>
+                <a:rect l="l" t="t" r="r" b="b"/>
+                <a:pathLst>
+                  <a:path w="623481" h="189220">
+                    <a:moveTo>
+                      <a:pt x="0" y="94831"/>
+                    </a:moveTo>
+                    <a:cubicBezTo>
+                      <a:pt x="0" y="42897"/>
+                      <a:pt x="158734" y="5723"/>
+                      <a:pt x="262647" y="797"/>
+                    </a:cubicBezTo>
+                    <a:cubicBezTo>
+                      <a:pt x="366560" y="-4129"/>
+                      <a:pt x="623481" y="13342"/>
+                      <a:pt x="623481" y="65276"/>
+                    </a:cubicBezTo>
+                    <a:cubicBezTo>
+                      <a:pt x="623481" y="117210"/>
+                      <a:pt x="366560" y="183939"/>
+                      <a:pt x="262647" y="188865"/>
+                    </a:cubicBezTo>
+                    <a:cubicBezTo>
+                      <a:pt x="158734" y="193791"/>
+                      <a:pt x="0" y="146765"/>
+                      <a:pt x="0" y="94831"/>
+                    </a:cubicBezTo>
+                    <a:close/>
+                  </a:path>
+                </a:pathLst>
+              </a:custGeom>
+              <a:solidFill>
+                <a:schemeClr val="accent6">
+                  <a:lumMod val="75000"/>
+                </a:schemeClr>
+              </a:solidFill>
+              <a:ln>
+                <a:solidFill>
+                  <a:schemeClr val="accent6">
+                    <a:lumMod val="75000"/>
+                  </a:schemeClr>
+                </a:solidFill>
+              </a:ln>
+            </p:spPr>
+            <p:style>
+              <a:lnRef idx="2">
+                <a:schemeClr val="accent6">
+                  <a:shade val="15000"/>
+                </a:schemeClr>
+              </a:lnRef>
+              <a:fillRef idx="1">
+                <a:schemeClr val="accent6"/>
+              </a:fillRef>
+              <a:effectRef idx="0">
+                <a:schemeClr val="accent6"/>
+              </a:effectRef>
+              <a:fontRef idx="minor">
+                <a:schemeClr val="lt1"/>
+              </a:fontRef>
+            </p:style>
+            <p:txBody>
+              <a:bodyPr rtlCol="0" anchor="ctr"/>
+              <a:lstStyle/>
+              <a:p>
+                <a:pPr algn="ctr"/>
+                <a:endParaRPr lang="en-NZ"/>
+              </a:p>
+            </p:txBody>
+          </p:sp>
+          <p:sp>
+            <p:nvSpPr>
+              <p:cNvPr id="40" name="Oval 15">
+                <a:extLst>
+                  <a:ext uri="{FF2B5EF4-FFF2-40B4-BE49-F238E27FC236}">
+                    <a16:creationId xmlns:a16="http://schemas.microsoft.com/office/drawing/2014/main" id="{0CD7B202-5966-24EC-B6C3-2001879D4628}"/>
+                  </a:ext>
+                </a:extLst>
+              </p:cNvPr>
+              <p:cNvSpPr/>
+              <p:nvPr/>
+            </p:nvSpPr>
+            <p:spPr>
+              <a:xfrm rot="17826229">
+                <a:off x="6168485" y="3764374"/>
+                <a:ext cx="428121" cy="90431"/>
+              </a:xfrm>
+              <a:custGeom>
+                <a:avLst/>
+                <a:gdLst>
+                  <a:gd name="csX0" fmla="*/ 0 w 525294"/>
+                  <a:gd name="csY0" fmla="*/ 94034 h 188068"/>
+                  <a:gd name="csX1" fmla="*/ 262647 w 525294"/>
+                  <a:gd name="csY1" fmla="*/ 0 h 188068"/>
+                  <a:gd name="csX2" fmla="*/ 525294 w 525294"/>
+                  <a:gd name="csY2" fmla="*/ 94034 h 188068"/>
+                  <a:gd name="csX3" fmla="*/ 262647 w 525294"/>
+                  <a:gd name="csY3" fmla="*/ 188068 h 188068"/>
+                  <a:gd name="csX4" fmla="*/ 0 w 525294"/>
+                  <a:gd name="csY4" fmla="*/ 94034 h 188068"/>
+                  <a:gd name="csX0" fmla="*/ 0 w 623481"/>
+                  <a:gd name="csY0" fmla="*/ 94831 h 189220"/>
+                  <a:gd name="csX1" fmla="*/ 262647 w 623481"/>
+                  <a:gd name="csY1" fmla="*/ 797 h 189220"/>
+                  <a:gd name="csX2" fmla="*/ 623481 w 623481"/>
+                  <a:gd name="csY2" fmla="*/ 65276 h 189220"/>
+                  <a:gd name="csX3" fmla="*/ 262647 w 623481"/>
+                  <a:gd name="csY3" fmla="*/ 188865 h 189220"/>
+                  <a:gd name="csX4" fmla="*/ 0 w 623481"/>
+                  <a:gd name="csY4" fmla="*/ 94831 h 189220"/>
+                </a:gdLst>
+                <a:ahLst/>
+                <a:cxnLst>
+                  <a:cxn ang="0">
+                    <a:pos x="csX0" y="csY0"/>
+                  </a:cxn>
+                  <a:cxn ang="0">
+                    <a:pos x="csX1" y="csY1"/>
+                  </a:cxn>
+                  <a:cxn ang="0">
+                    <a:pos x="csX2" y="csY2"/>
+                  </a:cxn>
+                  <a:cxn ang="0">
+                    <a:pos x="csX3" y="csY3"/>
+                  </a:cxn>
+                  <a:cxn ang="0">
+                    <a:pos x="csX4" y="csY4"/>
+                  </a:cxn>
+                </a:cxnLst>
+                <a:rect l="l" t="t" r="r" b="b"/>
+                <a:pathLst>
+                  <a:path w="623481" h="189220">
+                    <a:moveTo>
+                      <a:pt x="0" y="94831"/>
+                    </a:moveTo>
+                    <a:cubicBezTo>
+                      <a:pt x="0" y="42897"/>
+                      <a:pt x="158734" y="5723"/>
+                      <a:pt x="262647" y="797"/>
+                    </a:cubicBezTo>
+                    <a:cubicBezTo>
+                      <a:pt x="366560" y="-4129"/>
+                      <a:pt x="623481" y="13342"/>
+                      <a:pt x="623481" y="65276"/>
+                    </a:cubicBezTo>
+                    <a:cubicBezTo>
+                      <a:pt x="623481" y="117210"/>
+                      <a:pt x="366560" y="183939"/>
+                      <a:pt x="262647" y="188865"/>
+                    </a:cubicBezTo>
+                    <a:cubicBezTo>
+                      <a:pt x="158734" y="193791"/>
+                      <a:pt x="0" y="146765"/>
+                      <a:pt x="0" y="94831"/>
+                    </a:cubicBezTo>
+                    <a:close/>
+                  </a:path>
+                </a:pathLst>
+              </a:custGeom>
+              <a:solidFill>
+                <a:schemeClr val="accent6">
+                  <a:lumMod val="75000"/>
+                </a:schemeClr>
+              </a:solidFill>
+              <a:ln>
+                <a:solidFill>
+                  <a:schemeClr val="accent6">
+                    <a:lumMod val="75000"/>
+                  </a:schemeClr>
+                </a:solidFill>
+              </a:ln>
+            </p:spPr>
+            <p:style>
+              <a:lnRef idx="2">
+                <a:schemeClr val="accent6">
+                  <a:shade val="15000"/>
+                </a:schemeClr>
+              </a:lnRef>
+              <a:fillRef idx="1">
+                <a:schemeClr val="accent6"/>
+              </a:fillRef>
+              <a:effectRef idx="0">
+                <a:schemeClr val="accent6"/>
+              </a:effectRef>
+              <a:fontRef idx="minor">
+                <a:schemeClr val="lt1"/>
+              </a:fontRef>
+            </p:style>
+            <p:txBody>
+              <a:bodyPr rtlCol="0" anchor="ctr"/>
+              <a:lstStyle/>
+              <a:p>
+                <a:pPr algn="ctr"/>
+                <a:endParaRPr lang="en-NZ"/>
+              </a:p>
+            </p:txBody>
+          </p:sp>
+        </p:grpSp>
+        <p:grpSp>
+          <p:nvGrpSpPr>
+            <p:cNvPr id="42" name="Group 41">
+              <a:extLst>
+                <a:ext uri="{FF2B5EF4-FFF2-40B4-BE49-F238E27FC236}">
+                  <a16:creationId xmlns:a16="http://schemas.microsoft.com/office/drawing/2014/main" id="{34924CB9-E56C-60EE-1D03-56FAD016403D}"/>
+                </a:ext>
+              </a:extLst>
+            </p:cNvPr>
+            <p:cNvGrpSpPr/>
+            <p:nvPr/>
+          </p:nvGrpSpPr>
+          <p:grpSpPr>
+            <a:xfrm flipH="1">
+              <a:off x="2997047" y="2187673"/>
+              <a:ext cx="750300" cy="2737251"/>
+              <a:chOff x="5677461" y="2176091"/>
+              <a:chExt cx="750300" cy="2737251"/>
+            </a:xfrm>
+          </p:grpSpPr>
+          <p:sp>
+            <p:nvSpPr>
+              <p:cNvPr id="43" name="Oval 15">
+                <a:extLst>
+                  <a:ext uri="{FF2B5EF4-FFF2-40B4-BE49-F238E27FC236}">
+                    <a16:creationId xmlns:a16="http://schemas.microsoft.com/office/drawing/2014/main" id="{6FAFF837-16C2-0713-E4AC-8F5046A999B9}"/>
+                  </a:ext>
+                </a:extLst>
+              </p:cNvPr>
+              <p:cNvSpPr/>
+              <p:nvPr/>
+            </p:nvSpPr>
+            <p:spPr>
+              <a:xfrm rot="1439914" flipH="1">
+                <a:off x="5873621" y="3072463"/>
+                <a:ext cx="358584" cy="83907"/>
+              </a:xfrm>
+              <a:custGeom>
+                <a:avLst/>
+                <a:gdLst>
+                  <a:gd name="csX0" fmla="*/ 0 w 525294"/>
+                  <a:gd name="csY0" fmla="*/ 94034 h 188068"/>
+                  <a:gd name="csX1" fmla="*/ 262647 w 525294"/>
+                  <a:gd name="csY1" fmla="*/ 0 h 188068"/>
+                  <a:gd name="csX2" fmla="*/ 525294 w 525294"/>
+                  <a:gd name="csY2" fmla="*/ 94034 h 188068"/>
+                  <a:gd name="csX3" fmla="*/ 262647 w 525294"/>
+                  <a:gd name="csY3" fmla="*/ 188068 h 188068"/>
+                  <a:gd name="csX4" fmla="*/ 0 w 525294"/>
+                  <a:gd name="csY4" fmla="*/ 94034 h 188068"/>
+                  <a:gd name="csX0" fmla="*/ 0 w 623481"/>
+                  <a:gd name="csY0" fmla="*/ 94831 h 189220"/>
+                  <a:gd name="csX1" fmla="*/ 262647 w 623481"/>
+                  <a:gd name="csY1" fmla="*/ 797 h 189220"/>
+                  <a:gd name="csX2" fmla="*/ 623481 w 623481"/>
+                  <a:gd name="csY2" fmla="*/ 65276 h 189220"/>
+                  <a:gd name="csX3" fmla="*/ 262647 w 623481"/>
+                  <a:gd name="csY3" fmla="*/ 188865 h 189220"/>
+                  <a:gd name="csX4" fmla="*/ 0 w 623481"/>
+                  <a:gd name="csY4" fmla="*/ 94831 h 189220"/>
+                </a:gdLst>
+                <a:ahLst/>
+                <a:cxnLst>
+                  <a:cxn ang="0">
+                    <a:pos x="csX0" y="csY0"/>
+                  </a:cxn>
+                  <a:cxn ang="0">
+                    <a:pos x="csX1" y="csY1"/>
+                  </a:cxn>
+                  <a:cxn ang="0">
+                    <a:pos x="csX2" y="csY2"/>
+                  </a:cxn>
+                  <a:cxn ang="0">
+                    <a:pos x="csX3" y="csY3"/>
+                  </a:cxn>
+                  <a:cxn ang="0">
+                    <a:pos x="csX4" y="csY4"/>
+                  </a:cxn>
+                </a:cxnLst>
+                <a:rect l="l" t="t" r="r" b="b"/>
+                <a:pathLst>
+                  <a:path w="623481" h="189220">
+                    <a:moveTo>
+                      <a:pt x="0" y="94831"/>
+                    </a:moveTo>
+                    <a:cubicBezTo>
+                      <a:pt x="0" y="42897"/>
+                      <a:pt x="158734" y="5723"/>
+                      <a:pt x="262647" y="797"/>
+                    </a:cubicBezTo>
+                    <a:cubicBezTo>
+                      <a:pt x="366560" y="-4129"/>
+                      <a:pt x="623481" y="13342"/>
+                      <a:pt x="623481" y="65276"/>
+                    </a:cubicBezTo>
+                    <a:cubicBezTo>
+                      <a:pt x="623481" y="117210"/>
+                      <a:pt x="366560" y="183939"/>
+                      <a:pt x="262647" y="188865"/>
+                    </a:cubicBezTo>
+                    <a:cubicBezTo>
+                      <a:pt x="158734" y="193791"/>
+                      <a:pt x="0" y="146765"/>
+                      <a:pt x="0" y="94831"/>
+                    </a:cubicBezTo>
+                    <a:close/>
+                  </a:path>
+                </a:pathLst>
+              </a:custGeom>
+              <a:solidFill>
+                <a:schemeClr val="accent6">
+                  <a:lumMod val="75000"/>
+                </a:schemeClr>
+              </a:solidFill>
+              <a:ln>
+                <a:solidFill>
+                  <a:schemeClr val="accent6">
+                    <a:lumMod val="75000"/>
+                  </a:schemeClr>
+                </a:solidFill>
+              </a:ln>
+            </p:spPr>
+            <p:style>
+              <a:lnRef idx="2">
+                <a:schemeClr val="accent6">
+                  <a:shade val="15000"/>
+                </a:schemeClr>
+              </a:lnRef>
+              <a:fillRef idx="1">
+                <a:schemeClr val="accent6"/>
+              </a:fillRef>
+              <a:effectRef idx="0">
+                <a:schemeClr val="accent6"/>
+              </a:effectRef>
+              <a:fontRef idx="minor">
+                <a:schemeClr val="lt1"/>
+              </a:fontRef>
+            </p:style>
+            <p:txBody>
+              <a:bodyPr rtlCol="0" anchor="ctr"/>
+              <a:lstStyle/>
+              <a:p>
+                <a:pPr algn="ctr"/>
+                <a:endParaRPr lang="en-NZ"/>
+              </a:p>
+            </p:txBody>
+          </p:sp>
+          <p:sp>
+            <p:nvSpPr>
+              <p:cNvPr id="44" name="Oval 15">
+                <a:extLst>
+                  <a:ext uri="{FF2B5EF4-FFF2-40B4-BE49-F238E27FC236}">
+                    <a16:creationId xmlns:a16="http://schemas.microsoft.com/office/drawing/2014/main" id="{D4EF5C35-6F13-CE1A-5BA5-E5919D67F4AA}"/>
+                  </a:ext>
+                </a:extLst>
+              </p:cNvPr>
+              <p:cNvSpPr/>
+              <p:nvPr/>
+            </p:nvSpPr>
+            <p:spPr>
+              <a:xfrm rot="1297676" flipH="1">
+                <a:off x="5677461" y="2648054"/>
+                <a:ext cx="336104" cy="93295"/>
+              </a:xfrm>
+              <a:custGeom>
+                <a:avLst/>
+                <a:gdLst>
+                  <a:gd name="csX0" fmla="*/ 0 w 525294"/>
+                  <a:gd name="csY0" fmla="*/ 94034 h 188068"/>
+                  <a:gd name="csX1" fmla="*/ 262647 w 525294"/>
+                  <a:gd name="csY1" fmla="*/ 0 h 188068"/>
+                  <a:gd name="csX2" fmla="*/ 525294 w 525294"/>
+                  <a:gd name="csY2" fmla="*/ 94034 h 188068"/>
+                  <a:gd name="csX3" fmla="*/ 262647 w 525294"/>
+                  <a:gd name="csY3" fmla="*/ 188068 h 188068"/>
+                  <a:gd name="csX4" fmla="*/ 0 w 525294"/>
+                  <a:gd name="csY4" fmla="*/ 94034 h 188068"/>
+                  <a:gd name="csX0" fmla="*/ 0 w 623481"/>
+                  <a:gd name="csY0" fmla="*/ 94831 h 189220"/>
+                  <a:gd name="csX1" fmla="*/ 262647 w 623481"/>
+                  <a:gd name="csY1" fmla="*/ 797 h 189220"/>
+                  <a:gd name="csX2" fmla="*/ 623481 w 623481"/>
+                  <a:gd name="csY2" fmla="*/ 65276 h 189220"/>
+                  <a:gd name="csX3" fmla="*/ 262647 w 623481"/>
+                  <a:gd name="csY3" fmla="*/ 188865 h 189220"/>
+                  <a:gd name="csX4" fmla="*/ 0 w 623481"/>
+                  <a:gd name="csY4" fmla="*/ 94831 h 189220"/>
+                </a:gdLst>
+                <a:ahLst/>
+                <a:cxnLst>
+                  <a:cxn ang="0">
+                    <a:pos x="csX0" y="csY0"/>
+                  </a:cxn>
+                  <a:cxn ang="0">
+                    <a:pos x="csX1" y="csY1"/>
+                  </a:cxn>
+                  <a:cxn ang="0">
+                    <a:pos x="csX2" y="csY2"/>
+                  </a:cxn>
+                  <a:cxn ang="0">
+                    <a:pos x="csX3" y="csY3"/>
+                  </a:cxn>
+                  <a:cxn ang="0">
+                    <a:pos x="csX4" y="csY4"/>
+                  </a:cxn>
+                </a:cxnLst>
+                <a:rect l="l" t="t" r="r" b="b"/>
+                <a:pathLst>
+                  <a:path w="623481" h="189220">
+                    <a:moveTo>
+                      <a:pt x="0" y="94831"/>
+                    </a:moveTo>
+                    <a:cubicBezTo>
+                      <a:pt x="0" y="42897"/>
+                      <a:pt x="158734" y="5723"/>
+                      <a:pt x="262647" y="797"/>
+                    </a:cubicBezTo>
+                    <a:cubicBezTo>
+                      <a:pt x="366560" y="-4129"/>
+                      <a:pt x="623481" y="13342"/>
+                      <a:pt x="623481" y="65276"/>
+                    </a:cubicBezTo>
+                    <a:cubicBezTo>
+                      <a:pt x="623481" y="117210"/>
+                      <a:pt x="366560" y="183939"/>
+                      <a:pt x="262647" y="188865"/>
+                    </a:cubicBezTo>
+                    <a:cubicBezTo>
+                      <a:pt x="158734" y="193791"/>
+                      <a:pt x="0" y="146765"/>
+                      <a:pt x="0" y="94831"/>
+                    </a:cubicBezTo>
+                    <a:close/>
+                  </a:path>
+                </a:pathLst>
+              </a:custGeom>
+              <a:solidFill>
+                <a:schemeClr val="accent6">
+                  <a:lumMod val="75000"/>
+                </a:schemeClr>
+              </a:solidFill>
+              <a:ln>
+                <a:solidFill>
+                  <a:schemeClr val="accent6">
+                    <a:lumMod val="75000"/>
+                  </a:schemeClr>
+                </a:solidFill>
+              </a:ln>
+            </p:spPr>
+            <p:style>
+              <a:lnRef idx="2">
+                <a:schemeClr val="accent6">
+                  <a:shade val="15000"/>
+                </a:schemeClr>
+              </a:lnRef>
+              <a:fillRef idx="1">
+                <a:schemeClr val="accent6"/>
+              </a:fillRef>
+              <a:effectRef idx="0">
+                <a:schemeClr val="accent6"/>
+              </a:effectRef>
+              <a:fontRef idx="minor">
+                <a:schemeClr val="lt1"/>
+              </a:fontRef>
+            </p:style>
+            <p:txBody>
+              <a:bodyPr rtlCol="0" anchor="ctr"/>
+              <a:lstStyle/>
+              <a:p>
+                <a:pPr algn="ctr"/>
+                <a:endParaRPr lang="en-NZ"/>
+              </a:p>
+            </p:txBody>
+          </p:sp>
+          <p:sp>
+            <p:nvSpPr>
+              <p:cNvPr id="45" name="Oval 15">
+                <a:extLst>
+                  <a:ext uri="{FF2B5EF4-FFF2-40B4-BE49-F238E27FC236}">
+                    <a16:creationId xmlns:a16="http://schemas.microsoft.com/office/drawing/2014/main" id="{0D57873D-3B98-B4B8-D745-1DCE537C6F86}"/>
+                  </a:ext>
+                </a:extLst>
+              </p:cNvPr>
+              <p:cNvSpPr/>
+              <p:nvPr/>
+            </p:nvSpPr>
+            <p:spPr>
+              <a:xfrm rot="16971223">
+                <a:off x="6035007" y="2816575"/>
+                <a:ext cx="428121" cy="76467"/>
+              </a:xfrm>
+              <a:custGeom>
+                <a:avLst/>
+                <a:gdLst>
+                  <a:gd name="csX0" fmla="*/ 0 w 525294"/>
+                  <a:gd name="csY0" fmla="*/ 94034 h 188068"/>
+                  <a:gd name="csX1" fmla="*/ 262647 w 525294"/>
+                  <a:gd name="csY1" fmla="*/ 0 h 188068"/>
+                  <a:gd name="csX2" fmla="*/ 525294 w 525294"/>
+                  <a:gd name="csY2" fmla="*/ 94034 h 188068"/>
+                  <a:gd name="csX3" fmla="*/ 262647 w 525294"/>
+                  <a:gd name="csY3" fmla="*/ 188068 h 188068"/>
+                  <a:gd name="csX4" fmla="*/ 0 w 525294"/>
+                  <a:gd name="csY4" fmla="*/ 94034 h 188068"/>
+                  <a:gd name="csX0" fmla="*/ 0 w 623481"/>
+                  <a:gd name="csY0" fmla="*/ 94831 h 189220"/>
+                  <a:gd name="csX1" fmla="*/ 262647 w 623481"/>
+                  <a:gd name="csY1" fmla="*/ 797 h 189220"/>
+                  <a:gd name="csX2" fmla="*/ 623481 w 623481"/>
+                  <a:gd name="csY2" fmla="*/ 65276 h 189220"/>
+                  <a:gd name="csX3" fmla="*/ 262647 w 623481"/>
+                  <a:gd name="csY3" fmla="*/ 188865 h 189220"/>
+                  <a:gd name="csX4" fmla="*/ 0 w 623481"/>
+                  <a:gd name="csY4" fmla="*/ 94831 h 189220"/>
+                </a:gdLst>
+                <a:ahLst/>
+                <a:cxnLst>
+                  <a:cxn ang="0">
+                    <a:pos x="csX0" y="csY0"/>
+                  </a:cxn>
+                  <a:cxn ang="0">
+                    <a:pos x="csX1" y="csY1"/>
+                  </a:cxn>
+                  <a:cxn ang="0">
+                    <a:pos x="csX2" y="csY2"/>
+                  </a:cxn>
+                  <a:cxn ang="0">
+                    <a:pos x="csX3" y="csY3"/>
+                  </a:cxn>
+                  <a:cxn ang="0">
+                    <a:pos x="csX4" y="csY4"/>
+                  </a:cxn>
+                </a:cxnLst>
+                <a:rect l="l" t="t" r="r" b="b"/>
+                <a:pathLst>
+                  <a:path w="623481" h="189220">
+                    <a:moveTo>
+                      <a:pt x="0" y="94831"/>
+                    </a:moveTo>
+                    <a:cubicBezTo>
+                      <a:pt x="0" y="42897"/>
+                      <a:pt x="158734" y="5723"/>
+                      <a:pt x="262647" y="797"/>
+                    </a:cubicBezTo>
+                    <a:cubicBezTo>
+                      <a:pt x="366560" y="-4129"/>
+                      <a:pt x="623481" y="13342"/>
+                      <a:pt x="623481" y="65276"/>
+                    </a:cubicBezTo>
+                    <a:cubicBezTo>
+                      <a:pt x="623481" y="117210"/>
+                      <a:pt x="366560" y="183939"/>
+                      <a:pt x="262647" y="188865"/>
+                    </a:cubicBezTo>
+                    <a:cubicBezTo>
+                      <a:pt x="158734" y="193791"/>
+                      <a:pt x="0" y="146765"/>
+                      <a:pt x="0" y="94831"/>
+                    </a:cubicBezTo>
+                    <a:close/>
+                  </a:path>
+                </a:pathLst>
+              </a:custGeom>
+              <a:solidFill>
+                <a:schemeClr val="accent6">
+                  <a:lumMod val="75000"/>
+                </a:schemeClr>
+              </a:solidFill>
+              <a:ln>
+                <a:solidFill>
+                  <a:schemeClr val="accent6">
+                    <a:lumMod val="75000"/>
+                  </a:schemeClr>
+                </a:solidFill>
+              </a:ln>
+            </p:spPr>
+            <p:style>
+              <a:lnRef idx="2">
+                <a:schemeClr val="accent6">
+                  <a:shade val="15000"/>
+                </a:schemeClr>
+              </a:lnRef>
+              <a:fillRef idx="1">
+                <a:schemeClr val="accent6"/>
+              </a:fillRef>
+              <a:effectRef idx="0">
+                <a:schemeClr val="accent6"/>
+              </a:effectRef>
+              <a:fontRef idx="minor">
+                <a:schemeClr val="lt1"/>
+              </a:fontRef>
+            </p:style>
+            <p:txBody>
+              <a:bodyPr rtlCol="0" anchor="ctr"/>
+              <a:lstStyle/>
+              <a:p>
+                <a:pPr algn="ctr"/>
+                <a:endParaRPr lang="en-NZ"/>
+              </a:p>
+            </p:txBody>
+          </p:sp>
+          <p:sp>
+            <p:nvSpPr>
+              <p:cNvPr id="46" name="Oval 15">
+                <a:extLst>
+                  <a:ext uri="{FF2B5EF4-FFF2-40B4-BE49-F238E27FC236}">
+                    <a16:creationId xmlns:a16="http://schemas.microsoft.com/office/drawing/2014/main" id="{D21E51AF-5437-6156-DBFD-1104AA7F5B95}"/>
+                  </a:ext>
+                </a:extLst>
+              </p:cNvPr>
+              <p:cNvSpPr/>
+              <p:nvPr/>
+            </p:nvSpPr>
+            <p:spPr>
+              <a:xfrm rot="16672422">
+                <a:off x="5925138" y="2645257"/>
+                <a:ext cx="384004" cy="76570"/>
+              </a:xfrm>
+              <a:custGeom>
+                <a:avLst/>
+                <a:gdLst>
+                  <a:gd name="csX0" fmla="*/ 0 w 525294"/>
+                  <a:gd name="csY0" fmla="*/ 94034 h 188068"/>
+                  <a:gd name="csX1" fmla="*/ 262647 w 525294"/>
+                  <a:gd name="csY1" fmla="*/ 0 h 188068"/>
+                  <a:gd name="csX2" fmla="*/ 525294 w 525294"/>
+                  <a:gd name="csY2" fmla="*/ 94034 h 188068"/>
+                  <a:gd name="csX3" fmla="*/ 262647 w 525294"/>
+                  <a:gd name="csY3" fmla="*/ 188068 h 188068"/>
+                  <a:gd name="csX4" fmla="*/ 0 w 525294"/>
+                  <a:gd name="csY4" fmla="*/ 94034 h 188068"/>
+                  <a:gd name="csX0" fmla="*/ 0 w 623481"/>
+                  <a:gd name="csY0" fmla="*/ 94831 h 189220"/>
+                  <a:gd name="csX1" fmla="*/ 262647 w 623481"/>
+                  <a:gd name="csY1" fmla="*/ 797 h 189220"/>
+                  <a:gd name="csX2" fmla="*/ 623481 w 623481"/>
+                  <a:gd name="csY2" fmla="*/ 65276 h 189220"/>
+                  <a:gd name="csX3" fmla="*/ 262647 w 623481"/>
+                  <a:gd name="csY3" fmla="*/ 188865 h 189220"/>
+                  <a:gd name="csX4" fmla="*/ 0 w 623481"/>
+                  <a:gd name="csY4" fmla="*/ 94831 h 189220"/>
+                </a:gdLst>
+                <a:ahLst/>
+                <a:cxnLst>
+                  <a:cxn ang="0">
+                    <a:pos x="csX0" y="csY0"/>
+                  </a:cxn>
+                  <a:cxn ang="0">
+                    <a:pos x="csX1" y="csY1"/>
+                  </a:cxn>
+                  <a:cxn ang="0">
+                    <a:pos x="csX2" y="csY2"/>
+                  </a:cxn>
+                  <a:cxn ang="0">
+                    <a:pos x="csX3" y="csY3"/>
+                  </a:cxn>
+                  <a:cxn ang="0">
+                    <a:pos x="csX4" y="csY4"/>
+                  </a:cxn>
+                </a:cxnLst>
+                <a:rect l="l" t="t" r="r" b="b"/>
+                <a:pathLst>
+                  <a:path w="623481" h="189220">
+                    <a:moveTo>
+                      <a:pt x="0" y="94831"/>
+                    </a:moveTo>
+                    <a:cubicBezTo>
+                      <a:pt x="0" y="42897"/>
+                      <a:pt x="158734" y="5723"/>
+                      <a:pt x="262647" y="797"/>
+                    </a:cubicBezTo>
+                    <a:cubicBezTo>
+                      <a:pt x="366560" y="-4129"/>
+                      <a:pt x="623481" y="13342"/>
+                      <a:pt x="623481" y="65276"/>
+                    </a:cubicBezTo>
+                    <a:cubicBezTo>
+                      <a:pt x="623481" y="117210"/>
+                      <a:pt x="366560" y="183939"/>
+                      <a:pt x="262647" y="188865"/>
+                    </a:cubicBezTo>
+                    <a:cubicBezTo>
+                      <a:pt x="158734" y="193791"/>
+                      <a:pt x="0" y="146765"/>
+                      <a:pt x="0" y="94831"/>
+                    </a:cubicBezTo>
+                    <a:close/>
+                  </a:path>
+                </a:pathLst>
+              </a:custGeom>
+              <a:solidFill>
+                <a:schemeClr val="accent6">
+                  <a:lumMod val="75000"/>
+                </a:schemeClr>
+              </a:solidFill>
+              <a:ln>
+                <a:solidFill>
+                  <a:schemeClr val="accent6">
+                    <a:lumMod val="75000"/>
+                  </a:schemeClr>
+                </a:solidFill>
+              </a:ln>
+            </p:spPr>
+            <p:style>
+              <a:lnRef idx="2">
+                <a:schemeClr val="accent6">
+                  <a:shade val="15000"/>
+                </a:schemeClr>
+              </a:lnRef>
+              <a:fillRef idx="1">
+                <a:schemeClr val="accent6"/>
+              </a:fillRef>
+              <a:effectRef idx="0">
+                <a:schemeClr val="accent6"/>
+              </a:effectRef>
+              <a:fontRef idx="minor">
+                <a:schemeClr val="lt1"/>
+              </a:fontRef>
+            </p:style>
+            <p:txBody>
+              <a:bodyPr rtlCol="0" anchor="ctr"/>
+              <a:lstStyle/>
+              <a:p>
+                <a:pPr algn="ctr"/>
+                <a:endParaRPr lang="en-NZ"/>
+              </a:p>
+            </p:txBody>
+          </p:sp>
+          <p:sp>
+            <p:nvSpPr>
+              <p:cNvPr id="47" name="Oval 15">
+                <a:extLst>
+                  <a:ext uri="{FF2B5EF4-FFF2-40B4-BE49-F238E27FC236}">
+                    <a16:creationId xmlns:a16="http://schemas.microsoft.com/office/drawing/2014/main" id="{6E3A296F-05C6-8F46-539F-94C0F890FDCF}"/>
+                  </a:ext>
+                </a:extLst>
+              </p:cNvPr>
+              <p:cNvSpPr/>
+              <p:nvPr/>
+            </p:nvSpPr>
+            <p:spPr>
+              <a:xfrm rot="14162025">
+                <a:off x="5581911" y="2324390"/>
+                <a:ext cx="367317" cy="70720"/>
+              </a:xfrm>
+              <a:custGeom>
+                <a:avLst/>
+                <a:gdLst>
+                  <a:gd name="csX0" fmla="*/ 0 w 525294"/>
+                  <a:gd name="csY0" fmla="*/ 94034 h 188068"/>
+                  <a:gd name="csX1" fmla="*/ 262647 w 525294"/>
+                  <a:gd name="csY1" fmla="*/ 0 h 188068"/>
+                  <a:gd name="csX2" fmla="*/ 525294 w 525294"/>
+                  <a:gd name="csY2" fmla="*/ 94034 h 188068"/>
+                  <a:gd name="csX3" fmla="*/ 262647 w 525294"/>
+                  <a:gd name="csY3" fmla="*/ 188068 h 188068"/>
+                  <a:gd name="csX4" fmla="*/ 0 w 525294"/>
+                  <a:gd name="csY4" fmla="*/ 94034 h 188068"/>
+                  <a:gd name="csX0" fmla="*/ 0 w 623481"/>
+                  <a:gd name="csY0" fmla="*/ 94831 h 189220"/>
+                  <a:gd name="csX1" fmla="*/ 262647 w 623481"/>
+                  <a:gd name="csY1" fmla="*/ 797 h 189220"/>
+                  <a:gd name="csX2" fmla="*/ 623481 w 623481"/>
+                  <a:gd name="csY2" fmla="*/ 65276 h 189220"/>
+                  <a:gd name="csX3" fmla="*/ 262647 w 623481"/>
+                  <a:gd name="csY3" fmla="*/ 188865 h 189220"/>
+                  <a:gd name="csX4" fmla="*/ 0 w 623481"/>
+                  <a:gd name="csY4" fmla="*/ 94831 h 189220"/>
+                </a:gdLst>
+                <a:ahLst/>
+                <a:cxnLst>
+                  <a:cxn ang="0">
+                    <a:pos x="csX0" y="csY0"/>
+                  </a:cxn>
+                  <a:cxn ang="0">
+                    <a:pos x="csX1" y="csY1"/>
+                  </a:cxn>
+                  <a:cxn ang="0">
+                    <a:pos x="csX2" y="csY2"/>
+                  </a:cxn>
+                  <a:cxn ang="0">
+                    <a:pos x="csX3" y="csY3"/>
+                  </a:cxn>
+                  <a:cxn ang="0">
+                    <a:pos x="csX4" y="csY4"/>
+                  </a:cxn>
+                </a:cxnLst>
+                <a:rect l="l" t="t" r="r" b="b"/>
+                <a:pathLst>
+                  <a:path w="623481" h="189220">
+                    <a:moveTo>
+                      <a:pt x="0" y="94831"/>
+                    </a:moveTo>
+                    <a:cubicBezTo>
+                      <a:pt x="0" y="42897"/>
+                      <a:pt x="158734" y="5723"/>
+                      <a:pt x="262647" y="797"/>
+                    </a:cubicBezTo>
+                    <a:cubicBezTo>
+                      <a:pt x="366560" y="-4129"/>
+                      <a:pt x="623481" y="13342"/>
+                      <a:pt x="623481" y="65276"/>
+                    </a:cubicBezTo>
+                    <a:cubicBezTo>
+                      <a:pt x="623481" y="117210"/>
+                      <a:pt x="366560" y="183939"/>
+                      <a:pt x="262647" y="188865"/>
+                    </a:cubicBezTo>
+                    <a:cubicBezTo>
+                      <a:pt x="158734" y="193791"/>
+                      <a:pt x="0" y="146765"/>
+                      <a:pt x="0" y="94831"/>
+                    </a:cubicBezTo>
+                    <a:close/>
+                  </a:path>
+                </a:pathLst>
+              </a:custGeom>
+              <a:solidFill>
+                <a:schemeClr val="accent6">
+                  <a:lumMod val="75000"/>
+                </a:schemeClr>
+              </a:solidFill>
+              <a:ln>
+                <a:solidFill>
+                  <a:schemeClr val="accent6">
+                    <a:lumMod val="75000"/>
+                  </a:schemeClr>
+                </a:solidFill>
+              </a:ln>
+            </p:spPr>
+            <p:style>
+              <a:lnRef idx="2">
+                <a:schemeClr val="accent6">
+                  <a:shade val="15000"/>
+                </a:schemeClr>
+              </a:lnRef>
+              <a:fillRef idx="1">
+                <a:schemeClr val="accent6"/>
+              </a:fillRef>
+              <a:effectRef idx="0">
+                <a:schemeClr val="accent6"/>
+              </a:effectRef>
+              <a:fontRef idx="minor">
+                <a:schemeClr val="lt1"/>
+              </a:fontRef>
+            </p:style>
+            <p:txBody>
+              <a:bodyPr rtlCol="0" anchor="ctr"/>
+              <a:lstStyle/>
+              <a:p>
+                <a:pPr algn="ctr"/>
+                <a:endParaRPr lang="en-NZ"/>
+              </a:p>
+            </p:txBody>
+          </p:sp>
+          <p:sp>
+            <p:nvSpPr>
+              <p:cNvPr id="48" name="Oval 15">
+                <a:extLst>
+                  <a:ext uri="{FF2B5EF4-FFF2-40B4-BE49-F238E27FC236}">
+                    <a16:creationId xmlns:a16="http://schemas.microsoft.com/office/drawing/2014/main" id="{3F0B0211-B378-78E4-AA21-DBEFB02A27D9}"/>
+                  </a:ext>
+                </a:extLst>
+              </p:cNvPr>
+              <p:cNvSpPr/>
+              <p:nvPr/>
+            </p:nvSpPr>
+            <p:spPr>
+              <a:xfrm rot="2313172" flipH="1">
+                <a:off x="5906204" y="3935761"/>
+                <a:ext cx="368562" cy="86250"/>
+              </a:xfrm>
+              <a:custGeom>
+                <a:avLst/>
+                <a:gdLst>
+                  <a:gd name="csX0" fmla="*/ 0 w 525294"/>
+                  <a:gd name="csY0" fmla="*/ 94034 h 188068"/>
+                  <a:gd name="csX1" fmla="*/ 262647 w 525294"/>
+                  <a:gd name="csY1" fmla="*/ 0 h 188068"/>
+                  <a:gd name="csX2" fmla="*/ 525294 w 525294"/>
+                  <a:gd name="csY2" fmla="*/ 94034 h 188068"/>
+                  <a:gd name="csX3" fmla="*/ 262647 w 525294"/>
+                  <a:gd name="csY3" fmla="*/ 188068 h 188068"/>
+                  <a:gd name="csX4" fmla="*/ 0 w 525294"/>
+                  <a:gd name="csY4" fmla="*/ 94034 h 188068"/>
+                  <a:gd name="csX0" fmla="*/ 0 w 623481"/>
+                  <a:gd name="csY0" fmla="*/ 94831 h 189220"/>
+                  <a:gd name="csX1" fmla="*/ 262647 w 623481"/>
+                  <a:gd name="csY1" fmla="*/ 797 h 189220"/>
+                  <a:gd name="csX2" fmla="*/ 623481 w 623481"/>
+                  <a:gd name="csY2" fmla="*/ 65276 h 189220"/>
+                  <a:gd name="csX3" fmla="*/ 262647 w 623481"/>
+                  <a:gd name="csY3" fmla="*/ 188865 h 189220"/>
+                  <a:gd name="csX4" fmla="*/ 0 w 623481"/>
+                  <a:gd name="csY4" fmla="*/ 94831 h 189220"/>
+                </a:gdLst>
+                <a:ahLst/>
+                <a:cxnLst>
+                  <a:cxn ang="0">
+                    <a:pos x="csX0" y="csY0"/>
+                  </a:cxn>
+                  <a:cxn ang="0">
+                    <a:pos x="csX1" y="csY1"/>
+                  </a:cxn>
+                  <a:cxn ang="0">
+                    <a:pos x="csX2" y="csY2"/>
+                  </a:cxn>
+                  <a:cxn ang="0">
+                    <a:pos x="csX3" y="csY3"/>
+                  </a:cxn>
+                  <a:cxn ang="0">
+                    <a:pos x="csX4" y="csY4"/>
+                  </a:cxn>
+                </a:cxnLst>
+                <a:rect l="l" t="t" r="r" b="b"/>
+                <a:pathLst>
+                  <a:path w="623481" h="189220">
+                    <a:moveTo>
+                      <a:pt x="0" y="94831"/>
+                    </a:moveTo>
+                    <a:cubicBezTo>
+                      <a:pt x="0" y="42897"/>
+                      <a:pt x="158734" y="5723"/>
+                      <a:pt x="262647" y="797"/>
+                    </a:cubicBezTo>
+                    <a:cubicBezTo>
+                      <a:pt x="366560" y="-4129"/>
+                      <a:pt x="623481" y="13342"/>
+                      <a:pt x="623481" y="65276"/>
+                    </a:cubicBezTo>
+                    <a:cubicBezTo>
+                      <a:pt x="623481" y="117210"/>
+                      <a:pt x="366560" y="183939"/>
+                      <a:pt x="262647" y="188865"/>
+                    </a:cubicBezTo>
+                    <a:cubicBezTo>
+                      <a:pt x="158734" y="193791"/>
+                      <a:pt x="0" y="146765"/>
+                      <a:pt x="0" y="94831"/>
+                    </a:cubicBezTo>
+                    <a:close/>
+                  </a:path>
+                </a:pathLst>
+              </a:custGeom>
+              <a:solidFill>
+                <a:schemeClr val="accent6">
+                  <a:lumMod val="75000"/>
+                </a:schemeClr>
+              </a:solidFill>
+              <a:ln>
+                <a:solidFill>
+                  <a:schemeClr val="accent6">
+                    <a:lumMod val="75000"/>
+                  </a:schemeClr>
+                </a:solidFill>
+              </a:ln>
+            </p:spPr>
+            <p:style>
+              <a:lnRef idx="2">
+                <a:schemeClr val="accent6">
+                  <a:shade val="15000"/>
+                </a:schemeClr>
+              </a:lnRef>
+              <a:fillRef idx="1">
+                <a:schemeClr val="accent6"/>
+              </a:fillRef>
+              <a:effectRef idx="0">
+                <a:schemeClr val="accent6"/>
+              </a:effectRef>
+              <a:fontRef idx="minor">
+                <a:schemeClr val="lt1"/>
+              </a:fontRef>
+            </p:style>
+            <p:txBody>
+              <a:bodyPr rtlCol="0" anchor="ctr"/>
+              <a:lstStyle/>
+              <a:p>
+                <a:pPr algn="ctr"/>
+                <a:endParaRPr lang="en-NZ"/>
+              </a:p>
+            </p:txBody>
+          </p:sp>
+          <p:sp>
+            <p:nvSpPr>
+              <p:cNvPr id="49" name="Oval 15">
+                <a:extLst>
+                  <a:ext uri="{FF2B5EF4-FFF2-40B4-BE49-F238E27FC236}">
+                    <a16:creationId xmlns:a16="http://schemas.microsoft.com/office/drawing/2014/main" id="{3C367B3E-4DDC-8E0B-D8A5-178B65B3830A}"/>
+                  </a:ext>
+                </a:extLst>
+              </p:cNvPr>
+              <p:cNvSpPr/>
+              <p:nvPr/>
+            </p:nvSpPr>
+            <p:spPr>
+              <a:xfrm rot="2313172" flipH="1">
+                <a:off x="5988751" y="3323709"/>
+                <a:ext cx="291208" cy="92887"/>
+              </a:xfrm>
+              <a:custGeom>
+                <a:avLst/>
+                <a:gdLst>
+                  <a:gd name="csX0" fmla="*/ 0 w 525294"/>
+                  <a:gd name="csY0" fmla="*/ 94034 h 188068"/>
+                  <a:gd name="csX1" fmla="*/ 262647 w 525294"/>
+                  <a:gd name="csY1" fmla="*/ 0 h 188068"/>
+                  <a:gd name="csX2" fmla="*/ 525294 w 525294"/>
+                  <a:gd name="csY2" fmla="*/ 94034 h 188068"/>
+                  <a:gd name="csX3" fmla="*/ 262647 w 525294"/>
+                  <a:gd name="csY3" fmla="*/ 188068 h 188068"/>
+                  <a:gd name="csX4" fmla="*/ 0 w 525294"/>
+                  <a:gd name="csY4" fmla="*/ 94034 h 188068"/>
+                  <a:gd name="csX0" fmla="*/ 0 w 623481"/>
+                  <a:gd name="csY0" fmla="*/ 94831 h 189220"/>
+                  <a:gd name="csX1" fmla="*/ 262647 w 623481"/>
+                  <a:gd name="csY1" fmla="*/ 797 h 189220"/>
+                  <a:gd name="csX2" fmla="*/ 623481 w 623481"/>
+                  <a:gd name="csY2" fmla="*/ 65276 h 189220"/>
+                  <a:gd name="csX3" fmla="*/ 262647 w 623481"/>
+                  <a:gd name="csY3" fmla="*/ 188865 h 189220"/>
+                  <a:gd name="csX4" fmla="*/ 0 w 623481"/>
+                  <a:gd name="csY4" fmla="*/ 94831 h 189220"/>
+                </a:gdLst>
+                <a:ahLst/>
+                <a:cxnLst>
+                  <a:cxn ang="0">
+                    <a:pos x="csX0" y="csY0"/>
+                  </a:cxn>
+                  <a:cxn ang="0">
+                    <a:pos x="csX1" y="csY1"/>
+                  </a:cxn>
+                  <a:cxn ang="0">
+                    <a:pos x="csX2" y="csY2"/>
+                  </a:cxn>
+                  <a:cxn ang="0">
+                    <a:pos x="csX3" y="csY3"/>
+                  </a:cxn>
+                  <a:cxn ang="0">
+                    <a:pos x="csX4" y="csY4"/>
+                  </a:cxn>
+                </a:cxnLst>
+                <a:rect l="l" t="t" r="r" b="b"/>
+                <a:pathLst>
+                  <a:path w="623481" h="189220">
+                    <a:moveTo>
+                      <a:pt x="0" y="94831"/>
+                    </a:moveTo>
+                    <a:cubicBezTo>
+                      <a:pt x="0" y="42897"/>
+                      <a:pt x="158734" y="5723"/>
+                      <a:pt x="262647" y="797"/>
+                    </a:cubicBezTo>
+                    <a:cubicBezTo>
+                      <a:pt x="366560" y="-4129"/>
+                      <a:pt x="623481" y="13342"/>
+                      <a:pt x="623481" y="65276"/>
+                    </a:cubicBezTo>
+                    <a:cubicBezTo>
+                      <a:pt x="623481" y="117210"/>
+                      <a:pt x="366560" y="183939"/>
+                      <a:pt x="262647" y="188865"/>
+                    </a:cubicBezTo>
+                    <a:cubicBezTo>
+                      <a:pt x="158734" y="193791"/>
+                      <a:pt x="0" y="146765"/>
+                      <a:pt x="0" y="94831"/>
+                    </a:cubicBezTo>
+                    <a:close/>
+                  </a:path>
+                </a:pathLst>
+              </a:custGeom>
+              <a:solidFill>
+                <a:schemeClr val="accent6">
+                  <a:lumMod val="75000"/>
+                </a:schemeClr>
+              </a:solidFill>
+              <a:ln>
+                <a:solidFill>
+                  <a:schemeClr val="accent6">
+                    <a:lumMod val="75000"/>
+                  </a:schemeClr>
+                </a:solidFill>
+              </a:ln>
+            </p:spPr>
+            <p:style>
+              <a:lnRef idx="2">
+                <a:schemeClr val="accent6">
+                  <a:shade val="15000"/>
+                </a:schemeClr>
+              </a:lnRef>
+              <a:fillRef idx="1">
+                <a:schemeClr val="accent6"/>
+              </a:fillRef>
+              <a:effectRef idx="0">
+                <a:schemeClr val="accent6"/>
+              </a:effectRef>
+              <a:fontRef idx="minor">
+                <a:schemeClr val="lt1"/>
+              </a:fontRef>
+            </p:style>
+            <p:txBody>
+              <a:bodyPr rtlCol="0" anchor="ctr"/>
+              <a:lstStyle/>
+              <a:p>
+                <a:pPr algn="ctr"/>
+                <a:endParaRPr lang="en-NZ"/>
+              </a:p>
+            </p:txBody>
+          </p:sp>
+          <p:sp>
+            <p:nvSpPr>
+              <p:cNvPr id="50" name="Oval 15">
+                <a:extLst>
+                  <a:ext uri="{FF2B5EF4-FFF2-40B4-BE49-F238E27FC236}">
+                    <a16:creationId xmlns:a16="http://schemas.microsoft.com/office/drawing/2014/main" id="{B7262E78-04A3-D083-F6EA-59AA24828B8F}"/>
+                  </a:ext>
+                </a:extLst>
+              </p:cNvPr>
+              <p:cNvSpPr/>
+              <p:nvPr/>
+            </p:nvSpPr>
+            <p:spPr>
+              <a:xfrm rot="17214883">
+                <a:off x="6115209" y="3106268"/>
+                <a:ext cx="428121" cy="76467"/>
+              </a:xfrm>
+              <a:custGeom>
+                <a:avLst/>
+                <a:gdLst>
+                  <a:gd name="csX0" fmla="*/ 0 w 525294"/>
+                  <a:gd name="csY0" fmla="*/ 94034 h 188068"/>
+                  <a:gd name="csX1" fmla="*/ 262647 w 525294"/>
+                  <a:gd name="csY1" fmla="*/ 0 h 188068"/>
+                  <a:gd name="csX2" fmla="*/ 525294 w 525294"/>
+                  <a:gd name="csY2" fmla="*/ 94034 h 188068"/>
+                  <a:gd name="csX3" fmla="*/ 262647 w 525294"/>
+                  <a:gd name="csY3" fmla="*/ 188068 h 188068"/>
+                  <a:gd name="csX4" fmla="*/ 0 w 525294"/>
+                  <a:gd name="csY4" fmla="*/ 94034 h 188068"/>
+                  <a:gd name="csX0" fmla="*/ 0 w 623481"/>
+                  <a:gd name="csY0" fmla="*/ 94831 h 189220"/>
+                  <a:gd name="csX1" fmla="*/ 262647 w 623481"/>
+                  <a:gd name="csY1" fmla="*/ 797 h 189220"/>
+                  <a:gd name="csX2" fmla="*/ 623481 w 623481"/>
+                  <a:gd name="csY2" fmla="*/ 65276 h 189220"/>
+                  <a:gd name="csX3" fmla="*/ 262647 w 623481"/>
+                  <a:gd name="csY3" fmla="*/ 188865 h 189220"/>
+                  <a:gd name="csX4" fmla="*/ 0 w 623481"/>
+                  <a:gd name="csY4" fmla="*/ 94831 h 189220"/>
+                </a:gdLst>
+                <a:ahLst/>
+                <a:cxnLst>
+                  <a:cxn ang="0">
+                    <a:pos x="csX0" y="csY0"/>
+                  </a:cxn>
+                  <a:cxn ang="0">
+                    <a:pos x="csX1" y="csY1"/>
+                  </a:cxn>
+                  <a:cxn ang="0">
+                    <a:pos x="csX2" y="csY2"/>
+                  </a:cxn>
+                  <a:cxn ang="0">
+                    <a:pos x="csX3" y="csY3"/>
+                  </a:cxn>
+                  <a:cxn ang="0">
+                    <a:pos x="csX4" y="csY4"/>
+                  </a:cxn>
+                </a:cxnLst>
+                <a:rect l="l" t="t" r="r" b="b"/>
+                <a:pathLst>
+                  <a:path w="623481" h="189220">
+                    <a:moveTo>
+                      <a:pt x="0" y="94831"/>
+                    </a:moveTo>
+                    <a:cubicBezTo>
+                      <a:pt x="0" y="42897"/>
+                      <a:pt x="158734" y="5723"/>
+                      <a:pt x="262647" y="797"/>
+                    </a:cubicBezTo>
+                    <a:cubicBezTo>
+                      <a:pt x="366560" y="-4129"/>
+                      <a:pt x="623481" y="13342"/>
+                      <a:pt x="623481" y="65276"/>
+                    </a:cubicBezTo>
+                    <a:cubicBezTo>
+                      <a:pt x="623481" y="117210"/>
+                      <a:pt x="366560" y="183939"/>
+                      <a:pt x="262647" y="188865"/>
+                    </a:cubicBezTo>
+                    <a:cubicBezTo>
+                      <a:pt x="158734" y="193791"/>
+                      <a:pt x="0" y="146765"/>
+                      <a:pt x="0" y="94831"/>
+                    </a:cubicBezTo>
+                    <a:close/>
+                  </a:path>
+                </a:pathLst>
+              </a:custGeom>
+              <a:solidFill>
+                <a:schemeClr val="accent6">
+                  <a:lumMod val="75000"/>
+                </a:schemeClr>
+              </a:solidFill>
+              <a:ln>
+                <a:solidFill>
+                  <a:schemeClr val="accent6">
+                    <a:lumMod val="75000"/>
+                  </a:schemeClr>
+                </a:solidFill>
+              </a:ln>
+            </p:spPr>
+            <p:style>
+              <a:lnRef idx="2">
+                <a:schemeClr val="accent6">
+                  <a:shade val="15000"/>
+                </a:schemeClr>
+              </a:lnRef>
+              <a:fillRef idx="1">
+                <a:schemeClr val="accent6"/>
+              </a:fillRef>
+              <a:effectRef idx="0">
+                <a:schemeClr val="accent6"/>
+              </a:effectRef>
+              <a:fontRef idx="minor">
+                <a:schemeClr val="lt1"/>
+              </a:fontRef>
+            </p:style>
+            <p:txBody>
+              <a:bodyPr rtlCol="0" anchor="ctr"/>
+              <a:lstStyle/>
+              <a:p>
+                <a:pPr algn="ctr"/>
+                <a:endParaRPr lang="en-NZ"/>
+              </a:p>
+            </p:txBody>
+          </p:sp>
+          <p:sp>
+            <p:nvSpPr>
+              <p:cNvPr id="51" name="Freeform: Shape 50">
+                <a:extLst>
+                  <a:ext uri="{FF2B5EF4-FFF2-40B4-BE49-F238E27FC236}">
+                    <a16:creationId xmlns:a16="http://schemas.microsoft.com/office/drawing/2014/main" id="{7B9C2AAA-F11A-BDC2-FF63-3682DE58181C}"/>
+                  </a:ext>
+                </a:extLst>
+              </p:cNvPr>
+              <p:cNvSpPr/>
+              <p:nvPr/>
+            </p:nvSpPr>
+            <p:spPr>
+              <a:xfrm>
+                <a:off x="5799213" y="2487912"/>
+                <a:ext cx="477954" cy="2425430"/>
+              </a:xfrm>
+              <a:custGeom>
+                <a:avLst/>
+                <a:gdLst>
+                  <a:gd name="csX0" fmla="*/ 32425 w 477954"/>
+                  <a:gd name="csY0" fmla="*/ 0 h 2425430"/>
+                  <a:gd name="csX1" fmla="*/ 239949 w 477954"/>
+                  <a:gd name="csY1" fmla="*/ 272374 h 2425430"/>
+                  <a:gd name="csX2" fmla="*/ 453957 w 477954"/>
+                  <a:gd name="csY2" fmla="*/ 791183 h 2425430"/>
+                  <a:gd name="csX3" fmla="*/ 453957 w 477954"/>
+                  <a:gd name="csY3" fmla="*/ 1543455 h 2425430"/>
+                  <a:gd name="csX4" fmla="*/ 285344 w 477954"/>
+                  <a:gd name="csY4" fmla="*/ 2049293 h 2425430"/>
+                  <a:gd name="csX5" fmla="*/ 0 w 477954"/>
+                  <a:gd name="csY5" fmla="*/ 2425430 h 2425430"/>
+                  <a:gd name="csX6" fmla="*/ 0 w 477954"/>
+                  <a:gd name="csY6" fmla="*/ 2425430 h 2425430"/>
+                </a:gdLst>
+                <a:ahLst/>
+                <a:cxnLst>
+                  <a:cxn ang="0">
+                    <a:pos x="csX0" y="csY0"/>
+                  </a:cxn>
+                  <a:cxn ang="0">
+                    <a:pos x="csX1" y="csY1"/>
+                  </a:cxn>
+                  <a:cxn ang="0">
+                    <a:pos x="csX2" y="csY2"/>
+                  </a:cxn>
+                  <a:cxn ang="0">
+                    <a:pos x="csX3" y="csY3"/>
+                  </a:cxn>
+                  <a:cxn ang="0">
+                    <a:pos x="csX4" y="csY4"/>
+                  </a:cxn>
+                  <a:cxn ang="0">
+                    <a:pos x="csX5" y="csY5"/>
+                  </a:cxn>
+                  <a:cxn ang="0">
+                    <a:pos x="csX6" y="csY6"/>
+                  </a:cxn>
+                </a:cxnLst>
+                <a:rect l="l" t="t" r="r" b="b"/>
+                <a:pathLst>
+                  <a:path w="477954" h="2425430">
+                    <a:moveTo>
+                      <a:pt x="32425" y="0"/>
+                    </a:moveTo>
+                    <a:cubicBezTo>
+                      <a:pt x="101059" y="70255"/>
+                      <a:pt x="169694" y="140510"/>
+                      <a:pt x="239949" y="272374"/>
+                    </a:cubicBezTo>
+                    <a:cubicBezTo>
+                      <a:pt x="310204" y="404238"/>
+                      <a:pt x="418289" y="579336"/>
+                      <a:pt x="453957" y="791183"/>
+                    </a:cubicBezTo>
+                    <a:cubicBezTo>
+                      <a:pt x="489625" y="1003030"/>
+                      <a:pt x="482059" y="1333770"/>
+                      <a:pt x="453957" y="1543455"/>
+                    </a:cubicBezTo>
+                    <a:cubicBezTo>
+                      <a:pt x="425855" y="1753140"/>
+                      <a:pt x="361003" y="1902297"/>
+                      <a:pt x="285344" y="2049293"/>
+                    </a:cubicBezTo>
+                    <a:cubicBezTo>
+                      <a:pt x="209685" y="2196289"/>
+                      <a:pt x="0" y="2425430"/>
+                      <a:pt x="0" y="2425430"/>
+                    </a:cubicBezTo>
+                    <a:lnTo>
+                      <a:pt x="0" y="2425430"/>
+                    </a:lnTo>
+                  </a:path>
+                </a:pathLst>
+              </a:custGeom>
+              <a:noFill/>
+            </p:spPr>
+            <p:style>
+              <a:lnRef idx="2">
+                <a:schemeClr val="accent1">
+                  <a:shade val="15000"/>
+                </a:schemeClr>
+              </a:lnRef>
+              <a:fillRef idx="1">
+                <a:schemeClr val="accent1"/>
+              </a:fillRef>
+              <a:effectRef idx="0">
+                <a:schemeClr val="accent1"/>
+              </a:effectRef>
+              <a:fontRef idx="minor">
+                <a:schemeClr val="lt1"/>
+              </a:fontRef>
+            </p:style>
+            <p:txBody>
+              <a:bodyPr rtlCol="0" anchor="ctr"/>
+              <a:lstStyle/>
+              <a:p>
+                <a:pPr algn="ctr"/>
+                <a:endParaRPr lang="en-NZ"/>
+              </a:p>
+            </p:txBody>
+          </p:sp>
+          <p:sp>
+            <p:nvSpPr>
+              <p:cNvPr id="52" name="Oval 15">
+                <a:extLst>
+                  <a:ext uri="{FF2B5EF4-FFF2-40B4-BE49-F238E27FC236}">
+                    <a16:creationId xmlns:a16="http://schemas.microsoft.com/office/drawing/2014/main" id="{3FB89EA5-4934-BEED-5695-259919F057F0}"/>
+                  </a:ext>
+                </a:extLst>
+              </p:cNvPr>
+              <p:cNvSpPr/>
+              <p:nvPr/>
+            </p:nvSpPr>
+            <p:spPr>
+              <a:xfrm rot="1297676" flipH="1" flipV="1">
+                <a:off x="5798965" y="2887846"/>
+                <a:ext cx="336104" cy="74353"/>
+              </a:xfrm>
+              <a:custGeom>
+                <a:avLst/>
+                <a:gdLst>
+                  <a:gd name="csX0" fmla="*/ 0 w 525294"/>
+                  <a:gd name="csY0" fmla="*/ 94034 h 188068"/>
+                  <a:gd name="csX1" fmla="*/ 262647 w 525294"/>
+                  <a:gd name="csY1" fmla="*/ 0 h 188068"/>
+                  <a:gd name="csX2" fmla="*/ 525294 w 525294"/>
+                  <a:gd name="csY2" fmla="*/ 94034 h 188068"/>
+                  <a:gd name="csX3" fmla="*/ 262647 w 525294"/>
+                  <a:gd name="csY3" fmla="*/ 188068 h 188068"/>
+                  <a:gd name="csX4" fmla="*/ 0 w 525294"/>
+                  <a:gd name="csY4" fmla="*/ 94034 h 188068"/>
+                  <a:gd name="csX0" fmla="*/ 0 w 623481"/>
+                  <a:gd name="csY0" fmla="*/ 94831 h 189220"/>
+                  <a:gd name="csX1" fmla="*/ 262647 w 623481"/>
+                  <a:gd name="csY1" fmla="*/ 797 h 189220"/>
+                  <a:gd name="csX2" fmla="*/ 623481 w 623481"/>
+                  <a:gd name="csY2" fmla="*/ 65276 h 189220"/>
+                  <a:gd name="csX3" fmla="*/ 262647 w 623481"/>
+                  <a:gd name="csY3" fmla="*/ 188865 h 189220"/>
+                  <a:gd name="csX4" fmla="*/ 0 w 623481"/>
+                  <a:gd name="csY4" fmla="*/ 94831 h 189220"/>
+                </a:gdLst>
+                <a:ahLst/>
+                <a:cxnLst>
+                  <a:cxn ang="0">
+                    <a:pos x="csX0" y="csY0"/>
+                  </a:cxn>
+                  <a:cxn ang="0">
+                    <a:pos x="csX1" y="csY1"/>
+                  </a:cxn>
+                  <a:cxn ang="0">
+                    <a:pos x="csX2" y="csY2"/>
+                  </a:cxn>
+                  <a:cxn ang="0">
+                    <a:pos x="csX3" y="csY3"/>
+                  </a:cxn>
+                  <a:cxn ang="0">
+                    <a:pos x="csX4" y="csY4"/>
+                  </a:cxn>
+                </a:cxnLst>
+                <a:rect l="l" t="t" r="r" b="b"/>
+                <a:pathLst>
+                  <a:path w="623481" h="189220">
+                    <a:moveTo>
+                      <a:pt x="0" y="94831"/>
+                    </a:moveTo>
+                    <a:cubicBezTo>
+                      <a:pt x="0" y="42897"/>
+                      <a:pt x="158734" y="5723"/>
+                      <a:pt x="262647" y="797"/>
+                    </a:cubicBezTo>
+                    <a:cubicBezTo>
+                      <a:pt x="366560" y="-4129"/>
+                      <a:pt x="623481" y="13342"/>
+                      <a:pt x="623481" y="65276"/>
+                    </a:cubicBezTo>
+                    <a:cubicBezTo>
+                      <a:pt x="623481" y="117210"/>
+                      <a:pt x="366560" y="183939"/>
+                      <a:pt x="262647" y="188865"/>
+                    </a:cubicBezTo>
+                    <a:cubicBezTo>
+                      <a:pt x="158734" y="193791"/>
+                      <a:pt x="0" y="146765"/>
+                      <a:pt x="0" y="94831"/>
+                    </a:cubicBezTo>
+                    <a:close/>
+                  </a:path>
+                </a:pathLst>
+              </a:custGeom>
+              <a:solidFill>
+                <a:schemeClr val="accent6">
+                  <a:lumMod val="75000"/>
+                </a:schemeClr>
+              </a:solidFill>
+              <a:ln>
+                <a:solidFill>
+                  <a:schemeClr val="accent6">
+                    <a:lumMod val="75000"/>
+                  </a:schemeClr>
+                </a:solidFill>
+              </a:ln>
+            </p:spPr>
+            <p:style>
+              <a:lnRef idx="2">
+                <a:schemeClr val="accent6">
+                  <a:shade val="15000"/>
+                </a:schemeClr>
+              </a:lnRef>
+              <a:fillRef idx="1">
+                <a:schemeClr val="accent6"/>
+              </a:fillRef>
+              <a:effectRef idx="0">
+                <a:schemeClr val="accent6"/>
+              </a:effectRef>
+              <a:fontRef idx="minor">
+                <a:schemeClr val="lt1"/>
+              </a:fontRef>
+            </p:style>
+            <p:txBody>
+              <a:bodyPr rtlCol="0" anchor="ctr"/>
+              <a:lstStyle/>
+              <a:p>
+                <a:pPr algn="ctr"/>
+                <a:endParaRPr lang="en-NZ"/>
+              </a:p>
+            </p:txBody>
+          </p:sp>
+          <p:sp>
+            <p:nvSpPr>
+              <p:cNvPr id="53" name="Oval 15">
+                <a:extLst>
+                  <a:ext uri="{FF2B5EF4-FFF2-40B4-BE49-F238E27FC236}">
+                    <a16:creationId xmlns:a16="http://schemas.microsoft.com/office/drawing/2014/main" id="{9B0F7939-8C3C-1B47-56E5-FCD2E7320C1B}"/>
+                  </a:ext>
+                </a:extLst>
+              </p:cNvPr>
+              <p:cNvSpPr/>
+              <p:nvPr/>
+            </p:nvSpPr>
+            <p:spPr>
+              <a:xfrm rot="2313172" flipH="1">
+                <a:off x="5931238" y="3687580"/>
+                <a:ext cx="368562" cy="86250"/>
+              </a:xfrm>
+              <a:custGeom>
+                <a:avLst/>
+                <a:gdLst>
+                  <a:gd name="csX0" fmla="*/ 0 w 525294"/>
+                  <a:gd name="csY0" fmla="*/ 94034 h 188068"/>
+                  <a:gd name="csX1" fmla="*/ 262647 w 525294"/>
+                  <a:gd name="csY1" fmla="*/ 0 h 188068"/>
+                  <a:gd name="csX2" fmla="*/ 525294 w 525294"/>
+                  <a:gd name="csY2" fmla="*/ 94034 h 188068"/>
+                  <a:gd name="csX3" fmla="*/ 262647 w 525294"/>
+                  <a:gd name="csY3" fmla="*/ 188068 h 188068"/>
+                  <a:gd name="csX4" fmla="*/ 0 w 525294"/>
+                  <a:gd name="csY4" fmla="*/ 94034 h 188068"/>
+                  <a:gd name="csX0" fmla="*/ 0 w 623481"/>
+                  <a:gd name="csY0" fmla="*/ 94831 h 189220"/>
+                  <a:gd name="csX1" fmla="*/ 262647 w 623481"/>
+                  <a:gd name="csY1" fmla="*/ 797 h 189220"/>
+                  <a:gd name="csX2" fmla="*/ 623481 w 623481"/>
+                  <a:gd name="csY2" fmla="*/ 65276 h 189220"/>
+                  <a:gd name="csX3" fmla="*/ 262647 w 623481"/>
+                  <a:gd name="csY3" fmla="*/ 188865 h 189220"/>
+                  <a:gd name="csX4" fmla="*/ 0 w 623481"/>
+                  <a:gd name="csY4" fmla="*/ 94831 h 189220"/>
+                </a:gdLst>
+                <a:ahLst/>
+                <a:cxnLst>
+                  <a:cxn ang="0">
+                    <a:pos x="csX0" y="csY0"/>
+                  </a:cxn>
+                  <a:cxn ang="0">
+                    <a:pos x="csX1" y="csY1"/>
+                  </a:cxn>
+                  <a:cxn ang="0">
+                    <a:pos x="csX2" y="csY2"/>
+                  </a:cxn>
+                  <a:cxn ang="0">
+                    <a:pos x="csX3" y="csY3"/>
+                  </a:cxn>
+                  <a:cxn ang="0">
+                    <a:pos x="csX4" y="csY4"/>
+                  </a:cxn>
+                </a:cxnLst>
+                <a:rect l="l" t="t" r="r" b="b"/>
+                <a:pathLst>
+                  <a:path w="623481" h="189220">
+                    <a:moveTo>
+                      <a:pt x="0" y="94831"/>
+                    </a:moveTo>
+                    <a:cubicBezTo>
+                      <a:pt x="0" y="42897"/>
+                      <a:pt x="158734" y="5723"/>
+                      <a:pt x="262647" y="797"/>
+                    </a:cubicBezTo>
+                    <a:cubicBezTo>
+                      <a:pt x="366560" y="-4129"/>
+                      <a:pt x="623481" y="13342"/>
+                      <a:pt x="623481" y="65276"/>
+                    </a:cubicBezTo>
+                    <a:cubicBezTo>
+                      <a:pt x="623481" y="117210"/>
+                      <a:pt x="366560" y="183939"/>
+                      <a:pt x="262647" y="188865"/>
+                    </a:cubicBezTo>
+                    <a:cubicBezTo>
+                      <a:pt x="158734" y="193791"/>
+                      <a:pt x="0" y="146765"/>
+                      <a:pt x="0" y="94831"/>
+                    </a:cubicBezTo>
+                    <a:close/>
+                  </a:path>
+                </a:pathLst>
+              </a:custGeom>
+              <a:solidFill>
+                <a:schemeClr val="accent6">
+                  <a:lumMod val="75000"/>
+                </a:schemeClr>
+              </a:solidFill>
+              <a:ln>
+                <a:solidFill>
+                  <a:schemeClr val="accent6">
+                    <a:lumMod val="75000"/>
+                  </a:schemeClr>
+                </a:solidFill>
+              </a:ln>
+            </p:spPr>
+            <p:style>
+              <a:lnRef idx="2">
+                <a:schemeClr val="accent6">
+                  <a:shade val="15000"/>
+                </a:schemeClr>
+              </a:lnRef>
+              <a:fillRef idx="1">
+                <a:schemeClr val="accent6"/>
+              </a:fillRef>
+              <a:effectRef idx="0">
+                <a:schemeClr val="accent6"/>
+              </a:effectRef>
+              <a:fontRef idx="minor">
+                <a:schemeClr val="lt1"/>
+              </a:fontRef>
+            </p:style>
+            <p:txBody>
+              <a:bodyPr rtlCol="0" anchor="ctr"/>
+              <a:lstStyle/>
+              <a:p>
+                <a:pPr algn="ctr"/>
+                <a:endParaRPr lang="en-NZ"/>
+              </a:p>
+            </p:txBody>
+          </p:sp>
+          <p:sp>
+            <p:nvSpPr>
+              <p:cNvPr id="54" name="Oval 15">
+                <a:extLst>
+                  <a:ext uri="{FF2B5EF4-FFF2-40B4-BE49-F238E27FC236}">
+                    <a16:creationId xmlns:a16="http://schemas.microsoft.com/office/drawing/2014/main" id="{FF8475F1-258E-3369-589F-52CAC3091364}"/>
+                  </a:ext>
+                </a:extLst>
+              </p:cNvPr>
+              <p:cNvSpPr/>
+              <p:nvPr/>
+            </p:nvSpPr>
+            <p:spPr>
+              <a:xfrm rot="16599564">
+                <a:off x="5800619" y="2388447"/>
+                <a:ext cx="384004" cy="76570"/>
+              </a:xfrm>
+              <a:custGeom>
+                <a:avLst/>
+                <a:gdLst>
+                  <a:gd name="csX0" fmla="*/ 0 w 525294"/>
+                  <a:gd name="csY0" fmla="*/ 94034 h 188068"/>
+                  <a:gd name="csX1" fmla="*/ 262647 w 525294"/>
+                  <a:gd name="csY1" fmla="*/ 0 h 188068"/>
+                  <a:gd name="csX2" fmla="*/ 525294 w 525294"/>
+                  <a:gd name="csY2" fmla="*/ 94034 h 188068"/>
+                  <a:gd name="csX3" fmla="*/ 262647 w 525294"/>
+                  <a:gd name="csY3" fmla="*/ 188068 h 188068"/>
+                  <a:gd name="csX4" fmla="*/ 0 w 525294"/>
+                  <a:gd name="csY4" fmla="*/ 94034 h 188068"/>
+                  <a:gd name="csX0" fmla="*/ 0 w 623481"/>
+                  <a:gd name="csY0" fmla="*/ 94831 h 189220"/>
+                  <a:gd name="csX1" fmla="*/ 262647 w 623481"/>
+                  <a:gd name="csY1" fmla="*/ 797 h 189220"/>
+                  <a:gd name="csX2" fmla="*/ 623481 w 623481"/>
+                  <a:gd name="csY2" fmla="*/ 65276 h 189220"/>
+                  <a:gd name="csX3" fmla="*/ 262647 w 623481"/>
+                  <a:gd name="csY3" fmla="*/ 188865 h 189220"/>
+                  <a:gd name="csX4" fmla="*/ 0 w 623481"/>
+                  <a:gd name="csY4" fmla="*/ 94831 h 189220"/>
+                </a:gdLst>
+                <a:ahLst/>
+                <a:cxnLst>
+                  <a:cxn ang="0">
+                    <a:pos x="csX0" y="csY0"/>
+                  </a:cxn>
+                  <a:cxn ang="0">
+                    <a:pos x="csX1" y="csY1"/>
+                  </a:cxn>
+                  <a:cxn ang="0">
+                    <a:pos x="csX2" y="csY2"/>
+                  </a:cxn>
+                  <a:cxn ang="0">
+                    <a:pos x="csX3" y="csY3"/>
+                  </a:cxn>
+                  <a:cxn ang="0">
+                    <a:pos x="csX4" y="csY4"/>
+                  </a:cxn>
+                </a:cxnLst>
+                <a:rect l="l" t="t" r="r" b="b"/>
+                <a:pathLst>
+                  <a:path w="623481" h="189220">
+                    <a:moveTo>
+                      <a:pt x="0" y="94831"/>
+                    </a:moveTo>
+                    <a:cubicBezTo>
+                      <a:pt x="0" y="42897"/>
+                      <a:pt x="158734" y="5723"/>
+                      <a:pt x="262647" y="797"/>
+                    </a:cubicBezTo>
+                    <a:cubicBezTo>
+                      <a:pt x="366560" y="-4129"/>
+                      <a:pt x="623481" y="13342"/>
+                      <a:pt x="623481" y="65276"/>
+                    </a:cubicBezTo>
+                    <a:cubicBezTo>
+                      <a:pt x="623481" y="117210"/>
+                      <a:pt x="366560" y="183939"/>
+                      <a:pt x="262647" y="188865"/>
+                    </a:cubicBezTo>
+                    <a:cubicBezTo>
+                      <a:pt x="158734" y="193791"/>
+                      <a:pt x="0" y="146765"/>
+                      <a:pt x="0" y="94831"/>
+                    </a:cubicBezTo>
+                    <a:close/>
+                  </a:path>
+                </a:pathLst>
+              </a:custGeom>
+              <a:solidFill>
+                <a:schemeClr val="accent6">
+                  <a:lumMod val="75000"/>
+                </a:schemeClr>
+              </a:solidFill>
+              <a:ln>
+                <a:solidFill>
+                  <a:schemeClr val="accent6">
+                    <a:lumMod val="75000"/>
+                  </a:schemeClr>
+                </a:solidFill>
+              </a:ln>
+            </p:spPr>
+            <p:style>
+              <a:lnRef idx="2">
+                <a:schemeClr val="accent6">
+                  <a:shade val="15000"/>
+                </a:schemeClr>
+              </a:lnRef>
+              <a:fillRef idx="1">
+                <a:schemeClr val="accent6"/>
+              </a:fillRef>
+              <a:effectRef idx="0">
+                <a:schemeClr val="accent6"/>
+              </a:effectRef>
+              <a:fontRef idx="minor">
+                <a:schemeClr val="lt1"/>
+              </a:fontRef>
+            </p:style>
+            <p:txBody>
+              <a:bodyPr rtlCol="0" anchor="ctr"/>
+              <a:lstStyle/>
+              <a:p>
+                <a:pPr algn="ctr"/>
+                <a:endParaRPr lang="en-NZ"/>
+              </a:p>
+            </p:txBody>
+          </p:sp>
+          <p:sp>
+            <p:nvSpPr>
+              <p:cNvPr id="55" name="Oval 15">
+                <a:extLst>
+                  <a:ext uri="{FF2B5EF4-FFF2-40B4-BE49-F238E27FC236}">
+                    <a16:creationId xmlns:a16="http://schemas.microsoft.com/office/drawing/2014/main" id="{584BD3D6-B213-B8EC-F585-1AA9AFDF1D1D}"/>
+                  </a:ext>
+                </a:extLst>
+              </p:cNvPr>
+              <p:cNvSpPr/>
+              <p:nvPr/>
+            </p:nvSpPr>
+            <p:spPr>
+              <a:xfrm rot="17720721">
+                <a:off x="6162584" y="3440791"/>
+                <a:ext cx="428121" cy="76467"/>
+              </a:xfrm>
+              <a:custGeom>
+                <a:avLst/>
+                <a:gdLst>
+                  <a:gd name="csX0" fmla="*/ 0 w 525294"/>
+                  <a:gd name="csY0" fmla="*/ 94034 h 188068"/>
+                  <a:gd name="csX1" fmla="*/ 262647 w 525294"/>
+                  <a:gd name="csY1" fmla="*/ 0 h 188068"/>
+                  <a:gd name="csX2" fmla="*/ 525294 w 525294"/>
+                  <a:gd name="csY2" fmla="*/ 94034 h 188068"/>
+                  <a:gd name="csX3" fmla="*/ 262647 w 525294"/>
+                  <a:gd name="csY3" fmla="*/ 188068 h 188068"/>
+                  <a:gd name="csX4" fmla="*/ 0 w 525294"/>
+                  <a:gd name="csY4" fmla="*/ 94034 h 188068"/>
+                  <a:gd name="csX0" fmla="*/ 0 w 623481"/>
+                  <a:gd name="csY0" fmla="*/ 94831 h 189220"/>
+                  <a:gd name="csX1" fmla="*/ 262647 w 623481"/>
+                  <a:gd name="csY1" fmla="*/ 797 h 189220"/>
+                  <a:gd name="csX2" fmla="*/ 623481 w 623481"/>
+                  <a:gd name="csY2" fmla="*/ 65276 h 189220"/>
+                  <a:gd name="csX3" fmla="*/ 262647 w 623481"/>
+                  <a:gd name="csY3" fmla="*/ 188865 h 189220"/>
+                  <a:gd name="csX4" fmla="*/ 0 w 623481"/>
+                  <a:gd name="csY4" fmla="*/ 94831 h 189220"/>
+                </a:gdLst>
+                <a:ahLst/>
+                <a:cxnLst>
+                  <a:cxn ang="0">
+                    <a:pos x="csX0" y="csY0"/>
+                  </a:cxn>
+                  <a:cxn ang="0">
+                    <a:pos x="csX1" y="csY1"/>
+                  </a:cxn>
+                  <a:cxn ang="0">
+                    <a:pos x="csX2" y="csY2"/>
+                  </a:cxn>
+                  <a:cxn ang="0">
+                    <a:pos x="csX3" y="csY3"/>
+                  </a:cxn>
+                  <a:cxn ang="0">
+                    <a:pos x="csX4" y="csY4"/>
+                  </a:cxn>
+                </a:cxnLst>
+                <a:rect l="l" t="t" r="r" b="b"/>
+                <a:pathLst>
+                  <a:path w="623481" h="189220">
+                    <a:moveTo>
+                      <a:pt x="0" y="94831"/>
+                    </a:moveTo>
+                    <a:cubicBezTo>
+                      <a:pt x="0" y="42897"/>
+                      <a:pt x="158734" y="5723"/>
+                      <a:pt x="262647" y="797"/>
+                    </a:cubicBezTo>
+                    <a:cubicBezTo>
+                      <a:pt x="366560" y="-4129"/>
+                      <a:pt x="623481" y="13342"/>
+                      <a:pt x="623481" y="65276"/>
+                    </a:cubicBezTo>
+                    <a:cubicBezTo>
+                      <a:pt x="623481" y="117210"/>
+                      <a:pt x="366560" y="183939"/>
+                      <a:pt x="262647" y="188865"/>
+                    </a:cubicBezTo>
+                    <a:cubicBezTo>
+                      <a:pt x="158734" y="193791"/>
+                      <a:pt x="0" y="146765"/>
+                      <a:pt x="0" y="94831"/>
+                    </a:cubicBezTo>
+                    <a:close/>
+                  </a:path>
+                </a:pathLst>
+              </a:custGeom>
+              <a:solidFill>
+                <a:schemeClr val="accent6">
+                  <a:lumMod val="75000"/>
+                </a:schemeClr>
+              </a:solidFill>
+              <a:ln>
+                <a:solidFill>
+                  <a:schemeClr val="accent6">
+                    <a:lumMod val="75000"/>
+                  </a:schemeClr>
+                </a:solidFill>
+              </a:ln>
+            </p:spPr>
+            <p:style>
+              <a:lnRef idx="2">
+                <a:schemeClr val="accent6">
+                  <a:shade val="15000"/>
+                </a:schemeClr>
+              </a:lnRef>
+              <a:fillRef idx="1">
+                <a:schemeClr val="accent6"/>
+              </a:fillRef>
+              <a:effectRef idx="0">
+                <a:schemeClr val="accent6"/>
+              </a:effectRef>
+              <a:fontRef idx="minor">
+                <a:schemeClr val="lt1"/>
+              </a:fontRef>
+            </p:style>
+            <p:txBody>
+              <a:bodyPr rtlCol="0" anchor="ctr"/>
+              <a:lstStyle/>
+              <a:p>
+                <a:pPr algn="ctr"/>
+                <a:endParaRPr lang="en-NZ"/>
+              </a:p>
+            </p:txBody>
+          </p:sp>
+          <p:sp>
+            <p:nvSpPr>
+              <p:cNvPr id="56" name="Oval 15">
+                <a:extLst>
+                  <a:ext uri="{FF2B5EF4-FFF2-40B4-BE49-F238E27FC236}">
+                    <a16:creationId xmlns:a16="http://schemas.microsoft.com/office/drawing/2014/main" id="{04CA388B-D493-2A41-8CD7-17F6FB22EF6F}"/>
+                  </a:ext>
+                </a:extLst>
+              </p:cNvPr>
+              <p:cNvSpPr/>
+              <p:nvPr/>
+            </p:nvSpPr>
+            <p:spPr>
+              <a:xfrm rot="17826229">
+                <a:off x="6168485" y="3764374"/>
+                <a:ext cx="428121" cy="90431"/>
+              </a:xfrm>
+              <a:custGeom>
+                <a:avLst/>
+                <a:gdLst>
+                  <a:gd name="csX0" fmla="*/ 0 w 525294"/>
+                  <a:gd name="csY0" fmla="*/ 94034 h 188068"/>
+                  <a:gd name="csX1" fmla="*/ 262647 w 525294"/>
+                  <a:gd name="csY1" fmla="*/ 0 h 188068"/>
+                  <a:gd name="csX2" fmla="*/ 525294 w 525294"/>
+                  <a:gd name="csY2" fmla="*/ 94034 h 188068"/>
+                  <a:gd name="csX3" fmla="*/ 262647 w 525294"/>
+                  <a:gd name="csY3" fmla="*/ 188068 h 188068"/>
+                  <a:gd name="csX4" fmla="*/ 0 w 525294"/>
+                  <a:gd name="csY4" fmla="*/ 94034 h 188068"/>
+                  <a:gd name="csX0" fmla="*/ 0 w 623481"/>
+                  <a:gd name="csY0" fmla="*/ 94831 h 189220"/>
+                  <a:gd name="csX1" fmla="*/ 262647 w 623481"/>
+                  <a:gd name="csY1" fmla="*/ 797 h 189220"/>
+                  <a:gd name="csX2" fmla="*/ 623481 w 623481"/>
+                  <a:gd name="csY2" fmla="*/ 65276 h 189220"/>
+                  <a:gd name="csX3" fmla="*/ 262647 w 623481"/>
+                  <a:gd name="csY3" fmla="*/ 188865 h 189220"/>
+                  <a:gd name="csX4" fmla="*/ 0 w 623481"/>
+                  <a:gd name="csY4" fmla="*/ 94831 h 189220"/>
+                </a:gdLst>
+                <a:ahLst/>
+                <a:cxnLst>
+                  <a:cxn ang="0">
+                    <a:pos x="csX0" y="csY0"/>
+                  </a:cxn>
+                  <a:cxn ang="0">
+                    <a:pos x="csX1" y="csY1"/>
+                  </a:cxn>
+                  <a:cxn ang="0">
+                    <a:pos x="csX2" y="csY2"/>
+                  </a:cxn>
+                  <a:cxn ang="0">
+                    <a:pos x="csX3" y="csY3"/>
+                  </a:cxn>
+                  <a:cxn ang="0">
+                    <a:pos x="csX4" y="csY4"/>
+                  </a:cxn>
+                </a:cxnLst>
+                <a:rect l="l" t="t" r="r" b="b"/>
+                <a:pathLst>
+                  <a:path w="623481" h="189220">
+                    <a:moveTo>
+                      <a:pt x="0" y="94831"/>
+                    </a:moveTo>
+                    <a:cubicBezTo>
+                      <a:pt x="0" y="42897"/>
+                      <a:pt x="158734" y="5723"/>
+                      <a:pt x="262647" y="797"/>
+                    </a:cubicBezTo>
+                    <a:cubicBezTo>
+                      <a:pt x="366560" y="-4129"/>
+                      <a:pt x="623481" y="13342"/>
+                      <a:pt x="623481" y="65276"/>
+                    </a:cubicBezTo>
+                    <a:cubicBezTo>
+                      <a:pt x="623481" y="117210"/>
+                      <a:pt x="366560" y="183939"/>
+                      <a:pt x="262647" y="188865"/>
+                    </a:cubicBezTo>
+                    <a:cubicBezTo>
+                      <a:pt x="158734" y="193791"/>
+                      <a:pt x="0" y="146765"/>
+                      <a:pt x="0" y="94831"/>
+                    </a:cubicBezTo>
+                    <a:close/>
+                  </a:path>
+                </a:pathLst>
+              </a:custGeom>
+              <a:solidFill>
+                <a:schemeClr val="accent6">
+                  <a:lumMod val="75000"/>
+                </a:schemeClr>
+              </a:solidFill>
+              <a:ln>
+                <a:solidFill>
+                  <a:schemeClr val="accent6">
+                    <a:lumMod val="75000"/>
+                  </a:schemeClr>
+                </a:solidFill>
+              </a:ln>
+            </p:spPr>
+            <p:style>
+              <a:lnRef idx="2">
+                <a:schemeClr val="accent6">
+                  <a:shade val="15000"/>
+                </a:schemeClr>
+              </a:lnRef>
+              <a:fillRef idx="1">
+                <a:schemeClr val="accent6"/>
+              </a:fillRef>
+              <a:effectRef idx="0">
+                <a:schemeClr val="accent6"/>
+              </a:effectRef>
+              <a:fontRef idx="minor">
+                <a:schemeClr val="lt1"/>
+              </a:fontRef>
+            </p:style>
+            <p:txBody>
+              <a:bodyPr rtlCol="0" anchor="ctr"/>
+              <a:lstStyle/>
+              <a:p>
+                <a:pPr algn="ctr"/>
+                <a:endParaRPr lang="en-NZ"/>
+              </a:p>
+            </p:txBody>
+          </p:sp>
+        </p:grpSp>
+      </p:grpSp>
+    </p:spTree>
+    <p:extLst>
+      <p:ext uri="{BB962C8B-B14F-4D97-AF65-F5344CB8AC3E}">
+        <p14:creationId xmlns:p14="http://schemas.microsoft.com/office/powerpoint/2010/main" val="1275356749"/>
+      </p:ext>
+    </p:extLst>
+  </p:cSld>
+  <p:clrMapOvr>
+    <a:masterClrMapping/>
+  </p:clrMapOvr>
+</p:sld>
+</file>
+
+<file path=ppt/slides/slide3.xml><?xml version="1.0" encoding="utf-8"?>
+<p:sld xmlns:a="http://schemas.openxmlformats.org/drawingml/2006/main" xmlns:r="http://schemas.openxmlformats.org/officeDocument/2006/relationships" xmlns:p="http://schemas.openxmlformats.org/presentationml/2006/main">
+  <p:cSld>
+    <p:spTree>
+      <p:nvGrpSpPr>
+        <p:cNvPr id="1" name=""/>
+        <p:cNvGrpSpPr/>
+        <p:nvPr/>
+      </p:nvGrpSpPr>
+      <p:grpSpPr>
+        <a:xfrm>
+          <a:off x="0" y="0"/>
+          <a:ext cx="0" cy="0"/>
+          <a:chOff x="0" y="0"/>
+          <a:chExt cx="0" cy="0"/>
+        </a:xfrm>
+      </p:grpSpPr>
       <p:pic>
         <p:nvPicPr>
           <p:cNvPr id="5" name="Picture 4">
@@ -5997,7 +9681,7 @@
 </p:sld>
 </file>
 
-<file path=ppt/slides/slide3.xml><?xml version="1.0" encoding="utf-8"?>
+<file path=ppt/slides/slide4.xml><?xml version="1.0" encoding="utf-8"?>
 <p:sld xmlns:a="http://schemas.openxmlformats.org/drawingml/2006/main" xmlns:r="http://schemas.openxmlformats.org/officeDocument/2006/relationships" xmlns:p="http://schemas.openxmlformats.org/presentationml/2006/main">
   <p:cSld>
     <p:spTree>

--- a/images/juno bug logo.pptx
+++ b/images/juno bug logo.pptx
@@ -9,6 +9,7 @@
     <p:sldId id="259" r:id="rId3"/>
     <p:sldId id="258" r:id="rId4"/>
     <p:sldId id="257" r:id="rId5"/>
+    <p:sldId id="260" r:id="rId6"/>
   </p:sldIdLst>
   <p:sldSz cx="12192000" cy="6858000"/>
   <p:notesSz cx="6858000" cy="9144000"/>
@@ -264,7 +265,7 @@
           <a:p>
             <a:fld id="{9B1631A4-210E-4433-975B-A06E388530ED}" type="datetimeFigureOut">
               <a:rPr lang="en-NZ" smtClean="0"/>
-              <a:t>3/08/2026</a:t>
+              <a:t>25/08/2026</a:t>
             </a:fld>
             <a:endParaRPr lang="en-NZ"/>
           </a:p>
@@ -464,7 +465,7 @@
           <a:p>
             <a:fld id="{9B1631A4-210E-4433-975B-A06E388530ED}" type="datetimeFigureOut">
               <a:rPr lang="en-NZ" smtClean="0"/>
-              <a:t>3/08/2026</a:t>
+              <a:t>25/08/2026</a:t>
             </a:fld>
             <a:endParaRPr lang="en-NZ"/>
           </a:p>
@@ -674,7 +675,7 @@
           <a:p>
             <a:fld id="{9B1631A4-210E-4433-975B-A06E388530ED}" type="datetimeFigureOut">
               <a:rPr lang="en-NZ" smtClean="0"/>
-              <a:t>3/08/2026</a:t>
+              <a:t>25/08/2026</a:t>
             </a:fld>
             <a:endParaRPr lang="en-NZ"/>
           </a:p>
@@ -874,7 +875,7 @@
           <a:p>
             <a:fld id="{9B1631A4-210E-4433-975B-A06E388530ED}" type="datetimeFigureOut">
               <a:rPr lang="en-NZ" smtClean="0"/>
-              <a:t>3/08/2026</a:t>
+              <a:t>25/08/2026</a:t>
             </a:fld>
             <a:endParaRPr lang="en-NZ"/>
           </a:p>
@@ -1150,7 +1151,7 @@
           <a:p>
             <a:fld id="{9B1631A4-210E-4433-975B-A06E388530ED}" type="datetimeFigureOut">
               <a:rPr lang="en-NZ" smtClean="0"/>
-              <a:t>3/08/2026</a:t>
+              <a:t>25/08/2026</a:t>
             </a:fld>
             <a:endParaRPr lang="en-NZ"/>
           </a:p>
@@ -1418,7 +1419,7 @@
           <a:p>
             <a:fld id="{9B1631A4-210E-4433-975B-A06E388530ED}" type="datetimeFigureOut">
               <a:rPr lang="en-NZ" smtClean="0"/>
-              <a:t>3/08/2026</a:t>
+              <a:t>25/08/2026</a:t>
             </a:fld>
             <a:endParaRPr lang="en-NZ"/>
           </a:p>
@@ -1833,7 +1834,7 @@
           <a:p>
             <a:fld id="{9B1631A4-210E-4433-975B-A06E388530ED}" type="datetimeFigureOut">
               <a:rPr lang="en-NZ" smtClean="0"/>
-              <a:t>3/08/2026</a:t>
+              <a:t>25/08/2026</a:t>
             </a:fld>
             <a:endParaRPr lang="en-NZ"/>
           </a:p>
@@ -1975,7 +1976,7 @@
           <a:p>
             <a:fld id="{9B1631A4-210E-4433-975B-A06E388530ED}" type="datetimeFigureOut">
               <a:rPr lang="en-NZ" smtClean="0"/>
-              <a:t>3/08/2026</a:t>
+              <a:t>25/08/2026</a:t>
             </a:fld>
             <a:endParaRPr lang="en-NZ"/>
           </a:p>
@@ -2088,7 +2089,7 @@
           <a:p>
             <a:fld id="{9B1631A4-210E-4433-975B-A06E388530ED}" type="datetimeFigureOut">
               <a:rPr lang="en-NZ" smtClean="0"/>
-              <a:t>3/08/2026</a:t>
+              <a:t>25/08/2026</a:t>
             </a:fld>
             <a:endParaRPr lang="en-NZ"/>
           </a:p>
@@ -2401,7 +2402,7 @@
           <a:p>
             <a:fld id="{9B1631A4-210E-4433-975B-A06E388530ED}" type="datetimeFigureOut">
               <a:rPr lang="en-NZ" smtClean="0"/>
-              <a:t>3/08/2026</a:t>
+              <a:t>25/08/2026</a:t>
             </a:fld>
             <a:endParaRPr lang="en-NZ"/>
           </a:p>
@@ -2690,7 +2691,7 @@
           <a:p>
             <a:fld id="{9B1631A4-210E-4433-975B-A06E388530ED}" type="datetimeFigureOut">
               <a:rPr lang="en-NZ" smtClean="0"/>
-              <a:t>3/08/2026</a:t>
+              <a:t>25/08/2026</a:t>
             </a:fld>
             <a:endParaRPr lang="en-NZ"/>
           </a:p>
@@ -2933,7 +2934,7 @@
           <a:p>
             <a:fld id="{9B1631A4-210E-4433-975B-A06E388530ED}" type="datetimeFigureOut">
               <a:rPr lang="en-NZ" smtClean="0"/>
-              <a:t>3/08/2026</a:t>
+              <a:t>25/08/2026</a:t>
             </a:fld>
             <a:endParaRPr lang="en-NZ"/>
           </a:p>
@@ -5960,12 +5961,49 @@
           <a:chExt cx="0" cy="0"/>
         </a:xfrm>
       </p:grpSpPr>
+      <p:pic>
+        <p:nvPicPr>
+          <p:cNvPr id="5" name="Picture 4">
+            <a:extLst>
+              <a:ext uri="{FF2B5EF4-FFF2-40B4-BE49-F238E27FC236}">
+                <a16:creationId xmlns:a16="http://schemas.microsoft.com/office/drawing/2014/main" id="{AC7E09D6-8441-95CB-87F7-9BE8988B88D1}"/>
+              </a:ext>
+            </a:extLst>
+          </p:cNvPr>
+          <p:cNvPicPr>
+            <a:picLocks noChangeAspect="1"/>
+          </p:cNvPicPr>
+          <p:nvPr/>
+        </p:nvPicPr>
+        <p:blipFill>
+          <a:blip r:embed="rId2">
+            <a:extLst>
+              <a:ext uri="{28A0092B-C50C-407E-A947-70E740481C1C}">
+                <a14:useLocalDpi xmlns:a14="http://schemas.microsoft.com/office/drawing/2010/main" val="0"/>
+              </a:ext>
+            </a:extLst>
+          </a:blip>
+          <a:srcRect l="15788" r="16127"/>
+          <a:stretch>
+            <a:fillRect/>
+          </a:stretch>
+        </p:blipFill>
+        <p:spPr>
+          <a:xfrm>
+            <a:off x="3424072" y="1438300"/>
+            <a:ext cx="2594042" cy="3810000"/>
+          </a:xfrm>
+          <a:prstGeom prst="rect">
+            <a:avLst/>
+          </a:prstGeom>
+        </p:spPr>
+      </p:pic>
       <p:grpSp>
         <p:nvGrpSpPr>
-          <p:cNvPr id="57" name="Group 56">
+          <p:cNvPr id="41" name="Group 40">
             <a:extLst>
               <a:ext uri="{FF2B5EF4-FFF2-40B4-BE49-F238E27FC236}">
-                <a16:creationId xmlns:a16="http://schemas.microsoft.com/office/drawing/2014/main" id="{988F41C7-96E9-B1B0-BD1A-2229AF08CA52}"/>
+                <a16:creationId xmlns:a16="http://schemas.microsoft.com/office/drawing/2014/main" id="{B54CDE45-AA30-46C0-812D-E089F7441D8C}"/>
               </a:ext>
             </a:extLst>
           </p:cNvPr>
@@ -5974,3639 +6012,3581 @@
         </p:nvGrpSpPr>
         <p:grpSpPr>
           <a:xfrm>
-            <a:off x="2997047" y="1438300"/>
-            <a:ext cx="3430714" cy="3810000"/>
-            <a:chOff x="2997047" y="1438300"/>
-            <a:chExt cx="3430714" cy="3810000"/>
+            <a:off x="5677461" y="2176091"/>
+            <a:ext cx="750300" cy="2737251"/>
+            <a:chOff x="5677461" y="2176091"/>
+            <a:chExt cx="750300" cy="2737251"/>
           </a:xfrm>
         </p:grpSpPr>
-        <p:pic>
-          <p:nvPicPr>
-            <p:cNvPr id="5" name="Picture 4">
+        <p:sp>
+          <p:nvSpPr>
+            <p:cNvPr id="9" name="Oval 15">
               <a:extLst>
                 <a:ext uri="{FF2B5EF4-FFF2-40B4-BE49-F238E27FC236}">
-                  <a16:creationId xmlns:a16="http://schemas.microsoft.com/office/drawing/2014/main" id="{AC7E09D6-8441-95CB-87F7-9BE8988B88D1}"/>
+                  <a16:creationId xmlns:a16="http://schemas.microsoft.com/office/drawing/2014/main" id="{5F2E84E8-6A21-9898-2478-5E700516272C}"/>
                 </a:ext>
               </a:extLst>
             </p:cNvPr>
-            <p:cNvPicPr>
-              <a:picLocks noChangeAspect="1"/>
-            </p:cNvPicPr>
+            <p:cNvSpPr/>
             <p:nvPr/>
-          </p:nvPicPr>
-          <p:blipFill>
-            <a:blip r:embed="rId2">
-              <a:extLst>
-                <a:ext uri="{28A0092B-C50C-407E-A947-70E740481C1C}">
-                  <a14:useLocalDpi xmlns:a14="http://schemas.microsoft.com/office/drawing/2010/main" val="0"/>
-                </a:ext>
-              </a:extLst>
-            </a:blip>
-            <a:srcRect l="15788" r="16127"/>
-            <a:stretch>
-              <a:fillRect/>
-            </a:stretch>
-          </p:blipFill>
+          </p:nvSpPr>
           <p:spPr>
-            <a:xfrm>
-              <a:off x="3424072" y="1438300"/>
-              <a:ext cx="2594042" cy="3810000"/>
+            <a:xfrm rot="1439914" flipH="1">
+              <a:off x="5873621" y="3072463"/>
+              <a:ext cx="358584" cy="83907"/>
             </a:xfrm>
-            <a:prstGeom prst="rect">
+            <a:custGeom>
               <a:avLst/>
-            </a:prstGeom>
-          </p:spPr>
-        </p:pic>
-        <p:grpSp>
-          <p:nvGrpSpPr>
-            <p:cNvPr id="41" name="Group 40">
-              <a:extLst>
-                <a:ext uri="{FF2B5EF4-FFF2-40B4-BE49-F238E27FC236}">
-                  <a16:creationId xmlns:a16="http://schemas.microsoft.com/office/drawing/2014/main" id="{B54CDE45-AA30-46C0-812D-E089F7441D8C}"/>
-                </a:ext>
-              </a:extLst>
-            </p:cNvPr>
-            <p:cNvGrpSpPr/>
-            <p:nvPr/>
-          </p:nvGrpSpPr>
-          <p:grpSpPr>
-            <a:xfrm>
-              <a:off x="5677461" y="2176091"/>
-              <a:ext cx="750300" cy="2737251"/>
-              <a:chOff x="5677461" y="2176091"/>
-              <a:chExt cx="750300" cy="2737251"/>
-            </a:xfrm>
-          </p:grpSpPr>
-          <p:sp>
-            <p:nvSpPr>
-              <p:cNvPr id="9" name="Oval 15">
-                <a:extLst>
-                  <a:ext uri="{FF2B5EF4-FFF2-40B4-BE49-F238E27FC236}">
-                    <a16:creationId xmlns:a16="http://schemas.microsoft.com/office/drawing/2014/main" id="{5F2E84E8-6A21-9898-2478-5E700516272C}"/>
-                  </a:ext>
-                </a:extLst>
-              </p:cNvPr>
-              <p:cNvSpPr/>
-              <p:nvPr/>
-            </p:nvSpPr>
-            <p:spPr>
-              <a:xfrm rot="1439914" flipH="1">
-                <a:off x="5873621" y="3072463"/>
-                <a:ext cx="358584" cy="83907"/>
-              </a:xfrm>
-              <a:custGeom>
-                <a:avLst/>
-                <a:gdLst>
-                  <a:gd name="csX0" fmla="*/ 0 w 525294"/>
-                  <a:gd name="csY0" fmla="*/ 94034 h 188068"/>
-                  <a:gd name="csX1" fmla="*/ 262647 w 525294"/>
-                  <a:gd name="csY1" fmla="*/ 0 h 188068"/>
-                  <a:gd name="csX2" fmla="*/ 525294 w 525294"/>
-                  <a:gd name="csY2" fmla="*/ 94034 h 188068"/>
-                  <a:gd name="csX3" fmla="*/ 262647 w 525294"/>
-                  <a:gd name="csY3" fmla="*/ 188068 h 188068"/>
-                  <a:gd name="csX4" fmla="*/ 0 w 525294"/>
-                  <a:gd name="csY4" fmla="*/ 94034 h 188068"/>
-                  <a:gd name="csX0" fmla="*/ 0 w 623481"/>
-                  <a:gd name="csY0" fmla="*/ 94831 h 189220"/>
-                  <a:gd name="csX1" fmla="*/ 262647 w 623481"/>
-                  <a:gd name="csY1" fmla="*/ 797 h 189220"/>
-                  <a:gd name="csX2" fmla="*/ 623481 w 623481"/>
-                  <a:gd name="csY2" fmla="*/ 65276 h 189220"/>
-                  <a:gd name="csX3" fmla="*/ 262647 w 623481"/>
-                  <a:gd name="csY3" fmla="*/ 188865 h 189220"/>
-                  <a:gd name="csX4" fmla="*/ 0 w 623481"/>
-                  <a:gd name="csY4" fmla="*/ 94831 h 189220"/>
-                </a:gdLst>
-                <a:ahLst/>
-                <a:cxnLst>
-                  <a:cxn ang="0">
-                    <a:pos x="csX0" y="csY0"/>
-                  </a:cxn>
-                  <a:cxn ang="0">
-                    <a:pos x="csX1" y="csY1"/>
-                  </a:cxn>
-                  <a:cxn ang="0">
-                    <a:pos x="csX2" y="csY2"/>
-                  </a:cxn>
-                  <a:cxn ang="0">
-                    <a:pos x="csX3" y="csY3"/>
-                  </a:cxn>
-                  <a:cxn ang="0">
-                    <a:pos x="csX4" y="csY4"/>
-                  </a:cxn>
-                </a:cxnLst>
-                <a:rect l="l" t="t" r="r" b="b"/>
-                <a:pathLst>
-                  <a:path w="623481" h="189220">
-                    <a:moveTo>
-                      <a:pt x="0" y="94831"/>
-                    </a:moveTo>
-                    <a:cubicBezTo>
-                      <a:pt x="0" y="42897"/>
-                      <a:pt x="158734" y="5723"/>
-                      <a:pt x="262647" y="797"/>
-                    </a:cubicBezTo>
-                    <a:cubicBezTo>
-                      <a:pt x="366560" y="-4129"/>
-                      <a:pt x="623481" y="13342"/>
-                      <a:pt x="623481" y="65276"/>
-                    </a:cubicBezTo>
-                    <a:cubicBezTo>
-                      <a:pt x="623481" y="117210"/>
-                      <a:pt x="366560" y="183939"/>
-                      <a:pt x="262647" y="188865"/>
-                    </a:cubicBezTo>
-                    <a:cubicBezTo>
-                      <a:pt x="158734" y="193791"/>
-                      <a:pt x="0" y="146765"/>
-                      <a:pt x="0" y="94831"/>
-                    </a:cubicBezTo>
-                    <a:close/>
-                  </a:path>
-                </a:pathLst>
-              </a:custGeom>
+              <a:gdLst>
+                <a:gd name="csX0" fmla="*/ 0 w 525294"/>
+                <a:gd name="csY0" fmla="*/ 94034 h 188068"/>
+                <a:gd name="csX1" fmla="*/ 262647 w 525294"/>
+                <a:gd name="csY1" fmla="*/ 0 h 188068"/>
+                <a:gd name="csX2" fmla="*/ 525294 w 525294"/>
+                <a:gd name="csY2" fmla="*/ 94034 h 188068"/>
+                <a:gd name="csX3" fmla="*/ 262647 w 525294"/>
+                <a:gd name="csY3" fmla="*/ 188068 h 188068"/>
+                <a:gd name="csX4" fmla="*/ 0 w 525294"/>
+                <a:gd name="csY4" fmla="*/ 94034 h 188068"/>
+                <a:gd name="csX0" fmla="*/ 0 w 623481"/>
+                <a:gd name="csY0" fmla="*/ 94831 h 189220"/>
+                <a:gd name="csX1" fmla="*/ 262647 w 623481"/>
+                <a:gd name="csY1" fmla="*/ 797 h 189220"/>
+                <a:gd name="csX2" fmla="*/ 623481 w 623481"/>
+                <a:gd name="csY2" fmla="*/ 65276 h 189220"/>
+                <a:gd name="csX3" fmla="*/ 262647 w 623481"/>
+                <a:gd name="csY3" fmla="*/ 188865 h 189220"/>
+                <a:gd name="csX4" fmla="*/ 0 w 623481"/>
+                <a:gd name="csY4" fmla="*/ 94831 h 189220"/>
+              </a:gdLst>
+              <a:ahLst/>
+              <a:cxnLst>
+                <a:cxn ang="0">
+                  <a:pos x="csX0" y="csY0"/>
+                </a:cxn>
+                <a:cxn ang="0">
+                  <a:pos x="csX1" y="csY1"/>
+                </a:cxn>
+                <a:cxn ang="0">
+                  <a:pos x="csX2" y="csY2"/>
+                </a:cxn>
+                <a:cxn ang="0">
+                  <a:pos x="csX3" y="csY3"/>
+                </a:cxn>
+                <a:cxn ang="0">
+                  <a:pos x="csX4" y="csY4"/>
+                </a:cxn>
+              </a:cxnLst>
+              <a:rect l="l" t="t" r="r" b="b"/>
+              <a:pathLst>
+                <a:path w="623481" h="189220">
+                  <a:moveTo>
+                    <a:pt x="0" y="94831"/>
+                  </a:moveTo>
+                  <a:cubicBezTo>
+                    <a:pt x="0" y="42897"/>
+                    <a:pt x="158734" y="5723"/>
+                    <a:pt x="262647" y="797"/>
+                  </a:cubicBezTo>
+                  <a:cubicBezTo>
+                    <a:pt x="366560" y="-4129"/>
+                    <a:pt x="623481" y="13342"/>
+                    <a:pt x="623481" y="65276"/>
+                  </a:cubicBezTo>
+                  <a:cubicBezTo>
+                    <a:pt x="623481" y="117210"/>
+                    <a:pt x="366560" y="183939"/>
+                    <a:pt x="262647" y="188865"/>
+                  </a:cubicBezTo>
+                  <a:cubicBezTo>
+                    <a:pt x="158734" y="193791"/>
+                    <a:pt x="0" y="146765"/>
+                    <a:pt x="0" y="94831"/>
+                  </a:cubicBezTo>
+                  <a:close/>
+                </a:path>
+              </a:pathLst>
+            </a:custGeom>
+            <a:solidFill>
+              <a:schemeClr val="accent6">
+                <a:lumMod val="75000"/>
+              </a:schemeClr>
+            </a:solidFill>
+            <a:ln>
               <a:solidFill>
                 <a:schemeClr val="accent6">
                   <a:lumMod val="75000"/>
                 </a:schemeClr>
               </a:solidFill>
-              <a:ln>
-                <a:solidFill>
-                  <a:schemeClr val="accent6">
-                    <a:lumMod val="75000"/>
-                  </a:schemeClr>
-                </a:solidFill>
-              </a:ln>
-            </p:spPr>
-            <p:style>
-              <a:lnRef idx="2">
-                <a:schemeClr val="accent6">
-                  <a:shade val="15000"/>
-                </a:schemeClr>
-              </a:lnRef>
-              <a:fillRef idx="1">
-                <a:schemeClr val="accent6"/>
-              </a:fillRef>
-              <a:effectRef idx="0">
-                <a:schemeClr val="accent6"/>
-              </a:effectRef>
-              <a:fontRef idx="minor">
-                <a:schemeClr val="lt1"/>
-              </a:fontRef>
-            </p:style>
-            <p:txBody>
-              <a:bodyPr rtlCol="0" anchor="ctr"/>
-              <a:lstStyle/>
-              <a:p>
-                <a:pPr algn="ctr"/>
-                <a:endParaRPr lang="en-NZ"/>
-              </a:p>
-            </p:txBody>
-          </p:sp>
-          <p:sp>
-            <p:nvSpPr>
-              <p:cNvPr id="10" name="Oval 15">
-                <a:extLst>
-                  <a:ext uri="{FF2B5EF4-FFF2-40B4-BE49-F238E27FC236}">
-                    <a16:creationId xmlns:a16="http://schemas.microsoft.com/office/drawing/2014/main" id="{4B48606F-EE2B-D250-BC8F-A8C139DF2424}"/>
-                  </a:ext>
-                </a:extLst>
-              </p:cNvPr>
-              <p:cNvSpPr/>
-              <p:nvPr/>
-            </p:nvSpPr>
-            <p:spPr>
-              <a:xfrm rot="1297676" flipH="1">
-                <a:off x="5677461" y="2648054"/>
-                <a:ext cx="336104" cy="93295"/>
-              </a:xfrm>
-              <a:custGeom>
-                <a:avLst/>
-                <a:gdLst>
-                  <a:gd name="csX0" fmla="*/ 0 w 525294"/>
-                  <a:gd name="csY0" fmla="*/ 94034 h 188068"/>
-                  <a:gd name="csX1" fmla="*/ 262647 w 525294"/>
-                  <a:gd name="csY1" fmla="*/ 0 h 188068"/>
-                  <a:gd name="csX2" fmla="*/ 525294 w 525294"/>
-                  <a:gd name="csY2" fmla="*/ 94034 h 188068"/>
-                  <a:gd name="csX3" fmla="*/ 262647 w 525294"/>
-                  <a:gd name="csY3" fmla="*/ 188068 h 188068"/>
-                  <a:gd name="csX4" fmla="*/ 0 w 525294"/>
-                  <a:gd name="csY4" fmla="*/ 94034 h 188068"/>
-                  <a:gd name="csX0" fmla="*/ 0 w 623481"/>
-                  <a:gd name="csY0" fmla="*/ 94831 h 189220"/>
-                  <a:gd name="csX1" fmla="*/ 262647 w 623481"/>
-                  <a:gd name="csY1" fmla="*/ 797 h 189220"/>
-                  <a:gd name="csX2" fmla="*/ 623481 w 623481"/>
-                  <a:gd name="csY2" fmla="*/ 65276 h 189220"/>
-                  <a:gd name="csX3" fmla="*/ 262647 w 623481"/>
-                  <a:gd name="csY3" fmla="*/ 188865 h 189220"/>
-                  <a:gd name="csX4" fmla="*/ 0 w 623481"/>
-                  <a:gd name="csY4" fmla="*/ 94831 h 189220"/>
-                </a:gdLst>
-                <a:ahLst/>
-                <a:cxnLst>
-                  <a:cxn ang="0">
-                    <a:pos x="csX0" y="csY0"/>
-                  </a:cxn>
-                  <a:cxn ang="0">
-                    <a:pos x="csX1" y="csY1"/>
-                  </a:cxn>
-                  <a:cxn ang="0">
-                    <a:pos x="csX2" y="csY2"/>
-                  </a:cxn>
-                  <a:cxn ang="0">
-                    <a:pos x="csX3" y="csY3"/>
-                  </a:cxn>
-                  <a:cxn ang="0">
-                    <a:pos x="csX4" y="csY4"/>
-                  </a:cxn>
-                </a:cxnLst>
-                <a:rect l="l" t="t" r="r" b="b"/>
-                <a:pathLst>
-                  <a:path w="623481" h="189220">
-                    <a:moveTo>
-                      <a:pt x="0" y="94831"/>
-                    </a:moveTo>
-                    <a:cubicBezTo>
-                      <a:pt x="0" y="42897"/>
-                      <a:pt x="158734" y="5723"/>
-                      <a:pt x="262647" y="797"/>
-                    </a:cubicBezTo>
-                    <a:cubicBezTo>
-                      <a:pt x="366560" y="-4129"/>
-                      <a:pt x="623481" y="13342"/>
-                      <a:pt x="623481" y="65276"/>
-                    </a:cubicBezTo>
-                    <a:cubicBezTo>
-                      <a:pt x="623481" y="117210"/>
-                      <a:pt x="366560" y="183939"/>
-                      <a:pt x="262647" y="188865"/>
-                    </a:cubicBezTo>
-                    <a:cubicBezTo>
-                      <a:pt x="158734" y="193791"/>
-                      <a:pt x="0" y="146765"/>
-                      <a:pt x="0" y="94831"/>
-                    </a:cubicBezTo>
-                    <a:close/>
-                  </a:path>
-                </a:pathLst>
-              </a:custGeom>
+            </a:ln>
+          </p:spPr>
+          <p:style>
+            <a:lnRef idx="2">
+              <a:schemeClr val="accent6">
+                <a:shade val="15000"/>
+              </a:schemeClr>
+            </a:lnRef>
+            <a:fillRef idx="1">
+              <a:schemeClr val="accent6"/>
+            </a:fillRef>
+            <a:effectRef idx="0">
+              <a:schemeClr val="accent6"/>
+            </a:effectRef>
+            <a:fontRef idx="minor">
+              <a:schemeClr val="lt1"/>
+            </a:fontRef>
+          </p:style>
+          <p:txBody>
+            <a:bodyPr rtlCol="0" anchor="ctr"/>
+            <a:lstStyle/>
+            <a:p>
+              <a:pPr algn="ctr"/>
+              <a:endParaRPr lang="en-NZ"/>
+            </a:p>
+          </p:txBody>
+        </p:sp>
+        <p:sp>
+          <p:nvSpPr>
+            <p:cNvPr id="10" name="Oval 15">
+              <a:extLst>
+                <a:ext uri="{FF2B5EF4-FFF2-40B4-BE49-F238E27FC236}">
+                  <a16:creationId xmlns:a16="http://schemas.microsoft.com/office/drawing/2014/main" id="{4B48606F-EE2B-D250-BC8F-A8C139DF2424}"/>
+                </a:ext>
+              </a:extLst>
+            </p:cNvPr>
+            <p:cNvSpPr/>
+            <p:nvPr/>
+          </p:nvSpPr>
+          <p:spPr>
+            <a:xfrm rot="1297676" flipH="1">
+              <a:off x="5677461" y="2648054"/>
+              <a:ext cx="336104" cy="93295"/>
+            </a:xfrm>
+            <a:custGeom>
+              <a:avLst/>
+              <a:gdLst>
+                <a:gd name="csX0" fmla="*/ 0 w 525294"/>
+                <a:gd name="csY0" fmla="*/ 94034 h 188068"/>
+                <a:gd name="csX1" fmla="*/ 262647 w 525294"/>
+                <a:gd name="csY1" fmla="*/ 0 h 188068"/>
+                <a:gd name="csX2" fmla="*/ 525294 w 525294"/>
+                <a:gd name="csY2" fmla="*/ 94034 h 188068"/>
+                <a:gd name="csX3" fmla="*/ 262647 w 525294"/>
+                <a:gd name="csY3" fmla="*/ 188068 h 188068"/>
+                <a:gd name="csX4" fmla="*/ 0 w 525294"/>
+                <a:gd name="csY4" fmla="*/ 94034 h 188068"/>
+                <a:gd name="csX0" fmla="*/ 0 w 623481"/>
+                <a:gd name="csY0" fmla="*/ 94831 h 189220"/>
+                <a:gd name="csX1" fmla="*/ 262647 w 623481"/>
+                <a:gd name="csY1" fmla="*/ 797 h 189220"/>
+                <a:gd name="csX2" fmla="*/ 623481 w 623481"/>
+                <a:gd name="csY2" fmla="*/ 65276 h 189220"/>
+                <a:gd name="csX3" fmla="*/ 262647 w 623481"/>
+                <a:gd name="csY3" fmla="*/ 188865 h 189220"/>
+                <a:gd name="csX4" fmla="*/ 0 w 623481"/>
+                <a:gd name="csY4" fmla="*/ 94831 h 189220"/>
+              </a:gdLst>
+              <a:ahLst/>
+              <a:cxnLst>
+                <a:cxn ang="0">
+                  <a:pos x="csX0" y="csY0"/>
+                </a:cxn>
+                <a:cxn ang="0">
+                  <a:pos x="csX1" y="csY1"/>
+                </a:cxn>
+                <a:cxn ang="0">
+                  <a:pos x="csX2" y="csY2"/>
+                </a:cxn>
+                <a:cxn ang="0">
+                  <a:pos x="csX3" y="csY3"/>
+                </a:cxn>
+                <a:cxn ang="0">
+                  <a:pos x="csX4" y="csY4"/>
+                </a:cxn>
+              </a:cxnLst>
+              <a:rect l="l" t="t" r="r" b="b"/>
+              <a:pathLst>
+                <a:path w="623481" h="189220">
+                  <a:moveTo>
+                    <a:pt x="0" y="94831"/>
+                  </a:moveTo>
+                  <a:cubicBezTo>
+                    <a:pt x="0" y="42897"/>
+                    <a:pt x="158734" y="5723"/>
+                    <a:pt x="262647" y="797"/>
+                  </a:cubicBezTo>
+                  <a:cubicBezTo>
+                    <a:pt x="366560" y="-4129"/>
+                    <a:pt x="623481" y="13342"/>
+                    <a:pt x="623481" y="65276"/>
+                  </a:cubicBezTo>
+                  <a:cubicBezTo>
+                    <a:pt x="623481" y="117210"/>
+                    <a:pt x="366560" y="183939"/>
+                    <a:pt x="262647" y="188865"/>
+                  </a:cubicBezTo>
+                  <a:cubicBezTo>
+                    <a:pt x="158734" y="193791"/>
+                    <a:pt x="0" y="146765"/>
+                    <a:pt x="0" y="94831"/>
+                  </a:cubicBezTo>
+                  <a:close/>
+                </a:path>
+              </a:pathLst>
+            </a:custGeom>
+            <a:solidFill>
+              <a:schemeClr val="accent6">
+                <a:lumMod val="75000"/>
+              </a:schemeClr>
+            </a:solidFill>
+            <a:ln>
               <a:solidFill>
                 <a:schemeClr val="accent6">
                   <a:lumMod val="75000"/>
                 </a:schemeClr>
               </a:solidFill>
-              <a:ln>
-                <a:solidFill>
-                  <a:schemeClr val="accent6">
-                    <a:lumMod val="75000"/>
-                  </a:schemeClr>
-                </a:solidFill>
-              </a:ln>
-            </p:spPr>
-            <p:style>
-              <a:lnRef idx="2">
-                <a:schemeClr val="accent6">
-                  <a:shade val="15000"/>
-                </a:schemeClr>
-              </a:lnRef>
-              <a:fillRef idx="1">
-                <a:schemeClr val="accent6"/>
-              </a:fillRef>
-              <a:effectRef idx="0">
-                <a:schemeClr val="accent6"/>
-              </a:effectRef>
-              <a:fontRef idx="minor">
-                <a:schemeClr val="lt1"/>
-              </a:fontRef>
-            </p:style>
-            <p:txBody>
-              <a:bodyPr rtlCol="0" anchor="ctr"/>
-              <a:lstStyle/>
-              <a:p>
-                <a:pPr algn="ctr"/>
-                <a:endParaRPr lang="en-NZ"/>
-              </a:p>
-            </p:txBody>
-          </p:sp>
-          <p:sp>
-            <p:nvSpPr>
-              <p:cNvPr id="11" name="Oval 15">
-                <a:extLst>
-                  <a:ext uri="{FF2B5EF4-FFF2-40B4-BE49-F238E27FC236}">
-                    <a16:creationId xmlns:a16="http://schemas.microsoft.com/office/drawing/2014/main" id="{D24CD304-9A32-F514-D87D-48B673967EFB}"/>
-                  </a:ext>
-                </a:extLst>
-              </p:cNvPr>
-              <p:cNvSpPr/>
-              <p:nvPr/>
-            </p:nvSpPr>
-            <p:spPr>
-              <a:xfrm rot="16971223">
-                <a:off x="6035007" y="2816575"/>
-                <a:ext cx="428121" cy="76467"/>
-              </a:xfrm>
-              <a:custGeom>
-                <a:avLst/>
-                <a:gdLst>
-                  <a:gd name="csX0" fmla="*/ 0 w 525294"/>
-                  <a:gd name="csY0" fmla="*/ 94034 h 188068"/>
-                  <a:gd name="csX1" fmla="*/ 262647 w 525294"/>
-                  <a:gd name="csY1" fmla="*/ 0 h 188068"/>
-                  <a:gd name="csX2" fmla="*/ 525294 w 525294"/>
-                  <a:gd name="csY2" fmla="*/ 94034 h 188068"/>
-                  <a:gd name="csX3" fmla="*/ 262647 w 525294"/>
-                  <a:gd name="csY3" fmla="*/ 188068 h 188068"/>
-                  <a:gd name="csX4" fmla="*/ 0 w 525294"/>
-                  <a:gd name="csY4" fmla="*/ 94034 h 188068"/>
-                  <a:gd name="csX0" fmla="*/ 0 w 623481"/>
-                  <a:gd name="csY0" fmla="*/ 94831 h 189220"/>
-                  <a:gd name="csX1" fmla="*/ 262647 w 623481"/>
-                  <a:gd name="csY1" fmla="*/ 797 h 189220"/>
-                  <a:gd name="csX2" fmla="*/ 623481 w 623481"/>
-                  <a:gd name="csY2" fmla="*/ 65276 h 189220"/>
-                  <a:gd name="csX3" fmla="*/ 262647 w 623481"/>
-                  <a:gd name="csY3" fmla="*/ 188865 h 189220"/>
-                  <a:gd name="csX4" fmla="*/ 0 w 623481"/>
-                  <a:gd name="csY4" fmla="*/ 94831 h 189220"/>
-                </a:gdLst>
-                <a:ahLst/>
-                <a:cxnLst>
-                  <a:cxn ang="0">
-                    <a:pos x="csX0" y="csY0"/>
-                  </a:cxn>
-                  <a:cxn ang="0">
-                    <a:pos x="csX1" y="csY1"/>
-                  </a:cxn>
-                  <a:cxn ang="0">
-                    <a:pos x="csX2" y="csY2"/>
-                  </a:cxn>
-                  <a:cxn ang="0">
-                    <a:pos x="csX3" y="csY3"/>
-                  </a:cxn>
-                  <a:cxn ang="0">
-                    <a:pos x="csX4" y="csY4"/>
-                  </a:cxn>
-                </a:cxnLst>
-                <a:rect l="l" t="t" r="r" b="b"/>
-                <a:pathLst>
-                  <a:path w="623481" h="189220">
-                    <a:moveTo>
-                      <a:pt x="0" y="94831"/>
-                    </a:moveTo>
-                    <a:cubicBezTo>
-                      <a:pt x="0" y="42897"/>
-                      <a:pt x="158734" y="5723"/>
-                      <a:pt x="262647" y="797"/>
-                    </a:cubicBezTo>
-                    <a:cubicBezTo>
-                      <a:pt x="366560" y="-4129"/>
-                      <a:pt x="623481" y="13342"/>
-                      <a:pt x="623481" y="65276"/>
-                    </a:cubicBezTo>
-                    <a:cubicBezTo>
-                      <a:pt x="623481" y="117210"/>
-                      <a:pt x="366560" y="183939"/>
-                      <a:pt x="262647" y="188865"/>
-                    </a:cubicBezTo>
-                    <a:cubicBezTo>
-                      <a:pt x="158734" y="193791"/>
-                      <a:pt x="0" y="146765"/>
-                      <a:pt x="0" y="94831"/>
-                    </a:cubicBezTo>
-                    <a:close/>
-                  </a:path>
-                </a:pathLst>
-              </a:custGeom>
+            </a:ln>
+          </p:spPr>
+          <p:style>
+            <a:lnRef idx="2">
+              <a:schemeClr val="accent6">
+                <a:shade val="15000"/>
+              </a:schemeClr>
+            </a:lnRef>
+            <a:fillRef idx="1">
+              <a:schemeClr val="accent6"/>
+            </a:fillRef>
+            <a:effectRef idx="0">
+              <a:schemeClr val="accent6"/>
+            </a:effectRef>
+            <a:fontRef idx="minor">
+              <a:schemeClr val="lt1"/>
+            </a:fontRef>
+          </p:style>
+          <p:txBody>
+            <a:bodyPr rtlCol="0" anchor="ctr"/>
+            <a:lstStyle/>
+            <a:p>
+              <a:pPr algn="ctr"/>
+              <a:endParaRPr lang="en-NZ"/>
+            </a:p>
+          </p:txBody>
+        </p:sp>
+        <p:sp>
+          <p:nvSpPr>
+            <p:cNvPr id="11" name="Oval 15">
+              <a:extLst>
+                <a:ext uri="{FF2B5EF4-FFF2-40B4-BE49-F238E27FC236}">
+                  <a16:creationId xmlns:a16="http://schemas.microsoft.com/office/drawing/2014/main" id="{D24CD304-9A32-F514-D87D-48B673967EFB}"/>
+                </a:ext>
+              </a:extLst>
+            </p:cNvPr>
+            <p:cNvSpPr/>
+            <p:nvPr/>
+          </p:nvSpPr>
+          <p:spPr>
+            <a:xfrm rot="16971223">
+              <a:off x="6035007" y="2816575"/>
+              <a:ext cx="428121" cy="76467"/>
+            </a:xfrm>
+            <a:custGeom>
+              <a:avLst/>
+              <a:gdLst>
+                <a:gd name="csX0" fmla="*/ 0 w 525294"/>
+                <a:gd name="csY0" fmla="*/ 94034 h 188068"/>
+                <a:gd name="csX1" fmla="*/ 262647 w 525294"/>
+                <a:gd name="csY1" fmla="*/ 0 h 188068"/>
+                <a:gd name="csX2" fmla="*/ 525294 w 525294"/>
+                <a:gd name="csY2" fmla="*/ 94034 h 188068"/>
+                <a:gd name="csX3" fmla="*/ 262647 w 525294"/>
+                <a:gd name="csY3" fmla="*/ 188068 h 188068"/>
+                <a:gd name="csX4" fmla="*/ 0 w 525294"/>
+                <a:gd name="csY4" fmla="*/ 94034 h 188068"/>
+                <a:gd name="csX0" fmla="*/ 0 w 623481"/>
+                <a:gd name="csY0" fmla="*/ 94831 h 189220"/>
+                <a:gd name="csX1" fmla="*/ 262647 w 623481"/>
+                <a:gd name="csY1" fmla="*/ 797 h 189220"/>
+                <a:gd name="csX2" fmla="*/ 623481 w 623481"/>
+                <a:gd name="csY2" fmla="*/ 65276 h 189220"/>
+                <a:gd name="csX3" fmla="*/ 262647 w 623481"/>
+                <a:gd name="csY3" fmla="*/ 188865 h 189220"/>
+                <a:gd name="csX4" fmla="*/ 0 w 623481"/>
+                <a:gd name="csY4" fmla="*/ 94831 h 189220"/>
+              </a:gdLst>
+              <a:ahLst/>
+              <a:cxnLst>
+                <a:cxn ang="0">
+                  <a:pos x="csX0" y="csY0"/>
+                </a:cxn>
+                <a:cxn ang="0">
+                  <a:pos x="csX1" y="csY1"/>
+                </a:cxn>
+                <a:cxn ang="0">
+                  <a:pos x="csX2" y="csY2"/>
+                </a:cxn>
+                <a:cxn ang="0">
+                  <a:pos x="csX3" y="csY3"/>
+                </a:cxn>
+                <a:cxn ang="0">
+                  <a:pos x="csX4" y="csY4"/>
+                </a:cxn>
+              </a:cxnLst>
+              <a:rect l="l" t="t" r="r" b="b"/>
+              <a:pathLst>
+                <a:path w="623481" h="189220">
+                  <a:moveTo>
+                    <a:pt x="0" y="94831"/>
+                  </a:moveTo>
+                  <a:cubicBezTo>
+                    <a:pt x="0" y="42897"/>
+                    <a:pt x="158734" y="5723"/>
+                    <a:pt x="262647" y="797"/>
+                  </a:cubicBezTo>
+                  <a:cubicBezTo>
+                    <a:pt x="366560" y="-4129"/>
+                    <a:pt x="623481" y="13342"/>
+                    <a:pt x="623481" y="65276"/>
+                  </a:cubicBezTo>
+                  <a:cubicBezTo>
+                    <a:pt x="623481" y="117210"/>
+                    <a:pt x="366560" y="183939"/>
+                    <a:pt x="262647" y="188865"/>
+                  </a:cubicBezTo>
+                  <a:cubicBezTo>
+                    <a:pt x="158734" y="193791"/>
+                    <a:pt x="0" y="146765"/>
+                    <a:pt x="0" y="94831"/>
+                  </a:cubicBezTo>
+                  <a:close/>
+                </a:path>
+              </a:pathLst>
+            </a:custGeom>
+            <a:solidFill>
+              <a:schemeClr val="accent6">
+                <a:lumMod val="75000"/>
+              </a:schemeClr>
+            </a:solidFill>
+            <a:ln>
               <a:solidFill>
                 <a:schemeClr val="accent6">
                   <a:lumMod val="75000"/>
                 </a:schemeClr>
               </a:solidFill>
-              <a:ln>
-                <a:solidFill>
-                  <a:schemeClr val="accent6">
-                    <a:lumMod val="75000"/>
-                  </a:schemeClr>
-                </a:solidFill>
-              </a:ln>
-            </p:spPr>
-            <p:style>
-              <a:lnRef idx="2">
-                <a:schemeClr val="accent6">
-                  <a:shade val="15000"/>
-                </a:schemeClr>
-              </a:lnRef>
-              <a:fillRef idx="1">
-                <a:schemeClr val="accent6"/>
-              </a:fillRef>
-              <a:effectRef idx="0">
-                <a:schemeClr val="accent6"/>
-              </a:effectRef>
-              <a:fontRef idx="minor">
-                <a:schemeClr val="lt1"/>
-              </a:fontRef>
-            </p:style>
-            <p:txBody>
-              <a:bodyPr rtlCol="0" anchor="ctr"/>
-              <a:lstStyle/>
-              <a:p>
-                <a:pPr algn="ctr"/>
-                <a:endParaRPr lang="en-NZ"/>
-              </a:p>
-            </p:txBody>
-          </p:sp>
-          <p:sp>
-            <p:nvSpPr>
-              <p:cNvPr id="12" name="Oval 15">
-                <a:extLst>
-                  <a:ext uri="{FF2B5EF4-FFF2-40B4-BE49-F238E27FC236}">
-                    <a16:creationId xmlns:a16="http://schemas.microsoft.com/office/drawing/2014/main" id="{D7D3338A-C6EE-D5B4-014C-2B4D81442A74}"/>
-                  </a:ext>
-                </a:extLst>
-              </p:cNvPr>
-              <p:cNvSpPr/>
-              <p:nvPr/>
-            </p:nvSpPr>
-            <p:spPr>
-              <a:xfrm rot="16672422">
-                <a:off x="5925138" y="2645257"/>
-                <a:ext cx="384004" cy="76570"/>
-              </a:xfrm>
-              <a:custGeom>
-                <a:avLst/>
-                <a:gdLst>
-                  <a:gd name="csX0" fmla="*/ 0 w 525294"/>
-                  <a:gd name="csY0" fmla="*/ 94034 h 188068"/>
-                  <a:gd name="csX1" fmla="*/ 262647 w 525294"/>
-                  <a:gd name="csY1" fmla="*/ 0 h 188068"/>
-                  <a:gd name="csX2" fmla="*/ 525294 w 525294"/>
-                  <a:gd name="csY2" fmla="*/ 94034 h 188068"/>
-                  <a:gd name="csX3" fmla="*/ 262647 w 525294"/>
-                  <a:gd name="csY3" fmla="*/ 188068 h 188068"/>
-                  <a:gd name="csX4" fmla="*/ 0 w 525294"/>
-                  <a:gd name="csY4" fmla="*/ 94034 h 188068"/>
-                  <a:gd name="csX0" fmla="*/ 0 w 623481"/>
-                  <a:gd name="csY0" fmla="*/ 94831 h 189220"/>
-                  <a:gd name="csX1" fmla="*/ 262647 w 623481"/>
-                  <a:gd name="csY1" fmla="*/ 797 h 189220"/>
-                  <a:gd name="csX2" fmla="*/ 623481 w 623481"/>
-                  <a:gd name="csY2" fmla="*/ 65276 h 189220"/>
-                  <a:gd name="csX3" fmla="*/ 262647 w 623481"/>
-                  <a:gd name="csY3" fmla="*/ 188865 h 189220"/>
-                  <a:gd name="csX4" fmla="*/ 0 w 623481"/>
-                  <a:gd name="csY4" fmla="*/ 94831 h 189220"/>
-                </a:gdLst>
-                <a:ahLst/>
-                <a:cxnLst>
-                  <a:cxn ang="0">
-                    <a:pos x="csX0" y="csY0"/>
-                  </a:cxn>
-                  <a:cxn ang="0">
-                    <a:pos x="csX1" y="csY1"/>
-                  </a:cxn>
-                  <a:cxn ang="0">
-                    <a:pos x="csX2" y="csY2"/>
-                  </a:cxn>
-                  <a:cxn ang="0">
-                    <a:pos x="csX3" y="csY3"/>
-                  </a:cxn>
-                  <a:cxn ang="0">
-                    <a:pos x="csX4" y="csY4"/>
-                  </a:cxn>
-                </a:cxnLst>
-                <a:rect l="l" t="t" r="r" b="b"/>
-                <a:pathLst>
-                  <a:path w="623481" h="189220">
-                    <a:moveTo>
-                      <a:pt x="0" y="94831"/>
-                    </a:moveTo>
-                    <a:cubicBezTo>
-                      <a:pt x="0" y="42897"/>
-                      <a:pt x="158734" y="5723"/>
-                      <a:pt x="262647" y="797"/>
-                    </a:cubicBezTo>
-                    <a:cubicBezTo>
-                      <a:pt x="366560" y="-4129"/>
-                      <a:pt x="623481" y="13342"/>
-                      <a:pt x="623481" y="65276"/>
-                    </a:cubicBezTo>
-                    <a:cubicBezTo>
-                      <a:pt x="623481" y="117210"/>
-                      <a:pt x="366560" y="183939"/>
-                      <a:pt x="262647" y="188865"/>
-                    </a:cubicBezTo>
-                    <a:cubicBezTo>
-                      <a:pt x="158734" y="193791"/>
-                      <a:pt x="0" y="146765"/>
-                      <a:pt x="0" y="94831"/>
-                    </a:cubicBezTo>
-                    <a:close/>
-                  </a:path>
-                </a:pathLst>
-              </a:custGeom>
+            </a:ln>
+          </p:spPr>
+          <p:style>
+            <a:lnRef idx="2">
+              <a:schemeClr val="accent6">
+                <a:shade val="15000"/>
+              </a:schemeClr>
+            </a:lnRef>
+            <a:fillRef idx="1">
+              <a:schemeClr val="accent6"/>
+            </a:fillRef>
+            <a:effectRef idx="0">
+              <a:schemeClr val="accent6"/>
+            </a:effectRef>
+            <a:fontRef idx="minor">
+              <a:schemeClr val="lt1"/>
+            </a:fontRef>
+          </p:style>
+          <p:txBody>
+            <a:bodyPr rtlCol="0" anchor="ctr"/>
+            <a:lstStyle/>
+            <a:p>
+              <a:pPr algn="ctr"/>
+              <a:endParaRPr lang="en-NZ"/>
+            </a:p>
+          </p:txBody>
+        </p:sp>
+        <p:sp>
+          <p:nvSpPr>
+            <p:cNvPr id="12" name="Oval 15">
+              <a:extLst>
+                <a:ext uri="{FF2B5EF4-FFF2-40B4-BE49-F238E27FC236}">
+                  <a16:creationId xmlns:a16="http://schemas.microsoft.com/office/drawing/2014/main" id="{D7D3338A-C6EE-D5B4-014C-2B4D81442A74}"/>
+                </a:ext>
+              </a:extLst>
+            </p:cNvPr>
+            <p:cNvSpPr/>
+            <p:nvPr/>
+          </p:nvSpPr>
+          <p:spPr>
+            <a:xfrm rot="16672422">
+              <a:off x="5925138" y="2645257"/>
+              <a:ext cx="384004" cy="76570"/>
+            </a:xfrm>
+            <a:custGeom>
+              <a:avLst/>
+              <a:gdLst>
+                <a:gd name="csX0" fmla="*/ 0 w 525294"/>
+                <a:gd name="csY0" fmla="*/ 94034 h 188068"/>
+                <a:gd name="csX1" fmla="*/ 262647 w 525294"/>
+                <a:gd name="csY1" fmla="*/ 0 h 188068"/>
+                <a:gd name="csX2" fmla="*/ 525294 w 525294"/>
+                <a:gd name="csY2" fmla="*/ 94034 h 188068"/>
+                <a:gd name="csX3" fmla="*/ 262647 w 525294"/>
+                <a:gd name="csY3" fmla="*/ 188068 h 188068"/>
+                <a:gd name="csX4" fmla="*/ 0 w 525294"/>
+                <a:gd name="csY4" fmla="*/ 94034 h 188068"/>
+                <a:gd name="csX0" fmla="*/ 0 w 623481"/>
+                <a:gd name="csY0" fmla="*/ 94831 h 189220"/>
+                <a:gd name="csX1" fmla="*/ 262647 w 623481"/>
+                <a:gd name="csY1" fmla="*/ 797 h 189220"/>
+                <a:gd name="csX2" fmla="*/ 623481 w 623481"/>
+                <a:gd name="csY2" fmla="*/ 65276 h 189220"/>
+                <a:gd name="csX3" fmla="*/ 262647 w 623481"/>
+                <a:gd name="csY3" fmla="*/ 188865 h 189220"/>
+                <a:gd name="csX4" fmla="*/ 0 w 623481"/>
+                <a:gd name="csY4" fmla="*/ 94831 h 189220"/>
+              </a:gdLst>
+              <a:ahLst/>
+              <a:cxnLst>
+                <a:cxn ang="0">
+                  <a:pos x="csX0" y="csY0"/>
+                </a:cxn>
+                <a:cxn ang="0">
+                  <a:pos x="csX1" y="csY1"/>
+                </a:cxn>
+                <a:cxn ang="0">
+                  <a:pos x="csX2" y="csY2"/>
+                </a:cxn>
+                <a:cxn ang="0">
+                  <a:pos x="csX3" y="csY3"/>
+                </a:cxn>
+                <a:cxn ang="0">
+                  <a:pos x="csX4" y="csY4"/>
+                </a:cxn>
+              </a:cxnLst>
+              <a:rect l="l" t="t" r="r" b="b"/>
+              <a:pathLst>
+                <a:path w="623481" h="189220">
+                  <a:moveTo>
+                    <a:pt x="0" y="94831"/>
+                  </a:moveTo>
+                  <a:cubicBezTo>
+                    <a:pt x="0" y="42897"/>
+                    <a:pt x="158734" y="5723"/>
+                    <a:pt x="262647" y="797"/>
+                  </a:cubicBezTo>
+                  <a:cubicBezTo>
+                    <a:pt x="366560" y="-4129"/>
+                    <a:pt x="623481" y="13342"/>
+                    <a:pt x="623481" y="65276"/>
+                  </a:cubicBezTo>
+                  <a:cubicBezTo>
+                    <a:pt x="623481" y="117210"/>
+                    <a:pt x="366560" y="183939"/>
+                    <a:pt x="262647" y="188865"/>
+                  </a:cubicBezTo>
+                  <a:cubicBezTo>
+                    <a:pt x="158734" y="193791"/>
+                    <a:pt x="0" y="146765"/>
+                    <a:pt x="0" y="94831"/>
+                  </a:cubicBezTo>
+                  <a:close/>
+                </a:path>
+              </a:pathLst>
+            </a:custGeom>
+            <a:solidFill>
+              <a:schemeClr val="accent6">
+                <a:lumMod val="75000"/>
+              </a:schemeClr>
+            </a:solidFill>
+            <a:ln>
               <a:solidFill>
                 <a:schemeClr val="accent6">
                   <a:lumMod val="75000"/>
                 </a:schemeClr>
               </a:solidFill>
-              <a:ln>
-                <a:solidFill>
-                  <a:schemeClr val="accent6">
-                    <a:lumMod val="75000"/>
-                  </a:schemeClr>
-                </a:solidFill>
-              </a:ln>
-            </p:spPr>
-            <p:style>
-              <a:lnRef idx="2">
-                <a:schemeClr val="accent6">
-                  <a:shade val="15000"/>
-                </a:schemeClr>
-              </a:lnRef>
-              <a:fillRef idx="1">
-                <a:schemeClr val="accent6"/>
-              </a:fillRef>
-              <a:effectRef idx="0">
-                <a:schemeClr val="accent6"/>
-              </a:effectRef>
-              <a:fontRef idx="minor">
-                <a:schemeClr val="lt1"/>
-              </a:fontRef>
-            </p:style>
-            <p:txBody>
-              <a:bodyPr rtlCol="0" anchor="ctr"/>
-              <a:lstStyle/>
-              <a:p>
-                <a:pPr algn="ctr"/>
-                <a:endParaRPr lang="en-NZ"/>
-              </a:p>
-            </p:txBody>
-          </p:sp>
-          <p:sp>
-            <p:nvSpPr>
-              <p:cNvPr id="13" name="Oval 15">
-                <a:extLst>
-                  <a:ext uri="{FF2B5EF4-FFF2-40B4-BE49-F238E27FC236}">
-                    <a16:creationId xmlns:a16="http://schemas.microsoft.com/office/drawing/2014/main" id="{307DDED2-445E-4E5F-B7FC-333245FB2F1F}"/>
-                  </a:ext>
-                </a:extLst>
-              </p:cNvPr>
-              <p:cNvSpPr/>
-              <p:nvPr/>
-            </p:nvSpPr>
-            <p:spPr>
-              <a:xfrm rot="14162025">
-                <a:off x="5581911" y="2324390"/>
-                <a:ext cx="367317" cy="70720"/>
-              </a:xfrm>
-              <a:custGeom>
-                <a:avLst/>
-                <a:gdLst>
-                  <a:gd name="csX0" fmla="*/ 0 w 525294"/>
-                  <a:gd name="csY0" fmla="*/ 94034 h 188068"/>
-                  <a:gd name="csX1" fmla="*/ 262647 w 525294"/>
-                  <a:gd name="csY1" fmla="*/ 0 h 188068"/>
-                  <a:gd name="csX2" fmla="*/ 525294 w 525294"/>
-                  <a:gd name="csY2" fmla="*/ 94034 h 188068"/>
-                  <a:gd name="csX3" fmla="*/ 262647 w 525294"/>
-                  <a:gd name="csY3" fmla="*/ 188068 h 188068"/>
-                  <a:gd name="csX4" fmla="*/ 0 w 525294"/>
-                  <a:gd name="csY4" fmla="*/ 94034 h 188068"/>
-                  <a:gd name="csX0" fmla="*/ 0 w 623481"/>
-                  <a:gd name="csY0" fmla="*/ 94831 h 189220"/>
-                  <a:gd name="csX1" fmla="*/ 262647 w 623481"/>
-                  <a:gd name="csY1" fmla="*/ 797 h 189220"/>
-                  <a:gd name="csX2" fmla="*/ 623481 w 623481"/>
-                  <a:gd name="csY2" fmla="*/ 65276 h 189220"/>
-                  <a:gd name="csX3" fmla="*/ 262647 w 623481"/>
-                  <a:gd name="csY3" fmla="*/ 188865 h 189220"/>
-                  <a:gd name="csX4" fmla="*/ 0 w 623481"/>
-                  <a:gd name="csY4" fmla="*/ 94831 h 189220"/>
-                </a:gdLst>
-                <a:ahLst/>
-                <a:cxnLst>
-                  <a:cxn ang="0">
-                    <a:pos x="csX0" y="csY0"/>
-                  </a:cxn>
-                  <a:cxn ang="0">
-                    <a:pos x="csX1" y="csY1"/>
-                  </a:cxn>
-                  <a:cxn ang="0">
-                    <a:pos x="csX2" y="csY2"/>
-                  </a:cxn>
-                  <a:cxn ang="0">
-                    <a:pos x="csX3" y="csY3"/>
-                  </a:cxn>
-                  <a:cxn ang="0">
-                    <a:pos x="csX4" y="csY4"/>
-                  </a:cxn>
-                </a:cxnLst>
-                <a:rect l="l" t="t" r="r" b="b"/>
-                <a:pathLst>
-                  <a:path w="623481" h="189220">
-                    <a:moveTo>
-                      <a:pt x="0" y="94831"/>
-                    </a:moveTo>
-                    <a:cubicBezTo>
-                      <a:pt x="0" y="42897"/>
-                      <a:pt x="158734" y="5723"/>
-                      <a:pt x="262647" y="797"/>
-                    </a:cubicBezTo>
-                    <a:cubicBezTo>
-                      <a:pt x="366560" y="-4129"/>
-                      <a:pt x="623481" y="13342"/>
-                      <a:pt x="623481" y="65276"/>
-                    </a:cubicBezTo>
-                    <a:cubicBezTo>
-                      <a:pt x="623481" y="117210"/>
-                      <a:pt x="366560" y="183939"/>
-                      <a:pt x="262647" y="188865"/>
-                    </a:cubicBezTo>
-                    <a:cubicBezTo>
-                      <a:pt x="158734" y="193791"/>
-                      <a:pt x="0" y="146765"/>
-                      <a:pt x="0" y="94831"/>
-                    </a:cubicBezTo>
-                    <a:close/>
-                  </a:path>
-                </a:pathLst>
-              </a:custGeom>
+            </a:ln>
+          </p:spPr>
+          <p:style>
+            <a:lnRef idx="2">
+              <a:schemeClr val="accent6">
+                <a:shade val="15000"/>
+              </a:schemeClr>
+            </a:lnRef>
+            <a:fillRef idx="1">
+              <a:schemeClr val="accent6"/>
+            </a:fillRef>
+            <a:effectRef idx="0">
+              <a:schemeClr val="accent6"/>
+            </a:effectRef>
+            <a:fontRef idx="minor">
+              <a:schemeClr val="lt1"/>
+            </a:fontRef>
+          </p:style>
+          <p:txBody>
+            <a:bodyPr rtlCol="0" anchor="ctr"/>
+            <a:lstStyle/>
+            <a:p>
+              <a:pPr algn="ctr"/>
+              <a:endParaRPr lang="en-NZ"/>
+            </a:p>
+          </p:txBody>
+        </p:sp>
+        <p:sp>
+          <p:nvSpPr>
+            <p:cNvPr id="13" name="Oval 15">
+              <a:extLst>
+                <a:ext uri="{FF2B5EF4-FFF2-40B4-BE49-F238E27FC236}">
+                  <a16:creationId xmlns:a16="http://schemas.microsoft.com/office/drawing/2014/main" id="{307DDED2-445E-4E5F-B7FC-333245FB2F1F}"/>
+                </a:ext>
+              </a:extLst>
+            </p:cNvPr>
+            <p:cNvSpPr/>
+            <p:nvPr/>
+          </p:nvSpPr>
+          <p:spPr>
+            <a:xfrm rot="14162025">
+              <a:off x="5581911" y="2324390"/>
+              <a:ext cx="367317" cy="70720"/>
+            </a:xfrm>
+            <a:custGeom>
+              <a:avLst/>
+              <a:gdLst>
+                <a:gd name="csX0" fmla="*/ 0 w 525294"/>
+                <a:gd name="csY0" fmla="*/ 94034 h 188068"/>
+                <a:gd name="csX1" fmla="*/ 262647 w 525294"/>
+                <a:gd name="csY1" fmla="*/ 0 h 188068"/>
+                <a:gd name="csX2" fmla="*/ 525294 w 525294"/>
+                <a:gd name="csY2" fmla="*/ 94034 h 188068"/>
+                <a:gd name="csX3" fmla="*/ 262647 w 525294"/>
+                <a:gd name="csY3" fmla="*/ 188068 h 188068"/>
+                <a:gd name="csX4" fmla="*/ 0 w 525294"/>
+                <a:gd name="csY4" fmla="*/ 94034 h 188068"/>
+                <a:gd name="csX0" fmla="*/ 0 w 623481"/>
+                <a:gd name="csY0" fmla="*/ 94831 h 189220"/>
+                <a:gd name="csX1" fmla="*/ 262647 w 623481"/>
+                <a:gd name="csY1" fmla="*/ 797 h 189220"/>
+                <a:gd name="csX2" fmla="*/ 623481 w 623481"/>
+                <a:gd name="csY2" fmla="*/ 65276 h 189220"/>
+                <a:gd name="csX3" fmla="*/ 262647 w 623481"/>
+                <a:gd name="csY3" fmla="*/ 188865 h 189220"/>
+                <a:gd name="csX4" fmla="*/ 0 w 623481"/>
+                <a:gd name="csY4" fmla="*/ 94831 h 189220"/>
+              </a:gdLst>
+              <a:ahLst/>
+              <a:cxnLst>
+                <a:cxn ang="0">
+                  <a:pos x="csX0" y="csY0"/>
+                </a:cxn>
+                <a:cxn ang="0">
+                  <a:pos x="csX1" y="csY1"/>
+                </a:cxn>
+                <a:cxn ang="0">
+                  <a:pos x="csX2" y="csY2"/>
+                </a:cxn>
+                <a:cxn ang="0">
+                  <a:pos x="csX3" y="csY3"/>
+                </a:cxn>
+                <a:cxn ang="0">
+                  <a:pos x="csX4" y="csY4"/>
+                </a:cxn>
+              </a:cxnLst>
+              <a:rect l="l" t="t" r="r" b="b"/>
+              <a:pathLst>
+                <a:path w="623481" h="189220">
+                  <a:moveTo>
+                    <a:pt x="0" y="94831"/>
+                  </a:moveTo>
+                  <a:cubicBezTo>
+                    <a:pt x="0" y="42897"/>
+                    <a:pt x="158734" y="5723"/>
+                    <a:pt x="262647" y="797"/>
+                  </a:cubicBezTo>
+                  <a:cubicBezTo>
+                    <a:pt x="366560" y="-4129"/>
+                    <a:pt x="623481" y="13342"/>
+                    <a:pt x="623481" y="65276"/>
+                  </a:cubicBezTo>
+                  <a:cubicBezTo>
+                    <a:pt x="623481" y="117210"/>
+                    <a:pt x="366560" y="183939"/>
+                    <a:pt x="262647" y="188865"/>
+                  </a:cubicBezTo>
+                  <a:cubicBezTo>
+                    <a:pt x="158734" y="193791"/>
+                    <a:pt x="0" y="146765"/>
+                    <a:pt x="0" y="94831"/>
+                  </a:cubicBezTo>
+                  <a:close/>
+                </a:path>
+              </a:pathLst>
+            </a:custGeom>
+            <a:solidFill>
+              <a:schemeClr val="accent6">
+                <a:lumMod val="75000"/>
+              </a:schemeClr>
+            </a:solidFill>
+            <a:ln>
               <a:solidFill>
                 <a:schemeClr val="accent6">
                   <a:lumMod val="75000"/>
                 </a:schemeClr>
               </a:solidFill>
-              <a:ln>
-                <a:solidFill>
-                  <a:schemeClr val="accent6">
-                    <a:lumMod val="75000"/>
-                  </a:schemeClr>
-                </a:solidFill>
-              </a:ln>
-            </p:spPr>
-            <p:style>
-              <a:lnRef idx="2">
-                <a:schemeClr val="accent6">
-                  <a:shade val="15000"/>
-                </a:schemeClr>
-              </a:lnRef>
-              <a:fillRef idx="1">
-                <a:schemeClr val="accent6"/>
-              </a:fillRef>
-              <a:effectRef idx="0">
-                <a:schemeClr val="accent6"/>
-              </a:effectRef>
-              <a:fontRef idx="minor">
-                <a:schemeClr val="lt1"/>
-              </a:fontRef>
-            </p:style>
-            <p:txBody>
-              <a:bodyPr rtlCol="0" anchor="ctr"/>
-              <a:lstStyle/>
-              <a:p>
-                <a:pPr algn="ctr"/>
-                <a:endParaRPr lang="en-NZ"/>
-              </a:p>
-            </p:txBody>
-          </p:sp>
-          <p:sp>
-            <p:nvSpPr>
-              <p:cNvPr id="14" name="Oval 15">
-                <a:extLst>
-                  <a:ext uri="{FF2B5EF4-FFF2-40B4-BE49-F238E27FC236}">
-                    <a16:creationId xmlns:a16="http://schemas.microsoft.com/office/drawing/2014/main" id="{7B5E1C3C-210C-9516-8755-2640F9550CFF}"/>
-                  </a:ext>
-                </a:extLst>
-              </p:cNvPr>
-              <p:cNvSpPr/>
-              <p:nvPr/>
-            </p:nvSpPr>
-            <p:spPr>
-              <a:xfrm rot="2313172" flipH="1">
-                <a:off x="5906204" y="3935761"/>
-                <a:ext cx="368562" cy="86250"/>
-              </a:xfrm>
-              <a:custGeom>
-                <a:avLst/>
-                <a:gdLst>
-                  <a:gd name="csX0" fmla="*/ 0 w 525294"/>
-                  <a:gd name="csY0" fmla="*/ 94034 h 188068"/>
-                  <a:gd name="csX1" fmla="*/ 262647 w 525294"/>
-                  <a:gd name="csY1" fmla="*/ 0 h 188068"/>
-                  <a:gd name="csX2" fmla="*/ 525294 w 525294"/>
-                  <a:gd name="csY2" fmla="*/ 94034 h 188068"/>
-                  <a:gd name="csX3" fmla="*/ 262647 w 525294"/>
-                  <a:gd name="csY3" fmla="*/ 188068 h 188068"/>
-                  <a:gd name="csX4" fmla="*/ 0 w 525294"/>
-                  <a:gd name="csY4" fmla="*/ 94034 h 188068"/>
-                  <a:gd name="csX0" fmla="*/ 0 w 623481"/>
-                  <a:gd name="csY0" fmla="*/ 94831 h 189220"/>
-                  <a:gd name="csX1" fmla="*/ 262647 w 623481"/>
-                  <a:gd name="csY1" fmla="*/ 797 h 189220"/>
-                  <a:gd name="csX2" fmla="*/ 623481 w 623481"/>
-                  <a:gd name="csY2" fmla="*/ 65276 h 189220"/>
-                  <a:gd name="csX3" fmla="*/ 262647 w 623481"/>
-                  <a:gd name="csY3" fmla="*/ 188865 h 189220"/>
-                  <a:gd name="csX4" fmla="*/ 0 w 623481"/>
-                  <a:gd name="csY4" fmla="*/ 94831 h 189220"/>
-                </a:gdLst>
-                <a:ahLst/>
-                <a:cxnLst>
-                  <a:cxn ang="0">
-                    <a:pos x="csX0" y="csY0"/>
-                  </a:cxn>
-                  <a:cxn ang="0">
-                    <a:pos x="csX1" y="csY1"/>
-                  </a:cxn>
-                  <a:cxn ang="0">
-                    <a:pos x="csX2" y="csY2"/>
-                  </a:cxn>
-                  <a:cxn ang="0">
-                    <a:pos x="csX3" y="csY3"/>
-                  </a:cxn>
-                  <a:cxn ang="0">
-                    <a:pos x="csX4" y="csY4"/>
-                  </a:cxn>
-                </a:cxnLst>
-                <a:rect l="l" t="t" r="r" b="b"/>
-                <a:pathLst>
-                  <a:path w="623481" h="189220">
-                    <a:moveTo>
-                      <a:pt x="0" y="94831"/>
-                    </a:moveTo>
-                    <a:cubicBezTo>
-                      <a:pt x="0" y="42897"/>
-                      <a:pt x="158734" y="5723"/>
-                      <a:pt x="262647" y="797"/>
-                    </a:cubicBezTo>
-                    <a:cubicBezTo>
-                      <a:pt x="366560" y="-4129"/>
-                      <a:pt x="623481" y="13342"/>
-                      <a:pt x="623481" y="65276"/>
-                    </a:cubicBezTo>
-                    <a:cubicBezTo>
-                      <a:pt x="623481" y="117210"/>
-                      <a:pt x="366560" y="183939"/>
-                      <a:pt x="262647" y="188865"/>
-                    </a:cubicBezTo>
-                    <a:cubicBezTo>
-                      <a:pt x="158734" y="193791"/>
-                      <a:pt x="0" y="146765"/>
-                      <a:pt x="0" y="94831"/>
-                    </a:cubicBezTo>
-                    <a:close/>
-                  </a:path>
-                </a:pathLst>
-              </a:custGeom>
+            </a:ln>
+          </p:spPr>
+          <p:style>
+            <a:lnRef idx="2">
+              <a:schemeClr val="accent6">
+                <a:shade val="15000"/>
+              </a:schemeClr>
+            </a:lnRef>
+            <a:fillRef idx="1">
+              <a:schemeClr val="accent6"/>
+            </a:fillRef>
+            <a:effectRef idx="0">
+              <a:schemeClr val="accent6"/>
+            </a:effectRef>
+            <a:fontRef idx="minor">
+              <a:schemeClr val="lt1"/>
+            </a:fontRef>
+          </p:style>
+          <p:txBody>
+            <a:bodyPr rtlCol="0" anchor="ctr"/>
+            <a:lstStyle/>
+            <a:p>
+              <a:pPr algn="ctr"/>
+              <a:endParaRPr lang="en-NZ"/>
+            </a:p>
+          </p:txBody>
+        </p:sp>
+        <p:sp>
+          <p:nvSpPr>
+            <p:cNvPr id="14" name="Oval 15">
+              <a:extLst>
+                <a:ext uri="{FF2B5EF4-FFF2-40B4-BE49-F238E27FC236}">
+                  <a16:creationId xmlns:a16="http://schemas.microsoft.com/office/drawing/2014/main" id="{7B5E1C3C-210C-9516-8755-2640F9550CFF}"/>
+                </a:ext>
+              </a:extLst>
+            </p:cNvPr>
+            <p:cNvSpPr/>
+            <p:nvPr/>
+          </p:nvSpPr>
+          <p:spPr>
+            <a:xfrm rot="2313172" flipH="1">
+              <a:off x="5906204" y="3935761"/>
+              <a:ext cx="368562" cy="86250"/>
+            </a:xfrm>
+            <a:custGeom>
+              <a:avLst/>
+              <a:gdLst>
+                <a:gd name="csX0" fmla="*/ 0 w 525294"/>
+                <a:gd name="csY0" fmla="*/ 94034 h 188068"/>
+                <a:gd name="csX1" fmla="*/ 262647 w 525294"/>
+                <a:gd name="csY1" fmla="*/ 0 h 188068"/>
+                <a:gd name="csX2" fmla="*/ 525294 w 525294"/>
+                <a:gd name="csY2" fmla="*/ 94034 h 188068"/>
+                <a:gd name="csX3" fmla="*/ 262647 w 525294"/>
+                <a:gd name="csY3" fmla="*/ 188068 h 188068"/>
+                <a:gd name="csX4" fmla="*/ 0 w 525294"/>
+                <a:gd name="csY4" fmla="*/ 94034 h 188068"/>
+                <a:gd name="csX0" fmla="*/ 0 w 623481"/>
+                <a:gd name="csY0" fmla="*/ 94831 h 189220"/>
+                <a:gd name="csX1" fmla="*/ 262647 w 623481"/>
+                <a:gd name="csY1" fmla="*/ 797 h 189220"/>
+                <a:gd name="csX2" fmla="*/ 623481 w 623481"/>
+                <a:gd name="csY2" fmla="*/ 65276 h 189220"/>
+                <a:gd name="csX3" fmla="*/ 262647 w 623481"/>
+                <a:gd name="csY3" fmla="*/ 188865 h 189220"/>
+                <a:gd name="csX4" fmla="*/ 0 w 623481"/>
+                <a:gd name="csY4" fmla="*/ 94831 h 189220"/>
+              </a:gdLst>
+              <a:ahLst/>
+              <a:cxnLst>
+                <a:cxn ang="0">
+                  <a:pos x="csX0" y="csY0"/>
+                </a:cxn>
+                <a:cxn ang="0">
+                  <a:pos x="csX1" y="csY1"/>
+                </a:cxn>
+                <a:cxn ang="0">
+                  <a:pos x="csX2" y="csY2"/>
+                </a:cxn>
+                <a:cxn ang="0">
+                  <a:pos x="csX3" y="csY3"/>
+                </a:cxn>
+                <a:cxn ang="0">
+                  <a:pos x="csX4" y="csY4"/>
+                </a:cxn>
+              </a:cxnLst>
+              <a:rect l="l" t="t" r="r" b="b"/>
+              <a:pathLst>
+                <a:path w="623481" h="189220">
+                  <a:moveTo>
+                    <a:pt x="0" y="94831"/>
+                  </a:moveTo>
+                  <a:cubicBezTo>
+                    <a:pt x="0" y="42897"/>
+                    <a:pt x="158734" y="5723"/>
+                    <a:pt x="262647" y="797"/>
+                  </a:cubicBezTo>
+                  <a:cubicBezTo>
+                    <a:pt x="366560" y="-4129"/>
+                    <a:pt x="623481" y="13342"/>
+                    <a:pt x="623481" y="65276"/>
+                  </a:cubicBezTo>
+                  <a:cubicBezTo>
+                    <a:pt x="623481" y="117210"/>
+                    <a:pt x="366560" y="183939"/>
+                    <a:pt x="262647" y="188865"/>
+                  </a:cubicBezTo>
+                  <a:cubicBezTo>
+                    <a:pt x="158734" y="193791"/>
+                    <a:pt x="0" y="146765"/>
+                    <a:pt x="0" y="94831"/>
+                  </a:cubicBezTo>
+                  <a:close/>
+                </a:path>
+              </a:pathLst>
+            </a:custGeom>
+            <a:solidFill>
+              <a:schemeClr val="accent6">
+                <a:lumMod val="75000"/>
+              </a:schemeClr>
+            </a:solidFill>
+            <a:ln>
               <a:solidFill>
                 <a:schemeClr val="accent6">
                   <a:lumMod val="75000"/>
                 </a:schemeClr>
               </a:solidFill>
-              <a:ln>
-                <a:solidFill>
-                  <a:schemeClr val="accent6">
-                    <a:lumMod val="75000"/>
-                  </a:schemeClr>
-                </a:solidFill>
-              </a:ln>
-            </p:spPr>
-            <p:style>
-              <a:lnRef idx="2">
-                <a:schemeClr val="accent6">
-                  <a:shade val="15000"/>
-                </a:schemeClr>
-              </a:lnRef>
-              <a:fillRef idx="1">
-                <a:schemeClr val="accent6"/>
-              </a:fillRef>
-              <a:effectRef idx="0">
-                <a:schemeClr val="accent6"/>
-              </a:effectRef>
-              <a:fontRef idx="minor">
-                <a:schemeClr val="lt1"/>
-              </a:fontRef>
-            </p:style>
-            <p:txBody>
-              <a:bodyPr rtlCol="0" anchor="ctr"/>
-              <a:lstStyle/>
-              <a:p>
-                <a:pPr algn="ctr"/>
-                <a:endParaRPr lang="en-NZ"/>
-              </a:p>
-            </p:txBody>
-          </p:sp>
-          <p:sp>
-            <p:nvSpPr>
-              <p:cNvPr id="16" name="Oval 15">
-                <a:extLst>
-                  <a:ext uri="{FF2B5EF4-FFF2-40B4-BE49-F238E27FC236}">
-                    <a16:creationId xmlns:a16="http://schemas.microsoft.com/office/drawing/2014/main" id="{A87DD1C5-A39D-F682-658F-CCA892157DB1}"/>
-                  </a:ext>
-                </a:extLst>
-              </p:cNvPr>
-              <p:cNvSpPr/>
-              <p:nvPr/>
-            </p:nvSpPr>
-            <p:spPr>
-              <a:xfrm rot="2313172" flipH="1">
-                <a:off x="5988751" y="3323709"/>
-                <a:ext cx="291208" cy="92887"/>
-              </a:xfrm>
-              <a:custGeom>
-                <a:avLst/>
-                <a:gdLst>
-                  <a:gd name="csX0" fmla="*/ 0 w 525294"/>
-                  <a:gd name="csY0" fmla="*/ 94034 h 188068"/>
-                  <a:gd name="csX1" fmla="*/ 262647 w 525294"/>
-                  <a:gd name="csY1" fmla="*/ 0 h 188068"/>
-                  <a:gd name="csX2" fmla="*/ 525294 w 525294"/>
-                  <a:gd name="csY2" fmla="*/ 94034 h 188068"/>
-                  <a:gd name="csX3" fmla="*/ 262647 w 525294"/>
-                  <a:gd name="csY3" fmla="*/ 188068 h 188068"/>
-                  <a:gd name="csX4" fmla="*/ 0 w 525294"/>
-                  <a:gd name="csY4" fmla="*/ 94034 h 188068"/>
-                  <a:gd name="csX0" fmla="*/ 0 w 623481"/>
-                  <a:gd name="csY0" fmla="*/ 94831 h 189220"/>
-                  <a:gd name="csX1" fmla="*/ 262647 w 623481"/>
-                  <a:gd name="csY1" fmla="*/ 797 h 189220"/>
-                  <a:gd name="csX2" fmla="*/ 623481 w 623481"/>
-                  <a:gd name="csY2" fmla="*/ 65276 h 189220"/>
-                  <a:gd name="csX3" fmla="*/ 262647 w 623481"/>
-                  <a:gd name="csY3" fmla="*/ 188865 h 189220"/>
-                  <a:gd name="csX4" fmla="*/ 0 w 623481"/>
-                  <a:gd name="csY4" fmla="*/ 94831 h 189220"/>
-                </a:gdLst>
-                <a:ahLst/>
-                <a:cxnLst>
-                  <a:cxn ang="0">
-                    <a:pos x="csX0" y="csY0"/>
-                  </a:cxn>
-                  <a:cxn ang="0">
-                    <a:pos x="csX1" y="csY1"/>
-                  </a:cxn>
-                  <a:cxn ang="0">
-                    <a:pos x="csX2" y="csY2"/>
-                  </a:cxn>
-                  <a:cxn ang="0">
-                    <a:pos x="csX3" y="csY3"/>
-                  </a:cxn>
-                  <a:cxn ang="0">
-                    <a:pos x="csX4" y="csY4"/>
-                  </a:cxn>
-                </a:cxnLst>
-                <a:rect l="l" t="t" r="r" b="b"/>
-                <a:pathLst>
-                  <a:path w="623481" h="189220">
-                    <a:moveTo>
-                      <a:pt x="0" y="94831"/>
-                    </a:moveTo>
-                    <a:cubicBezTo>
-                      <a:pt x="0" y="42897"/>
-                      <a:pt x="158734" y="5723"/>
-                      <a:pt x="262647" y="797"/>
-                    </a:cubicBezTo>
-                    <a:cubicBezTo>
-                      <a:pt x="366560" y="-4129"/>
-                      <a:pt x="623481" y="13342"/>
-                      <a:pt x="623481" y="65276"/>
-                    </a:cubicBezTo>
-                    <a:cubicBezTo>
-                      <a:pt x="623481" y="117210"/>
-                      <a:pt x="366560" y="183939"/>
-                      <a:pt x="262647" y="188865"/>
-                    </a:cubicBezTo>
-                    <a:cubicBezTo>
-                      <a:pt x="158734" y="193791"/>
-                      <a:pt x="0" y="146765"/>
-                      <a:pt x="0" y="94831"/>
-                    </a:cubicBezTo>
-                    <a:close/>
-                  </a:path>
-                </a:pathLst>
-              </a:custGeom>
+            </a:ln>
+          </p:spPr>
+          <p:style>
+            <a:lnRef idx="2">
+              <a:schemeClr val="accent6">
+                <a:shade val="15000"/>
+              </a:schemeClr>
+            </a:lnRef>
+            <a:fillRef idx="1">
+              <a:schemeClr val="accent6"/>
+            </a:fillRef>
+            <a:effectRef idx="0">
+              <a:schemeClr val="accent6"/>
+            </a:effectRef>
+            <a:fontRef idx="minor">
+              <a:schemeClr val="lt1"/>
+            </a:fontRef>
+          </p:style>
+          <p:txBody>
+            <a:bodyPr rtlCol="0" anchor="ctr"/>
+            <a:lstStyle/>
+            <a:p>
+              <a:pPr algn="ctr"/>
+              <a:endParaRPr lang="en-NZ"/>
+            </a:p>
+          </p:txBody>
+        </p:sp>
+        <p:sp>
+          <p:nvSpPr>
+            <p:cNvPr id="16" name="Oval 15">
+              <a:extLst>
+                <a:ext uri="{FF2B5EF4-FFF2-40B4-BE49-F238E27FC236}">
+                  <a16:creationId xmlns:a16="http://schemas.microsoft.com/office/drawing/2014/main" id="{A87DD1C5-A39D-F682-658F-CCA892157DB1}"/>
+                </a:ext>
+              </a:extLst>
+            </p:cNvPr>
+            <p:cNvSpPr/>
+            <p:nvPr/>
+          </p:nvSpPr>
+          <p:spPr>
+            <a:xfrm rot="2313172" flipH="1">
+              <a:off x="5988751" y="3323709"/>
+              <a:ext cx="291208" cy="92887"/>
+            </a:xfrm>
+            <a:custGeom>
+              <a:avLst/>
+              <a:gdLst>
+                <a:gd name="csX0" fmla="*/ 0 w 525294"/>
+                <a:gd name="csY0" fmla="*/ 94034 h 188068"/>
+                <a:gd name="csX1" fmla="*/ 262647 w 525294"/>
+                <a:gd name="csY1" fmla="*/ 0 h 188068"/>
+                <a:gd name="csX2" fmla="*/ 525294 w 525294"/>
+                <a:gd name="csY2" fmla="*/ 94034 h 188068"/>
+                <a:gd name="csX3" fmla="*/ 262647 w 525294"/>
+                <a:gd name="csY3" fmla="*/ 188068 h 188068"/>
+                <a:gd name="csX4" fmla="*/ 0 w 525294"/>
+                <a:gd name="csY4" fmla="*/ 94034 h 188068"/>
+                <a:gd name="csX0" fmla="*/ 0 w 623481"/>
+                <a:gd name="csY0" fmla="*/ 94831 h 189220"/>
+                <a:gd name="csX1" fmla="*/ 262647 w 623481"/>
+                <a:gd name="csY1" fmla="*/ 797 h 189220"/>
+                <a:gd name="csX2" fmla="*/ 623481 w 623481"/>
+                <a:gd name="csY2" fmla="*/ 65276 h 189220"/>
+                <a:gd name="csX3" fmla="*/ 262647 w 623481"/>
+                <a:gd name="csY3" fmla="*/ 188865 h 189220"/>
+                <a:gd name="csX4" fmla="*/ 0 w 623481"/>
+                <a:gd name="csY4" fmla="*/ 94831 h 189220"/>
+              </a:gdLst>
+              <a:ahLst/>
+              <a:cxnLst>
+                <a:cxn ang="0">
+                  <a:pos x="csX0" y="csY0"/>
+                </a:cxn>
+                <a:cxn ang="0">
+                  <a:pos x="csX1" y="csY1"/>
+                </a:cxn>
+                <a:cxn ang="0">
+                  <a:pos x="csX2" y="csY2"/>
+                </a:cxn>
+                <a:cxn ang="0">
+                  <a:pos x="csX3" y="csY3"/>
+                </a:cxn>
+                <a:cxn ang="0">
+                  <a:pos x="csX4" y="csY4"/>
+                </a:cxn>
+              </a:cxnLst>
+              <a:rect l="l" t="t" r="r" b="b"/>
+              <a:pathLst>
+                <a:path w="623481" h="189220">
+                  <a:moveTo>
+                    <a:pt x="0" y="94831"/>
+                  </a:moveTo>
+                  <a:cubicBezTo>
+                    <a:pt x="0" y="42897"/>
+                    <a:pt x="158734" y="5723"/>
+                    <a:pt x="262647" y="797"/>
+                  </a:cubicBezTo>
+                  <a:cubicBezTo>
+                    <a:pt x="366560" y="-4129"/>
+                    <a:pt x="623481" y="13342"/>
+                    <a:pt x="623481" y="65276"/>
+                  </a:cubicBezTo>
+                  <a:cubicBezTo>
+                    <a:pt x="623481" y="117210"/>
+                    <a:pt x="366560" y="183939"/>
+                    <a:pt x="262647" y="188865"/>
+                  </a:cubicBezTo>
+                  <a:cubicBezTo>
+                    <a:pt x="158734" y="193791"/>
+                    <a:pt x="0" y="146765"/>
+                    <a:pt x="0" y="94831"/>
+                  </a:cubicBezTo>
+                  <a:close/>
+                </a:path>
+              </a:pathLst>
+            </a:custGeom>
+            <a:solidFill>
+              <a:schemeClr val="accent6">
+                <a:lumMod val="75000"/>
+              </a:schemeClr>
+            </a:solidFill>
+            <a:ln>
               <a:solidFill>
                 <a:schemeClr val="accent6">
                   <a:lumMod val="75000"/>
                 </a:schemeClr>
               </a:solidFill>
-              <a:ln>
-                <a:solidFill>
-                  <a:schemeClr val="accent6">
-                    <a:lumMod val="75000"/>
-                  </a:schemeClr>
-                </a:solidFill>
-              </a:ln>
-            </p:spPr>
-            <p:style>
-              <a:lnRef idx="2">
-                <a:schemeClr val="accent6">
-                  <a:shade val="15000"/>
-                </a:schemeClr>
-              </a:lnRef>
-              <a:fillRef idx="1">
-                <a:schemeClr val="accent6"/>
-              </a:fillRef>
-              <a:effectRef idx="0">
-                <a:schemeClr val="accent6"/>
-              </a:effectRef>
-              <a:fontRef idx="minor">
-                <a:schemeClr val="lt1"/>
-              </a:fontRef>
-            </p:style>
-            <p:txBody>
-              <a:bodyPr rtlCol="0" anchor="ctr"/>
-              <a:lstStyle/>
-              <a:p>
-                <a:pPr algn="ctr"/>
-                <a:endParaRPr lang="en-NZ"/>
-              </a:p>
-            </p:txBody>
-          </p:sp>
-          <p:sp>
-            <p:nvSpPr>
-              <p:cNvPr id="17" name="Oval 15">
-                <a:extLst>
-                  <a:ext uri="{FF2B5EF4-FFF2-40B4-BE49-F238E27FC236}">
-                    <a16:creationId xmlns:a16="http://schemas.microsoft.com/office/drawing/2014/main" id="{933A393D-9973-AA86-FE02-CB612DB39D30}"/>
-                  </a:ext>
-                </a:extLst>
-              </p:cNvPr>
-              <p:cNvSpPr/>
-              <p:nvPr/>
-            </p:nvSpPr>
-            <p:spPr>
-              <a:xfrm rot="17214883">
-                <a:off x="6115209" y="3106268"/>
-                <a:ext cx="428121" cy="76467"/>
-              </a:xfrm>
-              <a:custGeom>
-                <a:avLst/>
-                <a:gdLst>
-                  <a:gd name="csX0" fmla="*/ 0 w 525294"/>
-                  <a:gd name="csY0" fmla="*/ 94034 h 188068"/>
-                  <a:gd name="csX1" fmla="*/ 262647 w 525294"/>
-                  <a:gd name="csY1" fmla="*/ 0 h 188068"/>
-                  <a:gd name="csX2" fmla="*/ 525294 w 525294"/>
-                  <a:gd name="csY2" fmla="*/ 94034 h 188068"/>
-                  <a:gd name="csX3" fmla="*/ 262647 w 525294"/>
-                  <a:gd name="csY3" fmla="*/ 188068 h 188068"/>
-                  <a:gd name="csX4" fmla="*/ 0 w 525294"/>
-                  <a:gd name="csY4" fmla="*/ 94034 h 188068"/>
-                  <a:gd name="csX0" fmla="*/ 0 w 623481"/>
-                  <a:gd name="csY0" fmla="*/ 94831 h 189220"/>
-                  <a:gd name="csX1" fmla="*/ 262647 w 623481"/>
-                  <a:gd name="csY1" fmla="*/ 797 h 189220"/>
-                  <a:gd name="csX2" fmla="*/ 623481 w 623481"/>
-                  <a:gd name="csY2" fmla="*/ 65276 h 189220"/>
-                  <a:gd name="csX3" fmla="*/ 262647 w 623481"/>
-                  <a:gd name="csY3" fmla="*/ 188865 h 189220"/>
-                  <a:gd name="csX4" fmla="*/ 0 w 623481"/>
-                  <a:gd name="csY4" fmla="*/ 94831 h 189220"/>
-                </a:gdLst>
-                <a:ahLst/>
-                <a:cxnLst>
-                  <a:cxn ang="0">
-                    <a:pos x="csX0" y="csY0"/>
-                  </a:cxn>
-                  <a:cxn ang="0">
-                    <a:pos x="csX1" y="csY1"/>
-                  </a:cxn>
-                  <a:cxn ang="0">
-                    <a:pos x="csX2" y="csY2"/>
-                  </a:cxn>
-                  <a:cxn ang="0">
-                    <a:pos x="csX3" y="csY3"/>
-                  </a:cxn>
-                  <a:cxn ang="0">
-                    <a:pos x="csX4" y="csY4"/>
-                  </a:cxn>
-                </a:cxnLst>
-                <a:rect l="l" t="t" r="r" b="b"/>
-                <a:pathLst>
-                  <a:path w="623481" h="189220">
-                    <a:moveTo>
-                      <a:pt x="0" y="94831"/>
-                    </a:moveTo>
-                    <a:cubicBezTo>
-                      <a:pt x="0" y="42897"/>
-                      <a:pt x="158734" y="5723"/>
-                      <a:pt x="262647" y="797"/>
-                    </a:cubicBezTo>
-                    <a:cubicBezTo>
-                      <a:pt x="366560" y="-4129"/>
-                      <a:pt x="623481" y="13342"/>
-                      <a:pt x="623481" y="65276"/>
-                    </a:cubicBezTo>
-                    <a:cubicBezTo>
-                      <a:pt x="623481" y="117210"/>
-                      <a:pt x="366560" y="183939"/>
-                      <a:pt x="262647" y="188865"/>
-                    </a:cubicBezTo>
-                    <a:cubicBezTo>
-                      <a:pt x="158734" y="193791"/>
-                      <a:pt x="0" y="146765"/>
-                      <a:pt x="0" y="94831"/>
-                    </a:cubicBezTo>
-                    <a:close/>
-                  </a:path>
-                </a:pathLst>
-              </a:custGeom>
+            </a:ln>
+          </p:spPr>
+          <p:style>
+            <a:lnRef idx="2">
+              <a:schemeClr val="accent6">
+                <a:shade val="15000"/>
+              </a:schemeClr>
+            </a:lnRef>
+            <a:fillRef idx="1">
+              <a:schemeClr val="accent6"/>
+            </a:fillRef>
+            <a:effectRef idx="0">
+              <a:schemeClr val="accent6"/>
+            </a:effectRef>
+            <a:fontRef idx="minor">
+              <a:schemeClr val="lt1"/>
+            </a:fontRef>
+          </p:style>
+          <p:txBody>
+            <a:bodyPr rtlCol="0" anchor="ctr"/>
+            <a:lstStyle/>
+            <a:p>
+              <a:pPr algn="ctr"/>
+              <a:endParaRPr lang="en-NZ"/>
+            </a:p>
+          </p:txBody>
+        </p:sp>
+        <p:sp>
+          <p:nvSpPr>
+            <p:cNvPr id="17" name="Oval 15">
+              <a:extLst>
+                <a:ext uri="{FF2B5EF4-FFF2-40B4-BE49-F238E27FC236}">
+                  <a16:creationId xmlns:a16="http://schemas.microsoft.com/office/drawing/2014/main" id="{933A393D-9973-AA86-FE02-CB612DB39D30}"/>
+                </a:ext>
+              </a:extLst>
+            </p:cNvPr>
+            <p:cNvSpPr/>
+            <p:nvPr/>
+          </p:nvSpPr>
+          <p:spPr>
+            <a:xfrm rot="17214883">
+              <a:off x="6115209" y="3106268"/>
+              <a:ext cx="428121" cy="76467"/>
+            </a:xfrm>
+            <a:custGeom>
+              <a:avLst/>
+              <a:gdLst>
+                <a:gd name="csX0" fmla="*/ 0 w 525294"/>
+                <a:gd name="csY0" fmla="*/ 94034 h 188068"/>
+                <a:gd name="csX1" fmla="*/ 262647 w 525294"/>
+                <a:gd name="csY1" fmla="*/ 0 h 188068"/>
+                <a:gd name="csX2" fmla="*/ 525294 w 525294"/>
+                <a:gd name="csY2" fmla="*/ 94034 h 188068"/>
+                <a:gd name="csX3" fmla="*/ 262647 w 525294"/>
+                <a:gd name="csY3" fmla="*/ 188068 h 188068"/>
+                <a:gd name="csX4" fmla="*/ 0 w 525294"/>
+                <a:gd name="csY4" fmla="*/ 94034 h 188068"/>
+                <a:gd name="csX0" fmla="*/ 0 w 623481"/>
+                <a:gd name="csY0" fmla="*/ 94831 h 189220"/>
+                <a:gd name="csX1" fmla="*/ 262647 w 623481"/>
+                <a:gd name="csY1" fmla="*/ 797 h 189220"/>
+                <a:gd name="csX2" fmla="*/ 623481 w 623481"/>
+                <a:gd name="csY2" fmla="*/ 65276 h 189220"/>
+                <a:gd name="csX3" fmla="*/ 262647 w 623481"/>
+                <a:gd name="csY3" fmla="*/ 188865 h 189220"/>
+                <a:gd name="csX4" fmla="*/ 0 w 623481"/>
+                <a:gd name="csY4" fmla="*/ 94831 h 189220"/>
+              </a:gdLst>
+              <a:ahLst/>
+              <a:cxnLst>
+                <a:cxn ang="0">
+                  <a:pos x="csX0" y="csY0"/>
+                </a:cxn>
+                <a:cxn ang="0">
+                  <a:pos x="csX1" y="csY1"/>
+                </a:cxn>
+                <a:cxn ang="0">
+                  <a:pos x="csX2" y="csY2"/>
+                </a:cxn>
+                <a:cxn ang="0">
+                  <a:pos x="csX3" y="csY3"/>
+                </a:cxn>
+                <a:cxn ang="0">
+                  <a:pos x="csX4" y="csY4"/>
+                </a:cxn>
+              </a:cxnLst>
+              <a:rect l="l" t="t" r="r" b="b"/>
+              <a:pathLst>
+                <a:path w="623481" h="189220">
+                  <a:moveTo>
+                    <a:pt x="0" y="94831"/>
+                  </a:moveTo>
+                  <a:cubicBezTo>
+                    <a:pt x="0" y="42897"/>
+                    <a:pt x="158734" y="5723"/>
+                    <a:pt x="262647" y="797"/>
+                  </a:cubicBezTo>
+                  <a:cubicBezTo>
+                    <a:pt x="366560" y="-4129"/>
+                    <a:pt x="623481" y="13342"/>
+                    <a:pt x="623481" y="65276"/>
+                  </a:cubicBezTo>
+                  <a:cubicBezTo>
+                    <a:pt x="623481" y="117210"/>
+                    <a:pt x="366560" y="183939"/>
+                    <a:pt x="262647" y="188865"/>
+                  </a:cubicBezTo>
+                  <a:cubicBezTo>
+                    <a:pt x="158734" y="193791"/>
+                    <a:pt x="0" y="146765"/>
+                    <a:pt x="0" y="94831"/>
+                  </a:cubicBezTo>
+                  <a:close/>
+                </a:path>
+              </a:pathLst>
+            </a:custGeom>
+            <a:solidFill>
+              <a:schemeClr val="accent6">
+                <a:lumMod val="75000"/>
+              </a:schemeClr>
+            </a:solidFill>
+            <a:ln>
               <a:solidFill>
                 <a:schemeClr val="accent6">
                   <a:lumMod val="75000"/>
                 </a:schemeClr>
               </a:solidFill>
-              <a:ln>
-                <a:solidFill>
-                  <a:schemeClr val="accent6">
-                    <a:lumMod val="75000"/>
-                  </a:schemeClr>
-                </a:solidFill>
-              </a:ln>
-            </p:spPr>
-            <p:style>
-              <a:lnRef idx="2">
-                <a:schemeClr val="accent6">
-                  <a:shade val="15000"/>
-                </a:schemeClr>
-              </a:lnRef>
-              <a:fillRef idx="1">
-                <a:schemeClr val="accent6"/>
-              </a:fillRef>
-              <a:effectRef idx="0">
-                <a:schemeClr val="accent6"/>
-              </a:effectRef>
-              <a:fontRef idx="minor">
-                <a:schemeClr val="lt1"/>
-              </a:fontRef>
-            </p:style>
-            <p:txBody>
-              <a:bodyPr rtlCol="0" anchor="ctr"/>
-              <a:lstStyle/>
-              <a:p>
-                <a:pPr algn="ctr"/>
-                <a:endParaRPr lang="en-NZ"/>
-              </a:p>
-            </p:txBody>
-          </p:sp>
-          <p:sp>
-            <p:nvSpPr>
-              <p:cNvPr id="30" name="Freeform: Shape 29">
-                <a:extLst>
-                  <a:ext uri="{FF2B5EF4-FFF2-40B4-BE49-F238E27FC236}">
-                    <a16:creationId xmlns:a16="http://schemas.microsoft.com/office/drawing/2014/main" id="{2BACC278-1E5D-65E3-DE6B-73C8F5EAF8E5}"/>
-                  </a:ext>
-                </a:extLst>
-              </p:cNvPr>
-              <p:cNvSpPr/>
-              <p:nvPr/>
-            </p:nvSpPr>
-            <p:spPr>
-              <a:xfrm>
-                <a:off x="5799213" y="2487912"/>
-                <a:ext cx="477954" cy="2425430"/>
-              </a:xfrm>
-              <a:custGeom>
-                <a:avLst/>
-                <a:gdLst>
-                  <a:gd name="csX0" fmla="*/ 32425 w 477954"/>
-                  <a:gd name="csY0" fmla="*/ 0 h 2425430"/>
-                  <a:gd name="csX1" fmla="*/ 239949 w 477954"/>
-                  <a:gd name="csY1" fmla="*/ 272374 h 2425430"/>
-                  <a:gd name="csX2" fmla="*/ 453957 w 477954"/>
-                  <a:gd name="csY2" fmla="*/ 791183 h 2425430"/>
-                  <a:gd name="csX3" fmla="*/ 453957 w 477954"/>
-                  <a:gd name="csY3" fmla="*/ 1543455 h 2425430"/>
-                  <a:gd name="csX4" fmla="*/ 285344 w 477954"/>
-                  <a:gd name="csY4" fmla="*/ 2049293 h 2425430"/>
-                  <a:gd name="csX5" fmla="*/ 0 w 477954"/>
-                  <a:gd name="csY5" fmla="*/ 2425430 h 2425430"/>
-                  <a:gd name="csX6" fmla="*/ 0 w 477954"/>
-                  <a:gd name="csY6" fmla="*/ 2425430 h 2425430"/>
-                </a:gdLst>
-                <a:ahLst/>
-                <a:cxnLst>
-                  <a:cxn ang="0">
-                    <a:pos x="csX0" y="csY0"/>
-                  </a:cxn>
-                  <a:cxn ang="0">
-                    <a:pos x="csX1" y="csY1"/>
-                  </a:cxn>
-                  <a:cxn ang="0">
-                    <a:pos x="csX2" y="csY2"/>
-                  </a:cxn>
-                  <a:cxn ang="0">
-                    <a:pos x="csX3" y="csY3"/>
-                  </a:cxn>
-                  <a:cxn ang="0">
-                    <a:pos x="csX4" y="csY4"/>
-                  </a:cxn>
-                  <a:cxn ang="0">
-                    <a:pos x="csX5" y="csY5"/>
-                  </a:cxn>
-                  <a:cxn ang="0">
-                    <a:pos x="csX6" y="csY6"/>
-                  </a:cxn>
-                </a:cxnLst>
-                <a:rect l="l" t="t" r="r" b="b"/>
-                <a:pathLst>
-                  <a:path w="477954" h="2425430">
-                    <a:moveTo>
-                      <a:pt x="32425" y="0"/>
-                    </a:moveTo>
-                    <a:cubicBezTo>
-                      <a:pt x="101059" y="70255"/>
-                      <a:pt x="169694" y="140510"/>
-                      <a:pt x="239949" y="272374"/>
-                    </a:cubicBezTo>
-                    <a:cubicBezTo>
-                      <a:pt x="310204" y="404238"/>
-                      <a:pt x="418289" y="579336"/>
-                      <a:pt x="453957" y="791183"/>
-                    </a:cubicBezTo>
-                    <a:cubicBezTo>
-                      <a:pt x="489625" y="1003030"/>
-                      <a:pt x="482059" y="1333770"/>
-                      <a:pt x="453957" y="1543455"/>
-                    </a:cubicBezTo>
-                    <a:cubicBezTo>
-                      <a:pt x="425855" y="1753140"/>
-                      <a:pt x="361003" y="1902297"/>
-                      <a:pt x="285344" y="2049293"/>
-                    </a:cubicBezTo>
-                    <a:cubicBezTo>
-                      <a:pt x="209685" y="2196289"/>
-                      <a:pt x="0" y="2425430"/>
-                      <a:pt x="0" y="2425430"/>
-                    </a:cubicBezTo>
-                    <a:lnTo>
-                      <a:pt x="0" y="2425430"/>
-                    </a:lnTo>
-                  </a:path>
-                </a:pathLst>
-              </a:custGeom>
-              <a:noFill/>
-            </p:spPr>
-            <p:style>
-              <a:lnRef idx="2">
-                <a:schemeClr val="accent1">
-                  <a:shade val="15000"/>
-                </a:schemeClr>
-              </a:lnRef>
-              <a:fillRef idx="1">
-                <a:schemeClr val="accent1"/>
-              </a:fillRef>
-              <a:effectRef idx="0">
-                <a:schemeClr val="accent1"/>
-              </a:effectRef>
-              <a:fontRef idx="minor">
-                <a:schemeClr val="lt1"/>
-              </a:fontRef>
-            </p:style>
-            <p:txBody>
-              <a:bodyPr rtlCol="0" anchor="ctr"/>
-              <a:lstStyle/>
-              <a:p>
-                <a:pPr algn="ctr"/>
-                <a:endParaRPr lang="en-NZ"/>
-              </a:p>
-            </p:txBody>
-          </p:sp>
-          <p:sp>
-            <p:nvSpPr>
-              <p:cNvPr id="32" name="Oval 15">
-                <a:extLst>
-                  <a:ext uri="{FF2B5EF4-FFF2-40B4-BE49-F238E27FC236}">
-                    <a16:creationId xmlns:a16="http://schemas.microsoft.com/office/drawing/2014/main" id="{83E489AA-317F-AF71-A035-AB2F80606D29}"/>
-                  </a:ext>
-                </a:extLst>
-              </p:cNvPr>
-              <p:cNvSpPr/>
-              <p:nvPr/>
-            </p:nvSpPr>
-            <p:spPr>
-              <a:xfrm rot="1297676" flipH="1" flipV="1">
-                <a:off x="5798965" y="2887846"/>
-                <a:ext cx="336104" cy="74353"/>
-              </a:xfrm>
-              <a:custGeom>
-                <a:avLst/>
-                <a:gdLst>
-                  <a:gd name="csX0" fmla="*/ 0 w 525294"/>
-                  <a:gd name="csY0" fmla="*/ 94034 h 188068"/>
-                  <a:gd name="csX1" fmla="*/ 262647 w 525294"/>
-                  <a:gd name="csY1" fmla="*/ 0 h 188068"/>
-                  <a:gd name="csX2" fmla="*/ 525294 w 525294"/>
-                  <a:gd name="csY2" fmla="*/ 94034 h 188068"/>
-                  <a:gd name="csX3" fmla="*/ 262647 w 525294"/>
-                  <a:gd name="csY3" fmla="*/ 188068 h 188068"/>
-                  <a:gd name="csX4" fmla="*/ 0 w 525294"/>
-                  <a:gd name="csY4" fmla="*/ 94034 h 188068"/>
-                  <a:gd name="csX0" fmla="*/ 0 w 623481"/>
-                  <a:gd name="csY0" fmla="*/ 94831 h 189220"/>
-                  <a:gd name="csX1" fmla="*/ 262647 w 623481"/>
-                  <a:gd name="csY1" fmla="*/ 797 h 189220"/>
-                  <a:gd name="csX2" fmla="*/ 623481 w 623481"/>
-                  <a:gd name="csY2" fmla="*/ 65276 h 189220"/>
-                  <a:gd name="csX3" fmla="*/ 262647 w 623481"/>
-                  <a:gd name="csY3" fmla="*/ 188865 h 189220"/>
-                  <a:gd name="csX4" fmla="*/ 0 w 623481"/>
-                  <a:gd name="csY4" fmla="*/ 94831 h 189220"/>
-                </a:gdLst>
-                <a:ahLst/>
-                <a:cxnLst>
-                  <a:cxn ang="0">
-                    <a:pos x="csX0" y="csY0"/>
-                  </a:cxn>
-                  <a:cxn ang="0">
-                    <a:pos x="csX1" y="csY1"/>
-                  </a:cxn>
-                  <a:cxn ang="0">
-                    <a:pos x="csX2" y="csY2"/>
-                  </a:cxn>
-                  <a:cxn ang="0">
-                    <a:pos x="csX3" y="csY3"/>
-                  </a:cxn>
-                  <a:cxn ang="0">
-                    <a:pos x="csX4" y="csY4"/>
-                  </a:cxn>
-                </a:cxnLst>
-                <a:rect l="l" t="t" r="r" b="b"/>
-                <a:pathLst>
-                  <a:path w="623481" h="189220">
-                    <a:moveTo>
-                      <a:pt x="0" y="94831"/>
-                    </a:moveTo>
-                    <a:cubicBezTo>
-                      <a:pt x="0" y="42897"/>
-                      <a:pt x="158734" y="5723"/>
-                      <a:pt x="262647" y="797"/>
-                    </a:cubicBezTo>
-                    <a:cubicBezTo>
-                      <a:pt x="366560" y="-4129"/>
-                      <a:pt x="623481" y="13342"/>
-                      <a:pt x="623481" y="65276"/>
-                    </a:cubicBezTo>
-                    <a:cubicBezTo>
-                      <a:pt x="623481" y="117210"/>
-                      <a:pt x="366560" y="183939"/>
-                      <a:pt x="262647" y="188865"/>
-                    </a:cubicBezTo>
-                    <a:cubicBezTo>
-                      <a:pt x="158734" y="193791"/>
-                      <a:pt x="0" y="146765"/>
-                      <a:pt x="0" y="94831"/>
-                    </a:cubicBezTo>
-                    <a:close/>
-                  </a:path>
-                </a:pathLst>
-              </a:custGeom>
+            </a:ln>
+          </p:spPr>
+          <p:style>
+            <a:lnRef idx="2">
+              <a:schemeClr val="accent6">
+                <a:shade val="15000"/>
+              </a:schemeClr>
+            </a:lnRef>
+            <a:fillRef idx="1">
+              <a:schemeClr val="accent6"/>
+            </a:fillRef>
+            <a:effectRef idx="0">
+              <a:schemeClr val="accent6"/>
+            </a:effectRef>
+            <a:fontRef idx="minor">
+              <a:schemeClr val="lt1"/>
+            </a:fontRef>
+          </p:style>
+          <p:txBody>
+            <a:bodyPr rtlCol="0" anchor="ctr"/>
+            <a:lstStyle/>
+            <a:p>
+              <a:pPr algn="ctr"/>
+              <a:endParaRPr lang="en-NZ"/>
+            </a:p>
+          </p:txBody>
+        </p:sp>
+        <p:sp>
+          <p:nvSpPr>
+            <p:cNvPr id="30" name="Freeform: Shape 29">
+              <a:extLst>
+                <a:ext uri="{FF2B5EF4-FFF2-40B4-BE49-F238E27FC236}">
+                  <a16:creationId xmlns:a16="http://schemas.microsoft.com/office/drawing/2014/main" id="{2BACC278-1E5D-65E3-DE6B-73C8F5EAF8E5}"/>
+                </a:ext>
+              </a:extLst>
+            </p:cNvPr>
+            <p:cNvSpPr/>
+            <p:nvPr/>
+          </p:nvSpPr>
+          <p:spPr>
+            <a:xfrm>
+              <a:off x="5799213" y="2487912"/>
+              <a:ext cx="477954" cy="2425430"/>
+            </a:xfrm>
+            <a:custGeom>
+              <a:avLst/>
+              <a:gdLst>
+                <a:gd name="csX0" fmla="*/ 32425 w 477954"/>
+                <a:gd name="csY0" fmla="*/ 0 h 2425430"/>
+                <a:gd name="csX1" fmla="*/ 239949 w 477954"/>
+                <a:gd name="csY1" fmla="*/ 272374 h 2425430"/>
+                <a:gd name="csX2" fmla="*/ 453957 w 477954"/>
+                <a:gd name="csY2" fmla="*/ 791183 h 2425430"/>
+                <a:gd name="csX3" fmla="*/ 453957 w 477954"/>
+                <a:gd name="csY3" fmla="*/ 1543455 h 2425430"/>
+                <a:gd name="csX4" fmla="*/ 285344 w 477954"/>
+                <a:gd name="csY4" fmla="*/ 2049293 h 2425430"/>
+                <a:gd name="csX5" fmla="*/ 0 w 477954"/>
+                <a:gd name="csY5" fmla="*/ 2425430 h 2425430"/>
+                <a:gd name="csX6" fmla="*/ 0 w 477954"/>
+                <a:gd name="csY6" fmla="*/ 2425430 h 2425430"/>
+              </a:gdLst>
+              <a:ahLst/>
+              <a:cxnLst>
+                <a:cxn ang="0">
+                  <a:pos x="csX0" y="csY0"/>
+                </a:cxn>
+                <a:cxn ang="0">
+                  <a:pos x="csX1" y="csY1"/>
+                </a:cxn>
+                <a:cxn ang="0">
+                  <a:pos x="csX2" y="csY2"/>
+                </a:cxn>
+                <a:cxn ang="0">
+                  <a:pos x="csX3" y="csY3"/>
+                </a:cxn>
+                <a:cxn ang="0">
+                  <a:pos x="csX4" y="csY4"/>
+                </a:cxn>
+                <a:cxn ang="0">
+                  <a:pos x="csX5" y="csY5"/>
+                </a:cxn>
+                <a:cxn ang="0">
+                  <a:pos x="csX6" y="csY6"/>
+                </a:cxn>
+              </a:cxnLst>
+              <a:rect l="l" t="t" r="r" b="b"/>
+              <a:pathLst>
+                <a:path w="477954" h="2425430">
+                  <a:moveTo>
+                    <a:pt x="32425" y="0"/>
+                  </a:moveTo>
+                  <a:cubicBezTo>
+                    <a:pt x="101059" y="70255"/>
+                    <a:pt x="169694" y="140510"/>
+                    <a:pt x="239949" y="272374"/>
+                  </a:cubicBezTo>
+                  <a:cubicBezTo>
+                    <a:pt x="310204" y="404238"/>
+                    <a:pt x="418289" y="579336"/>
+                    <a:pt x="453957" y="791183"/>
+                  </a:cubicBezTo>
+                  <a:cubicBezTo>
+                    <a:pt x="489625" y="1003030"/>
+                    <a:pt x="482059" y="1333770"/>
+                    <a:pt x="453957" y="1543455"/>
+                  </a:cubicBezTo>
+                  <a:cubicBezTo>
+                    <a:pt x="425855" y="1753140"/>
+                    <a:pt x="361003" y="1902297"/>
+                    <a:pt x="285344" y="2049293"/>
+                  </a:cubicBezTo>
+                  <a:cubicBezTo>
+                    <a:pt x="209685" y="2196289"/>
+                    <a:pt x="0" y="2425430"/>
+                    <a:pt x="0" y="2425430"/>
+                  </a:cubicBezTo>
+                  <a:lnTo>
+                    <a:pt x="0" y="2425430"/>
+                  </a:lnTo>
+                </a:path>
+              </a:pathLst>
+            </a:custGeom>
+            <a:noFill/>
+          </p:spPr>
+          <p:style>
+            <a:lnRef idx="2">
+              <a:schemeClr val="accent1">
+                <a:shade val="15000"/>
+              </a:schemeClr>
+            </a:lnRef>
+            <a:fillRef idx="1">
+              <a:schemeClr val="accent1"/>
+            </a:fillRef>
+            <a:effectRef idx="0">
+              <a:schemeClr val="accent1"/>
+            </a:effectRef>
+            <a:fontRef idx="minor">
+              <a:schemeClr val="lt1"/>
+            </a:fontRef>
+          </p:style>
+          <p:txBody>
+            <a:bodyPr rtlCol="0" anchor="ctr"/>
+            <a:lstStyle/>
+            <a:p>
+              <a:pPr algn="ctr"/>
+              <a:endParaRPr lang="en-NZ"/>
+            </a:p>
+          </p:txBody>
+        </p:sp>
+        <p:sp>
+          <p:nvSpPr>
+            <p:cNvPr id="32" name="Oval 15">
+              <a:extLst>
+                <a:ext uri="{FF2B5EF4-FFF2-40B4-BE49-F238E27FC236}">
+                  <a16:creationId xmlns:a16="http://schemas.microsoft.com/office/drawing/2014/main" id="{83E489AA-317F-AF71-A035-AB2F80606D29}"/>
+                </a:ext>
+              </a:extLst>
+            </p:cNvPr>
+            <p:cNvSpPr/>
+            <p:nvPr/>
+          </p:nvSpPr>
+          <p:spPr>
+            <a:xfrm rot="1297676" flipH="1" flipV="1">
+              <a:off x="5798965" y="2887846"/>
+              <a:ext cx="336104" cy="74353"/>
+            </a:xfrm>
+            <a:custGeom>
+              <a:avLst/>
+              <a:gdLst>
+                <a:gd name="csX0" fmla="*/ 0 w 525294"/>
+                <a:gd name="csY0" fmla="*/ 94034 h 188068"/>
+                <a:gd name="csX1" fmla="*/ 262647 w 525294"/>
+                <a:gd name="csY1" fmla="*/ 0 h 188068"/>
+                <a:gd name="csX2" fmla="*/ 525294 w 525294"/>
+                <a:gd name="csY2" fmla="*/ 94034 h 188068"/>
+                <a:gd name="csX3" fmla="*/ 262647 w 525294"/>
+                <a:gd name="csY3" fmla="*/ 188068 h 188068"/>
+                <a:gd name="csX4" fmla="*/ 0 w 525294"/>
+                <a:gd name="csY4" fmla="*/ 94034 h 188068"/>
+                <a:gd name="csX0" fmla="*/ 0 w 623481"/>
+                <a:gd name="csY0" fmla="*/ 94831 h 189220"/>
+                <a:gd name="csX1" fmla="*/ 262647 w 623481"/>
+                <a:gd name="csY1" fmla="*/ 797 h 189220"/>
+                <a:gd name="csX2" fmla="*/ 623481 w 623481"/>
+                <a:gd name="csY2" fmla="*/ 65276 h 189220"/>
+                <a:gd name="csX3" fmla="*/ 262647 w 623481"/>
+                <a:gd name="csY3" fmla="*/ 188865 h 189220"/>
+                <a:gd name="csX4" fmla="*/ 0 w 623481"/>
+                <a:gd name="csY4" fmla="*/ 94831 h 189220"/>
+              </a:gdLst>
+              <a:ahLst/>
+              <a:cxnLst>
+                <a:cxn ang="0">
+                  <a:pos x="csX0" y="csY0"/>
+                </a:cxn>
+                <a:cxn ang="0">
+                  <a:pos x="csX1" y="csY1"/>
+                </a:cxn>
+                <a:cxn ang="0">
+                  <a:pos x="csX2" y="csY2"/>
+                </a:cxn>
+                <a:cxn ang="0">
+                  <a:pos x="csX3" y="csY3"/>
+                </a:cxn>
+                <a:cxn ang="0">
+                  <a:pos x="csX4" y="csY4"/>
+                </a:cxn>
+              </a:cxnLst>
+              <a:rect l="l" t="t" r="r" b="b"/>
+              <a:pathLst>
+                <a:path w="623481" h="189220">
+                  <a:moveTo>
+                    <a:pt x="0" y="94831"/>
+                  </a:moveTo>
+                  <a:cubicBezTo>
+                    <a:pt x="0" y="42897"/>
+                    <a:pt x="158734" y="5723"/>
+                    <a:pt x="262647" y="797"/>
+                  </a:cubicBezTo>
+                  <a:cubicBezTo>
+                    <a:pt x="366560" y="-4129"/>
+                    <a:pt x="623481" y="13342"/>
+                    <a:pt x="623481" y="65276"/>
+                  </a:cubicBezTo>
+                  <a:cubicBezTo>
+                    <a:pt x="623481" y="117210"/>
+                    <a:pt x="366560" y="183939"/>
+                    <a:pt x="262647" y="188865"/>
+                  </a:cubicBezTo>
+                  <a:cubicBezTo>
+                    <a:pt x="158734" y="193791"/>
+                    <a:pt x="0" y="146765"/>
+                    <a:pt x="0" y="94831"/>
+                  </a:cubicBezTo>
+                  <a:close/>
+                </a:path>
+              </a:pathLst>
+            </a:custGeom>
+            <a:solidFill>
+              <a:schemeClr val="accent6">
+                <a:lumMod val="75000"/>
+              </a:schemeClr>
+            </a:solidFill>
+            <a:ln>
               <a:solidFill>
                 <a:schemeClr val="accent6">
                   <a:lumMod val="75000"/>
                 </a:schemeClr>
               </a:solidFill>
-              <a:ln>
-                <a:solidFill>
-                  <a:schemeClr val="accent6">
-                    <a:lumMod val="75000"/>
-                  </a:schemeClr>
-                </a:solidFill>
-              </a:ln>
-            </p:spPr>
-            <p:style>
-              <a:lnRef idx="2">
-                <a:schemeClr val="accent6">
-                  <a:shade val="15000"/>
-                </a:schemeClr>
-              </a:lnRef>
-              <a:fillRef idx="1">
-                <a:schemeClr val="accent6"/>
-              </a:fillRef>
-              <a:effectRef idx="0">
-                <a:schemeClr val="accent6"/>
-              </a:effectRef>
-              <a:fontRef idx="minor">
-                <a:schemeClr val="lt1"/>
-              </a:fontRef>
-            </p:style>
-            <p:txBody>
-              <a:bodyPr rtlCol="0" anchor="ctr"/>
-              <a:lstStyle/>
-              <a:p>
-                <a:pPr algn="ctr"/>
-                <a:endParaRPr lang="en-NZ"/>
-              </a:p>
-            </p:txBody>
-          </p:sp>
-          <p:sp>
-            <p:nvSpPr>
-              <p:cNvPr id="34" name="Oval 15">
-                <a:extLst>
-                  <a:ext uri="{FF2B5EF4-FFF2-40B4-BE49-F238E27FC236}">
-                    <a16:creationId xmlns:a16="http://schemas.microsoft.com/office/drawing/2014/main" id="{80D1BDD5-71B9-1DBD-30D5-9316D6960DA5}"/>
-                  </a:ext>
-                </a:extLst>
-              </p:cNvPr>
-              <p:cNvSpPr/>
-              <p:nvPr/>
-            </p:nvSpPr>
-            <p:spPr>
-              <a:xfrm rot="2313172" flipH="1">
-                <a:off x="5931238" y="3687580"/>
-                <a:ext cx="368562" cy="86250"/>
-              </a:xfrm>
-              <a:custGeom>
-                <a:avLst/>
-                <a:gdLst>
-                  <a:gd name="csX0" fmla="*/ 0 w 525294"/>
-                  <a:gd name="csY0" fmla="*/ 94034 h 188068"/>
-                  <a:gd name="csX1" fmla="*/ 262647 w 525294"/>
-                  <a:gd name="csY1" fmla="*/ 0 h 188068"/>
-                  <a:gd name="csX2" fmla="*/ 525294 w 525294"/>
-                  <a:gd name="csY2" fmla="*/ 94034 h 188068"/>
-                  <a:gd name="csX3" fmla="*/ 262647 w 525294"/>
-                  <a:gd name="csY3" fmla="*/ 188068 h 188068"/>
-                  <a:gd name="csX4" fmla="*/ 0 w 525294"/>
-                  <a:gd name="csY4" fmla="*/ 94034 h 188068"/>
-                  <a:gd name="csX0" fmla="*/ 0 w 623481"/>
-                  <a:gd name="csY0" fmla="*/ 94831 h 189220"/>
-                  <a:gd name="csX1" fmla="*/ 262647 w 623481"/>
-                  <a:gd name="csY1" fmla="*/ 797 h 189220"/>
-                  <a:gd name="csX2" fmla="*/ 623481 w 623481"/>
-                  <a:gd name="csY2" fmla="*/ 65276 h 189220"/>
-                  <a:gd name="csX3" fmla="*/ 262647 w 623481"/>
-                  <a:gd name="csY3" fmla="*/ 188865 h 189220"/>
-                  <a:gd name="csX4" fmla="*/ 0 w 623481"/>
-                  <a:gd name="csY4" fmla="*/ 94831 h 189220"/>
-                </a:gdLst>
-                <a:ahLst/>
-                <a:cxnLst>
-                  <a:cxn ang="0">
-                    <a:pos x="csX0" y="csY0"/>
-                  </a:cxn>
-                  <a:cxn ang="0">
-                    <a:pos x="csX1" y="csY1"/>
-                  </a:cxn>
-                  <a:cxn ang="0">
-                    <a:pos x="csX2" y="csY2"/>
-                  </a:cxn>
-                  <a:cxn ang="0">
-                    <a:pos x="csX3" y="csY3"/>
-                  </a:cxn>
-                  <a:cxn ang="0">
-                    <a:pos x="csX4" y="csY4"/>
-                  </a:cxn>
-                </a:cxnLst>
-                <a:rect l="l" t="t" r="r" b="b"/>
-                <a:pathLst>
-                  <a:path w="623481" h="189220">
-                    <a:moveTo>
-                      <a:pt x="0" y="94831"/>
-                    </a:moveTo>
-                    <a:cubicBezTo>
-                      <a:pt x="0" y="42897"/>
-                      <a:pt x="158734" y="5723"/>
-                      <a:pt x="262647" y="797"/>
-                    </a:cubicBezTo>
-                    <a:cubicBezTo>
-                      <a:pt x="366560" y="-4129"/>
-                      <a:pt x="623481" y="13342"/>
-                      <a:pt x="623481" y="65276"/>
-                    </a:cubicBezTo>
-                    <a:cubicBezTo>
-                      <a:pt x="623481" y="117210"/>
-                      <a:pt x="366560" y="183939"/>
-                      <a:pt x="262647" y="188865"/>
-                    </a:cubicBezTo>
-                    <a:cubicBezTo>
-                      <a:pt x="158734" y="193791"/>
-                      <a:pt x="0" y="146765"/>
-                      <a:pt x="0" y="94831"/>
-                    </a:cubicBezTo>
-                    <a:close/>
-                  </a:path>
-                </a:pathLst>
-              </a:custGeom>
+            </a:ln>
+          </p:spPr>
+          <p:style>
+            <a:lnRef idx="2">
+              <a:schemeClr val="accent6">
+                <a:shade val="15000"/>
+              </a:schemeClr>
+            </a:lnRef>
+            <a:fillRef idx="1">
+              <a:schemeClr val="accent6"/>
+            </a:fillRef>
+            <a:effectRef idx="0">
+              <a:schemeClr val="accent6"/>
+            </a:effectRef>
+            <a:fontRef idx="minor">
+              <a:schemeClr val="lt1"/>
+            </a:fontRef>
+          </p:style>
+          <p:txBody>
+            <a:bodyPr rtlCol="0" anchor="ctr"/>
+            <a:lstStyle/>
+            <a:p>
+              <a:pPr algn="ctr"/>
+              <a:endParaRPr lang="en-NZ"/>
+            </a:p>
+          </p:txBody>
+        </p:sp>
+        <p:sp>
+          <p:nvSpPr>
+            <p:cNvPr id="34" name="Oval 15">
+              <a:extLst>
+                <a:ext uri="{FF2B5EF4-FFF2-40B4-BE49-F238E27FC236}">
+                  <a16:creationId xmlns:a16="http://schemas.microsoft.com/office/drawing/2014/main" id="{80D1BDD5-71B9-1DBD-30D5-9316D6960DA5}"/>
+                </a:ext>
+              </a:extLst>
+            </p:cNvPr>
+            <p:cNvSpPr/>
+            <p:nvPr/>
+          </p:nvSpPr>
+          <p:spPr>
+            <a:xfrm rot="2313172" flipH="1">
+              <a:off x="5931238" y="3687580"/>
+              <a:ext cx="368562" cy="86250"/>
+            </a:xfrm>
+            <a:custGeom>
+              <a:avLst/>
+              <a:gdLst>
+                <a:gd name="csX0" fmla="*/ 0 w 525294"/>
+                <a:gd name="csY0" fmla="*/ 94034 h 188068"/>
+                <a:gd name="csX1" fmla="*/ 262647 w 525294"/>
+                <a:gd name="csY1" fmla="*/ 0 h 188068"/>
+                <a:gd name="csX2" fmla="*/ 525294 w 525294"/>
+                <a:gd name="csY2" fmla="*/ 94034 h 188068"/>
+                <a:gd name="csX3" fmla="*/ 262647 w 525294"/>
+                <a:gd name="csY3" fmla="*/ 188068 h 188068"/>
+                <a:gd name="csX4" fmla="*/ 0 w 525294"/>
+                <a:gd name="csY4" fmla="*/ 94034 h 188068"/>
+                <a:gd name="csX0" fmla="*/ 0 w 623481"/>
+                <a:gd name="csY0" fmla="*/ 94831 h 189220"/>
+                <a:gd name="csX1" fmla="*/ 262647 w 623481"/>
+                <a:gd name="csY1" fmla="*/ 797 h 189220"/>
+                <a:gd name="csX2" fmla="*/ 623481 w 623481"/>
+                <a:gd name="csY2" fmla="*/ 65276 h 189220"/>
+                <a:gd name="csX3" fmla="*/ 262647 w 623481"/>
+                <a:gd name="csY3" fmla="*/ 188865 h 189220"/>
+                <a:gd name="csX4" fmla="*/ 0 w 623481"/>
+                <a:gd name="csY4" fmla="*/ 94831 h 189220"/>
+              </a:gdLst>
+              <a:ahLst/>
+              <a:cxnLst>
+                <a:cxn ang="0">
+                  <a:pos x="csX0" y="csY0"/>
+                </a:cxn>
+                <a:cxn ang="0">
+                  <a:pos x="csX1" y="csY1"/>
+                </a:cxn>
+                <a:cxn ang="0">
+                  <a:pos x="csX2" y="csY2"/>
+                </a:cxn>
+                <a:cxn ang="0">
+                  <a:pos x="csX3" y="csY3"/>
+                </a:cxn>
+                <a:cxn ang="0">
+                  <a:pos x="csX4" y="csY4"/>
+                </a:cxn>
+              </a:cxnLst>
+              <a:rect l="l" t="t" r="r" b="b"/>
+              <a:pathLst>
+                <a:path w="623481" h="189220">
+                  <a:moveTo>
+                    <a:pt x="0" y="94831"/>
+                  </a:moveTo>
+                  <a:cubicBezTo>
+                    <a:pt x="0" y="42897"/>
+                    <a:pt x="158734" y="5723"/>
+                    <a:pt x="262647" y="797"/>
+                  </a:cubicBezTo>
+                  <a:cubicBezTo>
+                    <a:pt x="366560" y="-4129"/>
+                    <a:pt x="623481" y="13342"/>
+                    <a:pt x="623481" y="65276"/>
+                  </a:cubicBezTo>
+                  <a:cubicBezTo>
+                    <a:pt x="623481" y="117210"/>
+                    <a:pt x="366560" y="183939"/>
+                    <a:pt x="262647" y="188865"/>
+                  </a:cubicBezTo>
+                  <a:cubicBezTo>
+                    <a:pt x="158734" y="193791"/>
+                    <a:pt x="0" y="146765"/>
+                    <a:pt x="0" y="94831"/>
+                  </a:cubicBezTo>
+                  <a:close/>
+                </a:path>
+              </a:pathLst>
+            </a:custGeom>
+            <a:solidFill>
+              <a:schemeClr val="accent6">
+                <a:lumMod val="75000"/>
+              </a:schemeClr>
+            </a:solidFill>
+            <a:ln>
               <a:solidFill>
                 <a:schemeClr val="accent6">
                   <a:lumMod val="75000"/>
                 </a:schemeClr>
               </a:solidFill>
-              <a:ln>
-                <a:solidFill>
-                  <a:schemeClr val="accent6">
-                    <a:lumMod val="75000"/>
-                  </a:schemeClr>
-                </a:solidFill>
-              </a:ln>
-            </p:spPr>
-            <p:style>
-              <a:lnRef idx="2">
-                <a:schemeClr val="accent6">
-                  <a:shade val="15000"/>
-                </a:schemeClr>
-              </a:lnRef>
-              <a:fillRef idx="1">
-                <a:schemeClr val="accent6"/>
-              </a:fillRef>
-              <a:effectRef idx="0">
-                <a:schemeClr val="accent6"/>
-              </a:effectRef>
-              <a:fontRef idx="minor">
-                <a:schemeClr val="lt1"/>
-              </a:fontRef>
-            </p:style>
-            <p:txBody>
-              <a:bodyPr rtlCol="0" anchor="ctr"/>
-              <a:lstStyle/>
-              <a:p>
-                <a:pPr algn="ctr"/>
-                <a:endParaRPr lang="en-NZ"/>
-              </a:p>
-            </p:txBody>
-          </p:sp>
-          <p:sp>
-            <p:nvSpPr>
-              <p:cNvPr id="36" name="Oval 15">
-                <a:extLst>
-                  <a:ext uri="{FF2B5EF4-FFF2-40B4-BE49-F238E27FC236}">
-                    <a16:creationId xmlns:a16="http://schemas.microsoft.com/office/drawing/2014/main" id="{8E3D0049-B1FC-EBA0-605F-F1FBFA3E1BEA}"/>
-                  </a:ext>
-                </a:extLst>
-              </p:cNvPr>
-              <p:cNvSpPr/>
-              <p:nvPr/>
-            </p:nvSpPr>
-            <p:spPr>
-              <a:xfrm rot="16599564">
-                <a:off x="5800619" y="2388447"/>
-                <a:ext cx="384004" cy="76570"/>
-              </a:xfrm>
-              <a:custGeom>
-                <a:avLst/>
-                <a:gdLst>
-                  <a:gd name="csX0" fmla="*/ 0 w 525294"/>
-                  <a:gd name="csY0" fmla="*/ 94034 h 188068"/>
-                  <a:gd name="csX1" fmla="*/ 262647 w 525294"/>
-                  <a:gd name="csY1" fmla="*/ 0 h 188068"/>
-                  <a:gd name="csX2" fmla="*/ 525294 w 525294"/>
-                  <a:gd name="csY2" fmla="*/ 94034 h 188068"/>
-                  <a:gd name="csX3" fmla="*/ 262647 w 525294"/>
-                  <a:gd name="csY3" fmla="*/ 188068 h 188068"/>
-                  <a:gd name="csX4" fmla="*/ 0 w 525294"/>
-                  <a:gd name="csY4" fmla="*/ 94034 h 188068"/>
-                  <a:gd name="csX0" fmla="*/ 0 w 623481"/>
-                  <a:gd name="csY0" fmla="*/ 94831 h 189220"/>
-                  <a:gd name="csX1" fmla="*/ 262647 w 623481"/>
-                  <a:gd name="csY1" fmla="*/ 797 h 189220"/>
-                  <a:gd name="csX2" fmla="*/ 623481 w 623481"/>
-                  <a:gd name="csY2" fmla="*/ 65276 h 189220"/>
-                  <a:gd name="csX3" fmla="*/ 262647 w 623481"/>
-                  <a:gd name="csY3" fmla="*/ 188865 h 189220"/>
-                  <a:gd name="csX4" fmla="*/ 0 w 623481"/>
-                  <a:gd name="csY4" fmla="*/ 94831 h 189220"/>
-                </a:gdLst>
-                <a:ahLst/>
-                <a:cxnLst>
-                  <a:cxn ang="0">
-                    <a:pos x="csX0" y="csY0"/>
-                  </a:cxn>
-                  <a:cxn ang="0">
-                    <a:pos x="csX1" y="csY1"/>
-                  </a:cxn>
-                  <a:cxn ang="0">
-                    <a:pos x="csX2" y="csY2"/>
-                  </a:cxn>
-                  <a:cxn ang="0">
-                    <a:pos x="csX3" y="csY3"/>
-                  </a:cxn>
-                  <a:cxn ang="0">
-                    <a:pos x="csX4" y="csY4"/>
-                  </a:cxn>
-                </a:cxnLst>
-                <a:rect l="l" t="t" r="r" b="b"/>
-                <a:pathLst>
-                  <a:path w="623481" h="189220">
-                    <a:moveTo>
-                      <a:pt x="0" y="94831"/>
-                    </a:moveTo>
-                    <a:cubicBezTo>
-                      <a:pt x="0" y="42897"/>
-                      <a:pt x="158734" y="5723"/>
-                      <a:pt x="262647" y="797"/>
-                    </a:cubicBezTo>
-                    <a:cubicBezTo>
-                      <a:pt x="366560" y="-4129"/>
-                      <a:pt x="623481" y="13342"/>
-                      <a:pt x="623481" y="65276"/>
-                    </a:cubicBezTo>
-                    <a:cubicBezTo>
-                      <a:pt x="623481" y="117210"/>
-                      <a:pt x="366560" y="183939"/>
-                      <a:pt x="262647" y="188865"/>
-                    </a:cubicBezTo>
-                    <a:cubicBezTo>
-                      <a:pt x="158734" y="193791"/>
-                      <a:pt x="0" y="146765"/>
-                      <a:pt x="0" y="94831"/>
-                    </a:cubicBezTo>
-                    <a:close/>
-                  </a:path>
-                </a:pathLst>
-              </a:custGeom>
+            </a:ln>
+          </p:spPr>
+          <p:style>
+            <a:lnRef idx="2">
+              <a:schemeClr val="accent6">
+                <a:shade val="15000"/>
+              </a:schemeClr>
+            </a:lnRef>
+            <a:fillRef idx="1">
+              <a:schemeClr val="accent6"/>
+            </a:fillRef>
+            <a:effectRef idx="0">
+              <a:schemeClr val="accent6"/>
+            </a:effectRef>
+            <a:fontRef idx="minor">
+              <a:schemeClr val="lt1"/>
+            </a:fontRef>
+          </p:style>
+          <p:txBody>
+            <a:bodyPr rtlCol="0" anchor="ctr"/>
+            <a:lstStyle/>
+            <a:p>
+              <a:pPr algn="ctr"/>
+              <a:endParaRPr lang="en-NZ"/>
+            </a:p>
+          </p:txBody>
+        </p:sp>
+        <p:sp>
+          <p:nvSpPr>
+            <p:cNvPr id="36" name="Oval 15">
+              <a:extLst>
+                <a:ext uri="{FF2B5EF4-FFF2-40B4-BE49-F238E27FC236}">
+                  <a16:creationId xmlns:a16="http://schemas.microsoft.com/office/drawing/2014/main" id="{8E3D0049-B1FC-EBA0-605F-F1FBFA3E1BEA}"/>
+                </a:ext>
+              </a:extLst>
+            </p:cNvPr>
+            <p:cNvSpPr/>
+            <p:nvPr/>
+          </p:nvSpPr>
+          <p:spPr>
+            <a:xfrm rot="16599564">
+              <a:off x="5800619" y="2388447"/>
+              <a:ext cx="384004" cy="76570"/>
+            </a:xfrm>
+            <a:custGeom>
+              <a:avLst/>
+              <a:gdLst>
+                <a:gd name="csX0" fmla="*/ 0 w 525294"/>
+                <a:gd name="csY0" fmla="*/ 94034 h 188068"/>
+                <a:gd name="csX1" fmla="*/ 262647 w 525294"/>
+                <a:gd name="csY1" fmla="*/ 0 h 188068"/>
+                <a:gd name="csX2" fmla="*/ 525294 w 525294"/>
+                <a:gd name="csY2" fmla="*/ 94034 h 188068"/>
+                <a:gd name="csX3" fmla="*/ 262647 w 525294"/>
+                <a:gd name="csY3" fmla="*/ 188068 h 188068"/>
+                <a:gd name="csX4" fmla="*/ 0 w 525294"/>
+                <a:gd name="csY4" fmla="*/ 94034 h 188068"/>
+                <a:gd name="csX0" fmla="*/ 0 w 623481"/>
+                <a:gd name="csY0" fmla="*/ 94831 h 189220"/>
+                <a:gd name="csX1" fmla="*/ 262647 w 623481"/>
+                <a:gd name="csY1" fmla="*/ 797 h 189220"/>
+                <a:gd name="csX2" fmla="*/ 623481 w 623481"/>
+                <a:gd name="csY2" fmla="*/ 65276 h 189220"/>
+                <a:gd name="csX3" fmla="*/ 262647 w 623481"/>
+                <a:gd name="csY3" fmla="*/ 188865 h 189220"/>
+                <a:gd name="csX4" fmla="*/ 0 w 623481"/>
+                <a:gd name="csY4" fmla="*/ 94831 h 189220"/>
+              </a:gdLst>
+              <a:ahLst/>
+              <a:cxnLst>
+                <a:cxn ang="0">
+                  <a:pos x="csX0" y="csY0"/>
+                </a:cxn>
+                <a:cxn ang="0">
+                  <a:pos x="csX1" y="csY1"/>
+                </a:cxn>
+                <a:cxn ang="0">
+                  <a:pos x="csX2" y="csY2"/>
+                </a:cxn>
+                <a:cxn ang="0">
+                  <a:pos x="csX3" y="csY3"/>
+                </a:cxn>
+                <a:cxn ang="0">
+                  <a:pos x="csX4" y="csY4"/>
+                </a:cxn>
+              </a:cxnLst>
+              <a:rect l="l" t="t" r="r" b="b"/>
+              <a:pathLst>
+                <a:path w="623481" h="189220">
+                  <a:moveTo>
+                    <a:pt x="0" y="94831"/>
+                  </a:moveTo>
+                  <a:cubicBezTo>
+                    <a:pt x="0" y="42897"/>
+                    <a:pt x="158734" y="5723"/>
+                    <a:pt x="262647" y="797"/>
+                  </a:cubicBezTo>
+                  <a:cubicBezTo>
+                    <a:pt x="366560" y="-4129"/>
+                    <a:pt x="623481" y="13342"/>
+                    <a:pt x="623481" y="65276"/>
+                  </a:cubicBezTo>
+                  <a:cubicBezTo>
+                    <a:pt x="623481" y="117210"/>
+                    <a:pt x="366560" y="183939"/>
+                    <a:pt x="262647" y="188865"/>
+                  </a:cubicBezTo>
+                  <a:cubicBezTo>
+                    <a:pt x="158734" y="193791"/>
+                    <a:pt x="0" y="146765"/>
+                    <a:pt x="0" y="94831"/>
+                  </a:cubicBezTo>
+                  <a:close/>
+                </a:path>
+              </a:pathLst>
+            </a:custGeom>
+            <a:solidFill>
+              <a:schemeClr val="accent6">
+                <a:lumMod val="75000"/>
+              </a:schemeClr>
+            </a:solidFill>
+            <a:ln>
               <a:solidFill>
                 <a:schemeClr val="accent6">
                   <a:lumMod val="75000"/>
                 </a:schemeClr>
               </a:solidFill>
-              <a:ln>
-                <a:solidFill>
-                  <a:schemeClr val="accent6">
-                    <a:lumMod val="75000"/>
-                  </a:schemeClr>
-                </a:solidFill>
-              </a:ln>
-            </p:spPr>
-            <p:style>
-              <a:lnRef idx="2">
-                <a:schemeClr val="accent6">
-                  <a:shade val="15000"/>
-                </a:schemeClr>
-              </a:lnRef>
-              <a:fillRef idx="1">
-                <a:schemeClr val="accent6"/>
-              </a:fillRef>
-              <a:effectRef idx="0">
-                <a:schemeClr val="accent6"/>
-              </a:effectRef>
-              <a:fontRef idx="minor">
-                <a:schemeClr val="lt1"/>
-              </a:fontRef>
-            </p:style>
-            <p:txBody>
-              <a:bodyPr rtlCol="0" anchor="ctr"/>
-              <a:lstStyle/>
-              <a:p>
-                <a:pPr algn="ctr"/>
-                <a:endParaRPr lang="en-NZ"/>
-              </a:p>
-            </p:txBody>
-          </p:sp>
-          <p:sp>
-            <p:nvSpPr>
-              <p:cNvPr id="38" name="Oval 15">
-                <a:extLst>
-                  <a:ext uri="{FF2B5EF4-FFF2-40B4-BE49-F238E27FC236}">
-                    <a16:creationId xmlns:a16="http://schemas.microsoft.com/office/drawing/2014/main" id="{0307720A-F418-F4C6-1B9A-C52287454FF2}"/>
-                  </a:ext>
-                </a:extLst>
-              </p:cNvPr>
-              <p:cNvSpPr/>
-              <p:nvPr/>
-            </p:nvSpPr>
-            <p:spPr>
-              <a:xfrm rot="17720721">
-                <a:off x="6162584" y="3440791"/>
-                <a:ext cx="428121" cy="76467"/>
-              </a:xfrm>
-              <a:custGeom>
-                <a:avLst/>
-                <a:gdLst>
-                  <a:gd name="csX0" fmla="*/ 0 w 525294"/>
-                  <a:gd name="csY0" fmla="*/ 94034 h 188068"/>
-                  <a:gd name="csX1" fmla="*/ 262647 w 525294"/>
-                  <a:gd name="csY1" fmla="*/ 0 h 188068"/>
-                  <a:gd name="csX2" fmla="*/ 525294 w 525294"/>
-                  <a:gd name="csY2" fmla="*/ 94034 h 188068"/>
-                  <a:gd name="csX3" fmla="*/ 262647 w 525294"/>
-                  <a:gd name="csY3" fmla="*/ 188068 h 188068"/>
-                  <a:gd name="csX4" fmla="*/ 0 w 525294"/>
-                  <a:gd name="csY4" fmla="*/ 94034 h 188068"/>
-                  <a:gd name="csX0" fmla="*/ 0 w 623481"/>
-                  <a:gd name="csY0" fmla="*/ 94831 h 189220"/>
-                  <a:gd name="csX1" fmla="*/ 262647 w 623481"/>
-                  <a:gd name="csY1" fmla="*/ 797 h 189220"/>
-                  <a:gd name="csX2" fmla="*/ 623481 w 623481"/>
-                  <a:gd name="csY2" fmla="*/ 65276 h 189220"/>
-                  <a:gd name="csX3" fmla="*/ 262647 w 623481"/>
-                  <a:gd name="csY3" fmla="*/ 188865 h 189220"/>
-                  <a:gd name="csX4" fmla="*/ 0 w 623481"/>
-                  <a:gd name="csY4" fmla="*/ 94831 h 189220"/>
-                </a:gdLst>
-                <a:ahLst/>
-                <a:cxnLst>
-                  <a:cxn ang="0">
-                    <a:pos x="csX0" y="csY0"/>
-                  </a:cxn>
-                  <a:cxn ang="0">
-                    <a:pos x="csX1" y="csY1"/>
-                  </a:cxn>
-                  <a:cxn ang="0">
-                    <a:pos x="csX2" y="csY2"/>
-                  </a:cxn>
-                  <a:cxn ang="0">
-                    <a:pos x="csX3" y="csY3"/>
-                  </a:cxn>
-                  <a:cxn ang="0">
-                    <a:pos x="csX4" y="csY4"/>
-                  </a:cxn>
-                </a:cxnLst>
-                <a:rect l="l" t="t" r="r" b="b"/>
-                <a:pathLst>
-                  <a:path w="623481" h="189220">
-                    <a:moveTo>
-                      <a:pt x="0" y="94831"/>
-                    </a:moveTo>
-                    <a:cubicBezTo>
-                      <a:pt x="0" y="42897"/>
-                      <a:pt x="158734" y="5723"/>
-                      <a:pt x="262647" y="797"/>
-                    </a:cubicBezTo>
-                    <a:cubicBezTo>
-                      <a:pt x="366560" y="-4129"/>
-                      <a:pt x="623481" y="13342"/>
-                      <a:pt x="623481" y="65276"/>
-                    </a:cubicBezTo>
-                    <a:cubicBezTo>
-                      <a:pt x="623481" y="117210"/>
-                      <a:pt x="366560" y="183939"/>
-                      <a:pt x="262647" y="188865"/>
-                    </a:cubicBezTo>
-                    <a:cubicBezTo>
-                      <a:pt x="158734" y="193791"/>
-                      <a:pt x="0" y="146765"/>
-                      <a:pt x="0" y="94831"/>
-                    </a:cubicBezTo>
-                    <a:close/>
-                  </a:path>
-                </a:pathLst>
-              </a:custGeom>
+            </a:ln>
+          </p:spPr>
+          <p:style>
+            <a:lnRef idx="2">
+              <a:schemeClr val="accent6">
+                <a:shade val="15000"/>
+              </a:schemeClr>
+            </a:lnRef>
+            <a:fillRef idx="1">
+              <a:schemeClr val="accent6"/>
+            </a:fillRef>
+            <a:effectRef idx="0">
+              <a:schemeClr val="accent6"/>
+            </a:effectRef>
+            <a:fontRef idx="minor">
+              <a:schemeClr val="lt1"/>
+            </a:fontRef>
+          </p:style>
+          <p:txBody>
+            <a:bodyPr rtlCol="0" anchor="ctr"/>
+            <a:lstStyle/>
+            <a:p>
+              <a:pPr algn="ctr"/>
+              <a:endParaRPr lang="en-NZ"/>
+            </a:p>
+          </p:txBody>
+        </p:sp>
+        <p:sp>
+          <p:nvSpPr>
+            <p:cNvPr id="38" name="Oval 15">
+              <a:extLst>
+                <a:ext uri="{FF2B5EF4-FFF2-40B4-BE49-F238E27FC236}">
+                  <a16:creationId xmlns:a16="http://schemas.microsoft.com/office/drawing/2014/main" id="{0307720A-F418-F4C6-1B9A-C52287454FF2}"/>
+                </a:ext>
+              </a:extLst>
+            </p:cNvPr>
+            <p:cNvSpPr/>
+            <p:nvPr/>
+          </p:nvSpPr>
+          <p:spPr>
+            <a:xfrm rot="17720721">
+              <a:off x="6162584" y="3440791"/>
+              <a:ext cx="428121" cy="76467"/>
+            </a:xfrm>
+            <a:custGeom>
+              <a:avLst/>
+              <a:gdLst>
+                <a:gd name="csX0" fmla="*/ 0 w 525294"/>
+                <a:gd name="csY0" fmla="*/ 94034 h 188068"/>
+                <a:gd name="csX1" fmla="*/ 262647 w 525294"/>
+                <a:gd name="csY1" fmla="*/ 0 h 188068"/>
+                <a:gd name="csX2" fmla="*/ 525294 w 525294"/>
+                <a:gd name="csY2" fmla="*/ 94034 h 188068"/>
+                <a:gd name="csX3" fmla="*/ 262647 w 525294"/>
+                <a:gd name="csY3" fmla="*/ 188068 h 188068"/>
+                <a:gd name="csX4" fmla="*/ 0 w 525294"/>
+                <a:gd name="csY4" fmla="*/ 94034 h 188068"/>
+                <a:gd name="csX0" fmla="*/ 0 w 623481"/>
+                <a:gd name="csY0" fmla="*/ 94831 h 189220"/>
+                <a:gd name="csX1" fmla="*/ 262647 w 623481"/>
+                <a:gd name="csY1" fmla="*/ 797 h 189220"/>
+                <a:gd name="csX2" fmla="*/ 623481 w 623481"/>
+                <a:gd name="csY2" fmla="*/ 65276 h 189220"/>
+                <a:gd name="csX3" fmla="*/ 262647 w 623481"/>
+                <a:gd name="csY3" fmla="*/ 188865 h 189220"/>
+                <a:gd name="csX4" fmla="*/ 0 w 623481"/>
+                <a:gd name="csY4" fmla="*/ 94831 h 189220"/>
+              </a:gdLst>
+              <a:ahLst/>
+              <a:cxnLst>
+                <a:cxn ang="0">
+                  <a:pos x="csX0" y="csY0"/>
+                </a:cxn>
+                <a:cxn ang="0">
+                  <a:pos x="csX1" y="csY1"/>
+                </a:cxn>
+                <a:cxn ang="0">
+                  <a:pos x="csX2" y="csY2"/>
+                </a:cxn>
+                <a:cxn ang="0">
+                  <a:pos x="csX3" y="csY3"/>
+                </a:cxn>
+                <a:cxn ang="0">
+                  <a:pos x="csX4" y="csY4"/>
+                </a:cxn>
+              </a:cxnLst>
+              <a:rect l="l" t="t" r="r" b="b"/>
+              <a:pathLst>
+                <a:path w="623481" h="189220">
+                  <a:moveTo>
+                    <a:pt x="0" y="94831"/>
+                  </a:moveTo>
+                  <a:cubicBezTo>
+                    <a:pt x="0" y="42897"/>
+                    <a:pt x="158734" y="5723"/>
+                    <a:pt x="262647" y="797"/>
+                  </a:cubicBezTo>
+                  <a:cubicBezTo>
+                    <a:pt x="366560" y="-4129"/>
+                    <a:pt x="623481" y="13342"/>
+                    <a:pt x="623481" y="65276"/>
+                  </a:cubicBezTo>
+                  <a:cubicBezTo>
+                    <a:pt x="623481" y="117210"/>
+                    <a:pt x="366560" y="183939"/>
+                    <a:pt x="262647" y="188865"/>
+                  </a:cubicBezTo>
+                  <a:cubicBezTo>
+                    <a:pt x="158734" y="193791"/>
+                    <a:pt x="0" y="146765"/>
+                    <a:pt x="0" y="94831"/>
+                  </a:cubicBezTo>
+                  <a:close/>
+                </a:path>
+              </a:pathLst>
+            </a:custGeom>
+            <a:solidFill>
+              <a:schemeClr val="accent6">
+                <a:lumMod val="75000"/>
+              </a:schemeClr>
+            </a:solidFill>
+            <a:ln>
               <a:solidFill>
                 <a:schemeClr val="accent6">
                   <a:lumMod val="75000"/>
                 </a:schemeClr>
               </a:solidFill>
-              <a:ln>
-                <a:solidFill>
-                  <a:schemeClr val="accent6">
-                    <a:lumMod val="75000"/>
-                  </a:schemeClr>
-                </a:solidFill>
-              </a:ln>
-            </p:spPr>
-            <p:style>
-              <a:lnRef idx="2">
-                <a:schemeClr val="accent6">
-                  <a:shade val="15000"/>
-                </a:schemeClr>
-              </a:lnRef>
-              <a:fillRef idx="1">
-                <a:schemeClr val="accent6"/>
-              </a:fillRef>
-              <a:effectRef idx="0">
-                <a:schemeClr val="accent6"/>
-              </a:effectRef>
-              <a:fontRef idx="minor">
-                <a:schemeClr val="lt1"/>
-              </a:fontRef>
-            </p:style>
-            <p:txBody>
-              <a:bodyPr rtlCol="0" anchor="ctr"/>
-              <a:lstStyle/>
-              <a:p>
-                <a:pPr algn="ctr"/>
-                <a:endParaRPr lang="en-NZ"/>
-              </a:p>
-            </p:txBody>
-          </p:sp>
-          <p:sp>
-            <p:nvSpPr>
-              <p:cNvPr id="40" name="Oval 15">
-                <a:extLst>
-                  <a:ext uri="{FF2B5EF4-FFF2-40B4-BE49-F238E27FC236}">
-                    <a16:creationId xmlns:a16="http://schemas.microsoft.com/office/drawing/2014/main" id="{0CD7B202-5966-24EC-B6C3-2001879D4628}"/>
-                  </a:ext>
-                </a:extLst>
-              </p:cNvPr>
-              <p:cNvSpPr/>
-              <p:nvPr/>
-            </p:nvSpPr>
-            <p:spPr>
-              <a:xfrm rot="17826229">
-                <a:off x="6168485" y="3764374"/>
-                <a:ext cx="428121" cy="90431"/>
-              </a:xfrm>
-              <a:custGeom>
-                <a:avLst/>
-                <a:gdLst>
-                  <a:gd name="csX0" fmla="*/ 0 w 525294"/>
-                  <a:gd name="csY0" fmla="*/ 94034 h 188068"/>
-                  <a:gd name="csX1" fmla="*/ 262647 w 525294"/>
-                  <a:gd name="csY1" fmla="*/ 0 h 188068"/>
-                  <a:gd name="csX2" fmla="*/ 525294 w 525294"/>
-                  <a:gd name="csY2" fmla="*/ 94034 h 188068"/>
-                  <a:gd name="csX3" fmla="*/ 262647 w 525294"/>
-                  <a:gd name="csY3" fmla="*/ 188068 h 188068"/>
-                  <a:gd name="csX4" fmla="*/ 0 w 525294"/>
-                  <a:gd name="csY4" fmla="*/ 94034 h 188068"/>
-                  <a:gd name="csX0" fmla="*/ 0 w 623481"/>
-                  <a:gd name="csY0" fmla="*/ 94831 h 189220"/>
-                  <a:gd name="csX1" fmla="*/ 262647 w 623481"/>
-                  <a:gd name="csY1" fmla="*/ 797 h 189220"/>
-                  <a:gd name="csX2" fmla="*/ 623481 w 623481"/>
-                  <a:gd name="csY2" fmla="*/ 65276 h 189220"/>
-                  <a:gd name="csX3" fmla="*/ 262647 w 623481"/>
-                  <a:gd name="csY3" fmla="*/ 188865 h 189220"/>
-                  <a:gd name="csX4" fmla="*/ 0 w 623481"/>
-                  <a:gd name="csY4" fmla="*/ 94831 h 189220"/>
-                </a:gdLst>
-                <a:ahLst/>
-                <a:cxnLst>
-                  <a:cxn ang="0">
-                    <a:pos x="csX0" y="csY0"/>
-                  </a:cxn>
-                  <a:cxn ang="0">
-                    <a:pos x="csX1" y="csY1"/>
-                  </a:cxn>
-                  <a:cxn ang="0">
-                    <a:pos x="csX2" y="csY2"/>
-                  </a:cxn>
-                  <a:cxn ang="0">
-                    <a:pos x="csX3" y="csY3"/>
-                  </a:cxn>
-                  <a:cxn ang="0">
-                    <a:pos x="csX4" y="csY4"/>
-                  </a:cxn>
-                </a:cxnLst>
-                <a:rect l="l" t="t" r="r" b="b"/>
-                <a:pathLst>
-                  <a:path w="623481" h="189220">
-                    <a:moveTo>
-                      <a:pt x="0" y="94831"/>
-                    </a:moveTo>
-                    <a:cubicBezTo>
-                      <a:pt x="0" y="42897"/>
-                      <a:pt x="158734" y="5723"/>
-                      <a:pt x="262647" y="797"/>
-                    </a:cubicBezTo>
-                    <a:cubicBezTo>
-                      <a:pt x="366560" y="-4129"/>
-                      <a:pt x="623481" y="13342"/>
-                      <a:pt x="623481" y="65276"/>
-                    </a:cubicBezTo>
-                    <a:cubicBezTo>
-                      <a:pt x="623481" y="117210"/>
-                      <a:pt x="366560" y="183939"/>
-                      <a:pt x="262647" y="188865"/>
-                    </a:cubicBezTo>
-                    <a:cubicBezTo>
-                      <a:pt x="158734" y="193791"/>
-                      <a:pt x="0" y="146765"/>
-                      <a:pt x="0" y="94831"/>
-                    </a:cubicBezTo>
-                    <a:close/>
-                  </a:path>
-                </a:pathLst>
-              </a:custGeom>
+            </a:ln>
+          </p:spPr>
+          <p:style>
+            <a:lnRef idx="2">
+              <a:schemeClr val="accent6">
+                <a:shade val="15000"/>
+              </a:schemeClr>
+            </a:lnRef>
+            <a:fillRef idx="1">
+              <a:schemeClr val="accent6"/>
+            </a:fillRef>
+            <a:effectRef idx="0">
+              <a:schemeClr val="accent6"/>
+            </a:effectRef>
+            <a:fontRef idx="minor">
+              <a:schemeClr val="lt1"/>
+            </a:fontRef>
+          </p:style>
+          <p:txBody>
+            <a:bodyPr rtlCol="0" anchor="ctr"/>
+            <a:lstStyle/>
+            <a:p>
+              <a:pPr algn="ctr"/>
+              <a:endParaRPr lang="en-NZ"/>
+            </a:p>
+          </p:txBody>
+        </p:sp>
+        <p:sp>
+          <p:nvSpPr>
+            <p:cNvPr id="40" name="Oval 15">
+              <a:extLst>
+                <a:ext uri="{FF2B5EF4-FFF2-40B4-BE49-F238E27FC236}">
+                  <a16:creationId xmlns:a16="http://schemas.microsoft.com/office/drawing/2014/main" id="{0CD7B202-5966-24EC-B6C3-2001879D4628}"/>
+                </a:ext>
+              </a:extLst>
+            </p:cNvPr>
+            <p:cNvSpPr/>
+            <p:nvPr/>
+          </p:nvSpPr>
+          <p:spPr>
+            <a:xfrm rot="17826229">
+              <a:off x="6168485" y="3764374"/>
+              <a:ext cx="428121" cy="90431"/>
+            </a:xfrm>
+            <a:custGeom>
+              <a:avLst/>
+              <a:gdLst>
+                <a:gd name="csX0" fmla="*/ 0 w 525294"/>
+                <a:gd name="csY0" fmla="*/ 94034 h 188068"/>
+                <a:gd name="csX1" fmla="*/ 262647 w 525294"/>
+                <a:gd name="csY1" fmla="*/ 0 h 188068"/>
+                <a:gd name="csX2" fmla="*/ 525294 w 525294"/>
+                <a:gd name="csY2" fmla="*/ 94034 h 188068"/>
+                <a:gd name="csX3" fmla="*/ 262647 w 525294"/>
+                <a:gd name="csY3" fmla="*/ 188068 h 188068"/>
+                <a:gd name="csX4" fmla="*/ 0 w 525294"/>
+                <a:gd name="csY4" fmla="*/ 94034 h 188068"/>
+                <a:gd name="csX0" fmla="*/ 0 w 623481"/>
+                <a:gd name="csY0" fmla="*/ 94831 h 189220"/>
+                <a:gd name="csX1" fmla="*/ 262647 w 623481"/>
+                <a:gd name="csY1" fmla="*/ 797 h 189220"/>
+                <a:gd name="csX2" fmla="*/ 623481 w 623481"/>
+                <a:gd name="csY2" fmla="*/ 65276 h 189220"/>
+                <a:gd name="csX3" fmla="*/ 262647 w 623481"/>
+                <a:gd name="csY3" fmla="*/ 188865 h 189220"/>
+                <a:gd name="csX4" fmla="*/ 0 w 623481"/>
+                <a:gd name="csY4" fmla="*/ 94831 h 189220"/>
+              </a:gdLst>
+              <a:ahLst/>
+              <a:cxnLst>
+                <a:cxn ang="0">
+                  <a:pos x="csX0" y="csY0"/>
+                </a:cxn>
+                <a:cxn ang="0">
+                  <a:pos x="csX1" y="csY1"/>
+                </a:cxn>
+                <a:cxn ang="0">
+                  <a:pos x="csX2" y="csY2"/>
+                </a:cxn>
+                <a:cxn ang="0">
+                  <a:pos x="csX3" y="csY3"/>
+                </a:cxn>
+                <a:cxn ang="0">
+                  <a:pos x="csX4" y="csY4"/>
+                </a:cxn>
+              </a:cxnLst>
+              <a:rect l="l" t="t" r="r" b="b"/>
+              <a:pathLst>
+                <a:path w="623481" h="189220">
+                  <a:moveTo>
+                    <a:pt x="0" y="94831"/>
+                  </a:moveTo>
+                  <a:cubicBezTo>
+                    <a:pt x="0" y="42897"/>
+                    <a:pt x="158734" y="5723"/>
+                    <a:pt x="262647" y="797"/>
+                  </a:cubicBezTo>
+                  <a:cubicBezTo>
+                    <a:pt x="366560" y="-4129"/>
+                    <a:pt x="623481" y="13342"/>
+                    <a:pt x="623481" y="65276"/>
+                  </a:cubicBezTo>
+                  <a:cubicBezTo>
+                    <a:pt x="623481" y="117210"/>
+                    <a:pt x="366560" y="183939"/>
+                    <a:pt x="262647" y="188865"/>
+                  </a:cubicBezTo>
+                  <a:cubicBezTo>
+                    <a:pt x="158734" y="193791"/>
+                    <a:pt x="0" y="146765"/>
+                    <a:pt x="0" y="94831"/>
+                  </a:cubicBezTo>
+                  <a:close/>
+                </a:path>
+              </a:pathLst>
+            </a:custGeom>
+            <a:solidFill>
+              <a:schemeClr val="accent6">
+                <a:lumMod val="75000"/>
+              </a:schemeClr>
+            </a:solidFill>
+            <a:ln>
               <a:solidFill>
                 <a:schemeClr val="accent6">
                   <a:lumMod val="75000"/>
                 </a:schemeClr>
               </a:solidFill>
-              <a:ln>
-                <a:solidFill>
-                  <a:schemeClr val="accent6">
-                    <a:lumMod val="75000"/>
-                  </a:schemeClr>
-                </a:solidFill>
-              </a:ln>
-            </p:spPr>
-            <p:style>
-              <a:lnRef idx="2">
-                <a:schemeClr val="accent6">
-                  <a:shade val="15000"/>
-                </a:schemeClr>
-              </a:lnRef>
-              <a:fillRef idx="1">
-                <a:schemeClr val="accent6"/>
-              </a:fillRef>
-              <a:effectRef idx="0">
-                <a:schemeClr val="accent6"/>
-              </a:effectRef>
-              <a:fontRef idx="minor">
-                <a:schemeClr val="lt1"/>
-              </a:fontRef>
-            </p:style>
-            <p:txBody>
-              <a:bodyPr rtlCol="0" anchor="ctr"/>
-              <a:lstStyle/>
-              <a:p>
-                <a:pPr algn="ctr"/>
-                <a:endParaRPr lang="en-NZ"/>
-              </a:p>
-            </p:txBody>
-          </p:sp>
-        </p:grpSp>
-        <p:grpSp>
-          <p:nvGrpSpPr>
-            <p:cNvPr id="42" name="Group 41">
+            </a:ln>
+          </p:spPr>
+          <p:style>
+            <a:lnRef idx="2">
+              <a:schemeClr val="accent6">
+                <a:shade val="15000"/>
+              </a:schemeClr>
+            </a:lnRef>
+            <a:fillRef idx="1">
+              <a:schemeClr val="accent6"/>
+            </a:fillRef>
+            <a:effectRef idx="0">
+              <a:schemeClr val="accent6"/>
+            </a:effectRef>
+            <a:fontRef idx="minor">
+              <a:schemeClr val="lt1"/>
+            </a:fontRef>
+          </p:style>
+          <p:txBody>
+            <a:bodyPr rtlCol="0" anchor="ctr"/>
+            <a:lstStyle/>
+            <a:p>
+              <a:pPr algn="ctr"/>
+              <a:endParaRPr lang="en-NZ"/>
+            </a:p>
+          </p:txBody>
+        </p:sp>
+      </p:grpSp>
+      <p:grpSp>
+        <p:nvGrpSpPr>
+          <p:cNvPr id="42" name="Group 41">
+            <a:extLst>
+              <a:ext uri="{FF2B5EF4-FFF2-40B4-BE49-F238E27FC236}">
+                <a16:creationId xmlns:a16="http://schemas.microsoft.com/office/drawing/2014/main" id="{34924CB9-E56C-60EE-1D03-56FAD016403D}"/>
+              </a:ext>
+            </a:extLst>
+          </p:cNvPr>
+          <p:cNvGrpSpPr/>
+          <p:nvPr/>
+        </p:nvGrpSpPr>
+        <p:grpSpPr>
+          <a:xfrm flipH="1">
+            <a:off x="2997047" y="2187673"/>
+            <a:ext cx="750300" cy="2737251"/>
+            <a:chOff x="5677461" y="2176091"/>
+            <a:chExt cx="750300" cy="2737251"/>
+          </a:xfrm>
+        </p:grpSpPr>
+        <p:sp>
+          <p:nvSpPr>
+            <p:cNvPr id="43" name="Oval 15">
               <a:extLst>
                 <a:ext uri="{FF2B5EF4-FFF2-40B4-BE49-F238E27FC236}">
-                  <a16:creationId xmlns:a16="http://schemas.microsoft.com/office/drawing/2014/main" id="{34924CB9-E56C-60EE-1D03-56FAD016403D}"/>
+                  <a16:creationId xmlns:a16="http://schemas.microsoft.com/office/drawing/2014/main" id="{6FAFF837-16C2-0713-E4AC-8F5046A999B9}"/>
                 </a:ext>
               </a:extLst>
             </p:cNvPr>
-            <p:cNvGrpSpPr/>
+            <p:cNvSpPr/>
             <p:nvPr/>
-          </p:nvGrpSpPr>
-          <p:grpSpPr>
-            <a:xfrm flipH="1">
-              <a:off x="2997047" y="2187673"/>
-              <a:ext cx="750300" cy="2737251"/>
-              <a:chOff x="5677461" y="2176091"/>
-              <a:chExt cx="750300" cy="2737251"/>
+          </p:nvSpPr>
+          <p:spPr>
+            <a:xfrm rot="1439914" flipH="1">
+              <a:off x="5873621" y="3072463"/>
+              <a:ext cx="358584" cy="83907"/>
             </a:xfrm>
-          </p:grpSpPr>
-          <p:sp>
-            <p:nvSpPr>
-              <p:cNvPr id="43" name="Oval 15">
-                <a:extLst>
-                  <a:ext uri="{FF2B5EF4-FFF2-40B4-BE49-F238E27FC236}">
-                    <a16:creationId xmlns:a16="http://schemas.microsoft.com/office/drawing/2014/main" id="{6FAFF837-16C2-0713-E4AC-8F5046A999B9}"/>
-                  </a:ext>
-                </a:extLst>
-              </p:cNvPr>
-              <p:cNvSpPr/>
-              <p:nvPr/>
-            </p:nvSpPr>
-            <p:spPr>
-              <a:xfrm rot="1439914" flipH="1">
-                <a:off x="5873621" y="3072463"/>
-                <a:ext cx="358584" cy="83907"/>
-              </a:xfrm>
-              <a:custGeom>
-                <a:avLst/>
-                <a:gdLst>
-                  <a:gd name="csX0" fmla="*/ 0 w 525294"/>
-                  <a:gd name="csY0" fmla="*/ 94034 h 188068"/>
-                  <a:gd name="csX1" fmla="*/ 262647 w 525294"/>
-                  <a:gd name="csY1" fmla="*/ 0 h 188068"/>
-                  <a:gd name="csX2" fmla="*/ 525294 w 525294"/>
-                  <a:gd name="csY2" fmla="*/ 94034 h 188068"/>
-                  <a:gd name="csX3" fmla="*/ 262647 w 525294"/>
-                  <a:gd name="csY3" fmla="*/ 188068 h 188068"/>
-                  <a:gd name="csX4" fmla="*/ 0 w 525294"/>
-                  <a:gd name="csY4" fmla="*/ 94034 h 188068"/>
-                  <a:gd name="csX0" fmla="*/ 0 w 623481"/>
-                  <a:gd name="csY0" fmla="*/ 94831 h 189220"/>
-                  <a:gd name="csX1" fmla="*/ 262647 w 623481"/>
-                  <a:gd name="csY1" fmla="*/ 797 h 189220"/>
-                  <a:gd name="csX2" fmla="*/ 623481 w 623481"/>
-                  <a:gd name="csY2" fmla="*/ 65276 h 189220"/>
-                  <a:gd name="csX3" fmla="*/ 262647 w 623481"/>
-                  <a:gd name="csY3" fmla="*/ 188865 h 189220"/>
-                  <a:gd name="csX4" fmla="*/ 0 w 623481"/>
-                  <a:gd name="csY4" fmla="*/ 94831 h 189220"/>
-                </a:gdLst>
-                <a:ahLst/>
-                <a:cxnLst>
-                  <a:cxn ang="0">
-                    <a:pos x="csX0" y="csY0"/>
-                  </a:cxn>
-                  <a:cxn ang="0">
-                    <a:pos x="csX1" y="csY1"/>
-                  </a:cxn>
-                  <a:cxn ang="0">
-                    <a:pos x="csX2" y="csY2"/>
-                  </a:cxn>
-                  <a:cxn ang="0">
-                    <a:pos x="csX3" y="csY3"/>
-                  </a:cxn>
-                  <a:cxn ang="0">
-                    <a:pos x="csX4" y="csY4"/>
-                  </a:cxn>
-                </a:cxnLst>
-                <a:rect l="l" t="t" r="r" b="b"/>
-                <a:pathLst>
-                  <a:path w="623481" h="189220">
-                    <a:moveTo>
-                      <a:pt x="0" y="94831"/>
-                    </a:moveTo>
-                    <a:cubicBezTo>
-                      <a:pt x="0" y="42897"/>
-                      <a:pt x="158734" y="5723"/>
-                      <a:pt x="262647" y="797"/>
-                    </a:cubicBezTo>
-                    <a:cubicBezTo>
-                      <a:pt x="366560" y="-4129"/>
-                      <a:pt x="623481" y="13342"/>
-                      <a:pt x="623481" y="65276"/>
-                    </a:cubicBezTo>
-                    <a:cubicBezTo>
-                      <a:pt x="623481" y="117210"/>
-                      <a:pt x="366560" y="183939"/>
-                      <a:pt x="262647" y="188865"/>
-                    </a:cubicBezTo>
-                    <a:cubicBezTo>
-                      <a:pt x="158734" y="193791"/>
-                      <a:pt x="0" y="146765"/>
-                      <a:pt x="0" y="94831"/>
-                    </a:cubicBezTo>
-                    <a:close/>
-                  </a:path>
-                </a:pathLst>
-              </a:custGeom>
+            <a:custGeom>
+              <a:avLst/>
+              <a:gdLst>
+                <a:gd name="csX0" fmla="*/ 0 w 525294"/>
+                <a:gd name="csY0" fmla="*/ 94034 h 188068"/>
+                <a:gd name="csX1" fmla="*/ 262647 w 525294"/>
+                <a:gd name="csY1" fmla="*/ 0 h 188068"/>
+                <a:gd name="csX2" fmla="*/ 525294 w 525294"/>
+                <a:gd name="csY2" fmla="*/ 94034 h 188068"/>
+                <a:gd name="csX3" fmla="*/ 262647 w 525294"/>
+                <a:gd name="csY3" fmla="*/ 188068 h 188068"/>
+                <a:gd name="csX4" fmla="*/ 0 w 525294"/>
+                <a:gd name="csY4" fmla="*/ 94034 h 188068"/>
+                <a:gd name="csX0" fmla="*/ 0 w 623481"/>
+                <a:gd name="csY0" fmla="*/ 94831 h 189220"/>
+                <a:gd name="csX1" fmla="*/ 262647 w 623481"/>
+                <a:gd name="csY1" fmla="*/ 797 h 189220"/>
+                <a:gd name="csX2" fmla="*/ 623481 w 623481"/>
+                <a:gd name="csY2" fmla="*/ 65276 h 189220"/>
+                <a:gd name="csX3" fmla="*/ 262647 w 623481"/>
+                <a:gd name="csY3" fmla="*/ 188865 h 189220"/>
+                <a:gd name="csX4" fmla="*/ 0 w 623481"/>
+                <a:gd name="csY4" fmla="*/ 94831 h 189220"/>
+              </a:gdLst>
+              <a:ahLst/>
+              <a:cxnLst>
+                <a:cxn ang="0">
+                  <a:pos x="csX0" y="csY0"/>
+                </a:cxn>
+                <a:cxn ang="0">
+                  <a:pos x="csX1" y="csY1"/>
+                </a:cxn>
+                <a:cxn ang="0">
+                  <a:pos x="csX2" y="csY2"/>
+                </a:cxn>
+                <a:cxn ang="0">
+                  <a:pos x="csX3" y="csY3"/>
+                </a:cxn>
+                <a:cxn ang="0">
+                  <a:pos x="csX4" y="csY4"/>
+                </a:cxn>
+              </a:cxnLst>
+              <a:rect l="l" t="t" r="r" b="b"/>
+              <a:pathLst>
+                <a:path w="623481" h="189220">
+                  <a:moveTo>
+                    <a:pt x="0" y="94831"/>
+                  </a:moveTo>
+                  <a:cubicBezTo>
+                    <a:pt x="0" y="42897"/>
+                    <a:pt x="158734" y="5723"/>
+                    <a:pt x="262647" y="797"/>
+                  </a:cubicBezTo>
+                  <a:cubicBezTo>
+                    <a:pt x="366560" y="-4129"/>
+                    <a:pt x="623481" y="13342"/>
+                    <a:pt x="623481" y="65276"/>
+                  </a:cubicBezTo>
+                  <a:cubicBezTo>
+                    <a:pt x="623481" y="117210"/>
+                    <a:pt x="366560" y="183939"/>
+                    <a:pt x="262647" y="188865"/>
+                  </a:cubicBezTo>
+                  <a:cubicBezTo>
+                    <a:pt x="158734" y="193791"/>
+                    <a:pt x="0" y="146765"/>
+                    <a:pt x="0" y="94831"/>
+                  </a:cubicBezTo>
+                  <a:close/>
+                </a:path>
+              </a:pathLst>
+            </a:custGeom>
+            <a:solidFill>
+              <a:schemeClr val="accent6">
+                <a:lumMod val="75000"/>
+              </a:schemeClr>
+            </a:solidFill>
+            <a:ln>
               <a:solidFill>
                 <a:schemeClr val="accent6">
                   <a:lumMod val="75000"/>
                 </a:schemeClr>
               </a:solidFill>
-              <a:ln>
-                <a:solidFill>
-                  <a:schemeClr val="accent6">
-                    <a:lumMod val="75000"/>
-                  </a:schemeClr>
-                </a:solidFill>
-              </a:ln>
-            </p:spPr>
-            <p:style>
-              <a:lnRef idx="2">
-                <a:schemeClr val="accent6">
-                  <a:shade val="15000"/>
-                </a:schemeClr>
-              </a:lnRef>
-              <a:fillRef idx="1">
-                <a:schemeClr val="accent6"/>
-              </a:fillRef>
-              <a:effectRef idx="0">
-                <a:schemeClr val="accent6"/>
-              </a:effectRef>
-              <a:fontRef idx="minor">
-                <a:schemeClr val="lt1"/>
-              </a:fontRef>
-            </p:style>
-            <p:txBody>
-              <a:bodyPr rtlCol="0" anchor="ctr"/>
-              <a:lstStyle/>
-              <a:p>
-                <a:pPr algn="ctr"/>
-                <a:endParaRPr lang="en-NZ"/>
-              </a:p>
-            </p:txBody>
-          </p:sp>
-          <p:sp>
-            <p:nvSpPr>
-              <p:cNvPr id="44" name="Oval 15">
-                <a:extLst>
-                  <a:ext uri="{FF2B5EF4-FFF2-40B4-BE49-F238E27FC236}">
-                    <a16:creationId xmlns:a16="http://schemas.microsoft.com/office/drawing/2014/main" id="{D4EF5C35-6F13-CE1A-5BA5-E5919D67F4AA}"/>
-                  </a:ext>
-                </a:extLst>
-              </p:cNvPr>
-              <p:cNvSpPr/>
-              <p:nvPr/>
-            </p:nvSpPr>
-            <p:spPr>
-              <a:xfrm rot="1297676" flipH="1">
-                <a:off x="5677461" y="2648054"/>
-                <a:ext cx="336104" cy="93295"/>
-              </a:xfrm>
-              <a:custGeom>
-                <a:avLst/>
-                <a:gdLst>
-                  <a:gd name="csX0" fmla="*/ 0 w 525294"/>
-                  <a:gd name="csY0" fmla="*/ 94034 h 188068"/>
-                  <a:gd name="csX1" fmla="*/ 262647 w 525294"/>
-                  <a:gd name="csY1" fmla="*/ 0 h 188068"/>
-                  <a:gd name="csX2" fmla="*/ 525294 w 525294"/>
-                  <a:gd name="csY2" fmla="*/ 94034 h 188068"/>
-                  <a:gd name="csX3" fmla="*/ 262647 w 525294"/>
-                  <a:gd name="csY3" fmla="*/ 188068 h 188068"/>
-                  <a:gd name="csX4" fmla="*/ 0 w 525294"/>
-                  <a:gd name="csY4" fmla="*/ 94034 h 188068"/>
-                  <a:gd name="csX0" fmla="*/ 0 w 623481"/>
-                  <a:gd name="csY0" fmla="*/ 94831 h 189220"/>
-                  <a:gd name="csX1" fmla="*/ 262647 w 623481"/>
-                  <a:gd name="csY1" fmla="*/ 797 h 189220"/>
-                  <a:gd name="csX2" fmla="*/ 623481 w 623481"/>
-                  <a:gd name="csY2" fmla="*/ 65276 h 189220"/>
-                  <a:gd name="csX3" fmla="*/ 262647 w 623481"/>
-                  <a:gd name="csY3" fmla="*/ 188865 h 189220"/>
-                  <a:gd name="csX4" fmla="*/ 0 w 623481"/>
-                  <a:gd name="csY4" fmla="*/ 94831 h 189220"/>
-                </a:gdLst>
-                <a:ahLst/>
-                <a:cxnLst>
-                  <a:cxn ang="0">
-                    <a:pos x="csX0" y="csY0"/>
-                  </a:cxn>
-                  <a:cxn ang="0">
-                    <a:pos x="csX1" y="csY1"/>
-                  </a:cxn>
-                  <a:cxn ang="0">
-                    <a:pos x="csX2" y="csY2"/>
-                  </a:cxn>
-                  <a:cxn ang="0">
-                    <a:pos x="csX3" y="csY3"/>
-                  </a:cxn>
-                  <a:cxn ang="0">
-                    <a:pos x="csX4" y="csY4"/>
-                  </a:cxn>
-                </a:cxnLst>
-                <a:rect l="l" t="t" r="r" b="b"/>
-                <a:pathLst>
-                  <a:path w="623481" h="189220">
-                    <a:moveTo>
-                      <a:pt x="0" y="94831"/>
-                    </a:moveTo>
-                    <a:cubicBezTo>
-                      <a:pt x="0" y="42897"/>
-                      <a:pt x="158734" y="5723"/>
-                      <a:pt x="262647" y="797"/>
-                    </a:cubicBezTo>
-                    <a:cubicBezTo>
-                      <a:pt x="366560" y="-4129"/>
-                      <a:pt x="623481" y="13342"/>
-                      <a:pt x="623481" y="65276"/>
-                    </a:cubicBezTo>
-                    <a:cubicBezTo>
-                      <a:pt x="623481" y="117210"/>
-                      <a:pt x="366560" y="183939"/>
-                      <a:pt x="262647" y="188865"/>
-                    </a:cubicBezTo>
-                    <a:cubicBezTo>
-                      <a:pt x="158734" y="193791"/>
-                      <a:pt x="0" y="146765"/>
-                      <a:pt x="0" y="94831"/>
-                    </a:cubicBezTo>
-                    <a:close/>
-                  </a:path>
-                </a:pathLst>
-              </a:custGeom>
+            </a:ln>
+          </p:spPr>
+          <p:style>
+            <a:lnRef idx="2">
+              <a:schemeClr val="accent6">
+                <a:shade val="15000"/>
+              </a:schemeClr>
+            </a:lnRef>
+            <a:fillRef idx="1">
+              <a:schemeClr val="accent6"/>
+            </a:fillRef>
+            <a:effectRef idx="0">
+              <a:schemeClr val="accent6"/>
+            </a:effectRef>
+            <a:fontRef idx="minor">
+              <a:schemeClr val="lt1"/>
+            </a:fontRef>
+          </p:style>
+          <p:txBody>
+            <a:bodyPr rtlCol="0" anchor="ctr"/>
+            <a:lstStyle/>
+            <a:p>
+              <a:pPr algn="ctr"/>
+              <a:endParaRPr lang="en-NZ"/>
+            </a:p>
+          </p:txBody>
+        </p:sp>
+        <p:sp>
+          <p:nvSpPr>
+            <p:cNvPr id="44" name="Oval 15">
+              <a:extLst>
+                <a:ext uri="{FF2B5EF4-FFF2-40B4-BE49-F238E27FC236}">
+                  <a16:creationId xmlns:a16="http://schemas.microsoft.com/office/drawing/2014/main" id="{D4EF5C35-6F13-CE1A-5BA5-E5919D67F4AA}"/>
+                </a:ext>
+              </a:extLst>
+            </p:cNvPr>
+            <p:cNvSpPr/>
+            <p:nvPr/>
+          </p:nvSpPr>
+          <p:spPr>
+            <a:xfrm rot="1297676" flipH="1">
+              <a:off x="5677461" y="2648054"/>
+              <a:ext cx="336104" cy="93295"/>
+            </a:xfrm>
+            <a:custGeom>
+              <a:avLst/>
+              <a:gdLst>
+                <a:gd name="csX0" fmla="*/ 0 w 525294"/>
+                <a:gd name="csY0" fmla="*/ 94034 h 188068"/>
+                <a:gd name="csX1" fmla="*/ 262647 w 525294"/>
+                <a:gd name="csY1" fmla="*/ 0 h 188068"/>
+                <a:gd name="csX2" fmla="*/ 525294 w 525294"/>
+                <a:gd name="csY2" fmla="*/ 94034 h 188068"/>
+                <a:gd name="csX3" fmla="*/ 262647 w 525294"/>
+                <a:gd name="csY3" fmla="*/ 188068 h 188068"/>
+                <a:gd name="csX4" fmla="*/ 0 w 525294"/>
+                <a:gd name="csY4" fmla="*/ 94034 h 188068"/>
+                <a:gd name="csX0" fmla="*/ 0 w 623481"/>
+                <a:gd name="csY0" fmla="*/ 94831 h 189220"/>
+                <a:gd name="csX1" fmla="*/ 262647 w 623481"/>
+                <a:gd name="csY1" fmla="*/ 797 h 189220"/>
+                <a:gd name="csX2" fmla="*/ 623481 w 623481"/>
+                <a:gd name="csY2" fmla="*/ 65276 h 189220"/>
+                <a:gd name="csX3" fmla="*/ 262647 w 623481"/>
+                <a:gd name="csY3" fmla="*/ 188865 h 189220"/>
+                <a:gd name="csX4" fmla="*/ 0 w 623481"/>
+                <a:gd name="csY4" fmla="*/ 94831 h 189220"/>
+              </a:gdLst>
+              <a:ahLst/>
+              <a:cxnLst>
+                <a:cxn ang="0">
+                  <a:pos x="csX0" y="csY0"/>
+                </a:cxn>
+                <a:cxn ang="0">
+                  <a:pos x="csX1" y="csY1"/>
+                </a:cxn>
+                <a:cxn ang="0">
+                  <a:pos x="csX2" y="csY2"/>
+                </a:cxn>
+                <a:cxn ang="0">
+                  <a:pos x="csX3" y="csY3"/>
+                </a:cxn>
+                <a:cxn ang="0">
+                  <a:pos x="csX4" y="csY4"/>
+                </a:cxn>
+              </a:cxnLst>
+              <a:rect l="l" t="t" r="r" b="b"/>
+              <a:pathLst>
+                <a:path w="623481" h="189220">
+                  <a:moveTo>
+                    <a:pt x="0" y="94831"/>
+                  </a:moveTo>
+                  <a:cubicBezTo>
+                    <a:pt x="0" y="42897"/>
+                    <a:pt x="158734" y="5723"/>
+                    <a:pt x="262647" y="797"/>
+                  </a:cubicBezTo>
+                  <a:cubicBezTo>
+                    <a:pt x="366560" y="-4129"/>
+                    <a:pt x="623481" y="13342"/>
+                    <a:pt x="623481" y="65276"/>
+                  </a:cubicBezTo>
+                  <a:cubicBezTo>
+                    <a:pt x="623481" y="117210"/>
+                    <a:pt x="366560" y="183939"/>
+                    <a:pt x="262647" y="188865"/>
+                  </a:cubicBezTo>
+                  <a:cubicBezTo>
+                    <a:pt x="158734" y="193791"/>
+                    <a:pt x="0" y="146765"/>
+                    <a:pt x="0" y="94831"/>
+                  </a:cubicBezTo>
+                  <a:close/>
+                </a:path>
+              </a:pathLst>
+            </a:custGeom>
+            <a:solidFill>
+              <a:schemeClr val="accent6">
+                <a:lumMod val="75000"/>
+              </a:schemeClr>
+            </a:solidFill>
+            <a:ln>
               <a:solidFill>
                 <a:schemeClr val="accent6">
                   <a:lumMod val="75000"/>
                 </a:schemeClr>
               </a:solidFill>
-              <a:ln>
-                <a:solidFill>
-                  <a:schemeClr val="accent6">
-                    <a:lumMod val="75000"/>
-                  </a:schemeClr>
-                </a:solidFill>
-              </a:ln>
-            </p:spPr>
-            <p:style>
-              <a:lnRef idx="2">
-                <a:schemeClr val="accent6">
-                  <a:shade val="15000"/>
-                </a:schemeClr>
-              </a:lnRef>
-              <a:fillRef idx="1">
-                <a:schemeClr val="accent6"/>
-              </a:fillRef>
-              <a:effectRef idx="0">
-                <a:schemeClr val="accent6"/>
-              </a:effectRef>
-              <a:fontRef idx="minor">
-                <a:schemeClr val="lt1"/>
-              </a:fontRef>
-            </p:style>
-            <p:txBody>
-              <a:bodyPr rtlCol="0" anchor="ctr"/>
-              <a:lstStyle/>
-              <a:p>
-                <a:pPr algn="ctr"/>
-                <a:endParaRPr lang="en-NZ"/>
-              </a:p>
-            </p:txBody>
-          </p:sp>
-          <p:sp>
-            <p:nvSpPr>
-              <p:cNvPr id="45" name="Oval 15">
-                <a:extLst>
-                  <a:ext uri="{FF2B5EF4-FFF2-40B4-BE49-F238E27FC236}">
-                    <a16:creationId xmlns:a16="http://schemas.microsoft.com/office/drawing/2014/main" id="{0D57873D-3B98-B4B8-D745-1DCE537C6F86}"/>
-                  </a:ext>
-                </a:extLst>
-              </p:cNvPr>
-              <p:cNvSpPr/>
-              <p:nvPr/>
-            </p:nvSpPr>
-            <p:spPr>
-              <a:xfrm rot="16971223">
-                <a:off x="6035007" y="2816575"/>
-                <a:ext cx="428121" cy="76467"/>
-              </a:xfrm>
-              <a:custGeom>
-                <a:avLst/>
-                <a:gdLst>
-                  <a:gd name="csX0" fmla="*/ 0 w 525294"/>
-                  <a:gd name="csY0" fmla="*/ 94034 h 188068"/>
-                  <a:gd name="csX1" fmla="*/ 262647 w 525294"/>
-                  <a:gd name="csY1" fmla="*/ 0 h 188068"/>
-                  <a:gd name="csX2" fmla="*/ 525294 w 525294"/>
-                  <a:gd name="csY2" fmla="*/ 94034 h 188068"/>
-                  <a:gd name="csX3" fmla="*/ 262647 w 525294"/>
-                  <a:gd name="csY3" fmla="*/ 188068 h 188068"/>
-                  <a:gd name="csX4" fmla="*/ 0 w 525294"/>
-                  <a:gd name="csY4" fmla="*/ 94034 h 188068"/>
-                  <a:gd name="csX0" fmla="*/ 0 w 623481"/>
-                  <a:gd name="csY0" fmla="*/ 94831 h 189220"/>
-                  <a:gd name="csX1" fmla="*/ 262647 w 623481"/>
-                  <a:gd name="csY1" fmla="*/ 797 h 189220"/>
-                  <a:gd name="csX2" fmla="*/ 623481 w 623481"/>
-                  <a:gd name="csY2" fmla="*/ 65276 h 189220"/>
-                  <a:gd name="csX3" fmla="*/ 262647 w 623481"/>
-                  <a:gd name="csY3" fmla="*/ 188865 h 189220"/>
-                  <a:gd name="csX4" fmla="*/ 0 w 623481"/>
-                  <a:gd name="csY4" fmla="*/ 94831 h 189220"/>
-                </a:gdLst>
-                <a:ahLst/>
-                <a:cxnLst>
-                  <a:cxn ang="0">
-                    <a:pos x="csX0" y="csY0"/>
-                  </a:cxn>
-                  <a:cxn ang="0">
-                    <a:pos x="csX1" y="csY1"/>
-                  </a:cxn>
-                  <a:cxn ang="0">
-                    <a:pos x="csX2" y="csY2"/>
-                  </a:cxn>
-                  <a:cxn ang="0">
-                    <a:pos x="csX3" y="csY3"/>
-                  </a:cxn>
-                  <a:cxn ang="0">
-                    <a:pos x="csX4" y="csY4"/>
-                  </a:cxn>
-                </a:cxnLst>
-                <a:rect l="l" t="t" r="r" b="b"/>
-                <a:pathLst>
-                  <a:path w="623481" h="189220">
-                    <a:moveTo>
-                      <a:pt x="0" y="94831"/>
-                    </a:moveTo>
-                    <a:cubicBezTo>
-                      <a:pt x="0" y="42897"/>
-                      <a:pt x="158734" y="5723"/>
-                      <a:pt x="262647" y="797"/>
-                    </a:cubicBezTo>
-                    <a:cubicBezTo>
-                      <a:pt x="366560" y="-4129"/>
-                      <a:pt x="623481" y="13342"/>
-                      <a:pt x="623481" y="65276"/>
-                    </a:cubicBezTo>
-                    <a:cubicBezTo>
-                      <a:pt x="623481" y="117210"/>
-                      <a:pt x="366560" y="183939"/>
-                      <a:pt x="262647" y="188865"/>
-                    </a:cubicBezTo>
-                    <a:cubicBezTo>
-                      <a:pt x="158734" y="193791"/>
-                      <a:pt x="0" y="146765"/>
-                      <a:pt x="0" y="94831"/>
-                    </a:cubicBezTo>
-                    <a:close/>
-                  </a:path>
-                </a:pathLst>
-              </a:custGeom>
+            </a:ln>
+          </p:spPr>
+          <p:style>
+            <a:lnRef idx="2">
+              <a:schemeClr val="accent6">
+                <a:shade val="15000"/>
+              </a:schemeClr>
+            </a:lnRef>
+            <a:fillRef idx="1">
+              <a:schemeClr val="accent6"/>
+            </a:fillRef>
+            <a:effectRef idx="0">
+              <a:schemeClr val="accent6"/>
+            </a:effectRef>
+            <a:fontRef idx="minor">
+              <a:schemeClr val="lt1"/>
+            </a:fontRef>
+          </p:style>
+          <p:txBody>
+            <a:bodyPr rtlCol="0" anchor="ctr"/>
+            <a:lstStyle/>
+            <a:p>
+              <a:pPr algn="ctr"/>
+              <a:endParaRPr lang="en-NZ"/>
+            </a:p>
+          </p:txBody>
+        </p:sp>
+        <p:sp>
+          <p:nvSpPr>
+            <p:cNvPr id="45" name="Oval 15">
+              <a:extLst>
+                <a:ext uri="{FF2B5EF4-FFF2-40B4-BE49-F238E27FC236}">
+                  <a16:creationId xmlns:a16="http://schemas.microsoft.com/office/drawing/2014/main" id="{0D57873D-3B98-B4B8-D745-1DCE537C6F86}"/>
+                </a:ext>
+              </a:extLst>
+            </p:cNvPr>
+            <p:cNvSpPr/>
+            <p:nvPr/>
+          </p:nvSpPr>
+          <p:spPr>
+            <a:xfrm rot="16971223">
+              <a:off x="6035007" y="2816575"/>
+              <a:ext cx="428121" cy="76467"/>
+            </a:xfrm>
+            <a:custGeom>
+              <a:avLst/>
+              <a:gdLst>
+                <a:gd name="csX0" fmla="*/ 0 w 525294"/>
+                <a:gd name="csY0" fmla="*/ 94034 h 188068"/>
+                <a:gd name="csX1" fmla="*/ 262647 w 525294"/>
+                <a:gd name="csY1" fmla="*/ 0 h 188068"/>
+                <a:gd name="csX2" fmla="*/ 525294 w 525294"/>
+                <a:gd name="csY2" fmla="*/ 94034 h 188068"/>
+                <a:gd name="csX3" fmla="*/ 262647 w 525294"/>
+                <a:gd name="csY3" fmla="*/ 188068 h 188068"/>
+                <a:gd name="csX4" fmla="*/ 0 w 525294"/>
+                <a:gd name="csY4" fmla="*/ 94034 h 188068"/>
+                <a:gd name="csX0" fmla="*/ 0 w 623481"/>
+                <a:gd name="csY0" fmla="*/ 94831 h 189220"/>
+                <a:gd name="csX1" fmla="*/ 262647 w 623481"/>
+                <a:gd name="csY1" fmla="*/ 797 h 189220"/>
+                <a:gd name="csX2" fmla="*/ 623481 w 623481"/>
+                <a:gd name="csY2" fmla="*/ 65276 h 189220"/>
+                <a:gd name="csX3" fmla="*/ 262647 w 623481"/>
+                <a:gd name="csY3" fmla="*/ 188865 h 189220"/>
+                <a:gd name="csX4" fmla="*/ 0 w 623481"/>
+                <a:gd name="csY4" fmla="*/ 94831 h 189220"/>
+              </a:gdLst>
+              <a:ahLst/>
+              <a:cxnLst>
+                <a:cxn ang="0">
+                  <a:pos x="csX0" y="csY0"/>
+                </a:cxn>
+                <a:cxn ang="0">
+                  <a:pos x="csX1" y="csY1"/>
+                </a:cxn>
+                <a:cxn ang="0">
+                  <a:pos x="csX2" y="csY2"/>
+                </a:cxn>
+                <a:cxn ang="0">
+                  <a:pos x="csX3" y="csY3"/>
+                </a:cxn>
+                <a:cxn ang="0">
+                  <a:pos x="csX4" y="csY4"/>
+                </a:cxn>
+              </a:cxnLst>
+              <a:rect l="l" t="t" r="r" b="b"/>
+              <a:pathLst>
+                <a:path w="623481" h="189220">
+                  <a:moveTo>
+                    <a:pt x="0" y="94831"/>
+                  </a:moveTo>
+                  <a:cubicBezTo>
+                    <a:pt x="0" y="42897"/>
+                    <a:pt x="158734" y="5723"/>
+                    <a:pt x="262647" y="797"/>
+                  </a:cubicBezTo>
+                  <a:cubicBezTo>
+                    <a:pt x="366560" y="-4129"/>
+                    <a:pt x="623481" y="13342"/>
+                    <a:pt x="623481" y="65276"/>
+                  </a:cubicBezTo>
+                  <a:cubicBezTo>
+                    <a:pt x="623481" y="117210"/>
+                    <a:pt x="366560" y="183939"/>
+                    <a:pt x="262647" y="188865"/>
+                  </a:cubicBezTo>
+                  <a:cubicBezTo>
+                    <a:pt x="158734" y="193791"/>
+                    <a:pt x="0" y="146765"/>
+                    <a:pt x="0" y="94831"/>
+                  </a:cubicBezTo>
+                  <a:close/>
+                </a:path>
+              </a:pathLst>
+            </a:custGeom>
+            <a:solidFill>
+              <a:schemeClr val="accent6">
+                <a:lumMod val="75000"/>
+              </a:schemeClr>
+            </a:solidFill>
+            <a:ln>
               <a:solidFill>
                 <a:schemeClr val="accent6">
                   <a:lumMod val="75000"/>
                 </a:schemeClr>
               </a:solidFill>
-              <a:ln>
-                <a:solidFill>
-                  <a:schemeClr val="accent6">
-                    <a:lumMod val="75000"/>
-                  </a:schemeClr>
-                </a:solidFill>
-              </a:ln>
-            </p:spPr>
-            <p:style>
-              <a:lnRef idx="2">
-                <a:schemeClr val="accent6">
-                  <a:shade val="15000"/>
-                </a:schemeClr>
-              </a:lnRef>
-              <a:fillRef idx="1">
-                <a:schemeClr val="accent6"/>
-              </a:fillRef>
-              <a:effectRef idx="0">
-                <a:schemeClr val="accent6"/>
-              </a:effectRef>
-              <a:fontRef idx="minor">
-                <a:schemeClr val="lt1"/>
-              </a:fontRef>
-            </p:style>
-            <p:txBody>
-              <a:bodyPr rtlCol="0" anchor="ctr"/>
-              <a:lstStyle/>
-              <a:p>
-                <a:pPr algn="ctr"/>
-                <a:endParaRPr lang="en-NZ"/>
-              </a:p>
-            </p:txBody>
-          </p:sp>
-          <p:sp>
-            <p:nvSpPr>
-              <p:cNvPr id="46" name="Oval 15">
-                <a:extLst>
-                  <a:ext uri="{FF2B5EF4-FFF2-40B4-BE49-F238E27FC236}">
-                    <a16:creationId xmlns:a16="http://schemas.microsoft.com/office/drawing/2014/main" id="{D21E51AF-5437-6156-DBFD-1104AA7F5B95}"/>
-                  </a:ext>
-                </a:extLst>
-              </p:cNvPr>
-              <p:cNvSpPr/>
-              <p:nvPr/>
-            </p:nvSpPr>
-            <p:spPr>
-              <a:xfrm rot="16672422">
-                <a:off x="5925138" y="2645257"/>
-                <a:ext cx="384004" cy="76570"/>
-              </a:xfrm>
-              <a:custGeom>
-                <a:avLst/>
-                <a:gdLst>
-                  <a:gd name="csX0" fmla="*/ 0 w 525294"/>
-                  <a:gd name="csY0" fmla="*/ 94034 h 188068"/>
-                  <a:gd name="csX1" fmla="*/ 262647 w 525294"/>
-                  <a:gd name="csY1" fmla="*/ 0 h 188068"/>
-                  <a:gd name="csX2" fmla="*/ 525294 w 525294"/>
-                  <a:gd name="csY2" fmla="*/ 94034 h 188068"/>
-                  <a:gd name="csX3" fmla="*/ 262647 w 525294"/>
-                  <a:gd name="csY3" fmla="*/ 188068 h 188068"/>
-                  <a:gd name="csX4" fmla="*/ 0 w 525294"/>
-                  <a:gd name="csY4" fmla="*/ 94034 h 188068"/>
-                  <a:gd name="csX0" fmla="*/ 0 w 623481"/>
-                  <a:gd name="csY0" fmla="*/ 94831 h 189220"/>
-                  <a:gd name="csX1" fmla="*/ 262647 w 623481"/>
-                  <a:gd name="csY1" fmla="*/ 797 h 189220"/>
-                  <a:gd name="csX2" fmla="*/ 623481 w 623481"/>
-                  <a:gd name="csY2" fmla="*/ 65276 h 189220"/>
-                  <a:gd name="csX3" fmla="*/ 262647 w 623481"/>
-                  <a:gd name="csY3" fmla="*/ 188865 h 189220"/>
-                  <a:gd name="csX4" fmla="*/ 0 w 623481"/>
-                  <a:gd name="csY4" fmla="*/ 94831 h 189220"/>
-                </a:gdLst>
-                <a:ahLst/>
-                <a:cxnLst>
-                  <a:cxn ang="0">
-                    <a:pos x="csX0" y="csY0"/>
-                  </a:cxn>
-                  <a:cxn ang="0">
-                    <a:pos x="csX1" y="csY1"/>
-                  </a:cxn>
-                  <a:cxn ang="0">
-                    <a:pos x="csX2" y="csY2"/>
-                  </a:cxn>
-                  <a:cxn ang="0">
-                    <a:pos x="csX3" y="csY3"/>
-                  </a:cxn>
-                  <a:cxn ang="0">
-                    <a:pos x="csX4" y="csY4"/>
-                  </a:cxn>
-                </a:cxnLst>
-                <a:rect l="l" t="t" r="r" b="b"/>
-                <a:pathLst>
-                  <a:path w="623481" h="189220">
-                    <a:moveTo>
-                      <a:pt x="0" y="94831"/>
-                    </a:moveTo>
-                    <a:cubicBezTo>
-                      <a:pt x="0" y="42897"/>
-                      <a:pt x="158734" y="5723"/>
-                      <a:pt x="262647" y="797"/>
-                    </a:cubicBezTo>
-                    <a:cubicBezTo>
-                      <a:pt x="366560" y="-4129"/>
-                      <a:pt x="623481" y="13342"/>
-                      <a:pt x="623481" y="65276"/>
-                    </a:cubicBezTo>
-                    <a:cubicBezTo>
-                      <a:pt x="623481" y="117210"/>
-                      <a:pt x="366560" y="183939"/>
-                      <a:pt x="262647" y="188865"/>
-                    </a:cubicBezTo>
-                    <a:cubicBezTo>
-                      <a:pt x="158734" y="193791"/>
-                      <a:pt x="0" y="146765"/>
-                      <a:pt x="0" y="94831"/>
-                    </a:cubicBezTo>
-                    <a:close/>
-                  </a:path>
-                </a:pathLst>
-              </a:custGeom>
+            </a:ln>
+          </p:spPr>
+          <p:style>
+            <a:lnRef idx="2">
+              <a:schemeClr val="accent6">
+                <a:shade val="15000"/>
+              </a:schemeClr>
+            </a:lnRef>
+            <a:fillRef idx="1">
+              <a:schemeClr val="accent6"/>
+            </a:fillRef>
+            <a:effectRef idx="0">
+              <a:schemeClr val="accent6"/>
+            </a:effectRef>
+            <a:fontRef idx="minor">
+              <a:schemeClr val="lt1"/>
+            </a:fontRef>
+          </p:style>
+          <p:txBody>
+            <a:bodyPr rtlCol="0" anchor="ctr"/>
+            <a:lstStyle/>
+            <a:p>
+              <a:pPr algn="ctr"/>
+              <a:endParaRPr lang="en-NZ"/>
+            </a:p>
+          </p:txBody>
+        </p:sp>
+        <p:sp>
+          <p:nvSpPr>
+            <p:cNvPr id="46" name="Oval 15">
+              <a:extLst>
+                <a:ext uri="{FF2B5EF4-FFF2-40B4-BE49-F238E27FC236}">
+                  <a16:creationId xmlns:a16="http://schemas.microsoft.com/office/drawing/2014/main" id="{D21E51AF-5437-6156-DBFD-1104AA7F5B95}"/>
+                </a:ext>
+              </a:extLst>
+            </p:cNvPr>
+            <p:cNvSpPr/>
+            <p:nvPr/>
+          </p:nvSpPr>
+          <p:spPr>
+            <a:xfrm rot="16672422">
+              <a:off x="5925138" y="2645257"/>
+              <a:ext cx="384004" cy="76570"/>
+            </a:xfrm>
+            <a:custGeom>
+              <a:avLst/>
+              <a:gdLst>
+                <a:gd name="csX0" fmla="*/ 0 w 525294"/>
+                <a:gd name="csY0" fmla="*/ 94034 h 188068"/>
+                <a:gd name="csX1" fmla="*/ 262647 w 525294"/>
+                <a:gd name="csY1" fmla="*/ 0 h 188068"/>
+                <a:gd name="csX2" fmla="*/ 525294 w 525294"/>
+                <a:gd name="csY2" fmla="*/ 94034 h 188068"/>
+                <a:gd name="csX3" fmla="*/ 262647 w 525294"/>
+                <a:gd name="csY3" fmla="*/ 188068 h 188068"/>
+                <a:gd name="csX4" fmla="*/ 0 w 525294"/>
+                <a:gd name="csY4" fmla="*/ 94034 h 188068"/>
+                <a:gd name="csX0" fmla="*/ 0 w 623481"/>
+                <a:gd name="csY0" fmla="*/ 94831 h 189220"/>
+                <a:gd name="csX1" fmla="*/ 262647 w 623481"/>
+                <a:gd name="csY1" fmla="*/ 797 h 189220"/>
+                <a:gd name="csX2" fmla="*/ 623481 w 623481"/>
+                <a:gd name="csY2" fmla="*/ 65276 h 189220"/>
+                <a:gd name="csX3" fmla="*/ 262647 w 623481"/>
+                <a:gd name="csY3" fmla="*/ 188865 h 189220"/>
+                <a:gd name="csX4" fmla="*/ 0 w 623481"/>
+                <a:gd name="csY4" fmla="*/ 94831 h 189220"/>
+              </a:gdLst>
+              <a:ahLst/>
+              <a:cxnLst>
+                <a:cxn ang="0">
+                  <a:pos x="csX0" y="csY0"/>
+                </a:cxn>
+                <a:cxn ang="0">
+                  <a:pos x="csX1" y="csY1"/>
+                </a:cxn>
+                <a:cxn ang="0">
+                  <a:pos x="csX2" y="csY2"/>
+                </a:cxn>
+                <a:cxn ang="0">
+                  <a:pos x="csX3" y="csY3"/>
+                </a:cxn>
+                <a:cxn ang="0">
+                  <a:pos x="csX4" y="csY4"/>
+                </a:cxn>
+              </a:cxnLst>
+              <a:rect l="l" t="t" r="r" b="b"/>
+              <a:pathLst>
+                <a:path w="623481" h="189220">
+                  <a:moveTo>
+                    <a:pt x="0" y="94831"/>
+                  </a:moveTo>
+                  <a:cubicBezTo>
+                    <a:pt x="0" y="42897"/>
+                    <a:pt x="158734" y="5723"/>
+                    <a:pt x="262647" y="797"/>
+                  </a:cubicBezTo>
+                  <a:cubicBezTo>
+                    <a:pt x="366560" y="-4129"/>
+                    <a:pt x="623481" y="13342"/>
+                    <a:pt x="623481" y="65276"/>
+                  </a:cubicBezTo>
+                  <a:cubicBezTo>
+                    <a:pt x="623481" y="117210"/>
+                    <a:pt x="366560" y="183939"/>
+                    <a:pt x="262647" y="188865"/>
+                  </a:cubicBezTo>
+                  <a:cubicBezTo>
+                    <a:pt x="158734" y="193791"/>
+                    <a:pt x="0" y="146765"/>
+                    <a:pt x="0" y="94831"/>
+                  </a:cubicBezTo>
+                  <a:close/>
+                </a:path>
+              </a:pathLst>
+            </a:custGeom>
+            <a:solidFill>
+              <a:schemeClr val="accent6">
+                <a:lumMod val="75000"/>
+              </a:schemeClr>
+            </a:solidFill>
+            <a:ln>
               <a:solidFill>
                 <a:schemeClr val="accent6">
                   <a:lumMod val="75000"/>
                 </a:schemeClr>
               </a:solidFill>
-              <a:ln>
-                <a:solidFill>
-                  <a:schemeClr val="accent6">
-                    <a:lumMod val="75000"/>
-                  </a:schemeClr>
-                </a:solidFill>
-              </a:ln>
-            </p:spPr>
-            <p:style>
-              <a:lnRef idx="2">
-                <a:schemeClr val="accent6">
-                  <a:shade val="15000"/>
-                </a:schemeClr>
-              </a:lnRef>
-              <a:fillRef idx="1">
-                <a:schemeClr val="accent6"/>
-              </a:fillRef>
-              <a:effectRef idx="0">
-                <a:schemeClr val="accent6"/>
-              </a:effectRef>
-              <a:fontRef idx="minor">
-                <a:schemeClr val="lt1"/>
-              </a:fontRef>
-            </p:style>
-            <p:txBody>
-              <a:bodyPr rtlCol="0" anchor="ctr"/>
-              <a:lstStyle/>
-              <a:p>
-                <a:pPr algn="ctr"/>
-                <a:endParaRPr lang="en-NZ"/>
-              </a:p>
-            </p:txBody>
-          </p:sp>
-          <p:sp>
-            <p:nvSpPr>
-              <p:cNvPr id="47" name="Oval 15">
-                <a:extLst>
-                  <a:ext uri="{FF2B5EF4-FFF2-40B4-BE49-F238E27FC236}">
-                    <a16:creationId xmlns:a16="http://schemas.microsoft.com/office/drawing/2014/main" id="{6E3A296F-05C6-8F46-539F-94C0F890FDCF}"/>
-                  </a:ext>
-                </a:extLst>
-              </p:cNvPr>
-              <p:cNvSpPr/>
-              <p:nvPr/>
-            </p:nvSpPr>
-            <p:spPr>
-              <a:xfrm rot="14162025">
-                <a:off x="5581911" y="2324390"/>
-                <a:ext cx="367317" cy="70720"/>
-              </a:xfrm>
-              <a:custGeom>
-                <a:avLst/>
-                <a:gdLst>
-                  <a:gd name="csX0" fmla="*/ 0 w 525294"/>
-                  <a:gd name="csY0" fmla="*/ 94034 h 188068"/>
-                  <a:gd name="csX1" fmla="*/ 262647 w 525294"/>
-                  <a:gd name="csY1" fmla="*/ 0 h 188068"/>
-                  <a:gd name="csX2" fmla="*/ 525294 w 525294"/>
-                  <a:gd name="csY2" fmla="*/ 94034 h 188068"/>
-                  <a:gd name="csX3" fmla="*/ 262647 w 525294"/>
-                  <a:gd name="csY3" fmla="*/ 188068 h 188068"/>
-                  <a:gd name="csX4" fmla="*/ 0 w 525294"/>
-                  <a:gd name="csY4" fmla="*/ 94034 h 188068"/>
-                  <a:gd name="csX0" fmla="*/ 0 w 623481"/>
-                  <a:gd name="csY0" fmla="*/ 94831 h 189220"/>
-                  <a:gd name="csX1" fmla="*/ 262647 w 623481"/>
-                  <a:gd name="csY1" fmla="*/ 797 h 189220"/>
-                  <a:gd name="csX2" fmla="*/ 623481 w 623481"/>
-                  <a:gd name="csY2" fmla="*/ 65276 h 189220"/>
-                  <a:gd name="csX3" fmla="*/ 262647 w 623481"/>
-                  <a:gd name="csY3" fmla="*/ 188865 h 189220"/>
-                  <a:gd name="csX4" fmla="*/ 0 w 623481"/>
-                  <a:gd name="csY4" fmla="*/ 94831 h 189220"/>
-                </a:gdLst>
-                <a:ahLst/>
-                <a:cxnLst>
-                  <a:cxn ang="0">
-                    <a:pos x="csX0" y="csY0"/>
-                  </a:cxn>
-                  <a:cxn ang="0">
-                    <a:pos x="csX1" y="csY1"/>
-                  </a:cxn>
-                  <a:cxn ang="0">
-                    <a:pos x="csX2" y="csY2"/>
-                  </a:cxn>
-                  <a:cxn ang="0">
-                    <a:pos x="csX3" y="csY3"/>
-                  </a:cxn>
-                  <a:cxn ang="0">
-                    <a:pos x="csX4" y="csY4"/>
-                  </a:cxn>
-                </a:cxnLst>
-                <a:rect l="l" t="t" r="r" b="b"/>
-                <a:pathLst>
-                  <a:path w="623481" h="189220">
-                    <a:moveTo>
-                      <a:pt x="0" y="94831"/>
-                    </a:moveTo>
-                    <a:cubicBezTo>
-                      <a:pt x="0" y="42897"/>
-                      <a:pt x="158734" y="5723"/>
-                      <a:pt x="262647" y="797"/>
-                    </a:cubicBezTo>
-                    <a:cubicBezTo>
-                      <a:pt x="366560" y="-4129"/>
-                      <a:pt x="623481" y="13342"/>
-                      <a:pt x="623481" y="65276"/>
-                    </a:cubicBezTo>
-                    <a:cubicBezTo>
-                      <a:pt x="623481" y="117210"/>
-                      <a:pt x="366560" y="183939"/>
-                      <a:pt x="262647" y="188865"/>
-                    </a:cubicBezTo>
-                    <a:cubicBezTo>
-                      <a:pt x="158734" y="193791"/>
-                      <a:pt x="0" y="146765"/>
-                      <a:pt x="0" y="94831"/>
-                    </a:cubicBezTo>
-                    <a:close/>
-                  </a:path>
-                </a:pathLst>
-              </a:custGeom>
+            </a:ln>
+          </p:spPr>
+          <p:style>
+            <a:lnRef idx="2">
+              <a:schemeClr val="accent6">
+                <a:shade val="15000"/>
+              </a:schemeClr>
+            </a:lnRef>
+            <a:fillRef idx="1">
+              <a:schemeClr val="accent6"/>
+            </a:fillRef>
+            <a:effectRef idx="0">
+              <a:schemeClr val="accent6"/>
+            </a:effectRef>
+            <a:fontRef idx="minor">
+              <a:schemeClr val="lt1"/>
+            </a:fontRef>
+          </p:style>
+          <p:txBody>
+            <a:bodyPr rtlCol="0" anchor="ctr"/>
+            <a:lstStyle/>
+            <a:p>
+              <a:pPr algn="ctr"/>
+              <a:endParaRPr lang="en-NZ"/>
+            </a:p>
+          </p:txBody>
+        </p:sp>
+        <p:sp>
+          <p:nvSpPr>
+            <p:cNvPr id="47" name="Oval 15">
+              <a:extLst>
+                <a:ext uri="{FF2B5EF4-FFF2-40B4-BE49-F238E27FC236}">
+                  <a16:creationId xmlns:a16="http://schemas.microsoft.com/office/drawing/2014/main" id="{6E3A296F-05C6-8F46-539F-94C0F890FDCF}"/>
+                </a:ext>
+              </a:extLst>
+            </p:cNvPr>
+            <p:cNvSpPr/>
+            <p:nvPr/>
+          </p:nvSpPr>
+          <p:spPr>
+            <a:xfrm rot="14162025">
+              <a:off x="5581911" y="2324390"/>
+              <a:ext cx="367317" cy="70720"/>
+            </a:xfrm>
+            <a:custGeom>
+              <a:avLst/>
+              <a:gdLst>
+                <a:gd name="csX0" fmla="*/ 0 w 525294"/>
+                <a:gd name="csY0" fmla="*/ 94034 h 188068"/>
+                <a:gd name="csX1" fmla="*/ 262647 w 525294"/>
+                <a:gd name="csY1" fmla="*/ 0 h 188068"/>
+                <a:gd name="csX2" fmla="*/ 525294 w 525294"/>
+                <a:gd name="csY2" fmla="*/ 94034 h 188068"/>
+                <a:gd name="csX3" fmla="*/ 262647 w 525294"/>
+                <a:gd name="csY3" fmla="*/ 188068 h 188068"/>
+                <a:gd name="csX4" fmla="*/ 0 w 525294"/>
+                <a:gd name="csY4" fmla="*/ 94034 h 188068"/>
+                <a:gd name="csX0" fmla="*/ 0 w 623481"/>
+                <a:gd name="csY0" fmla="*/ 94831 h 189220"/>
+                <a:gd name="csX1" fmla="*/ 262647 w 623481"/>
+                <a:gd name="csY1" fmla="*/ 797 h 189220"/>
+                <a:gd name="csX2" fmla="*/ 623481 w 623481"/>
+                <a:gd name="csY2" fmla="*/ 65276 h 189220"/>
+                <a:gd name="csX3" fmla="*/ 262647 w 623481"/>
+                <a:gd name="csY3" fmla="*/ 188865 h 189220"/>
+                <a:gd name="csX4" fmla="*/ 0 w 623481"/>
+                <a:gd name="csY4" fmla="*/ 94831 h 189220"/>
+              </a:gdLst>
+              <a:ahLst/>
+              <a:cxnLst>
+                <a:cxn ang="0">
+                  <a:pos x="csX0" y="csY0"/>
+                </a:cxn>
+                <a:cxn ang="0">
+                  <a:pos x="csX1" y="csY1"/>
+                </a:cxn>
+                <a:cxn ang="0">
+                  <a:pos x="csX2" y="csY2"/>
+                </a:cxn>
+                <a:cxn ang="0">
+                  <a:pos x="csX3" y="csY3"/>
+                </a:cxn>
+                <a:cxn ang="0">
+                  <a:pos x="csX4" y="csY4"/>
+                </a:cxn>
+              </a:cxnLst>
+              <a:rect l="l" t="t" r="r" b="b"/>
+              <a:pathLst>
+                <a:path w="623481" h="189220">
+                  <a:moveTo>
+                    <a:pt x="0" y="94831"/>
+                  </a:moveTo>
+                  <a:cubicBezTo>
+                    <a:pt x="0" y="42897"/>
+                    <a:pt x="158734" y="5723"/>
+                    <a:pt x="262647" y="797"/>
+                  </a:cubicBezTo>
+                  <a:cubicBezTo>
+                    <a:pt x="366560" y="-4129"/>
+                    <a:pt x="623481" y="13342"/>
+                    <a:pt x="623481" y="65276"/>
+                  </a:cubicBezTo>
+                  <a:cubicBezTo>
+                    <a:pt x="623481" y="117210"/>
+                    <a:pt x="366560" y="183939"/>
+                    <a:pt x="262647" y="188865"/>
+                  </a:cubicBezTo>
+                  <a:cubicBezTo>
+                    <a:pt x="158734" y="193791"/>
+                    <a:pt x="0" y="146765"/>
+                    <a:pt x="0" y="94831"/>
+                  </a:cubicBezTo>
+                  <a:close/>
+                </a:path>
+              </a:pathLst>
+            </a:custGeom>
+            <a:solidFill>
+              <a:schemeClr val="accent6">
+                <a:lumMod val="75000"/>
+              </a:schemeClr>
+            </a:solidFill>
+            <a:ln>
               <a:solidFill>
                 <a:schemeClr val="accent6">
                   <a:lumMod val="75000"/>
                 </a:schemeClr>
               </a:solidFill>
-              <a:ln>
-                <a:solidFill>
-                  <a:schemeClr val="accent6">
-                    <a:lumMod val="75000"/>
-                  </a:schemeClr>
-                </a:solidFill>
-              </a:ln>
-            </p:spPr>
-            <p:style>
-              <a:lnRef idx="2">
-                <a:schemeClr val="accent6">
-                  <a:shade val="15000"/>
-                </a:schemeClr>
-              </a:lnRef>
-              <a:fillRef idx="1">
-                <a:schemeClr val="accent6"/>
-              </a:fillRef>
-              <a:effectRef idx="0">
-                <a:schemeClr val="accent6"/>
-              </a:effectRef>
-              <a:fontRef idx="minor">
-                <a:schemeClr val="lt1"/>
-              </a:fontRef>
-            </p:style>
-            <p:txBody>
-              <a:bodyPr rtlCol="0" anchor="ctr"/>
-              <a:lstStyle/>
-              <a:p>
-                <a:pPr algn="ctr"/>
-                <a:endParaRPr lang="en-NZ"/>
-              </a:p>
-            </p:txBody>
-          </p:sp>
-          <p:sp>
-            <p:nvSpPr>
-              <p:cNvPr id="48" name="Oval 15">
-                <a:extLst>
-                  <a:ext uri="{FF2B5EF4-FFF2-40B4-BE49-F238E27FC236}">
-                    <a16:creationId xmlns:a16="http://schemas.microsoft.com/office/drawing/2014/main" id="{3F0B0211-B378-78E4-AA21-DBEFB02A27D9}"/>
-                  </a:ext>
-                </a:extLst>
-              </p:cNvPr>
-              <p:cNvSpPr/>
-              <p:nvPr/>
-            </p:nvSpPr>
-            <p:spPr>
-              <a:xfrm rot="2313172" flipH="1">
-                <a:off x="5906204" y="3935761"/>
-                <a:ext cx="368562" cy="86250"/>
-              </a:xfrm>
-              <a:custGeom>
-                <a:avLst/>
-                <a:gdLst>
-                  <a:gd name="csX0" fmla="*/ 0 w 525294"/>
-                  <a:gd name="csY0" fmla="*/ 94034 h 188068"/>
-                  <a:gd name="csX1" fmla="*/ 262647 w 525294"/>
-                  <a:gd name="csY1" fmla="*/ 0 h 188068"/>
-                  <a:gd name="csX2" fmla="*/ 525294 w 525294"/>
-                  <a:gd name="csY2" fmla="*/ 94034 h 188068"/>
-                  <a:gd name="csX3" fmla="*/ 262647 w 525294"/>
-                  <a:gd name="csY3" fmla="*/ 188068 h 188068"/>
-                  <a:gd name="csX4" fmla="*/ 0 w 525294"/>
-                  <a:gd name="csY4" fmla="*/ 94034 h 188068"/>
-                  <a:gd name="csX0" fmla="*/ 0 w 623481"/>
-                  <a:gd name="csY0" fmla="*/ 94831 h 189220"/>
-                  <a:gd name="csX1" fmla="*/ 262647 w 623481"/>
-                  <a:gd name="csY1" fmla="*/ 797 h 189220"/>
-                  <a:gd name="csX2" fmla="*/ 623481 w 623481"/>
-                  <a:gd name="csY2" fmla="*/ 65276 h 189220"/>
-                  <a:gd name="csX3" fmla="*/ 262647 w 623481"/>
-                  <a:gd name="csY3" fmla="*/ 188865 h 189220"/>
-                  <a:gd name="csX4" fmla="*/ 0 w 623481"/>
-                  <a:gd name="csY4" fmla="*/ 94831 h 189220"/>
-                </a:gdLst>
-                <a:ahLst/>
-                <a:cxnLst>
-                  <a:cxn ang="0">
-                    <a:pos x="csX0" y="csY0"/>
-                  </a:cxn>
-                  <a:cxn ang="0">
-                    <a:pos x="csX1" y="csY1"/>
-                  </a:cxn>
-                  <a:cxn ang="0">
-                    <a:pos x="csX2" y="csY2"/>
-                  </a:cxn>
-                  <a:cxn ang="0">
-                    <a:pos x="csX3" y="csY3"/>
-                  </a:cxn>
-                  <a:cxn ang="0">
-                    <a:pos x="csX4" y="csY4"/>
-                  </a:cxn>
-                </a:cxnLst>
-                <a:rect l="l" t="t" r="r" b="b"/>
-                <a:pathLst>
-                  <a:path w="623481" h="189220">
-                    <a:moveTo>
-                      <a:pt x="0" y="94831"/>
-                    </a:moveTo>
-                    <a:cubicBezTo>
-                      <a:pt x="0" y="42897"/>
-                      <a:pt x="158734" y="5723"/>
-                      <a:pt x="262647" y="797"/>
-                    </a:cubicBezTo>
-                    <a:cubicBezTo>
-                      <a:pt x="366560" y="-4129"/>
-                      <a:pt x="623481" y="13342"/>
-                      <a:pt x="623481" y="65276"/>
-                    </a:cubicBezTo>
-                    <a:cubicBezTo>
-                      <a:pt x="623481" y="117210"/>
-                      <a:pt x="366560" y="183939"/>
-                      <a:pt x="262647" y="188865"/>
-                    </a:cubicBezTo>
-                    <a:cubicBezTo>
-                      <a:pt x="158734" y="193791"/>
-                      <a:pt x="0" y="146765"/>
-                      <a:pt x="0" y="94831"/>
-                    </a:cubicBezTo>
-                    <a:close/>
-                  </a:path>
-                </a:pathLst>
-              </a:custGeom>
+            </a:ln>
+          </p:spPr>
+          <p:style>
+            <a:lnRef idx="2">
+              <a:schemeClr val="accent6">
+                <a:shade val="15000"/>
+              </a:schemeClr>
+            </a:lnRef>
+            <a:fillRef idx="1">
+              <a:schemeClr val="accent6"/>
+            </a:fillRef>
+            <a:effectRef idx="0">
+              <a:schemeClr val="accent6"/>
+            </a:effectRef>
+            <a:fontRef idx="minor">
+              <a:schemeClr val="lt1"/>
+            </a:fontRef>
+          </p:style>
+          <p:txBody>
+            <a:bodyPr rtlCol="0" anchor="ctr"/>
+            <a:lstStyle/>
+            <a:p>
+              <a:pPr algn="ctr"/>
+              <a:endParaRPr lang="en-NZ"/>
+            </a:p>
+          </p:txBody>
+        </p:sp>
+        <p:sp>
+          <p:nvSpPr>
+            <p:cNvPr id="48" name="Oval 15">
+              <a:extLst>
+                <a:ext uri="{FF2B5EF4-FFF2-40B4-BE49-F238E27FC236}">
+                  <a16:creationId xmlns:a16="http://schemas.microsoft.com/office/drawing/2014/main" id="{3F0B0211-B378-78E4-AA21-DBEFB02A27D9}"/>
+                </a:ext>
+              </a:extLst>
+            </p:cNvPr>
+            <p:cNvSpPr/>
+            <p:nvPr/>
+          </p:nvSpPr>
+          <p:spPr>
+            <a:xfrm rot="2313172" flipH="1">
+              <a:off x="5906204" y="3935761"/>
+              <a:ext cx="368562" cy="86250"/>
+            </a:xfrm>
+            <a:custGeom>
+              <a:avLst/>
+              <a:gdLst>
+                <a:gd name="csX0" fmla="*/ 0 w 525294"/>
+                <a:gd name="csY0" fmla="*/ 94034 h 188068"/>
+                <a:gd name="csX1" fmla="*/ 262647 w 525294"/>
+                <a:gd name="csY1" fmla="*/ 0 h 188068"/>
+                <a:gd name="csX2" fmla="*/ 525294 w 525294"/>
+                <a:gd name="csY2" fmla="*/ 94034 h 188068"/>
+                <a:gd name="csX3" fmla="*/ 262647 w 525294"/>
+                <a:gd name="csY3" fmla="*/ 188068 h 188068"/>
+                <a:gd name="csX4" fmla="*/ 0 w 525294"/>
+                <a:gd name="csY4" fmla="*/ 94034 h 188068"/>
+                <a:gd name="csX0" fmla="*/ 0 w 623481"/>
+                <a:gd name="csY0" fmla="*/ 94831 h 189220"/>
+                <a:gd name="csX1" fmla="*/ 262647 w 623481"/>
+                <a:gd name="csY1" fmla="*/ 797 h 189220"/>
+                <a:gd name="csX2" fmla="*/ 623481 w 623481"/>
+                <a:gd name="csY2" fmla="*/ 65276 h 189220"/>
+                <a:gd name="csX3" fmla="*/ 262647 w 623481"/>
+                <a:gd name="csY3" fmla="*/ 188865 h 189220"/>
+                <a:gd name="csX4" fmla="*/ 0 w 623481"/>
+                <a:gd name="csY4" fmla="*/ 94831 h 189220"/>
+              </a:gdLst>
+              <a:ahLst/>
+              <a:cxnLst>
+                <a:cxn ang="0">
+                  <a:pos x="csX0" y="csY0"/>
+                </a:cxn>
+                <a:cxn ang="0">
+                  <a:pos x="csX1" y="csY1"/>
+                </a:cxn>
+                <a:cxn ang="0">
+                  <a:pos x="csX2" y="csY2"/>
+                </a:cxn>
+                <a:cxn ang="0">
+                  <a:pos x="csX3" y="csY3"/>
+                </a:cxn>
+                <a:cxn ang="0">
+                  <a:pos x="csX4" y="csY4"/>
+                </a:cxn>
+              </a:cxnLst>
+              <a:rect l="l" t="t" r="r" b="b"/>
+              <a:pathLst>
+                <a:path w="623481" h="189220">
+                  <a:moveTo>
+                    <a:pt x="0" y="94831"/>
+                  </a:moveTo>
+                  <a:cubicBezTo>
+                    <a:pt x="0" y="42897"/>
+                    <a:pt x="158734" y="5723"/>
+                    <a:pt x="262647" y="797"/>
+                  </a:cubicBezTo>
+                  <a:cubicBezTo>
+                    <a:pt x="366560" y="-4129"/>
+                    <a:pt x="623481" y="13342"/>
+                    <a:pt x="623481" y="65276"/>
+                  </a:cubicBezTo>
+                  <a:cubicBezTo>
+                    <a:pt x="623481" y="117210"/>
+                    <a:pt x="366560" y="183939"/>
+                    <a:pt x="262647" y="188865"/>
+                  </a:cubicBezTo>
+                  <a:cubicBezTo>
+                    <a:pt x="158734" y="193791"/>
+                    <a:pt x="0" y="146765"/>
+                    <a:pt x="0" y="94831"/>
+                  </a:cubicBezTo>
+                  <a:close/>
+                </a:path>
+              </a:pathLst>
+            </a:custGeom>
+            <a:solidFill>
+              <a:schemeClr val="accent6">
+                <a:lumMod val="75000"/>
+              </a:schemeClr>
+            </a:solidFill>
+            <a:ln>
               <a:solidFill>
                 <a:schemeClr val="accent6">
                   <a:lumMod val="75000"/>
                 </a:schemeClr>
               </a:solidFill>
-              <a:ln>
-                <a:solidFill>
-                  <a:schemeClr val="accent6">
-                    <a:lumMod val="75000"/>
-                  </a:schemeClr>
-                </a:solidFill>
-              </a:ln>
-            </p:spPr>
-            <p:style>
-              <a:lnRef idx="2">
-                <a:schemeClr val="accent6">
-                  <a:shade val="15000"/>
-                </a:schemeClr>
-              </a:lnRef>
-              <a:fillRef idx="1">
-                <a:schemeClr val="accent6"/>
-              </a:fillRef>
-              <a:effectRef idx="0">
-                <a:schemeClr val="accent6"/>
-              </a:effectRef>
-              <a:fontRef idx="minor">
-                <a:schemeClr val="lt1"/>
-              </a:fontRef>
-            </p:style>
-            <p:txBody>
-              <a:bodyPr rtlCol="0" anchor="ctr"/>
-              <a:lstStyle/>
-              <a:p>
-                <a:pPr algn="ctr"/>
-                <a:endParaRPr lang="en-NZ"/>
-              </a:p>
-            </p:txBody>
-          </p:sp>
-          <p:sp>
-            <p:nvSpPr>
-              <p:cNvPr id="49" name="Oval 15">
-                <a:extLst>
-                  <a:ext uri="{FF2B5EF4-FFF2-40B4-BE49-F238E27FC236}">
-                    <a16:creationId xmlns:a16="http://schemas.microsoft.com/office/drawing/2014/main" id="{3C367B3E-4DDC-8E0B-D8A5-178B65B3830A}"/>
-                  </a:ext>
-                </a:extLst>
-              </p:cNvPr>
-              <p:cNvSpPr/>
-              <p:nvPr/>
-            </p:nvSpPr>
-            <p:spPr>
-              <a:xfrm rot="2313172" flipH="1">
-                <a:off x="5988751" y="3323709"/>
-                <a:ext cx="291208" cy="92887"/>
-              </a:xfrm>
-              <a:custGeom>
-                <a:avLst/>
-                <a:gdLst>
-                  <a:gd name="csX0" fmla="*/ 0 w 525294"/>
-                  <a:gd name="csY0" fmla="*/ 94034 h 188068"/>
-                  <a:gd name="csX1" fmla="*/ 262647 w 525294"/>
-                  <a:gd name="csY1" fmla="*/ 0 h 188068"/>
-                  <a:gd name="csX2" fmla="*/ 525294 w 525294"/>
-                  <a:gd name="csY2" fmla="*/ 94034 h 188068"/>
-                  <a:gd name="csX3" fmla="*/ 262647 w 525294"/>
-                  <a:gd name="csY3" fmla="*/ 188068 h 188068"/>
-                  <a:gd name="csX4" fmla="*/ 0 w 525294"/>
-                  <a:gd name="csY4" fmla="*/ 94034 h 188068"/>
-                  <a:gd name="csX0" fmla="*/ 0 w 623481"/>
-                  <a:gd name="csY0" fmla="*/ 94831 h 189220"/>
-                  <a:gd name="csX1" fmla="*/ 262647 w 623481"/>
-                  <a:gd name="csY1" fmla="*/ 797 h 189220"/>
-                  <a:gd name="csX2" fmla="*/ 623481 w 623481"/>
-                  <a:gd name="csY2" fmla="*/ 65276 h 189220"/>
-                  <a:gd name="csX3" fmla="*/ 262647 w 623481"/>
-                  <a:gd name="csY3" fmla="*/ 188865 h 189220"/>
-                  <a:gd name="csX4" fmla="*/ 0 w 623481"/>
-                  <a:gd name="csY4" fmla="*/ 94831 h 189220"/>
-                </a:gdLst>
-                <a:ahLst/>
-                <a:cxnLst>
-                  <a:cxn ang="0">
-                    <a:pos x="csX0" y="csY0"/>
-                  </a:cxn>
-                  <a:cxn ang="0">
-                    <a:pos x="csX1" y="csY1"/>
-                  </a:cxn>
-                  <a:cxn ang="0">
-                    <a:pos x="csX2" y="csY2"/>
-                  </a:cxn>
-                  <a:cxn ang="0">
-                    <a:pos x="csX3" y="csY3"/>
-                  </a:cxn>
-                  <a:cxn ang="0">
-                    <a:pos x="csX4" y="csY4"/>
-                  </a:cxn>
-                </a:cxnLst>
-                <a:rect l="l" t="t" r="r" b="b"/>
-                <a:pathLst>
-                  <a:path w="623481" h="189220">
-                    <a:moveTo>
-                      <a:pt x="0" y="94831"/>
-                    </a:moveTo>
-                    <a:cubicBezTo>
-                      <a:pt x="0" y="42897"/>
-                      <a:pt x="158734" y="5723"/>
-                      <a:pt x="262647" y="797"/>
-                    </a:cubicBezTo>
-                    <a:cubicBezTo>
-                      <a:pt x="366560" y="-4129"/>
-                      <a:pt x="623481" y="13342"/>
-                      <a:pt x="623481" y="65276"/>
-                    </a:cubicBezTo>
-                    <a:cubicBezTo>
-                      <a:pt x="623481" y="117210"/>
-                      <a:pt x="366560" y="183939"/>
-                      <a:pt x="262647" y="188865"/>
-                    </a:cubicBezTo>
-                    <a:cubicBezTo>
-                      <a:pt x="158734" y="193791"/>
-                      <a:pt x="0" y="146765"/>
-                      <a:pt x="0" y="94831"/>
-                    </a:cubicBezTo>
-                    <a:close/>
-                  </a:path>
-                </a:pathLst>
-              </a:custGeom>
+            </a:ln>
+          </p:spPr>
+          <p:style>
+            <a:lnRef idx="2">
+              <a:schemeClr val="accent6">
+                <a:shade val="15000"/>
+              </a:schemeClr>
+            </a:lnRef>
+            <a:fillRef idx="1">
+              <a:schemeClr val="accent6"/>
+            </a:fillRef>
+            <a:effectRef idx="0">
+              <a:schemeClr val="accent6"/>
+            </a:effectRef>
+            <a:fontRef idx="minor">
+              <a:schemeClr val="lt1"/>
+            </a:fontRef>
+          </p:style>
+          <p:txBody>
+            <a:bodyPr rtlCol="0" anchor="ctr"/>
+            <a:lstStyle/>
+            <a:p>
+              <a:pPr algn="ctr"/>
+              <a:endParaRPr lang="en-NZ"/>
+            </a:p>
+          </p:txBody>
+        </p:sp>
+        <p:sp>
+          <p:nvSpPr>
+            <p:cNvPr id="49" name="Oval 15">
+              <a:extLst>
+                <a:ext uri="{FF2B5EF4-FFF2-40B4-BE49-F238E27FC236}">
+                  <a16:creationId xmlns:a16="http://schemas.microsoft.com/office/drawing/2014/main" id="{3C367B3E-4DDC-8E0B-D8A5-178B65B3830A}"/>
+                </a:ext>
+              </a:extLst>
+            </p:cNvPr>
+            <p:cNvSpPr/>
+            <p:nvPr/>
+          </p:nvSpPr>
+          <p:spPr>
+            <a:xfrm rot="2313172" flipH="1">
+              <a:off x="5988751" y="3323709"/>
+              <a:ext cx="291208" cy="92887"/>
+            </a:xfrm>
+            <a:custGeom>
+              <a:avLst/>
+              <a:gdLst>
+                <a:gd name="csX0" fmla="*/ 0 w 525294"/>
+                <a:gd name="csY0" fmla="*/ 94034 h 188068"/>
+                <a:gd name="csX1" fmla="*/ 262647 w 525294"/>
+                <a:gd name="csY1" fmla="*/ 0 h 188068"/>
+                <a:gd name="csX2" fmla="*/ 525294 w 525294"/>
+                <a:gd name="csY2" fmla="*/ 94034 h 188068"/>
+                <a:gd name="csX3" fmla="*/ 262647 w 525294"/>
+                <a:gd name="csY3" fmla="*/ 188068 h 188068"/>
+                <a:gd name="csX4" fmla="*/ 0 w 525294"/>
+                <a:gd name="csY4" fmla="*/ 94034 h 188068"/>
+                <a:gd name="csX0" fmla="*/ 0 w 623481"/>
+                <a:gd name="csY0" fmla="*/ 94831 h 189220"/>
+                <a:gd name="csX1" fmla="*/ 262647 w 623481"/>
+                <a:gd name="csY1" fmla="*/ 797 h 189220"/>
+                <a:gd name="csX2" fmla="*/ 623481 w 623481"/>
+                <a:gd name="csY2" fmla="*/ 65276 h 189220"/>
+                <a:gd name="csX3" fmla="*/ 262647 w 623481"/>
+                <a:gd name="csY3" fmla="*/ 188865 h 189220"/>
+                <a:gd name="csX4" fmla="*/ 0 w 623481"/>
+                <a:gd name="csY4" fmla="*/ 94831 h 189220"/>
+              </a:gdLst>
+              <a:ahLst/>
+              <a:cxnLst>
+                <a:cxn ang="0">
+                  <a:pos x="csX0" y="csY0"/>
+                </a:cxn>
+                <a:cxn ang="0">
+                  <a:pos x="csX1" y="csY1"/>
+                </a:cxn>
+                <a:cxn ang="0">
+                  <a:pos x="csX2" y="csY2"/>
+                </a:cxn>
+                <a:cxn ang="0">
+                  <a:pos x="csX3" y="csY3"/>
+                </a:cxn>
+                <a:cxn ang="0">
+                  <a:pos x="csX4" y="csY4"/>
+                </a:cxn>
+              </a:cxnLst>
+              <a:rect l="l" t="t" r="r" b="b"/>
+              <a:pathLst>
+                <a:path w="623481" h="189220">
+                  <a:moveTo>
+                    <a:pt x="0" y="94831"/>
+                  </a:moveTo>
+                  <a:cubicBezTo>
+                    <a:pt x="0" y="42897"/>
+                    <a:pt x="158734" y="5723"/>
+                    <a:pt x="262647" y="797"/>
+                  </a:cubicBezTo>
+                  <a:cubicBezTo>
+                    <a:pt x="366560" y="-4129"/>
+                    <a:pt x="623481" y="13342"/>
+                    <a:pt x="623481" y="65276"/>
+                  </a:cubicBezTo>
+                  <a:cubicBezTo>
+                    <a:pt x="623481" y="117210"/>
+                    <a:pt x="366560" y="183939"/>
+                    <a:pt x="262647" y="188865"/>
+                  </a:cubicBezTo>
+                  <a:cubicBezTo>
+                    <a:pt x="158734" y="193791"/>
+                    <a:pt x="0" y="146765"/>
+                    <a:pt x="0" y="94831"/>
+                  </a:cubicBezTo>
+                  <a:close/>
+                </a:path>
+              </a:pathLst>
+            </a:custGeom>
+            <a:solidFill>
+              <a:schemeClr val="accent6">
+                <a:lumMod val="75000"/>
+              </a:schemeClr>
+            </a:solidFill>
+            <a:ln>
               <a:solidFill>
                 <a:schemeClr val="accent6">
                   <a:lumMod val="75000"/>
                 </a:schemeClr>
               </a:solidFill>
-              <a:ln>
-                <a:solidFill>
-                  <a:schemeClr val="accent6">
-                    <a:lumMod val="75000"/>
-                  </a:schemeClr>
-                </a:solidFill>
-              </a:ln>
-            </p:spPr>
-            <p:style>
-              <a:lnRef idx="2">
-                <a:schemeClr val="accent6">
-                  <a:shade val="15000"/>
-                </a:schemeClr>
-              </a:lnRef>
-              <a:fillRef idx="1">
-                <a:schemeClr val="accent6"/>
-              </a:fillRef>
-              <a:effectRef idx="0">
-                <a:schemeClr val="accent6"/>
-              </a:effectRef>
-              <a:fontRef idx="minor">
-                <a:schemeClr val="lt1"/>
-              </a:fontRef>
-            </p:style>
-            <p:txBody>
-              <a:bodyPr rtlCol="0" anchor="ctr"/>
-              <a:lstStyle/>
-              <a:p>
-                <a:pPr algn="ctr"/>
-                <a:endParaRPr lang="en-NZ"/>
-              </a:p>
-            </p:txBody>
-          </p:sp>
-          <p:sp>
-            <p:nvSpPr>
-              <p:cNvPr id="50" name="Oval 15">
-                <a:extLst>
-                  <a:ext uri="{FF2B5EF4-FFF2-40B4-BE49-F238E27FC236}">
-                    <a16:creationId xmlns:a16="http://schemas.microsoft.com/office/drawing/2014/main" id="{B7262E78-04A3-D083-F6EA-59AA24828B8F}"/>
-                  </a:ext>
-                </a:extLst>
-              </p:cNvPr>
-              <p:cNvSpPr/>
-              <p:nvPr/>
-            </p:nvSpPr>
-            <p:spPr>
-              <a:xfrm rot="17214883">
-                <a:off x="6115209" y="3106268"/>
-                <a:ext cx="428121" cy="76467"/>
-              </a:xfrm>
-              <a:custGeom>
-                <a:avLst/>
-                <a:gdLst>
-                  <a:gd name="csX0" fmla="*/ 0 w 525294"/>
-                  <a:gd name="csY0" fmla="*/ 94034 h 188068"/>
-                  <a:gd name="csX1" fmla="*/ 262647 w 525294"/>
-                  <a:gd name="csY1" fmla="*/ 0 h 188068"/>
-                  <a:gd name="csX2" fmla="*/ 525294 w 525294"/>
-                  <a:gd name="csY2" fmla="*/ 94034 h 188068"/>
-                  <a:gd name="csX3" fmla="*/ 262647 w 525294"/>
-                  <a:gd name="csY3" fmla="*/ 188068 h 188068"/>
-                  <a:gd name="csX4" fmla="*/ 0 w 525294"/>
-                  <a:gd name="csY4" fmla="*/ 94034 h 188068"/>
-                  <a:gd name="csX0" fmla="*/ 0 w 623481"/>
-                  <a:gd name="csY0" fmla="*/ 94831 h 189220"/>
-                  <a:gd name="csX1" fmla="*/ 262647 w 623481"/>
-                  <a:gd name="csY1" fmla="*/ 797 h 189220"/>
-                  <a:gd name="csX2" fmla="*/ 623481 w 623481"/>
-                  <a:gd name="csY2" fmla="*/ 65276 h 189220"/>
-                  <a:gd name="csX3" fmla="*/ 262647 w 623481"/>
-                  <a:gd name="csY3" fmla="*/ 188865 h 189220"/>
-                  <a:gd name="csX4" fmla="*/ 0 w 623481"/>
-                  <a:gd name="csY4" fmla="*/ 94831 h 189220"/>
-                </a:gdLst>
-                <a:ahLst/>
-                <a:cxnLst>
-                  <a:cxn ang="0">
-                    <a:pos x="csX0" y="csY0"/>
-                  </a:cxn>
-                  <a:cxn ang="0">
-                    <a:pos x="csX1" y="csY1"/>
-                  </a:cxn>
-                  <a:cxn ang="0">
-                    <a:pos x="csX2" y="csY2"/>
-                  </a:cxn>
-                  <a:cxn ang="0">
-                    <a:pos x="csX3" y="csY3"/>
-                  </a:cxn>
-                  <a:cxn ang="0">
-                    <a:pos x="csX4" y="csY4"/>
-                  </a:cxn>
-                </a:cxnLst>
-                <a:rect l="l" t="t" r="r" b="b"/>
-                <a:pathLst>
-                  <a:path w="623481" h="189220">
-                    <a:moveTo>
-                      <a:pt x="0" y="94831"/>
-                    </a:moveTo>
-                    <a:cubicBezTo>
-                      <a:pt x="0" y="42897"/>
-                      <a:pt x="158734" y="5723"/>
-                      <a:pt x="262647" y="797"/>
-                    </a:cubicBezTo>
-                    <a:cubicBezTo>
-                      <a:pt x="366560" y="-4129"/>
-                      <a:pt x="623481" y="13342"/>
-                      <a:pt x="623481" y="65276"/>
-                    </a:cubicBezTo>
-                    <a:cubicBezTo>
-                      <a:pt x="623481" y="117210"/>
-                      <a:pt x="366560" y="183939"/>
-                      <a:pt x="262647" y="188865"/>
-                    </a:cubicBezTo>
-                    <a:cubicBezTo>
-                      <a:pt x="158734" y="193791"/>
-                      <a:pt x="0" y="146765"/>
-                      <a:pt x="0" y="94831"/>
-                    </a:cubicBezTo>
-                    <a:close/>
-                  </a:path>
-                </a:pathLst>
-              </a:custGeom>
+            </a:ln>
+          </p:spPr>
+          <p:style>
+            <a:lnRef idx="2">
+              <a:schemeClr val="accent6">
+                <a:shade val="15000"/>
+              </a:schemeClr>
+            </a:lnRef>
+            <a:fillRef idx="1">
+              <a:schemeClr val="accent6"/>
+            </a:fillRef>
+            <a:effectRef idx="0">
+              <a:schemeClr val="accent6"/>
+            </a:effectRef>
+            <a:fontRef idx="minor">
+              <a:schemeClr val="lt1"/>
+            </a:fontRef>
+          </p:style>
+          <p:txBody>
+            <a:bodyPr rtlCol="0" anchor="ctr"/>
+            <a:lstStyle/>
+            <a:p>
+              <a:pPr algn="ctr"/>
+              <a:endParaRPr lang="en-NZ"/>
+            </a:p>
+          </p:txBody>
+        </p:sp>
+        <p:sp>
+          <p:nvSpPr>
+            <p:cNvPr id="50" name="Oval 15">
+              <a:extLst>
+                <a:ext uri="{FF2B5EF4-FFF2-40B4-BE49-F238E27FC236}">
+                  <a16:creationId xmlns:a16="http://schemas.microsoft.com/office/drawing/2014/main" id="{B7262E78-04A3-D083-F6EA-59AA24828B8F}"/>
+                </a:ext>
+              </a:extLst>
+            </p:cNvPr>
+            <p:cNvSpPr/>
+            <p:nvPr/>
+          </p:nvSpPr>
+          <p:spPr>
+            <a:xfrm rot="17214883">
+              <a:off x="6115209" y="3106268"/>
+              <a:ext cx="428121" cy="76467"/>
+            </a:xfrm>
+            <a:custGeom>
+              <a:avLst/>
+              <a:gdLst>
+                <a:gd name="csX0" fmla="*/ 0 w 525294"/>
+                <a:gd name="csY0" fmla="*/ 94034 h 188068"/>
+                <a:gd name="csX1" fmla="*/ 262647 w 525294"/>
+                <a:gd name="csY1" fmla="*/ 0 h 188068"/>
+                <a:gd name="csX2" fmla="*/ 525294 w 525294"/>
+                <a:gd name="csY2" fmla="*/ 94034 h 188068"/>
+                <a:gd name="csX3" fmla="*/ 262647 w 525294"/>
+                <a:gd name="csY3" fmla="*/ 188068 h 188068"/>
+                <a:gd name="csX4" fmla="*/ 0 w 525294"/>
+                <a:gd name="csY4" fmla="*/ 94034 h 188068"/>
+                <a:gd name="csX0" fmla="*/ 0 w 623481"/>
+                <a:gd name="csY0" fmla="*/ 94831 h 189220"/>
+                <a:gd name="csX1" fmla="*/ 262647 w 623481"/>
+                <a:gd name="csY1" fmla="*/ 797 h 189220"/>
+                <a:gd name="csX2" fmla="*/ 623481 w 623481"/>
+                <a:gd name="csY2" fmla="*/ 65276 h 189220"/>
+                <a:gd name="csX3" fmla="*/ 262647 w 623481"/>
+                <a:gd name="csY3" fmla="*/ 188865 h 189220"/>
+                <a:gd name="csX4" fmla="*/ 0 w 623481"/>
+                <a:gd name="csY4" fmla="*/ 94831 h 189220"/>
+              </a:gdLst>
+              <a:ahLst/>
+              <a:cxnLst>
+                <a:cxn ang="0">
+                  <a:pos x="csX0" y="csY0"/>
+                </a:cxn>
+                <a:cxn ang="0">
+                  <a:pos x="csX1" y="csY1"/>
+                </a:cxn>
+                <a:cxn ang="0">
+                  <a:pos x="csX2" y="csY2"/>
+                </a:cxn>
+                <a:cxn ang="0">
+                  <a:pos x="csX3" y="csY3"/>
+                </a:cxn>
+                <a:cxn ang="0">
+                  <a:pos x="csX4" y="csY4"/>
+                </a:cxn>
+              </a:cxnLst>
+              <a:rect l="l" t="t" r="r" b="b"/>
+              <a:pathLst>
+                <a:path w="623481" h="189220">
+                  <a:moveTo>
+                    <a:pt x="0" y="94831"/>
+                  </a:moveTo>
+                  <a:cubicBezTo>
+                    <a:pt x="0" y="42897"/>
+                    <a:pt x="158734" y="5723"/>
+                    <a:pt x="262647" y="797"/>
+                  </a:cubicBezTo>
+                  <a:cubicBezTo>
+                    <a:pt x="366560" y="-4129"/>
+                    <a:pt x="623481" y="13342"/>
+                    <a:pt x="623481" y="65276"/>
+                  </a:cubicBezTo>
+                  <a:cubicBezTo>
+                    <a:pt x="623481" y="117210"/>
+                    <a:pt x="366560" y="183939"/>
+                    <a:pt x="262647" y="188865"/>
+                  </a:cubicBezTo>
+                  <a:cubicBezTo>
+                    <a:pt x="158734" y="193791"/>
+                    <a:pt x="0" y="146765"/>
+                    <a:pt x="0" y="94831"/>
+                  </a:cubicBezTo>
+                  <a:close/>
+                </a:path>
+              </a:pathLst>
+            </a:custGeom>
+            <a:solidFill>
+              <a:schemeClr val="accent6">
+                <a:lumMod val="75000"/>
+              </a:schemeClr>
+            </a:solidFill>
+            <a:ln>
               <a:solidFill>
                 <a:schemeClr val="accent6">
                   <a:lumMod val="75000"/>
                 </a:schemeClr>
               </a:solidFill>
-              <a:ln>
-                <a:solidFill>
-                  <a:schemeClr val="accent6">
-                    <a:lumMod val="75000"/>
-                  </a:schemeClr>
-                </a:solidFill>
-              </a:ln>
-            </p:spPr>
-            <p:style>
-              <a:lnRef idx="2">
-                <a:schemeClr val="accent6">
-                  <a:shade val="15000"/>
-                </a:schemeClr>
-              </a:lnRef>
-              <a:fillRef idx="1">
-                <a:schemeClr val="accent6"/>
-              </a:fillRef>
-              <a:effectRef idx="0">
-                <a:schemeClr val="accent6"/>
-              </a:effectRef>
-              <a:fontRef idx="minor">
-                <a:schemeClr val="lt1"/>
-              </a:fontRef>
-            </p:style>
-            <p:txBody>
-              <a:bodyPr rtlCol="0" anchor="ctr"/>
-              <a:lstStyle/>
-              <a:p>
-                <a:pPr algn="ctr"/>
-                <a:endParaRPr lang="en-NZ"/>
-              </a:p>
-            </p:txBody>
-          </p:sp>
-          <p:sp>
-            <p:nvSpPr>
-              <p:cNvPr id="51" name="Freeform: Shape 50">
-                <a:extLst>
-                  <a:ext uri="{FF2B5EF4-FFF2-40B4-BE49-F238E27FC236}">
-                    <a16:creationId xmlns:a16="http://schemas.microsoft.com/office/drawing/2014/main" id="{7B9C2AAA-F11A-BDC2-FF63-3682DE58181C}"/>
-                  </a:ext>
-                </a:extLst>
-              </p:cNvPr>
-              <p:cNvSpPr/>
-              <p:nvPr/>
-            </p:nvSpPr>
-            <p:spPr>
-              <a:xfrm>
-                <a:off x="5799213" y="2487912"/>
-                <a:ext cx="477954" cy="2425430"/>
-              </a:xfrm>
-              <a:custGeom>
-                <a:avLst/>
-                <a:gdLst>
-                  <a:gd name="csX0" fmla="*/ 32425 w 477954"/>
-                  <a:gd name="csY0" fmla="*/ 0 h 2425430"/>
-                  <a:gd name="csX1" fmla="*/ 239949 w 477954"/>
-                  <a:gd name="csY1" fmla="*/ 272374 h 2425430"/>
-                  <a:gd name="csX2" fmla="*/ 453957 w 477954"/>
-                  <a:gd name="csY2" fmla="*/ 791183 h 2425430"/>
-                  <a:gd name="csX3" fmla="*/ 453957 w 477954"/>
-                  <a:gd name="csY3" fmla="*/ 1543455 h 2425430"/>
-                  <a:gd name="csX4" fmla="*/ 285344 w 477954"/>
-                  <a:gd name="csY4" fmla="*/ 2049293 h 2425430"/>
-                  <a:gd name="csX5" fmla="*/ 0 w 477954"/>
-                  <a:gd name="csY5" fmla="*/ 2425430 h 2425430"/>
-                  <a:gd name="csX6" fmla="*/ 0 w 477954"/>
-                  <a:gd name="csY6" fmla="*/ 2425430 h 2425430"/>
-                </a:gdLst>
-                <a:ahLst/>
-                <a:cxnLst>
-                  <a:cxn ang="0">
-                    <a:pos x="csX0" y="csY0"/>
-                  </a:cxn>
-                  <a:cxn ang="0">
-                    <a:pos x="csX1" y="csY1"/>
-                  </a:cxn>
-                  <a:cxn ang="0">
-                    <a:pos x="csX2" y="csY2"/>
-                  </a:cxn>
-                  <a:cxn ang="0">
-                    <a:pos x="csX3" y="csY3"/>
-                  </a:cxn>
-                  <a:cxn ang="0">
-                    <a:pos x="csX4" y="csY4"/>
-                  </a:cxn>
-                  <a:cxn ang="0">
-                    <a:pos x="csX5" y="csY5"/>
-                  </a:cxn>
-                  <a:cxn ang="0">
-                    <a:pos x="csX6" y="csY6"/>
-                  </a:cxn>
-                </a:cxnLst>
-                <a:rect l="l" t="t" r="r" b="b"/>
-                <a:pathLst>
-                  <a:path w="477954" h="2425430">
-                    <a:moveTo>
-                      <a:pt x="32425" y="0"/>
-                    </a:moveTo>
-                    <a:cubicBezTo>
-                      <a:pt x="101059" y="70255"/>
-                      <a:pt x="169694" y="140510"/>
-                      <a:pt x="239949" y="272374"/>
-                    </a:cubicBezTo>
-                    <a:cubicBezTo>
-                      <a:pt x="310204" y="404238"/>
-                      <a:pt x="418289" y="579336"/>
-                      <a:pt x="453957" y="791183"/>
-                    </a:cubicBezTo>
-                    <a:cubicBezTo>
-                      <a:pt x="489625" y="1003030"/>
-                      <a:pt x="482059" y="1333770"/>
-                      <a:pt x="453957" y="1543455"/>
-                    </a:cubicBezTo>
-                    <a:cubicBezTo>
-                      <a:pt x="425855" y="1753140"/>
-                      <a:pt x="361003" y="1902297"/>
-                      <a:pt x="285344" y="2049293"/>
-                    </a:cubicBezTo>
-                    <a:cubicBezTo>
-                      <a:pt x="209685" y="2196289"/>
-                      <a:pt x="0" y="2425430"/>
-                      <a:pt x="0" y="2425430"/>
-                    </a:cubicBezTo>
-                    <a:lnTo>
-                      <a:pt x="0" y="2425430"/>
-                    </a:lnTo>
-                  </a:path>
-                </a:pathLst>
-              </a:custGeom>
-              <a:noFill/>
-            </p:spPr>
-            <p:style>
-              <a:lnRef idx="2">
-                <a:schemeClr val="accent1">
-                  <a:shade val="15000"/>
-                </a:schemeClr>
-              </a:lnRef>
-              <a:fillRef idx="1">
-                <a:schemeClr val="accent1"/>
-              </a:fillRef>
-              <a:effectRef idx="0">
-                <a:schemeClr val="accent1"/>
-              </a:effectRef>
-              <a:fontRef idx="minor">
-                <a:schemeClr val="lt1"/>
-              </a:fontRef>
-            </p:style>
-            <p:txBody>
-              <a:bodyPr rtlCol="0" anchor="ctr"/>
-              <a:lstStyle/>
-              <a:p>
-                <a:pPr algn="ctr"/>
-                <a:endParaRPr lang="en-NZ"/>
-              </a:p>
-            </p:txBody>
-          </p:sp>
-          <p:sp>
-            <p:nvSpPr>
-              <p:cNvPr id="52" name="Oval 15">
-                <a:extLst>
-                  <a:ext uri="{FF2B5EF4-FFF2-40B4-BE49-F238E27FC236}">
-                    <a16:creationId xmlns:a16="http://schemas.microsoft.com/office/drawing/2014/main" id="{3FB89EA5-4934-BEED-5695-259919F057F0}"/>
-                  </a:ext>
-                </a:extLst>
-              </p:cNvPr>
-              <p:cNvSpPr/>
-              <p:nvPr/>
-            </p:nvSpPr>
-            <p:spPr>
-              <a:xfrm rot="1297676" flipH="1" flipV="1">
-                <a:off x="5798965" y="2887846"/>
-                <a:ext cx="336104" cy="74353"/>
-              </a:xfrm>
-              <a:custGeom>
-                <a:avLst/>
-                <a:gdLst>
-                  <a:gd name="csX0" fmla="*/ 0 w 525294"/>
-                  <a:gd name="csY0" fmla="*/ 94034 h 188068"/>
-                  <a:gd name="csX1" fmla="*/ 262647 w 525294"/>
-                  <a:gd name="csY1" fmla="*/ 0 h 188068"/>
-                  <a:gd name="csX2" fmla="*/ 525294 w 525294"/>
-                  <a:gd name="csY2" fmla="*/ 94034 h 188068"/>
-                  <a:gd name="csX3" fmla="*/ 262647 w 525294"/>
-                  <a:gd name="csY3" fmla="*/ 188068 h 188068"/>
-                  <a:gd name="csX4" fmla="*/ 0 w 525294"/>
-                  <a:gd name="csY4" fmla="*/ 94034 h 188068"/>
-                  <a:gd name="csX0" fmla="*/ 0 w 623481"/>
-                  <a:gd name="csY0" fmla="*/ 94831 h 189220"/>
-                  <a:gd name="csX1" fmla="*/ 262647 w 623481"/>
-                  <a:gd name="csY1" fmla="*/ 797 h 189220"/>
-                  <a:gd name="csX2" fmla="*/ 623481 w 623481"/>
-                  <a:gd name="csY2" fmla="*/ 65276 h 189220"/>
-                  <a:gd name="csX3" fmla="*/ 262647 w 623481"/>
-                  <a:gd name="csY3" fmla="*/ 188865 h 189220"/>
-                  <a:gd name="csX4" fmla="*/ 0 w 623481"/>
-                  <a:gd name="csY4" fmla="*/ 94831 h 189220"/>
-                </a:gdLst>
-                <a:ahLst/>
-                <a:cxnLst>
-                  <a:cxn ang="0">
-                    <a:pos x="csX0" y="csY0"/>
-                  </a:cxn>
-                  <a:cxn ang="0">
-                    <a:pos x="csX1" y="csY1"/>
-                  </a:cxn>
-                  <a:cxn ang="0">
-                    <a:pos x="csX2" y="csY2"/>
-                  </a:cxn>
-                  <a:cxn ang="0">
-                    <a:pos x="csX3" y="csY3"/>
-                  </a:cxn>
-                  <a:cxn ang="0">
-                    <a:pos x="csX4" y="csY4"/>
-                  </a:cxn>
-                </a:cxnLst>
-                <a:rect l="l" t="t" r="r" b="b"/>
-                <a:pathLst>
-                  <a:path w="623481" h="189220">
-                    <a:moveTo>
-                      <a:pt x="0" y="94831"/>
-                    </a:moveTo>
-                    <a:cubicBezTo>
-                      <a:pt x="0" y="42897"/>
-                      <a:pt x="158734" y="5723"/>
-                      <a:pt x="262647" y="797"/>
-                    </a:cubicBezTo>
-                    <a:cubicBezTo>
-                      <a:pt x="366560" y="-4129"/>
-                      <a:pt x="623481" y="13342"/>
-                      <a:pt x="623481" y="65276"/>
-                    </a:cubicBezTo>
-                    <a:cubicBezTo>
-                      <a:pt x="623481" y="117210"/>
-                      <a:pt x="366560" y="183939"/>
-                      <a:pt x="262647" y="188865"/>
-                    </a:cubicBezTo>
-                    <a:cubicBezTo>
-                      <a:pt x="158734" y="193791"/>
-                      <a:pt x="0" y="146765"/>
-                      <a:pt x="0" y="94831"/>
-                    </a:cubicBezTo>
-                    <a:close/>
-                  </a:path>
-                </a:pathLst>
-              </a:custGeom>
+            </a:ln>
+          </p:spPr>
+          <p:style>
+            <a:lnRef idx="2">
+              <a:schemeClr val="accent6">
+                <a:shade val="15000"/>
+              </a:schemeClr>
+            </a:lnRef>
+            <a:fillRef idx="1">
+              <a:schemeClr val="accent6"/>
+            </a:fillRef>
+            <a:effectRef idx="0">
+              <a:schemeClr val="accent6"/>
+            </a:effectRef>
+            <a:fontRef idx="minor">
+              <a:schemeClr val="lt1"/>
+            </a:fontRef>
+          </p:style>
+          <p:txBody>
+            <a:bodyPr rtlCol="0" anchor="ctr"/>
+            <a:lstStyle/>
+            <a:p>
+              <a:pPr algn="ctr"/>
+              <a:endParaRPr lang="en-NZ"/>
+            </a:p>
+          </p:txBody>
+        </p:sp>
+        <p:sp>
+          <p:nvSpPr>
+            <p:cNvPr id="51" name="Freeform: Shape 50">
+              <a:extLst>
+                <a:ext uri="{FF2B5EF4-FFF2-40B4-BE49-F238E27FC236}">
+                  <a16:creationId xmlns:a16="http://schemas.microsoft.com/office/drawing/2014/main" id="{7B9C2AAA-F11A-BDC2-FF63-3682DE58181C}"/>
+                </a:ext>
+              </a:extLst>
+            </p:cNvPr>
+            <p:cNvSpPr/>
+            <p:nvPr/>
+          </p:nvSpPr>
+          <p:spPr>
+            <a:xfrm>
+              <a:off x="5799213" y="2487912"/>
+              <a:ext cx="477954" cy="2425430"/>
+            </a:xfrm>
+            <a:custGeom>
+              <a:avLst/>
+              <a:gdLst>
+                <a:gd name="csX0" fmla="*/ 32425 w 477954"/>
+                <a:gd name="csY0" fmla="*/ 0 h 2425430"/>
+                <a:gd name="csX1" fmla="*/ 239949 w 477954"/>
+                <a:gd name="csY1" fmla="*/ 272374 h 2425430"/>
+                <a:gd name="csX2" fmla="*/ 453957 w 477954"/>
+                <a:gd name="csY2" fmla="*/ 791183 h 2425430"/>
+                <a:gd name="csX3" fmla="*/ 453957 w 477954"/>
+                <a:gd name="csY3" fmla="*/ 1543455 h 2425430"/>
+                <a:gd name="csX4" fmla="*/ 285344 w 477954"/>
+                <a:gd name="csY4" fmla="*/ 2049293 h 2425430"/>
+                <a:gd name="csX5" fmla="*/ 0 w 477954"/>
+                <a:gd name="csY5" fmla="*/ 2425430 h 2425430"/>
+                <a:gd name="csX6" fmla="*/ 0 w 477954"/>
+                <a:gd name="csY6" fmla="*/ 2425430 h 2425430"/>
+              </a:gdLst>
+              <a:ahLst/>
+              <a:cxnLst>
+                <a:cxn ang="0">
+                  <a:pos x="csX0" y="csY0"/>
+                </a:cxn>
+                <a:cxn ang="0">
+                  <a:pos x="csX1" y="csY1"/>
+                </a:cxn>
+                <a:cxn ang="0">
+                  <a:pos x="csX2" y="csY2"/>
+                </a:cxn>
+                <a:cxn ang="0">
+                  <a:pos x="csX3" y="csY3"/>
+                </a:cxn>
+                <a:cxn ang="0">
+                  <a:pos x="csX4" y="csY4"/>
+                </a:cxn>
+                <a:cxn ang="0">
+                  <a:pos x="csX5" y="csY5"/>
+                </a:cxn>
+                <a:cxn ang="0">
+                  <a:pos x="csX6" y="csY6"/>
+                </a:cxn>
+              </a:cxnLst>
+              <a:rect l="l" t="t" r="r" b="b"/>
+              <a:pathLst>
+                <a:path w="477954" h="2425430">
+                  <a:moveTo>
+                    <a:pt x="32425" y="0"/>
+                  </a:moveTo>
+                  <a:cubicBezTo>
+                    <a:pt x="101059" y="70255"/>
+                    <a:pt x="169694" y="140510"/>
+                    <a:pt x="239949" y="272374"/>
+                  </a:cubicBezTo>
+                  <a:cubicBezTo>
+                    <a:pt x="310204" y="404238"/>
+                    <a:pt x="418289" y="579336"/>
+                    <a:pt x="453957" y="791183"/>
+                  </a:cubicBezTo>
+                  <a:cubicBezTo>
+                    <a:pt x="489625" y="1003030"/>
+                    <a:pt x="482059" y="1333770"/>
+                    <a:pt x="453957" y="1543455"/>
+                  </a:cubicBezTo>
+                  <a:cubicBezTo>
+                    <a:pt x="425855" y="1753140"/>
+                    <a:pt x="361003" y="1902297"/>
+                    <a:pt x="285344" y="2049293"/>
+                  </a:cubicBezTo>
+                  <a:cubicBezTo>
+                    <a:pt x="209685" y="2196289"/>
+                    <a:pt x="0" y="2425430"/>
+                    <a:pt x="0" y="2425430"/>
+                  </a:cubicBezTo>
+                  <a:lnTo>
+                    <a:pt x="0" y="2425430"/>
+                  </a:lnTo>
+                </a:path>
+              </a:pathLst>
+            </a:custGeom>
+            <a:noFill/>
+          </p:spPr>
+          <p:style>
+            <a:lnRef idx="2">
+              <a:schemeClr val="accent1">
+                <a:shade val="15000"/>
+              </a:schemeClr>
+            </a:lnRef>
+            <a:fillRef idx="1">
+              <a:schemeClr val="accent1"/>
+            </a:fillRef>
+            <a:effectRef idx="0">
+              <a:schemeClr val="accent1"/>
+            </a:effectRef>
+            <a:fontRef idx="minor">
+              <a:schemeClr val="lt1"/>
+            </a:fontRef>
+          </p:style>
+          <p:txBody>
+            <a:bodyPr rtlCol="0" anchor="ctr"/>
+            <a:lstStyle/>
+            <a:p>
+              <a:pPr algn="ctr"/>
+              <a:endParaRPr lang="en-NZ"/>
+            </a:p>
+          </p:txBody>
+        </p:sp>
+        <p:sp>
+          <p:nvSpPr>
+            <p:cNvPr id="52" name="Oval 15">
+              <a:extLst>
+                <a:ext uri="{FF2B5EF4-FFF2-40B4-BE49-F238E27FC236}">
+                  <a16:creationId xmlns:a16="http://schemas.microsoft.com/office/drawing/2014/main" id="{3FB89EA5-4934-BEED-5695-259919F057F0}"/>
+                </a:ext>
+              </a:extLst>
+            </p:cNvPr>
+            <p:cNvSpPr/>
+            <p:nvPr/>
+          </p:nvSpPr>
+          <p:spPr>
+            <a:xfrm rot="1297676" flipH="1" flipV="1">
+              <a:off x="5798965" y="2887846"/>
+              <a:ext cx="336104" cy="74353"/>
+            </a:xfrm>
+            <a:custGeom>
+              <a:avLst/>
+              <a:gdLst>
+                <a:gd name="csX0" fmla="*/ 0 w 525294"/>
+                <a:gd name="csY0" fmla="*/ 94034 h 188068"/>
+                <a:gd name="csX1" fmla="*/ 262647 w 525294"/>
+                <a:gd name="csY1" fmla="*/ 0 h 188068"/>
+                <a:gd name="csX2" fmla="*/ 525294 w 525294"/>
+                <a:gd name="csY2" fmla="*/ 94034 h 188068"/>
+                <a:gd name="csX3" fmla="*/ 262647 w 525294"/>
+                <a:gd name="csY3" fmla="*/ 188068 h 188068"/>
+                <a:gd name="csX4" fmla="*/ 0 w 525294"/>
+                <a:gd name="csY4" fmla="*/ 94034 h 188068"/>
+                <a:gd name="csX0" fmla="*/ 0 w 623481"/>
+                <a:gd name="csY0" fmla="*/ 94831 h 189220"/>
+                <a:gd name="csX1" fmla="*/ 262647 w 623481"/>
+                <a:gd name="csY1" fmla="*/ 797 h 189220"/>
+                <a:gd name="csX2" fmla="*/ 623481 w 623481"/>
+                <a:gd name="csY2" fmla="*/ 65276 h 189220"/>
+                <a:gd name="csX3" fmla="*/ 262647 w 623481"/>
+                <a:gd name="csY3" fmla="*/ 188865 h 189220"/>
+                <a:gd name="csX4" fmla="*/ 0 w 623481"/>
+                <a:gd name="csY4" fmla="*/ 94831 h 189220"/>
+              </a:gdLst>
+              <a:ahLst/>
+              <a:cxnLst>
+                <a:cxn ang="0">
+                  <a:pos x="csX0" y="csY0"/>
+                </a:cxn>
+                <a:cxn ang="0">
+                  <a:pos x="csX1" y="csY1"/>
+                </a:cxn>
+                <a:cxn ang="0">
+                  <a:pos x="csX2" y="csY2"/>
+                </a:cxn>
+                <a:cxn ang="0">
+                  <a:pos x="csX3" y="csY3"/>
+                </a:cxn>
+                <a:cxn ang="0">
+                  <a:pos x="csX4" y="csY4"/>
+                </a:cxn>
+              </a:cxnLst>
+              <a:rect l="l" t="t" r="r" b="b"/>
+              <a:pathLst>
+                <a:path w="623481" h="189220">
+                  <a:moveTo>
+                    <a:pt x="0" y="94831"/>
+                  </a:moveTo>
+                  <a:cubicBezTo>
+                    <a:pt x="0" y="42897"/>
+                    <a:pt x="158734" y="5723"/>
+                    <a:pt x="262647" y="797"/>
+                  </a:cubicBezTo>
+                  <a:cubicBezTo>
+                    <a:pt x="366560" y="-4129"/>
+                    <a:pt x="623481" y="13342"/>
+                    <a:pt x="623481" y="65276"/>
+                  </a:cubicBezTo>
+                  <a:cubicBezTo>
+                    <a:pt x="623481" y="117210"/>
+                    <a:pt x="366560" y="183939"/>
+                    <a:pt x="262647" y="188865"/>
+                  </a:cubicBezTo>
+                  <a:cubicBezTo>
+                    <a:pt x="158734" y="193791"/>
+                    <a:pt x="0" y="146765"/>
+                    <a:pt x="0" y="94831"/>
+                  </a:cubicBezTo>
+                  <a:close/>
+                </a:path>
+              </a:pathLst>
+            </a:custGeom>
+            <a:solidFill>
+              <a:schemeClr val="accent6">
+                <a:lumMod val="75000"/>
+              </a:schemeClr>
+            </a:solidFill>
+            <a:ln>
               <a:solidFill>
                 <a:schemeClr val="accent6">
                   <a:lumMod val="75000"/>
                 </a:schemeClr>
               </a:solidFill>
-              <a:ln>
-                <a:solidFill>
-                  <a:schemeClr val="accent6">
-                    <a:lumMod val="75000"/>
-                  </a:schemeClr>
-                </a:solidFill>
-              </a:ln>
-            </p:spPr>
-            <p:style>
-              <a:lnRef idx="2">
-                <a:schemeClr val="accent6">
-                  <a:shade val="15000"/>
-                </a:schemeClr>
-              </a:lnRef>
-              <a:fillRef idx="1">
-                <a:schemeClr val="accent6"/>
-              </a:fillRef>
-              <a:effectRef idx="0">
-                <a:schemeClr val="accent6"/>
-              </a:effectRef>
-              <a:fontRef idx="minor">
-                <a:schemeClr val="lt1"/>
-              </a:fontRef>
-            </p:style>
-            <p:txBody>
-              <a:bodyPr rtlCol="0" anchor="ctr"/>
-              <a:lstStyle/>
-              <a:p>
-                <a:pPr algn="ctr"/>
-                <a:endParaRPr lang="en-NZ"/>
-              </a:p>
-            </p:txBody>
-          </p:sp>
-          <p:sp>
-            <p:nvSpPr>
-              <p:cNvPr id="53" name="Oval 15">
-                <a:extLst>
-                  <a:ext uri="{FF2B5EF4-FFF2-40B4-BE49-F238E27FC236}">
-                    <a16:creationId xmlns:a16="http://schemas.microsoft.com/office/drawing/2014/main" id="{9B0F7939-8C3C-1B47-56E5-FCD2E7320C1B}"/>
-                  </a:ext>
-                </a:extLst>
-              </p:cNvPr>
-              <p:cNvSpPr/>
-              <p:nvPr/>
-            </p:nvSpPr>
-            <p:spPr>
-              <a:xfrm rot="2313172" flipH="1">
-                <a:off x="5931238" y="3687580"/>
-                <a:ext cx="368562" cy="86250"/>
-              </a:xfrm>
-              <a:custGeom>
-                <a:avLst/>
-                <a:gdLst>
-                  <a:gd name="csX0" fmla="*/ 0 w 525294"/>
-                  <a:gd name="csY0" fmla="*/ 94034 h 188068"/>
-                  <a:gd name="csX1" fmla="*/ 262647 w 525294"/>
-                  <a:gd name="csY1" fmla="*/ 0 h 188068"/>
-                  <a:gd name="csX2" fmla="*/ 525294 w 525294"/>
-                  <a:gd name="csY2" fmla="*/ 94034 h 188068"/>
-                  <a:gd name="csX3" fmla="*/ 262647 w 525294"/>
-                  <a:gd name="csY3" fmla="*/ 188068 h 188068"/>
-                  <a:gd name="csX4" fmla="*/ 0 w 525294"/>
-                  <a:gd name="csY4" fmla="*/ 94034 h 188068"/>
-                  <a:gd name="csX0" fmla="*/ 0 w 623481"/>
-                  <a:gd name="csY0" fmla="*/ 94831 h 189220"/>
-                  <a:gd name="csX1" fmla="*/ 262647 w 623481"/>
-                  <a:gd name="csY1" fmla="*/ 797 h 189220"/>
-                  <a:gd name="csX2" fmla="*/ 623481 w 623481"/>
-                  <a:gd name="csY2" fmla="*/ 65276 h 189220"/>
-                  <a:gd name="csX3" fmla="*/ 262647 w 623481"/>
-                  <a:gd name="csY3" fmla="*/ 188865 h 189220"/>
-                  <a:gd name="csX4" fmla="*/ 0 w 623481"/>
-                  <a:gd name="csY4" fmla="*/ 94831 h 189220"/>
-                </a:gdLst>
-                <a:ahLst/>
-                <a:cxnLst>
-                  <a:cxn ang="0">
-                    <a:pos x="csX0" y="csY0"/>
-                  </a:cxn>
-                  <a:cxn ang="0">
-                    <a:pos x="csX1" y="csY1"/>
-                  </a:cxn>
-                  <a:cxn ang="0">
-                    <a:pos x="csX2" y="csY2"/>
-                  </a:cxn>
-                  <a:cxn ang="0">
-                    <a:pos x="csX3" y="csY3"/>
-                  </a:cxn>
-                  <a:cxn ang="0">
-                    <a:pos x="csX4" y="csY4"/>
-                  </a:cxn>
-                </a:cxnLst>
-                <a:rect l="l" t="t" r="r" b="b"/>
-                <a:pathLst>
-                  <a:path w="623481" h="189220">
-                    <a:moveTo>
-                      <a:pt x="0" y="94831"/>
-                    </a:moveTo>
-                    <a:cubicBezTo>
-                      <a:pt x="0" y="42897"/>
-                      <a:pt x="158734" y="5723"/>
-                      <a:pt x="262647" y="797"/>
-                    </a:cubicBezTo>
-                    <a:cubicBezTo>
-                      <a:pt x="366560" y="-4129"/>
-                      <a:pt x="623481" y="13342"/>
-                      <a:pt x="623481" y="65276"/>
-                    </a:cubicBezTo>
-                    <a:cubicBezTo>
-                      <a:pt x="623481" y="117210"/>
-                      <a:pt x="366560" y="183939"/>
-                      <a:pt x="262647" y="188865"/>
-                    </a:cubicBezTo>
-                    <a:cubicBezTo>
-                      <a:pt x="158734" y="193791"/>
-                      <a:pt x="0" y="146765"/>
-                      <a:pt x="0" y="94831"/>
-                    </a:cubicBezTo>
-                    <a:close/>
-                  </a:path>
-                </a:pathLst>
-              </a:custGeom>
+            </a:ln>
+          </p:spPr>
+          <p:style>
+            <a:lnRef idx="2">
+              <a:schemeClr val="accent6">
+                <a:shade val="15000"/>
+              </a:schemeClr>
+            </a:lnRef>
+            <a:fillRef idx="1">
+              <a:schemeClr val="accent6"/>
+            </a:fillRef>
+            <a:effectRef idx="0">
+              <a:schemeClr val="accent6"/>
+            </a:effectRef>
+            <a:fontRef idx="minor">
+              <a:schemeClr val="lt1"/>
+            </a:fontRef>
+          </p:style>
+          <p:txBody>
+            <a:bodyPr rtlCol="0" anchor="ctr"/>
+            <a:lstStyle/>
+            <a:p>
+              <a:pPr algn="ctr"/>
+              <a:endParaRPr lang="en-NZ"/>
+            </a:p>
+          </p:txBody>
+        </p:sp>
+        <p:sp>
+          <p:nvSpPr>
+            <p:cNvPr id="53" name="Oval 15">
+              <a:extLst>
+                <a:ext uri="{FF2B5EF4-FFF2-40B4-BE49-F238E27FC236}">
+                  <a16:creationId xmlns:a16="http://schemas.microsoft.com/office/drawing/2014/main" id="{9B0F7939-8C3C-1B47-56E5-FCD2E7320C1B}"/>
+                </a:ext>
+              </a:extLst>
+            </p:cNvPr>
+            <p:cNvSpPr/>
+            <p:nvPr/>
+          </p:nvSpPr>
+          <p:spPr>
+            <a:xfrm rot="2313172" flipH="1">
+              <a:off x="5931238" y="3687580"/>
+              <a:ext cx="368562" cy="86250"/>
+            </a:xfrm>
+            <a:custGeom>
+              <a:avLst/>
+              <a:gdLst>
+                <a:gd name="csX0" fmla="*/ 0 w 525294"/>
+                <a:gd name="csY0" fmla="*/ 94034 h 188068"/>
+                <a:gd name="csX1" fmla="*/ 262647 w 525294"/>
+                <a:gd name="csY1" fmla="*/ 0 h 188068"/>
+                <a:gd name="csX2" fmla="*/ 525294 w 525294"/>
+                <a:gd name="csY2" fmla="*/ 94034 h 188068"/>
+                <a:gd name="csX3" fmla="*/ 262647 w 525294"/>
+                <a:gd name="csY3" fmla="*/ 188068 h 188068"/>
+                <a:gd name="csX4" fmla="*/ 0 w 525294"/>
+                <a:gd name="csY4" fmla="*/ 94034 h 188068"/>
+                <a:gd name="csX0" fmla="*/ 0 w 623481"/>
+                <a:gd name="csY0" fmla="*/ 94831 h 189220"/>
+                <a:gd name="csX1" fmla="*/ 262647 w 623481"/>
+                <a:gd name="csY1" fmla="*/ 797 h 189220"/>
+                <a:gd name="csX2" fmla="*/ 623481 w 623481"/>
+                <a:gd name="csY2" fmla="*/ 65276 h 189220"/>
+                <a:gd name="csX3" fmla="*/ 262647 w 623481"/>
+                <a:gd name="csY3" fmla="*/ 188865 h 189220"/>
+                <a:gd name="csX4" fmla="*/ 0 w 623481"/>
+                <a:gd name="csY4" fmla="*/ 94831 h 189220"/>
+              </a:gdLst>
+              <a:ahLst/>
+              <a:cxnLst>
+                <a:cxn ang="0">
+                  <a:pos x="csX0" y="csY0"/>
+                </a:cxn>
+                <a:cxn ang="0">
+                  <a:pos x="csX1" y="csY1"/>
+                </a:cxn>
+                <a:cxn ang="0">
+                  <a:pos x="csX2" y="csY2"/>
+                </a:cxn>
+                <a:cxn ang="0">
+                  <a:pos x="csX3" y="csY3"/>
+                </a:cxn>
+                <a:cxn ang="0">
+                  <a:pos x="csX4" y="csY4"/>
+                </a:cxn>
+              </a:cxnLst>
+              <a:rect l="l" t="t" r="r" b="b"/>
+              <a:pathLst>
+                <a:path w="623481" h="189220">
+                  <a:moveTo>
+                    <a:pt x="0" y="94831"/>
+                  </a:moveTo>
+                  <a:cubicBezTo>
+                    <a:pt x="0" y="42897"/>
+                    <a:pt x="158734" y="5723"/>
+                    <a:pt x="262647" y="797"/>
+                  </a:cubicBezTo>
+                  <a:cubicBezTo>
+                    <a:pt x="366560" y="-4129"/>
+                    <a:pt x="623481" y="13342"/>
+                    <a:pt x="623481" y="65276"/>
+                  </a:cubicBezTo>
+                  <a:cubicBezTo>
+                    <a:pt x="623481" y="117210"/>
+                    <a:pt x="366560" y="183939"/>
+                    <a:pt x="262647" y="188865"/>
+                  </a:cubicBezTo>
+                  <a:cubicBezTo>
+                    <a:pt x="158734" y="193791"/>
+                    <a:pt x="0" y="146765"/>
+                    <a:pt x="0" y="94831"/>
+                  </a:cubicBezTo>
+                  <a:close/>
+                </a:path>
+              </a:pathLst>
+            </a:custGeom>
+            <a:solidFill>
+              <a:schemeClr val="accent6">
+                <a:lumMod val="75000"/>
+              </a:schemeClr>
+            </a:solidFill>
+            <a:ln>
               <a:solidFill>
                 <a:schemeClr val="accent6">
                   <a:lumMod val="75000"/>
                 </a:schemeClr>
               </a:solidFill>
-              <a:ln>
-                <a:solidFill>
-                  <a:schemeClr val="accent6">
-                    <a:lumMod val="75000"/>
-                  </a:schemeClr>
-                </a:solidFill>
-              </a:ln>
-            </p:spPr>
-            <p:style>
-              <a:lnRef idx="2">
-                <a:schemeClr val="accent6">
-                  <a:shade val="15000"/>
-                </a:schemeClr>
-              </a:lnRef>
-              <a:fillRef idx="1">
-                <a:schemeClr val="accent6"/>
-              </a:fillRef>
-              <a:effectRef idx="0">
-                <a:schemeClr val="accent6"/>
-              </a:effectRef>
-              <a:fontRef idx="minor">
-                <a:schemeClr val="lt1"/>
-              </a:fontRef>
-            </p:style>
-            <p:txBody>
-              <a:bodyPr rtlCol="0" anchor="ctr"/>
-              <a:lstStyle/>
-              <a:p>
-                <a:pPr algn="ctr"/>
-                <a:endParaRPr lang="en-NZ"/>
-              </a:p>
-            </p:txBody>
-          </p:sp>
-          <p:sp>
-            <p:nvSpPr>
-              <p:cNvPr id="54" name="Oval 15">
-                <a:extLst>
-                  <a:ext uri="{FF2B5EF4-FFF2-40B4-BE49-F238E27FC236}">
-                    <a16:creationId xmlns:a16="http://schemas.microsoft.com/office/drawing/2014/main" id="{FF8475F1-258E-3369-589F-52CAC3091364}"/>
-                  </a:ext>
-                </a:extLst>
-              </p:cNvPr>
-              <p:cNvSpPr/>
-              <p:nvPr/>
-            </p:nvSpPr>
-            <p:spPr>
-              <a:xfrm rot="16599564">
-                <a:off x="5800619" y="2388447"/>
-                <a:ext cx="384004" cy="76570"/>
-              </a:xfrm>
-              <a:custGeom>
-                <a:avLst/>
-                <a:gdLst>
-                  <a:gd name="csX0" fmla="*/ 0 w 525294"/>
-                  <a:gd name="csY0" fmla="*/ 94034 h 188068"/>
-                  <a:gd name="csX1" fmla="*/ 262647 w 525294"/>
-                  <a:gd name="csY1" fmla="*/ 0 h 188068"/>
-                  <a:gd name="csX2" fmla="*/ 525294 w 525294"/>
-                  <a:gd name="csY2" fmla="*/ 94034 h 188068"/>
-                  <a:gd name="csX3" fmla="*/ 262647 w 525294"/>
-                  <a:gd name="csY3" fmla="*/ 188068 h 188068"/>
-                  <a:gd name="csX4" fmla="*/ 0 w 525294"/>
-                  <a:gd name="csY4" fmla="*/ 94034 h 188068"/>
-                  <a:gd name="csX0" fmla="*/ 0 w 623481"/>
-                  <a:gd name="csY0" fmla="*/ 94831 h 189220"/>
-                  <a:gd name="csX1" fmla="*/ 262647 w 623481"/>
-                  <a:gd name="csY1" fmla="*/ 797 h 189220"/>
-                  <a:gd name="csX2" fmla="*/ 623481 w 623481"/>
-                  <a:gd name="csY2" fmla="*/ 65276 h 189220"/>
-                  <a:gd name="csX3" fmla="*/ 262647 w 623481"/>
-                  <a:gd name="csY3" fmla="*/ 188865 h 189220"/>
-                  <a:gd name="csX4" fmla="*/ 0 w 623481"/>
-                  <a:gd name="csY4" fmla="*/ 94831 h 189220"/>
-                </a:gdLst>
-                <a:ahLst/>
-                <a:cxnLst>
-                  <a:cxn ang="0">
-                    <a:pos x="csX0" y="csY0"/>
-                  </a:cxn>
-                  <a:cxn ang="0">
-                    <a:pos x="csX1" y="csY1"/>
-                  </a:cxn>
-                  <a:cxn ang="0">
-                    <a:pos x="csX2" y="csY2"/>
-                  </a:cxn>
-                  <a:cxn ang="0">
-                    <a:pos x="csX3" y="csY3"/>
-                  </a:cxn>
-                  <a:cxn ang="0">
-                    <a:pos x="csX4" y="csY4"/>
-                  </a:cxn>
-                </a:cxnLst>
-                <a:rect l="l" t="t" r="r" b="b"/>
-                <a:pathLst>
-                  <a:path w="623481" h="189220">
-                    <a:moveTo>
-                      <a:pt x="0" y="94831"/>
-                    </a:moveTo>
-                    <a:cubicBezTo>
-                      <a:pt x="0" y="42897"/>
-                      <a:pt x="158734" y="5723"/>
-                      <a:pt x="262647" y="797"/>
-                    </a:cubicBezTo>
-                    <a:cubicBezTo>
-                      <a:pt x="366560" y="-4129"/>
-                      <a:pt x="623481" y="13342"/>
-                      <a:pt x="623481" y="65276"/>
-                    </a:cubicBezTo>
-                    <a:cubicBezTo>
-                      <a:pt x="623481" y="117210"/>
-                      <a:pt x="366560" y="183939"/>
-                      <a:pt x="262647" y="188865"/>
-                    </a:cubicBezTo>
-                    <a:cubicBezTo>
-                      <a:pt x="158734" y="193791"/>
-                      <a:pt x="0" y="146765"/>
-                      <a:pt x="0" y="94831"/>
-                    </a:cubicBezTo>
-                    <a:close/>
-                  </a:path>
-                </a:pathLst>
-              </a:custGeom>
+            </a:ln>
+          </p:spPr>
+          <p:style>
+            <a:lnRef idx="2">
+              <a:schemeClr val="accent6">
+                <a:shade val="15000"/>
+              </a:schemeClr>
+            </a:lnRef>
+            <a:fillRef idx="1">
+              <a:schemeClr val="accent6"/>
+            </a:fillRef>
+            <a:effectRef idx="0">
+              <a:schemeClr val="accent6"/>
+            </a:effectRef>
+            <a:fontRef idx="minor">
+              <a:schemeClr val="lt1"/>
+            </a:fontRef>
+          </p:style>
+          <p:txBody>
+            <a:bodyPr rtlCol="0" anchor="ctr"/>
+            <a:lstStyle/>
+            <a:p>
+              <a:pPr algn="ctr"/>
+              <a:endParaRPr lang="en-NZ"/>
+            </a:p>
+          </p:txBody>
+        </p:sp>
+        <p:sp>
+          <p:nvSpPr>
+            <p:cNvPr id="54" name="Oval 15">
+              <a:extLst>
+                <a:ext uri="{FF2B5EF4-FFF2-40B4-BE49-F238E27FC236}">
+                  <a16:creationId xmlns:a16="http://schemas.microsoft.com/office/drawing/2014/main" id="{FF8475F1-258E-3369-589F-52CAC3091364}"/>
+                </a:ext>
+              </a:extLst>
+            </p:cNvPr>
+            <p:cNvSpPr/>
+            <p:nvPr/>
+          </p:nvSpPr>
+          <p:spPr>
+            <a:xfrm rot="16599564">
+              <a:off x="5800619" y="2388447"/>
+              <a:ext cx="384004" cy="76570"/>
+            </a:xfrm>
+            <a:custGeom>
+              <a:avLst/>
+              <a:gdLst>
+                <a:gd name="csX0" fmla="*/ 0 w 525294"/>
+                <a:gd name="csY0" fmla="*/ 94034 h 188068"/>
+                <a:gd name="csX1" fmla="*/ 262647 w 525294"/>
+                <a:gd name="csY1" fmla="*/ 0 h 188068"/>
+                <a:gd name="csX2" fmla="*/ 525294 w 525294"/>
+                <a:gd name="csY2" fmla="*/ 94034 h 188068"/>
+                <a:gd name="csX3" fmla="*/ 262647 w 525294"/>
+                <a:gd name="csY3" fmla="*/ 188068 h 188068"/>
+                <a:gd name="csX4" fmla="*/ 0 w 525294"/>
+                <a:gd name="csY4" fmla="*/ 94034 h 188068"/>
+                <a:gd name="csX0" fmla="*/ 0 w 623481"/>
+                <a:gd name="csY0" fmla="*/ 94831 h 189220"/>
+                <a:gd name="csX1" fmla="*/ 262647 w 623481"/>
+                <a:gd name="csY1" fmla="*/ 797 h 189220"/>
+                <a:gd name="csX2" fmla="*/ 623481 w 623481"/>
+                <a:gd name="csY2" fmla="*/ 65276 h 189220"/>
+                <a:gd name="csX3" fmla="*/ 262647 w 623481"/>
+                <a:gd name="csY3" fmla="*/ 188865 h 189220"/>
+                <a:gd name="csX4" fmla="*/ 0 w 623481"/>
+                <a:gd name="csY4" fmla="*/ 94831 h 189220"/>
+              </a:gdLst>
+              <a:ahLst/>
+              <a:cxnLst>
+                <a:cxn ang="0">
+                  <a:pos x="csX0" y="csY0"/>
+                </a:cxn>
+                <a:cxn ang="0">
+                  <a:pos x="csX1" y="csY1"/>
+                </a:cxn>
+                <a:cxn ang="0">
+                  <a:pos x="csX2" y="csY2"/>
+                </a:cxn>
+                <a:cxn ang="0">
+                  <a:pos x="csX3" y="csY3"/>
+                </a:cxn>
+                <a:cxn ang="0">
+                  <a:pos x="csX4" y="csY4"/>
+                </a:cxn>
+              </a:cxnLst>
+              <a:rect l="l" t="t" r="r" b="b"/>
+              <a:pathLst>
+                <a:path w="623481" h="189220">
+                  <a:moveTo>
+                    <a:pt x="0" y="94831"/>
+                  </a:moveTo>
+                  <a:cubicBezTo>
+                    <a:pt x="0" y="42897"/>
+                    <a:pt x="158734" y="5723"/>
+                    <a:pt x="262647" y="797"/>
+                  </a:cubicBezTo>
+                  <a:cubicBezTo>
+                    <a:pt x="366560" y="-4129"/>
+                    <a:pt x="623481" y="13342"/>
+                    <a:pt x="623481" y="65276"/>
+                  </a:cubicBezTo>
+                  <a:cubicBezTo>
+                    <a:pt x="623481" y="117210"/>
+                    <a:pt x="366560" y="183939"/>
+                    <a:pt x="262647" y="188865"/>
+                  </a:cubicBezTo>
+                  <a:cubicBezTo>
+                    <a:pt x="158734" y="193791"/>
+                    <a:pt x="0" y="146765"/>
+                    <a:pt x="0" y="94831"/>
+                  </a:cubicBezTo>
+                  <a:close/>
+                </a:path>
+              </a:pathLst>
+            </a:custGeom>
+            <a:solidFill>
+              <a:schemeClr val="accent6">
+                <a:lumMod val="75000"/>
+              </a:schemeClr>
+            </a:solidFill>
+            <a:ln>
               <a:solidFill>
                 <a:schemeClr val="accent6">
                   <a:lumMod val="75000"/>
                 </a:schemeClr>
               </a:solidFill>
-              <a:ln>
-                <a:solidFill>
-                  <a:schemeClr val="accent6">
-                    <a:lumMod val="75000"/>
-                  </a:schemeClr>
-                </a:solidFill>
-              </a:ln>
-            </p:spPr>
-            <p:style>
-              <a:lnRef idx="2">
-                <a:schemeClr val="accent6">
-                  <a:shade val="15000"/>
-                </a:schemeClr>
-              </a:lnRef>
-              <a:fillRef idx="1">
-                <a:schemeClr val="accent6"/>
-              </a:fillRef>
-              <a:effectRef idx="0">
-                <a:schemeClr val="accent6"/>
-              </a:effectRef>
-              <a:fontRef idx="minor">
-                <a:schemeClr val="lt1"/>
-              </a:fontRef>
-            </p:style>
-            <p:txBody>
-              <a:bodyPr rtlCol="0" anchor="ctr"/>
-              <a:lstStyle/>
-              <a:p>
-                <a:pPr algn="ctr"/>
-                <a:endParaRPr lang="en-NZ"/>
-              </a:p>
-            </p:txBody>
-          </p:sp>
-          <p:sp>
-            <p:nvSpPr>
-              <p:cNvPr id="55" name="Oval 15">
-                <a:extLst>
-                  <a:ext uri="{FF2B5EF4-FFF2-40B4-BE49-F238E27FC236}">
-                    <a16:creationId xmlns:a16="http://schemas.microsoft.com/office/drawing/2014/main" id="{584BD3D6-B213-B8EC-F585-1AA9AFDF1D1D}"/>
-                  </a:ext>
-                </a:extLst>
-              </p:cNvPr>
-              <p:cNvSpPr/>
-              <p:nvPr/>
-            </p:nvSpPr>
-            <p:spPr>
-              <a:xfrm rot="17720721">
-                <a:off x="6162584" y="3440791"/>
-                <a:ext cx="428121" cy="76467"/>
-              </a:xfrm>
-              <a:custGeom>
-                <a:avLst/>
-                <a:gdLst>
-                  <a:gd name="csX0" fmla="*/ 0 w 525294"/>
-                  <a:gd name="csY0" fmla="*/ 94034 h 188068"/>
-                  <a:gd name="csX1" fmla="*/ 262647 w 525294"/>
-                  <a:gd name="csY1" fmla="*/ 0 h 188068"/>
-                  <a:gd name="csX2" fmla="*/ 525294 w 525294"/>
-                  <a:gd name="csY2" fmla="*/ 94034 h 188068"/>
-                  <a:gd name="csX3" fmla="*/ 262647 w 525294"/>
-                  <a:gd name="csY3" fmla="*/ 188068 h 188068"/>
-                  <a:gd name="csX4" fmla="*/ 0 w 525294"/>
-                  <a:gd name="csY4" fmla="*/ 94034 h 188068"/>
-                  <a:gd name="csX0" fmla="*/ 0 w 623481"/>
-                  <a:gd name="csY0" fmla="*/ 94831 h 189220"/>
-                  <a:gd name="csX1" fmla="*/ 262647 w 623481"/>
-                  <a:gd name="csY1" fmla="*/ 797 h 189220"/>
-                  <a:gd name="csX2" fmla="*/ 623481 w 623481"/>
-                  <a:gd name="csY2" fmla="*/ 65276 h 189220"/>
-                  <a:gd name="csX3" fmla="*/ 262647 w 623481"/>
-                  <a:gd name="csY3" fmla="*/ 188865 h 189220"/>
-                  <a:gd name="csX4" fmla="*/ 0 w 623481"/>
-                  <a:gd name="csY4" fmla="*/ 94831 h 189220"/>
-                </a:gdLst>
-                <a:ahLst/>
-                <a:cxnLst>
-                  <a:cxn ang="0">
-                    <a:pos x="csX0" y="csY0"/>
-                  </a:cxn>
-                  <a:cxn ang="0">
-                    <a:pos x="csX1" y="csY1"/>
-                  </a:cxn>
-                  <a:cxn ang="0">
-                    <a:pos x="csX2" y="csY2"/>
-                  </a:cxn>
-                  <a:cxn ang="0">
-                    <a:pos x="csX3" y="csY3"/>
-                  </a:cxn>
-                  <a:cxn ang="0">
-                    <a:pos x="csX4" y="csY4"/>
-                  </a:cxn>
-                </a:cxnLst>
-                <a:rect l="l" t="t" r="r" b="b"/>
-                <a:pathLst>
-                  <a:path w="623481" h="189220">
-                    <a:moveTo>
-                      <a:pt x="0" y="94831"/>
-                    </a:moveTo>
-                    <a:cubicBezTo>
-                      <a:pt x="0" y="42897"/>
-                      <a:pt x="158734" y="5723"/>
-                      <a:pt x="262647" y="797"/>
-                    </a:cubicBezTo>
-                    <a:cubicBezTo>
-                      <a:pt x="366560" y="-4129"/>
-                      <a:pt x="623481" y="13342"/>
-                      <a:pt x="623481" y="65276"/>
-                    </a:cubicBezTo>
-                    <a:cubicBezTo>
-                      <a:pt x="623481" y="117210"/>
-                      <a:pt x="366560" y="183939"/>
-                      <a:pt x="262647" y="188865"/>
-                    </a:cubicBezTo>
-                    <a:cubicBezTo>
-                      <a:pt x="158734" y="193791"/>
-                      <a:pt x="0" y="146765"/>
-                      <a:pt x="0" y="94831"/>
-                    </a:cubicBezTo>
-                    <a:close/>
-                  </a:path>
-                </a:pathLst>
-              </a:custGeom>
+            </a:ln>
+          </p:spPr>
+          <p:style>
+            <a:lnRef idx="2">
+              <a:schemeClr val="accent6">
+                <a:shade val="15000"/>
+              </a:schemeClr>
+            </a:lnRef>
+            <a:fillRef idx="1">
+              <a:schemeClr val="accent6"/>
+            </a:fillRef>
+            <a:effectRef idx="0">
+              <a:schemeClr val="accent6"/>
+            </a:effectRef>
+            <a:fontRef idx="minor">
+              <a:schemeClr val="lt1"/>
+            </a:fontRef>
+          </p:style>
+          <p:txBody>
+            <a:bodyPr rtlCol="0" anchor="ctr"/>
+            <a:lstStyle/>
+            <a:p>
+              <a:pPr algn="ctr"/>
+              <a:endParaRPr lang="en-NZ"/>
+            </a:p>
+          </p:txBody>
+        </p:sp>
+        <p:sp>
+          <p:nvSpPr>
+            <p:cNvPr id="55" name="Oval 15">
+              <a:extLst>
+                <a:ext uri="{FF2B5EF4-FFF2-40B4-BE49-F238E27FC236}">
+                  <a16:creationId xmlns:a16="http://schemas.microsoft.com/office/drawing/2014/main" id="{584BD3D6-B213-B8EC-F585-1AA9AFDF1D1D}"/>
+                </a:ext>
+              </a:extLst>
+            </p:cNvPr>
+            <p:cNvSpPr/>
+            <p:nvPr/>
+          </p:nvSpPr>
+          <p:spPr>
+            <a:xfrm rot="17720721">
+              <a:off x="6162584" y="3440791"/>
+              <a:ext cx="428121" cy="76467"/>
+            </a:xfrm>
+            <a:custGeom>
+              <a:avLst/>
+              <a:gdLst>
+                <a:gd name="csX0" fmla="*/ 0 w 525294"/>
+                <a:gd name="csY0" fmla="*/ 94034 h 188068"/>
+                <a:gd name="csX1" fmla="*/ 262647 w 525294"/>
+                <a:gd name="csY1" fmla="*/ 0 h 188068"/>
+                <a:gd name="csX2" fmla="*/ 525294 w 525294"/>
+                <a:gd name="csY2" fmla="*/ 94034 h 188068"/>
+                <a:gd name="csX3" fmla="*/ 262647 w 525294"/>
+                <a:gd name="csY3" fmla="*/ 188068 h 188068"/>
+                <a:gd name="csX4" fmla="*/ 0 w 525294"/>
+                <a:gd name="csY4" fmla="*/ 94034 h 188068"/>
+                <a:gd name="csX0" fmla="*/ 0 w 623481"/>
+                <a:gd name="csY0" fmla="*/ 94831 h 189220"/>
+                <a:gd name="csX1" fmla="*/ 262647 w 623481"/>
+                <a:gd name="csY1" fmla="*/ 797 h 189220"/>
+                <a:gd name="csX2" fmla="*/ 623481 w 623481"/>
+                <a:gd name="csY2" fmla="*/ 65276 h 189220"/>
+                <a:gd name="csX3" fmla="*/ 262647 w 623481"/>
+                <a:gd name="csY3" fmla="*/ 188865 h 189220"/>
+                <a:gd name="csX4" fmla="*/ 0 w 623481"/>
+                <a:gd name="csY4" fmla="*/ 94831 h 189220"/>
+              </a:gdLst>
+              <a:ahLst/>
+              <a:cxnLst>
+                <a:cxn ang="0">
+                  <a:pos x="csX0" y="csY0"/>
+                </a:cxn>
+                <a:cxn ang="0">
+                  <a:pos x="csX1" y="csY1"/>
+                </a:cxn>
+                <a:cxn ang="0">
+                  <a:pos x="csX2" y="csY2"/>
+                </a:cxn>
+                <a:cxn ang="0">
+                  <a:pos x="csX3" y="csY3"/>
+                </a:cxn>
+                <a:cxn ang="0">
+                  <a:pos x="csX4" y="csY4"/>
+                </a:cxn>
+              </a:cxnLst>
+              <a:rect l="l" t="t" r="r" b="b"/>
+              <a:pathLst>
+                <a:path w="623481" h="189220">
+                  <a:moveTo>
+                    <a:pt x="0" y="94831"/>
+                  </a:moveTo>
+                  <a:cubicBezTo>
+                    <a:pt x="0" y="42897"/>
+                    <a:pt x="158734" y="5723"/>
+                    <a:pt x="262647" y="797"/>
+                  </a:cubicBezTo>
+                  <a:cubicBezTo>
+                    <a:pt x="366560" y="-4129"/>
+                    <a:pt x="623481" y="13342"/>
+                    <a:pt x="623481" y="65276"/>
+                  </a:cubicBezTo>
+                  <a:cubicBezTo>
+                    <a:pt x="623481" y="117210"/>
+                    <a:pt x="366560" y="183939"/>
+                    <a:pt x="262647" y="188865"/>
+                  </a:cubicBezTo>
+                  <a:cubicBezTo>
+                    <a:pt x="158734" y="193791"/>
+                    <a:pt x="0" y="146765"/>
+                    <a:pt x="0" y="94831"/>
+                  </a:cubicBezTo>
+                  <a:close/>
+                </a:path>
+              </a:pathLst>
+            </a:custGeom>
+            <a:solidFill>
+              <a:schemeClr val="accent6">
+                <a:lumMod val="75000"/>
+              </a:schemeClr>
+            </a:solidFill>
+            <a:ln>
               <a:solidFill>
                 <a:schemeClr val="accent6">
                   <a:lumMod val="75000"/>
                 </a:schemeClr>
               </a:solidFill>
-              <a:ln>
-                <a:solidFill>
-                  <a:schemeClr val="accent6">
-                    <a:lumMod val="75000"/>
-                  </a:schemeClr>
-                </a:solidFill>
-              </a:ln>
-            </p:spPr>
-            <p:style>
-              <a:lnRef idx="2">
-                <a:schemeClr val="accent6">
-                  <a:shade val="15000"/>
-                </a:schemeClr>
-              </a:lnRef>
-              <a:fillRef idx="1">
-                <a:schemeClr val="accent6"/>
-              </a:fillRef>
-              <a:effectRef idx="0">
-                <a:schemeClr val="accent6"/>
-              </a:effectRef>
-              <a:fontRef idx="minor">
-                <a:schemeClr val="lt1"/>
-              </a:fontRef>
-            </p:style>
-            <p:txBody>
-              <a:bodyPr rtlCol="0" anchor="ctr"/>
-              <a:lstStyle/>
-              <a:p>
-                <a:pPr algn="ctr"/>
-                <a:endParaRPr lang="en-NZ"/>
-              </a:p>
-            </p:txBody>
-          </p:sp>
-          <p:sp>
-            <p:nvSpPr>
-              <p:cNvPr id="56" name="Oval 15">
-                <a:extLst>
-                  <a:ext uri="{FF2B5EF4-FFF2-40B4-BE49-F238E27FC236}">
-                    <a16:creationId xmlns:a16="http://schemas.microsoft.com/office/drawing/2014/main" id="{04CA388B-D493-2A41-8CD7-17F6FB22EF6F}"/>
-                  </a:ext>
-                </a:extLst>
-              </p:cNvPr>
-              <p:cNvSpPr/>
-              <p:nvPr/>
-            </p:nvSpPr>
-            <p:spPr>
-              <a:xfrm rot="17826229">
-                <a:off x="6168485" y="3764374"/>
-                <a:ext cx="428121" cy="90431"/>
-              </a:xfrm>
-              <a:custGeom>
-                <a:avLst/>
-                <a:gdLst>
-                  <a:gd name="csX0" fmla="*/ 0 w 525294"/>
-                  <a:gd name="csY0" fmla="*/ 94034 h 188068"/>
-                  <a:gd name="csX1" fmla="*/ 262647 w 525294"/>
-                  <a:gd name="csY1" fmla="*/ 0 h 188068"/>
-                  <a:gd name="csX2" fmla="*/ 525294 w 525294"/>
-                  <a:gd name="csY2" fmla="*/ 94034 h 188068"/>
-                  <a:gd name="csX3" fmla="*/ 262647 w 525294"/>
-                  <a:gd name="csY3" fmla="*/ 188068 h 188068"/>
-                  <a:gd name="csX4" fmla="*/ 0 w 525294"/>
-                  <a:gd name="csY4" fmla="*/ 94034 h 188068"/>
-                  <a:gd name="csX0" fmla="*/ 0 w 623481"/>
-                  <a:gd name="csY0" fmla="*/ 94831 h 189220"/>
-                  <a:gd name="csX1" fmla="*/ 262647 w 623481"/>
-                  <a:gd name="csY1" fmla="*/ 797 h 189220"/>
-                  <a:gd name="csX2" fmla="*/ 623481 w 623481"/>
-                  <a:gd name="csY2" fmla="*/ 65276 h 189220"/>
-                  <a:gd name="csX3" fmla="*/ 262647 w 623481"/>
-                  <a:gd name="csY3" fmla="*/ 188865 h 189220"/>
-                  <a:gd name="csX4" fmla="*/ 0 w 623481"/>
-                  <a:gd name="csY4" fmla="*/ 94831 h 189220"/>
-                </a:gdLst>
-                <a:ahLst/>
-                <a:cxnLst>
-                  <a:cxn ang="0">
-                    <a:pos x="csX0" y="csY0"/>
-                  </a:cxn>
-                  <a:cxn ang="0">
-                    <a:pos x="csX1" y="csY1"/>
-                  </a:cxn>
-                  <a:cxn ang="0">
-                    <a:pos x="csX2" y="csY2"/>
-                  </a:cxn>
-                  <a:cxn ang="0">
-                    <a:pos x="csX3" y="csY3"/>
-                  </a:cxn>
-                  <a:cxn ang="0">
-                    <a:pos x="csX4" y="csY4"/>
-                  </a:cxn>
-                </a:cxnLst>
-                <a:rect l="l" t="t" r="r" b="b"/>
-                <a:pathLst>
-                  <a:path w="623481" h="189220">
-                    <a:moveTo>
-                      <a:pt x="0" y="94831"/>
-                    </a:moveTo>
-                    <a:cubicBezTo>
-                      <a:pt x="0" y="42897"/>
-                      <a:pt x="158734" y="5723"/>
-                      <a:pt x="262647" y="797"/>
-                    </a:cubicBezTo>
-                    <a:cubicBezTo>
-                      <a:pt x="366560" y="-4129"/>
-                      <a:pt x="623481" y="13342"/>
-                      <a:pt x="623481" y="65276"/>
-                    </a:cubicBezTo>
-                    <a:cubicBezTo>
-                      <a:pt x="623481" y="117210"/>
-                      <a:pt x="366560" y="183939"/>
-                      <a:pt x="262647" y="188865"/>
-                    </a:cubicBezTo>
-                    <a:cubicBezTo>
-                      <a:pt x="158734" y="193791"/>
-                      <a:pt x="0" y="146765"/>
-                      <a:pt x="0" y="94831"/>
-                    </a:cubicBezTo>
-                    <a:close/>
-                  </a:path>
-                </a:pathLst>
-              </a:custGeom>
+            </a:ln>
+          </p:spPr>
+          <p:style>
+            <a:lnRef idx="2">
+              <a:schemeClr val="accent6">
+                <a:shade val="15000"/>
+              </a:schemeClr>
+            </a:lnRef>
+            <a:fillRef idx="1">
+              <a:schemeClr val="accent6"/>
+            </a:fillRef>
+            <a:effectRef idx="0">
+              <a:schemeClr val="accent6"/>
+            </a:effectRef>
+            <a:fontRef idx="minor">
+              <a:schemeClr val="lt1"/>
+            </a:fontRef>
+          </p:style>
+          <p:txBody>
+            <a:bodyPr rtlCol="0" anchor="ctr"/>
+            <a:lstStyle/>
+            <a:p>
+              <a:pPr algn="ctr"/>
+              <a:endParaRPr lang="en-NZ"/>
+            </a:p>
+          </p:txBody>
+        </p:sp>
+        <p:sp>
+          <p:nvSpPr>
+            <p:cNvPr id="56" name="Oval 15">
+              <a:extLst>
+                <a:ext uri="{FF2B5EF4-FFF2-40B4-BE49-F238E27FC236}">
+                  <a16:creationId xmlns:a16="http://schemas.microsoft.com/office/drawing/2014/main" id="{04CA388B-D493-2A41-8CD7-17F6FB22EF6F}"/>
+                </a:ext>
+              </a:extLst>
+            </p:cNvPr>
+            <p:cNvSpPr/>
+            <p:nvPr/>
+          </p:nvSpPr>
+          <p:spPr>
+            <a:xfrm rot="17826229">
+              <a:off x="6168485" y="3764374"/>
+              <a:ext cx="428121" cy="90431"/>
+            </a:xfrm>
+            <a:custGeom>
+              <a:avLst/>
+              <a:gdLst>
+                <a:gd name="csX0" fmla="*/ 0 w 525294"/>
+                <a:gd name="csY0" fmla="*/ 94034 h 188068"/>
+                <a:gd name="csX1" fmla="*/ 262647 w 525294"/>
+                <a:gd name="csY1" fmla="*/ 0 h 188068"/>
+                <a:gd name="csX2" fmla="*/ 525294 w 525294"/>
+                <a:gd name="csY2" fmla="*/ 94034 h 188068"/>
+                <a:gd name="csX3" fmla="*/ 262647 w 525294"/>
+                <a:gd name="csY3" fmla="*/ 188068 h 188068"/>
+                <a:gd name="csX4" fmla="*/ 0 w 525294"/>
+                <a:gd name="csY4" fmla="*/ 94034 h 188068"/>
+                <a:gd name="csX0" fmla="*/ 0 w 623481"/>
+                <a:gd name="csY0" fmla="*/ 94831 h 189220"/>
+                <a:gd name="csX1" fmla="*/ 262647 w 623481"/>
+                <a:gd name="csY1" fmla="*/ 797 h 189220"/>
+                <a:gd name="csX2" fmla="*/ 623481 w 623481"/>
+                <a:gd name="csY2" fmla="*/ 65276 h 189220"/>
+                <a:gd name="csX3" fmla="*/ 262647 w 623481"/>
+                <a:gd name="csY3" fmla="*/ 188865 h 189220"/>
+                <a:gd name="csX4" fmla="*/ 0 w 623481"/>
+                <a:gd name="csY4" fmla="*/ 94831 h 189220"/>
+              </a:gdLst>
+              <a:ahLst/>
+              <a:cxnLst>
+                <a:cxn ang="0">
+                  <a:pos x="csX0" y="csY0"/>
+                </a:cxn>
+                <a:cxn ang="0">
+                  <a:pos x="csX1" y="csY1"/>
+                </a:cxn>
+                <a:cxn ang="0">
+                  <a:pos x="csX2" y="csY2"/>
+                </a:cxn>
+                <a:cxn ang="0">
+                  <a:pos x="csX3" y="csY3"/>
+                </a:cxn>
+                <a:cxn ang="0">
+                  <a:pos x="csX4" y="csY4"/>
+                </a:cxn>
+              </a:cxnLst>
+              <a:rect l="l" t="t" r="r" b="b"/>
+              <a:pathLst>
+                <a:path w="623481" h="189220">
+                  <a:moveTo>
+                    <a:pt x="0" y="94831"/>
+                  </a:moveTo>
+                  <a:cubicBezTo>
+                    <a:pt x="0" y="42897"/>
+                    <a:pt x="158734" y="5723"/>
+                    <a:pt x="262647" y="797"/>
+                  </a:cubicBezTo>
+                  <a:cubicBezTo>
+                    <a:pt x="366560" y="-4129"/>
+                    <a:pt x="623481" y="13342"/>
+                    <a:pt x="623481" y="65276"/>
+                  </a:cubicBezTo>
+                  <a:cubicBezTo>
+                    <a:pt x="623481" y="117210"/>
+                    <a:pt x="366560" y="183939"/>
+                    <a:pt x="262647" y="188865"/>
+                  </a:cubicBezTo>
+                  <a:cubicBezTo>
+                    <a:pt x="158734" y="193791"/>
+                    <a:pt x="0" y="146765"/>
+                    <a:pt x="0" y="94831"/>
+                  </a:cubicBezTo>
+                  <a:close/>
+                </a:path>
+              </a:pathLst>
+            </a:custGeom>
+            <a:solidFill>
+              <a:schemeClr val="accent6">
+                <a:lumMod val="75000"/>
+              </a:schemeClr>
+            </a:solidFill>
+            <a:ln>
               <a:solidFill>
                 <a:schemeClr val="accent6">
                   <a:lumMod val="75000"/>
                 </a:schemeClr>
               </a:solidFill>
-              <a:ln>
-                <a:solidFill>
-                  <a:schemeClr val="accent6">
-                    <a:lumMod val="75000"/>
-                  </a:schemeClr>
-                </a:solidFill>
-              </a:ln>
-            </p:spPr>
-            <p:style>
-              <a:lnRef idx="2">
-                <a:schemeClr val="accent6">
-                  <a:shade val="15000"/>
-                </a:schemeClr>
-              </a:lnRef>
-              <a:fillRef idx="1">
-                <a:schemeClr val="accent6"/>
-              </a:fillRef>
-              <a:effectRef idx="0">
-                <a:schemeClr val="accent6"/>
-              </a:effectRef>
-              <a:fontRef idx="minor">
-                <a:schemeClr val="lt1"/>
-              </a:fontRef>
-            </p:style>
-            <p:txBody>
-              <a:bodyPr rtlCol="0" anchor="ctr"/>
-              <a:lstStyle/>
-              <a:p>
-                <a:pPr algn="ctr"/>
-                <a:endParaRPr lang="en-NZ"/>
-              </a:p>
-            </p:txBody>
-          </p:sp>
-        </p:grpSp>
+            </a:ln>
+          </p:spPr>
+          <p:style>
+            <a:lnRef idx="2">
+              <a:schemeClr val="accent6">
+                <a:shade val="15000"/>
+              </a:schemeClr>
+            </a:lnRef>
+            <a:fillRef idx="1">
+              <a:schemeClr val="accent6"/>
+            </a:fillRef>
+            <a:effectRef idx="0">
+              <a:schemeClr val="accent6"/>
+            </a:effectRef>
+            <a:fontRef idx="minor">
+              <a:schemeClr val="lt1"/>
+            </a:fontRef>
+          </p:style>
+          <p:txBody>
+            <a:bodyPr rtlCol="0" anchor="ctr"/>
+            <a:lstStyle/>
+            <a:p>
+              <a:pPr algn="ctr"/>
+              <a:endParaRPr lang="en-NZ"/>
+            </a:p>
+          </p:txBody>
+        </p:sp>
       </p:grpSp>
     </p:spTree>
     <p:extLst>
@@ -9782,6 +9762,2595 @@
     <p:extLst>
       <p:ext uri="{BB962C8B-B14F-4D97-AF65-F5344CB8AC3E}">
         <p14:creationId xmlns:p14="http://schemas.microsoft.com/office/powerpoint/2010/main" val="4092373880"/>
+      </p:ext>
+    </p:extLst>
+  </p:cSld>
+  <p:clrMapOvr>
+    <a:masterClrMapping/>
+  </p:clrMapOvr>
+</p:sld>
+</file>
+
+<file path=ppt/slides/slide5.xml><?xml version="1.0" encoding="utf-8"?>
+<p:sld xmlns:a="http://schemas.openxmlformats.org/drawingml/2006/main" xmlns:r="http://schemas.openxmlformats.org/officeDocument/2006/relationships" xmlns:p="http://schemas.openxmlformats.org/presentationml/2006/main">
+  <p:cSld>
+    <p:spTree>
+      <p:nvGrpSpPr>
+        <p:cNvPr id="1" name=""/>
+        <p:cNvGrpSpPr/>
+        <p:nvPr/>
+      </p:nvGrpSpPr>
+      <p:grpSpPr>
+        <a:xfrm>
+          <a:off x="0" y="0"/>
+          <a:ext cx="0" cy="0"/>
+          <a:chOff x="0" y="0"/>
+          <a:chExt cx="0" cy="0"/>
+        </a:xfrm>
+      </p:grpSpPr>
+      <p:pic>
+        <p:nvPicPr>
+          <p:cNvPr id="3" name="Picture 2">
+            <a:extLst>
+              <a:ext uri="{FF2B5EF4-FFF2-40B4-BE49-F238E27FC236}">
+                <a16:creationId xmlns:a16="http://schemas.microsoft.com/office/drawing/2014/main" id="{19791499-87D0-12FA-32C0-47C434CAD2B3}"/>
+              </a:ext>
+            </a:extLst>
+          </p:cNvPr>
+          <p:cNvPicPr>
+            <a:picLocks noChangeAspect="1"/>
+          </p:cNvPicPr>
+          <p:nvPr/>
+        </p:nvPicPr>
+        <p:blipFill>
+          <a:blip r:embed="rId2">
+            <a:extLst>
+              <a:ext uri="{28A0092B-C50C-407E-A947-70E740481C1C}">
+                <a14:useLocalDpi xmlns:a14="http://schemas.microsoft.com/office/drawing/2010/main" val="0"/>
+              </a:ext>
+            </a:extLst>
+          </a:blip>
+          <a:srcRect l="15788" r="16127" b="12077"/>
+          <a:stretch>
+            <a:fillRect/>
+          </a:stretch>
+        </p:blipFill>
+        <p:spPr>
+          <a:xfrm>
+            <a:off x="6928306" y="813571"/>
+            <a:ext cx="2594042" cy="3349867"/>
+          </a:xfrm>
+          <a:prstGeom prst="rect">
+            <a:avLst/>
+          </a:prstGeom>
+        </p:spPr>
+      </p:pic>
+      <p:grpSp>
+        <p:nvGrpSpPr>
+          <p:cNvPr id="4" name="Group 3">
+            <a:extLst>
+              <a:ext uri="{FF2B5EF4-FFF2-40B4-BE49-F238E27FC236}">
+                <a16:creationId xmlns:a16="http://schemas.microsoft.com/office/drawing/2014/main" id="{17605558-2554-C262-D5F6-F7B4F6886C7E}"/>
+              </a:ext>
+            </a:extLst>
+          </p:cNvPr>
+          <p:cNvGrpSpPr/>
+          <p:nvPr/>
+        </p:nvGrpSpPr>
+        <p:grpSpPr>
+          <a:xfrm>
+            <a:off x="1572114" y="1745136"/>
+            <a:ext cx="591053" cy="2470190"/>
+            <a:chOff x="1763631" y="2008038"/>
+            <a:chExt cx="591053" cy="2470190"/>
+          </a:xfrm>
+        </p:grpSpPr>
+        <p:sp>
+          <p:nvSpPr>
+            <p:cNvPr id="16" name="Freeform: Shape 15">
+              <a:extLst>
+                <a:ext uri="{FF2B5EF4-FFF2-40B4-BE49-F238E27FC236}">
+                  <a16:creationId xmlns:a16="http://schemas.microsoft.com/office/drawing/2014/main" id="{CD3DE8BF-502B-35D3-C31A-769FD2B5988A}"/>
+                </a:ext>
+              </a:extLst>
+            </p:cNvPr>
+            <p:cNvSpPr/>
+            <p:nvPr/>
+          </p:nvSpPr>
+          <p:spPr>
+            <a:xfrm>
+              <a:off x="1923562" y="2302743"/>
+              <a:ext cx="257713" cy="2175485"/>
+            </a:xfrm>
+            <a:custGeom>
+              <a:avLst/>
+              <a:gdLst>
+                <a:gd name="csX0" fmla="*/ 571913 w 708101"/>
+                <a:gd name="csY0" fmla="*/ 2341123 h 2341123"/>
+                <a:gd name="csX1" fmla="*/ 1224 w 708101"/>
+                <a:gd name="csY1" fmla="*/ 1063557 h 2341123"/>
+                <a:gd name="csX2" fmla="*/ 708101 w 708101"/>
+                <a:gd name="csY2" fmla="*/ 0 h 2341123"/>
+                <a:gd name="csX3" fmla="*/ 708101 w 708101"/>
+                <a:gd name="csY3" fmla="*/ 0 h 2341123"/>
+              </a:gdLst>
+              <a:ahLst/>
+              <a:cxnLst>
+                <a:cxn ang="0">
+                  <a:pos x="csX0" y="csY0"/>
+                </a:cxn>
+                <a:cxn ang="0">
+                  <a:pos x="csX1" y="csY1"/>
+                </a:cxn>
+                <a:cxn ang="0">
+                  <a:pos x="csX2" y="csY2"/>
+                </a:cxn>
+                <a:cxn ang="0">
+                  <a:pos x="csX3" y="csY3"/>
+                </a:cxn>
+              </a:cxnLst>
+              <a:rect l="l" t="t" r="r" b="b"/>
+              <a:pathLst>
+                <a:path w="708101" h="2341123">
+                  <a:moveTo>
+                    <a:pt x="571913" y="2341123"/>
+                  </a:moveTo>
+                  <a:cubicBezTo>
+                    <a:pt x="275219" y="1897433"/>
+                    <a:pt x="-21474" y="1453744"/>
+                    <a:pt x="1224" y="1063557"/>
+                  </a:cubicBezTo>
+                  <a:cubicBezTo>
+                    <a:pt x="23922" y="673370"/>
+                    <a:pt x="708101" y="0"/>
+                    <a:pt x="708101" y="0"/>
+                  </a:cubicBezTo>
+                  <a:lnTo>
+                    <a:pt x="708101" y="0"/>
+                  </a:lnTo>
+                </a:path>
+              </a:pathLst>
+            </a:custGeom>
+            <a:ln w="38100">
+              <a:solidFill>
+                <a:schemeClr val="accent6">
+                  <a:lumMod val="50000"/>
+                </a:schemeClr>
+              </a:solidFill>
+            </a:ln>
+          </p:spPr>
+          <p:style>
+            <a:lnRef idx="1">
+              <a:schemeClr val="accent6"/>
+            </a:lnRef>
+            <a:fillRef idx="0">
+              <a:schemeClr val="accent6"/>
+            </a:fillRef>
+            <a:effectRef idx="0">
+              <a:schemeClr val="accent6"/>
+            </a:effectRef>
+            <a:fontRef idx="minor">
+              <a:schemeClr val="tx1"/>
+            </a:fontRef>
+          </p:style>
+          <p:txBody>
+            <a:bodyPr rtlCol="0" anchor="ctr"/>
+            <a:lstStyle/>
+            <a:p>
+              <a:pPr algn="ctr"/>
+              <a:endParaRPr lang="en-NZ"/>
+            </a:p>
+          </p:txBody>
+        </p:sp>
+        <p:sp>
+          <p:nvSpPr>
+            <p:cNvPr id="17" name="Oval 15">
+              <a:extLst>
+                <a:ext uri="{FF2B5EF4-FFF2-40B4-BE49-F238E27FC236}">
+                  <a16:creationId xmlns:a16="http://schemas.microsoft.com/office/drawing/2014/main" id="{50A54E7B-3E86-C887-16AB-9E44D02CF6E9}"/>
+                </a:ext>
+              </a:extLst>
+            </p:cNvPr>
+            <p:cNvSpPr/>
+            <p:nvPr/>
+          </p:nvSpPr>
+          <p:spPr>
+            <a:xfrm rot="19286828">
+              <a:off x="1996100" y="3897440"/>
+              <a:ext cx="358584" cy="83907"/>
+            </a:xfrm>
+            <a:custGeom>
+              <a:avLst/>
+              <a:gdLst>
+                <a:gd name="csX0" fmla="*/ 0 w 525294"/>
+                <a:gd name="csY0" fmla="*/ 94034 h 188068"/>
+                <a:gd name="csX1" fmla="*/ 262647 w 525294"/>
+                <a:gd name="csY1" fmla="*/ 0 h 188068"/>
+                <a:gd name="csX2" fmla="*/ 525294 w 525294"/>
+                <a:gd name="csY2" fmla="*/ 94034 h 188068"/>
+                <a:gd name="csX3" fmla="*/ 262647 w 525294"/>
+                <a:gd name="csY3" fmla="*/ 188068 h 188068"/>
+                <a:gd name="csX4" fmla="*/ 0 w 525294"/>
+                <a:gd name="csY4" fmla="*/ 94034 h 188068"/>
+                <a:gd name="csX0" fmla="*/ 0 w 623481"/>
+                <a:gd name="csY0" fmla="*/ 94831 h 189220"/>
+                <a:gd name="csX1" fmla="*/ 262647 w 623481"/>
+                <a:gd name="csY1" fmla="*/ 797 h 189220"/>
+                <a:gd name="csX2" fmla="*/ 623481 w 623481"/>
+                <a:gd name="csY2" fmla="*/ 65276 h 189220"/>
+                <a:gd name="csX3" fmla="*/ 262647 w 623481"/>
+                <a:gd name="csY3" fmla="*/ 188865 h 189220"/>
+                <a:gd name="csX4" fmla="*/ 0 w 623481"/>
+                <a:gd name="csY4" fmla="*/ 94831 h 189220"/>
+              </a:gdLst>
+              <a:ahLst/>
+              <a:cxnLst>
+                <a:cxn ang="0">
+                  <a:pos x="csX0" y="csY0"/>
+                </a:cxn>
+                <a:cxn ang="0">
+                  <a:pos x="csX1" y="csY1"/>
+                </a:cxn>
+                <a:cxn ang="0">
+                  <a:pos x="csX2" y="csY2"/>
+                </a:cxn>
+                <a:cxn ang="0">
+                  <a:pos x="csX3" y="csY3"/>
+                </a:cxn>
+                <a:cxn ang="0">
+                  <a:pos x="csX4" y="csY4"/>
+                </a:cxn>
+              </a:cxnLst>
+              <a:rect l="l" t="t" r="r" b="b"/>
+              <a:pathLst>
+                <a:path w="623481" h="189220">
+                  <a:moveTo>
+                    <a:pt x="0" y="94831"/>
+                  </a:moveTo>
+                  <a:cubicBezTo>
+                    <a:pt x="0" y="42897"/>
+                    <a:pt x="158734" y="5723"/>
+                    <a:pt x="262647" y="797"/>
+                  </a:cubicBezTo>
+                  <a:cubicBezTo>
+                    <a:pt x="366560" y="-4129"/>
+                    <a:pt x="623481" y="13342"/>
+                    <a:pt x="623481" y="65276"/>
+                  </a:cubicBezTo>
+                  <a:cubicBezTo>
+                    <a:pt x="623481" y="117210"/>
+                    <a:pt x="366560" y="183939"/>
+                    <a:pt x="262647" y="188865"/>
+                  </a:cubicBezTo>
+                  <a:cubicBezTo>
+                    <a:pt x="158734" y="193791"/>
+                    <a:pt x="0" y="146765"/>
+                    <a:pt x="0" y="94831"/>
+                  </a:cubicBezTo>
+                  <a:close/>
+                </a:path>
+              </a:pathLst>
+            </a:custGeom>
+            <a:solidFill>
+              <a:schemeClr val="accent6">
+                <a:lumMod val="75000"/>
+              </a:schemeClr>
+            </a:solidFill>
+            <a:ln>
+              <a:solidFill>
+                <a:schemeClr val="accent6">
+                  <a:lumMod val="75000"/>
+                </a:schemeClr>
+              </a:solidFill>
+            </a:ln>
+          </p:spPr>
+          <p:style>
+            <a:lnRef idx="2">
+              <a:schemeClr val="accent6">
+                <a:shade val="15000"/>
+              </a:schemeClr>
+            </a:lnRef>
+            <a:fillRef idx="1">
+              <a:schemeClr val="accent6"/>
+            </a:fillRef>
+            <a:effectRef idx="0">
+              <a:schemeClr val="accent6"/>
+            </a:effectRef>
+            <a:fontRef idx="minor">
+              <a:schemeClr val="lt1"/>
+            </a:fontRef>
+          </p:style>
+          <p:txBody>
+            <a:bodyPr rtlCol="0" anchor="ctr"/>
+            <a:lstStyle/>
+            <a:p>
+              <a:pPr algn="ctr"/>
+              <a:endParaRPr lang="en-NZ"/>
+            </a:p>
+          </p:txBody>
+        </p:sp>
+        <p:sp>
+          <p:nvSpPr>
+            <p:cNvPr id="18" name="Oval 15">
+              <a:extLst>
+                <a:ext uri="{FF2B5EF4-FFF2-40B4-BE49-F238E27FC236}">
+                  <a16:creationId xmlns:a16="http://schemas.microsoft.com/office/drawing/2014/main" id="{D8380408-C51C-BEDA-6470-9B7FFD5DDC0C}"/>
+                </a:ext>
+              </a:extLst>
+            </p:cNvPr>
+            <p:cNvSpPr/>
+            <p:nvPr/>
+          </p:nvSpPr>
+          <p:spPr>
+            <a:xfrm rot="18624200">
+              <a:off x="2118585" y="2148778"/>
+              <a:ext cx="327199" cy="45719"/>
+            </a:xfrm>
+            <a:custGeom>
+              <a:avLst/>
+              <a:gdLst>
+                <a:gd name="csX0" fmla="*/ 0 w 525294"/>
+                <a:gd name="csY0" fmla="*/ 94034 h 188068"/>
+                <a:gd name="csX1" fmla="*/ 262647 w 525294"/>
+                <a:gd name="csY1" fmla="*/ 0 h 188068"/>
+                <a:gd name="csX2" fmla="*/ 525294 w 525294"/>
+                <a:gd name="csY2" fmla="*/ 94034 h 188068"/>
+                <a:gd name="csX3" fmla="*/ 262647 w 525294"/>
+                <a:gd name="csY3" fmla="*/ 188068 h 188068"/>
+                <a:gd name="csX4" fmla="*/ 0 w 525294"/>
+                <a:gd name="csY4" fmla="*/ 94034 h 188068"/>
+                <a:gd name="csX0" fmla="*/ 0 w 623481"/>
+                <a:gd name="csY0" fmla="*/ 94831 h 189220"/>
+                <a:gd name="csX1" fmla="*/ 262647 w 623481"/>
+                <a:gd name="csY1" fmla="*/ 797 h 189220"/>
+                <a:gd name="csX2" fmla="*/ 623481 w 623481"/>
+                <a:gd name="csY2" fmla="*/ 65276 h 189220"/>
+                <a:gd name="csX3" fmla="*/ 262647 w 623481"/>
+                <a:gd name="csY3" fmla="*/ 188865 h 189220"/>
+                <a:gd name="csX4" fmla="*/ 0 w 623481"/>
+                <a:gd name="csY4" fmla="*/ 94831 h 189220"/>
+              </a:gdLst>
+              <a:ahLst/>
+              <a:cxnLst>
+                <a:cxn ang="0">
+                  <a:pos x="csX0" y="csY0"/>
+                </a:cxn>
+                <a:cxn ang="0">
+                  <a:pos x="csX1" y="csY1"/>
+                </a:cxn>
+                <a:cxn ang="0">
+                  <a:pos x="csX2" y="csY2"/>
+                </a:cxn>
+                <a:cxn ang="0">
+                  <a:pos x="csX3" y="csY3"/>
+                </a:cxn>
+                <a:cxn ang="0">
+                  <a:pos x="csX4" y="csY4"/>
+                </a:cxn>
+              </a:cxnLst>
+              <a:rect l="l" t="t" r="r" b="b"/>
+              <a:pathLst>
+                <a:path w="623481" h="189220">
+                  <a:moveTo>
+                    <a:pt x="0" y="94831"/>
+                  </a:moveTo>
+                  <a:cubicBezTo>
+                    <a:pt x="0" y="42897"/>
+                    <a:pt x="158734" y="5723"/>
+                    <a:pt x="262647" y="797"/>
+                  </a:cubicBezTo>
+                  <a:cubicBezTo>
+                    <a:pt x="366560" y="-4129"/>
+                    <a:pt x="623481" y="13342"/>
+                    <a:pt x="623481" y="65276"/>
+                  </a:cubicBezTo>
+                  <a:cubicBezTo>
+                    <a:pt x="623481" y="117210"/>
+                    <a:pt x="366560" y="183939"/>
+                    <a:pt x="262647" y="188865"/>
+                  </a:cubicBezTo>
+                  <a:cubicBezTo>
+                    <a:pt x="158734" y="193791"/>
+                    <a:pt x="0" y="146765"/>
+                    <a:pt x="0" y="94831"/>
+                  </a:cubicBezTo>
+                  <a:close/>
+                </a:path>
+              </a:pathLst>
+            </a:custGeom>
+            <a:solidFill>
+              <a:schemeClr val="accent6">
+                <a:lumMod val="75000"/>
+              </a:schemeClr>
+            </a:solidFill>
+            <a:ln>
+              <a:solidFill>
+                <a:schemeClr val="accent6">
+                  <a:lumMod val="75000"/>
+                </a:schemeClr>
+              </a:solidFill>
+            </a:ln>
+          </p:spPr>
+          <p:style>
+            <a:lnRef idx="2">
+              <a:schemeClr val="accent6">
+                <a:shade val="15000"/>
+              </a:schemeClr>
+            </a:lnRef>
+            <a:fillRef idx="1">
+              <a:schemeClr val="accent6"/>
+            </a:fillRef>
+            <a:effectRef idx="0">
+              <a:schemeClr val="accent6"/>
+            </a:effectRef>
+            <a:fontRef idx="minor">
+              <a:schemeClr val="lt1"/>
+            </a:fontRef>
+          </p:style>
+          <p:txBody>
+            <a:bodyPr rtlCol="0" anchor="ctr"/>
+            <a:lstStyle/>
+            <a:p>
+              <a:pPr algn="ctr"/>
+              <a:endParaRPr lang="en-NZ"/>
+            </a:p>
+          </p:txBody>
+        </p:sp>
+        <p:sp>
+          <p:nvSpPr>
+            <p:cNvPr id="19" name="Oval 15">
+              <a:extLst>
+                <a:ext uri="{FF2B5EF4-FFF2-40B4-BE49-F238E27FC236}">
+                  <a16:creationId xmlns:a16="http://schemas.microsoft.com/office/drawing/2014/main" id="{E3AEF77A-AEAA-3F76-1211-C37D6B1FC218}"/>
+                </a:ext>
+              </a:extLst>
+            </p:cNvPr>
+            <p:cNvSpPr/>
+            <p:nvPr/>
+          </p:nvSpPr>
+          <p:spPr>
+            <a:xfrm rot="3067841" flipH="1">
+              <a:off x="1587804" y="3263939"/>
+              <a:ext cx="428121" cy="76467"/>
+            </a:xfrm>
+            <a:custGeom>
+              <a:avLst/>
+              <a:gdLst>
+                <a:gd name="csX0" fmla="*/ 0 w 525294"/>
+                <a:gd name="csY0" fmla="*/ 94034 h 188068"/>
+                <a:gd name="csX1" fmla="*/ 262647 w 525294"/>
+                <a:gd name="csY1" fmla="*/ 0 h 188068"/>
+                <a:gd name="csX2" fmla="*/ 525294 w 525294"/>
+                <a:gd name="csY2" fmla="*/ 94034 h 188068"/>
+                <a:gd name="csX3" fmla="*/ 262647 w 525294"/>
+                <a:gd name="csY3" fmla="*/ 188068 h 188068"/>
+                <a:gd name="csX4" fmla="*/ 0 w 525294"/>
+                <a:gd name="csY4" fmla="*/ 94034 h 188068"/>
+                <a:gd name="csX0" fmla="*/ 0 w 623481"/>
+                <a:gd name="csY0" fmla="*/ 94831 h 189220"/>
+                <a:gd name="csX1" fmla="*/ 262647 w 623481"/>
+                <a:gd name="csY1" fmla="*/ 797 h 189220"/>
+                <a:gd name="csX2" fmla="*/ 623481 w 623481"/>
+                <a:gd name="csY2" fmla="*/ 65276 h 189220"/>
+                <a:gd name="csX3" fmla="*/ 262647 w 623481"/>
+                <a:gd name="csY3" fmla="*/ 188865 h 189220"/>
+                <a:gd name="csX4" fmla="*/ 0 w 623481"/>
+                <a:gd name="csY4" fmla="*/ 94831 h 189220"/>
+              </a:gdLst>
+              <a:ahLst/>
+              <a:cxnLst>
+                <a:cxn ang="0">
+                  <a:pos x="csX0" y="csY0"/>
+                </a:cxn>
+                <a:cxn ang="0">
+                  <a:pos x="csX1" y="csY1"/>
+                </a:cxn>
+                <a:cxn ang="0">
+                  <a:pos x="csX2" y="csY2"/>
+                </a:cxn>
+                <a:cxn ang="0">
+                  <a:pos x="csX3" y="csY3"/>
+                </a:cxn>
+                <a:cxn ang="0">
+                  <a:pos x="csX4" y="csY4"/>
+                </a:cxn>
+              </a:cxnLst>
+              <a:rect l="l" t="t" r="r" b="b"/>
+              <a:pathLst>
+                <a:path w="623481" h="189220">
+                  <a:moveTo>
+                    <a:pt x="0" y="94831"/>
+                  </a:moveTo>
+                  <a:cubicBezTo>
+                    <a:pt x="0" y="42897"/>
+                    <a:pt x="158734" y="5723"/>
+                    <a:pt x="262647" y="797"/>
+                  </a:cubicBezTo>
+                  <a:cubicBezTo>
+                    <a:pt x="366560" y="-4129"/>
+                    <a:pt x="623481" y="13342"/>
+                    <a:pt x="623481" y="65276"/>
+                  </a:cubicBezTo>
+                  <a:cubicBezTo>
+                    <a:pt x="623481" y="117210"/>
+                    <a:pt x="366560" y="183939"/>
+                    <a:pt x="262647" y="188865"/>
+                  </a:cubicBezTo>
+                  <a:cubicBezTo>
+                    <a:pt x="158734" y="193791"/>
+                    <a:pt x="0" y="146765"/>
+                    <a:pt x="0" y="94831"/>
+                  </a:cubicBezTo>
+                  <a:close/>
+                </a:path>
+              </a:pathLst>
+            </a:custGeom>
+            <a:solidFill>
+              <a:schemeClr val="accent6">
+                <a:lumMod val="75000"/>
+              </a:schemeClr>
+            </a:solidFill>
+            <a:ln>
+              <a:solidFill>
+                <a:schemeClr val="accent6">
+                  <a:lumMod val="75000"/>
+                </a:schemeClr>
+              </a:solidFill>
+            </a:ln>
+          </p:spPr>
+          <p:style>
+            <a:lnRef idx="2">
+              <a:schemeClr val="accent6">
+                <a:shade val="15000"/>
+              </a:schemeClr>
+            </a:lnRef>
+            <a:fillRef idx="1">
+              <a:schemeClr val="accent6"/>
+            </a:fillRef>
+            <a:effectRef idx="0">
+              <a:schemeClr val="accent6"/>
+            </a:effectRef>
+            <a:fontRef idx="minor">
+              <a:schemeClr val="lt1"/>
+            </a:fontRef>
+          </p:style>
+          <p:txBody>
+            <a:bodyPr rtlCol="0" anchor="ctr"/>
+            <a:lstStyle/>
+            <a:p>
+              <a:pPr algn="ctr"/>
+              <a:endParaRPr lang="en-NZ"/>
+            </a:p>
+          </p:txBody>
+        </p:sp>
+        <p:sp>
+          <p:nvSpPr>
+            <p:cNvPr id="20" name="Oval 15">
+              <a:extLst>
+                <a:ext uri="{FF2B5EF4-FFF2-40B4-BE49-F238E27FC236}">
+                  <a16:creationId xmlns:a16="http://schemas.microsoft.com/office/drawing/2014/main" id="{E8AEB632-A788-FFEB-7976-C7D0E9784FC1}"/>
+                </a:ext>
+              </a:extLst>
+            </p:cNvPr>
+            <p:cNvSpPr/>
+            <p:nvPr/>
+          </p:nvSpPr>
+          <p:spPr>
+            <a:xfrm rot="3683002" flipH="1">
+              <a:off x="1680082" y="2801327"/>
+              <a:ext cx="384004" cy="56911"/>
+            </a:xfrm>
+            <a:custGeom>
+              <a:avLst/>
+              <a:gdLst>
+                <a:gd name="csX0" fmla="*/ 0 w 525294"/>
+                <a:gd name="csY0" fmla="*/ 94034 h 188068"/>
+                <a:gd name="csX1" fmla="*/ 262647 w 525294"/>
+                <a:gd name="csY1" fmla="*/ 0 h 188068"/>
+                <a:gd name="csX2" fmla="*/ 525294 w 525294"/>
+                <a:gd name="csY2" fmla="*/ 94034 h 188068"/>
+                <a:gd name="csX3" fmla="*/ 262647 w 525294"/>
+                <a:gd name="csY3" fmla="*/ 188068 h 188068"/>
+                <a:gd name="csX4" fmla="*/ 0 w 525294"/>
+                <a:gd name="csY4" fmla="*/ 94034 h 188068"/>
+                <a:gd name="csX0" fmla="*/ 0 w 623481"/>
+                <a:gd name="csY0" fmla="*/ 94831 h 189220"/>
+                <a:gd name="csX1" fmla="*/ 262647 w 623481"/>
+                <a:gd name="csY1" fmla="*/ 797 h 189220"/>
+                <a:gd name="csX2" fmla="*/ 623481 w 623481"/>
+                <a:gd name="csY2" fmla="*/ 65276 h 189220"/>
+                <a:gd name="csX3" fmla="*/ 262647 w 623481"/>
+                <a:gd name="csY3" fmla="*/ 188865 h 189220"/>
+                <a:gd name="csX4" fmla="*/ 0 w 623481"/>
+                <a:gd name="csY4" fmla="*/ 94831 h 189220"/>
+              </a:gdLst>
+              <a:ahLst/>
+              <a:cxnLst>
+                <a:cxn ang="0">
+                  <a:pos x="csX0" y="csY0"/>
+                </a:cxn>
+                <a:cxn ang="0">
+                  <a:pos x="csX1" y="csY1"/>
+                </a:cxn>
+                <a:cxn ang="0">
+                  <a:pos x="csX2" y="csY2"/>
+                </a:cxn>
+                <a:cxn ang="0">
+                  <a:pos x="csX3" y="csY3"/>
+                </a:cxn>
+                <a:cxn ang="0">
+                  <a:pos x="csX4" y="csY4"/>
+                </a:cxn>
+              </a:cxnLst>
+              <a:rect l="l" t="t" r="r" b="b"/>
+              <a:pathLst>
+                <a:path w="623481" h="189220">
+                  <a:moveTo>
+                    <a:pt x="0" y="94831"/>
+                  </a:moveTo>
+                  <a:cubicBezTo>
+                    <a:pt x="0" y="42897"/>
+                    <a:pt x="158734" y="5723"/>
+                    <a:pt x="262647" y="797"/>
+                  </a:cubicBezTo>
+                  <a:cubicBezTo>
+                    <a:pt x="366560" y="-4129"/>
+                    <a:pt x="623481" y="13342"/>
+                    <a:pt x="623481" y="65276"/>
+                  </a:cubicBezTo>
+                  <a:cubicBezTo>
+                    <a:pt x="623481" y="117210"/>
+                    <a:pt x="366560" y="183939"/>
+                    <a:pt x="262647" y="188865"/>
+                  </a:cubicBezTo>
+                  <a:cubicBezTo>
+                    <a:pt x="158734" y="193791"/>
+                    <a:pt x="0" y="146765"/>
+                    <a:pt x="0" y="94831"/>
+                  </a:cubicBezTo>
+                  <a:close/>
+                </a:path>
+              </a:pathLst>
+            </a:custGeom>
+            <a:solidFill>
+              <a:schemeClr val="accent6">
+                <a:lumMod val="75000"/>
+              </a:schemeClr>
+            </a:solidFill>
+            <a:ln>
+              <a:solidFill>
+                <a:schemeClr val="accent6">
+                  <a:lumMod val="75000"/>
+                </a:schemeClr>
+              </a:solidFill>
+            </a:ln>
+          </p:spPr>
+          <p:style>
+            <a:lnRef idx="2">
+              <a:schemeClr val="accent6">
+                <a:shade val="15000"/>
+              </a:schemeClr>
+            </a:lnRef>
+            <a:fillRef idx="1">
+              <a:schemeClr val="accent6"/>
+            </a:fillRef>
+            <a:effectRef idx="0">
+              <a:schemeClr val="accent6"/>
+            </a:effectRef>
+            <a:fontRef idx="minor">
+              <a:schemeClr val="lt1"/>
+            </a:fontRef>
+          </p:style>
+          <p:txBody>
+            <a:bodyPr rtlCol="0" anchor="ctr"/>
+            <a:lstStyle/>
+            <a:p>
+              <a:pPr algn="ctr"/>
+              <a:endParaRPr lang="en-NZ"/>
+            </a:p>
+          </p:txBody>
+        </p:sp>
+        <p:sp>
+          <p:nvSpPr>
+            <p:cNvPr id="21" name="Oval 15">
+              <a:extLst>
+                <a:ext uri="{FF2B5EF4-FFF2-40B4-BE49-F238E27FC236}">
+                  <a16:creationId xmlns:a16="http://schemas.microsoft.com/office/drawing/2014/main" id="{9B593418-2A3F-D532-51E7-593043F7481B}"/>
+                </a:ext>
+              </a:extLst>
+            </p:cNvPr>
+            <p:cNvSpPr/>
+            <p:nvPr/>
+          </p:nvSpPr>
+          <p:spPr>
+            <a:xfrm rot="5158366" flipH="1">
+              <a:off x="1928466" y="2389480"/>
+              <a:ext cx="271936" cy="55089"/>
+            </a:xfrm>
+            <a:custGeom>
+              <a:avLst/>
+              <a:gdLst>
+                <a:gd name="csX0" fmla="*/ 0 w 525294"/>
+                <a:gd name="csY0" fmla="*/ 94034 h 188068"/>
+                <a:gd name="csX1" fmla="*/ 262647 w 525294"/>
+                <a:gd name="csY1" fmla="*/ 0 h 188068"/>
+                <a:gd name="csX2" fmla="*/ 525294 w 525294"/>
+                <a:gd name="csY2" fmla="*/ 94034 h 188068"/>
+                <a:gd name="csX3" fmla="*/ 262647 w 525294"/>
+                <a:gd name="csY3" fmla="*/ 188068 h 188068"/>
+                <a:gd name="csX4" fmla="*/ 0 w 525294"/>
+                <a:gd name="csY4" fmla="*/ 94034 h 188068"/>
+                <a:gd name="csX0" fmla="*/ 0 w 623481"/>
+                <a:gd name="csY0" fmla="*/ 94831 h 189220"/>
+                <a:gd name="csX1" fmla="*/ 262647 w 623481"/>
+                <a:gd name="csY1" fmla="*/ 797 h 189220"/>
+                <a:gd name="csX2" fmla="*/ 623481 w 623481"/>
+                <a:gd name="csY2" fmla="*/ 65276 h 189220"/>
+                <a:gd name="csX3" fmla="*/ 262647 w 623481"/>
+                <a:gd name="csY3" fmla="*/ 188865 h 189220"/>
+                <a:gd name="csX4" fmla="*/ 0 w 623481"/>
+                <a:gd name="csY4" fmla="*/ 94831 h 189220"/>
+              </a:gdLst>
+              <a:ahLst/>
+              <a:cxnLst>
+                <a:cxn ang="0">
+                  <a:pos x="csX0" y="csY0"/>
+                </a:cxn>
+                <a:cxn ang="0">
+                  <a:pos x="csX1" y="csY1"/>
+                </a:cxn>
+                <a:cxn ang="0">
+                  <a:pos x="csX2" y="csY2"/>
+                </a:cxn>
+                <a:cxn ang="0">
+                  <a:pos x="csX3" y="csY3"/>
+                </a:cxn>
+                <a:cxn ang="0">
+                  <a:pos x="csX4" y="csY4"/>
+                </a:cxn>
+              </a:cxnLst>
+              <a:rect l="l" t="t" r="r" b="b"/>
+              <a:pathLst>
+                <a:path w="623481" h="189220">
+                  <a:moveTo>
+                    <a:pt x="0" y="94831"/>
+                  </a:moveTo>
+                  <a:cubicBezTo>
+                    <a:pt x="0" y="42897"/>
+                    <a:pt x="158734" y="5723"/>
+                    <a:pt x="262647" y="797"/>
+                  </a:cubicBezTo>
+                  <a:cubicBezTo>
+                    <a:pt x="366560" y="-4129"/>
+                    <a:pt x="623481" y="13342"/>
+                    <a:pt x="623481" y="65276"/>
+                  </a:cubicBezTo>
+                  <a:cubicBezTo>
+                    <a:pt x="623481" y="117210"/>
+                    <a:pt x="366560" y="183939"/>
+                    <a:pt x="262647" y="188865"/>
+                  </a:cubicBezTo>
+                  <a:cubicBezTo>
+                    <a:pt x="158734" y="193791"/>
+                    <a:pt x="0" y="146765"/>
+                    <a:pt x="0" y="94831"/>
+                  </a:cubicBezTo>
+                  <a:close/>
+                </a:path>
+              </a:pathLst>
+            </a:custGeom>
+            <a:solidFill>
+              <a:schemeClr val="accent6">
+                <a:lumMod val="75000"/>
+              </a:schemeClr>
+            </a:solidFill>
+            <a:ln>
+              <a:solidFill>
+                <a:schemeClr val="accent6">
+                  <a:lumMod val="75000"/>
+                </a:schemeClr>
+              </a:solidFill>
+            </a:ln>
+          </p:spPr>
+          <p:style>
+            <a:lnRef idx="2">
+              <a:schemeClr val="accent6">
+                <a:shade val="15000"/>
+              </a:schemeClr>
+            </a:lnRef>
+            <a:fillRef idx="1">
+              <a:schemeClr val="accent6"/>
+            </a:fillRef>
+            <a:effectRef idx="0">
+              <a:schemeClr val="accent6"/>
+            </a:effectRef>
+            <a:fontRef idx="minor">
+              <a:schemeClr val="lt1"/>
+            </a:fontRef>
+          </p:style>
+          <p:txBody>
+            <a:bodyPr rtlCol="0" anchor="ctr"/>
+            <a:lstStyle/>
+            <a:p>
+              <a:pPr algn="ctr"/>
+              <a:endParaRPr lang="en-NZ"/>
+            </a:p>
+          </p:txBody>
+        </p:sp>
+        <p:sp>
+          <p:nvSpPr>
+            <p:cNvPr id="22" name="Oval 15">
+              <a:extLst>
+                <a:ext uri="{FF2B5EF4-FFF2-40B4-BE49-F238E27FC236}">
+                  <a16:creationId xmlns:a16="http://schemas.microsoft.com/office/drawing/2014/main" id="{741F6006-5DBA-CE7D-1291-390F5890E47A}"/>
+                </a:ext>
+              </a:extLst>
+            </p:cNvPr>
+            <p:cNvSpPr/>
+            <p:nvPr/>
+          </p:nvSpPr>
+          <p:spPr>
+            <a:xfrm rot="19286828">
+              <a:off x="1907716" y="3497653"/>
+              <a:ext cx="368562" cy="86250"/>
+            </a:xfrm>
+            <a:custGeom>
+              <a:avLst/>
+              <a:gdLst>
+                <a:gd name="csX0" fmla="*/ 0 w 525294"/>
+                <a:gd name="csY0" fmla="*/ 94034 h 188068"/>
+                <a:gd name="csX1" fmla="*/ 262647 w 525294"/>
+                <a:gd name="csY1" fmla="*/ 0 h 188068"/>
+                <a:gd name="csX2" fmla="*/ 525294 w 525294"/>
+                <a:gd name="csY2" fmla="*/ 94034 h 188068"/>
+                <a:gd name="csX3" fmla="*/ 262647 w 525294"/>
+                <a:gd name="csY3" fmla="*/ 188068 h 188068"/>
+                <a:gd name="csX4" fmla="*/ 0 w 525294"/>
+                <a:gd name="csY4" fmla="*/ 94034 h 188068"/>
+                <a:gd name="csX0" fmla="*/ 0 w 623481"/>
+                <a:gd name="csY0" fmla="*/ 94831 h 189220"/>
+                <a:gd name="csX1" fmla="*/ 262647 w 623481"/>
+                <a:gd name="csY1" fmla="*/ 797 h 189220"/>
+                <a:gd name="csX2" fmla="*/ 623481 w 623481"/>
+                <a:gd name="csY2" fmla="*/ 65276 h 189220"/>
+                <a:gd name="csX3" fmla="*/ 262647 w 623481"/>
+                <a:gd name="csY3" fmla="*/ 188865 h 189220"/>
+                <a:gd name="csX4" fmla="*/ 0 w 623481"/>
+                <a:gd name="csY4" fmla="*/ 94831 h 189220"/>
+              </a:gdLst>
+              <a:ahLst/>
+              <a:cxnLst>
+                <a:cxn ang="0">
+                  <a:pos x="csX0" y="csY0"/>
+                </a:cxn>
+                <a:cxn ang="0">
+                  <a:pos x="csX1" y="csY1"/>
+                </a:cxn>
+                <a:cxn ang="0">
+                  <a:pos x="csX2" y="csY2"/>
+                </a:cxn>
+                <a:cxn ang="0">
+                  <a:pos x="csX3" y="csY3"/>
+                </a:cxn>
+                <a:cxn ang="0">
+                  <a:pos x="csX4" y="csY4"/>
+                </a:cxn>
+              </a:cxnLst>
+              <a:rect l="l" t="t" r="r" b="b"/>
+              <a:pathLst>
+                <a:path w="623481" h="189220">
+                  <a:moveTo>
+                    <a:pt x="0" y="94831"/>
+                  </a:moveTo>
+                  <a:cubicBezTo>
+                    <a:pt x="0" y="42897"/>
+                    <a:pt x="158734" y="5723"/>
+                    <a:pt x="262647" y="797"/>
+                  </a:cubicBezTo>
+                  <a:cubicBezTo>
+                    <a:pt x="366560" y="-4129"/>
+                    <a:pt x="623481" y="13342"/>
+                    <a:pt x="623481" y="65276"/>
+                  </a:cubicBezTo>
+                  <a:cubicBezTo>
+                    <a:pt x="623481" y="117210"/>
+                    <a:pt x="366560" y="183939"/>
+                    <a:pt x="262647" y="188865"/>
+                  </a:cubicBezTo>
+                  <a:cubicBezTo>
+                    <a:pt x="158734" y="193791"/>
+                    <a:pt x="0" y="146765"/>
+                    <a:pt x="0" y="94831"/>
+                  </a:cubicBezTo>
+                  <a:close/>
+                </a:path>
+              </a:pathLst>
+            </a:custGeom>
+            <a:solidFill>
+              <a:schemeClr val="accent6">
+                <a:lumMod val="75000"/>
+              </a:schemeClr>
+            </a:solidFill>
+            <a:ln>
+              <a:solidFill>
+                <a:schemeClr val="accent6">
+                  <a:lumMod val="75000"/>
+                </a:schemeClr>
+              </a:solidFill>
+            </a:ln>
+          </p:spPr>
+          <p:style>
+            <a:lnRef idx="2">
+              <a:schemeClr val="accent6">
+                <a:shade val="15000"/>
+              </a:schemeClr>
+            </a:lnRef>
+            <a:fillRef idx="1">
+              <a:schemeClr val="accent6"/>
+            </a:fillRef>
+            <a:effectRef idx="0">
+              <a:schemeClr val="accent6"/>
+            </a:effectRef>
+            <a:fontRef idx="minor">
+              <a:schemeClr val="lt1"/>
+            </a:fontRef>
+          </p:style>
+          <p:txBody>
+            <a:bodyPr rtlCol="0" anchor="ctr"/>
+            <a:lstStyle/>
+            <a:p>
+              <a:pPr algn="ctr"/>
+              <a:endParaRPr lang="en-NZ"/>
+            </a:p>
+          </p:txBody>
+        </p:sp>
+        <p:sp>
+          <p:nvSpPr>
+            <p:cNvPr id="23" name="Oval 15">
+              <a:extLst>
+                <a:ext uri="{FF2B5EF4-FFF2-40B4-BE49-F238E27FC236}">
+                  <a16:creationId xmlns:a16="http://schemas.microsoft.com/office/drawing/2014/main" id="{056AAE6B-01D4-C4A2-D3B2-57A220F3A096}"/>
+                </a:ext>
+              </a:extLst>
+            </p:cNvPr>
+            <p:cNvSpPr/>
+            <p:nvPr/>
+          </p:nvSpPr>
+          <p:spPr>
+            <a:xfrm rot="19286828">
+              <a:off x="2004759" y="2607654"/>
+              <a:ext cx="291208" cy="92887"/>
+            </a:xfrm>
+            <a:custGeom>
+              <a:avLst/>
+              <a:gdLst>
+                <a:gd name="csX0" fmla="*/ 0 w 525294"/>
+                <a:gd name="csY0" fmla="*/ 94034 h 188068"/>
+                <a:gd name="csX1" fmla="*/ 262647 w 525294"/>
+                <a:gd name="csY1" fmla="*/ 0 h 188068"/>
+                <a:gd name="csX2" fmla="*/ 525294 w 525294"/>
+                <a:gd name="csY2" fmla="*/ 94034 h 188068"/>
+                <a:gd name="csX3" fmla="*/ 262647 w 525294"/>
+                <a:gd name="csY3" fmla="*/ 188068 h 188068"/>
+                <a:gd name="csX4" fmla="*/ 0 w 525294"/>
+                <a:gd name="csY4" fmla="*/ 94034 h 188068"/>
+                <a:gd name="csX0" fmla="*/ 0 w 623481"/>
+                <a:gd name="csY0" fmla="*/ 94831 h 189220"/>
+                <a:gd name="csX1" fmla="*/ 262647 w 623481"/>
+                <a:gd name="csY1" fmla="*/ 797 h 189220"/>
+                <a:gd name="csX2" fmla="*/ 623481 w 623481"/>
+                <a:gd name="csY2" fmla="*/ 65276 h 189220"/>
+                <a:gd name="csX3" fmla="*/ 262647 w 623481"/>
+                <a:gd name="csY3" fmla="*/ 188865 h 189220"/>
+                <a:gd name="csX4" fmla="*/ 0 w 623481"/>
+                <a:gd name="csY4" fmla="*/ 94831 h 189220"/>
+              </a:gdLst>
+              <a:ahLst/>
+              <a:cxnLst>
+                <a:cxn ang="0">
+                  <a:pos x="csX0" y="csY0"/>
+                </a:cxn>
+                <a:cxn ang="0">
+                  <a:pos x="csX1" y="csY1"/>
+                </a:cxn>
+                <a:cxn ang="0">
+                  <a:pos x="csX2" y="csY2"/>
+                </a:cxn>
+                <a:cxn ang="0">
+                  <a:pos x="csX3" y="csY3"/>
+                </a:cxn>
+                <a:cxn ang="0">
+                  <a:pos x="csX4" y="csY4"/>
+                </a:cxn>
+              </a:cxnLst>
+              <a:rect l="l" t="t" r="r" b="b"/>
+              <a:pathLst>
+                <a:path w="623481" h="189220">
+                  <a:moveTo>
+                    <a:pt x="0" y="94831"/>
+                  </a:moveTo>
+                  <a:cubicBezTo>
+                    <a:pt x="0" y="42897"/>
+                    <a:pt x="158734" y="5723"/>
+                    <a:pt x="262647" y="797"/>
+                  </a:cubicBezTo>
+                  <a:cubicBezTo>
+                    <a:pt x="366560" y="-4129"/>
+                    <a:pt x="623481" y="13342"/>
+                    <a:pt x="623481" y="65276"/>
+                  </a:cubicBezTo>
+                  <a:cubicBezTo>
+                    <a:pt x="623481" y="117210"/>
+                    <a:pt x="366560" y="183939"/>
+                    <a:pt x="262647" y="188865"/>
+                  </a:cubicBezTo>
+                  <a:cubicBezTo>
+                    <a:pt x="158734" y="193791"/>
+                    <a:pt x="0" y="146765"/>
+                    <a:pt x="0" y="94831"/>
+                  </a:cubicBezTo>
+                  <a:close/>
+                </a:path>
+              </a:pathLst>
+            </a:custGeom>
+            <a:solidFill>
+              <a:schemeClr val="accent6">
+                <a:lumMod val="75000"/>
+              </a:schemeClr>
+            </a:solidFill>
+            <a:ln>
+              <a:solidFill>
+                <a:schemeClr val="accent6">
+                  <a:lumMod val="75000"/>
+                </a:schemeClr>
+              </a:solidFill>
+            </a:ln>
+          </p:spPr>
+          <p:style>
+            <a:lnRef idx="2">
+              <a:schemeClr val="accent6">
+                <a:shade val="15000"/>
+              </a:schemeClr>
+            </a:lnRef>
+            <a:fillRef idx="1">
+              <a:schemeClr val="accent6"/>
+            </a:fillRef>
+            <a:effectRef idx="0">
+              <a:schemeClr val="accent6"/>
+            </a:effectRef>
+            <a:fontRef idx="minor">
+              <a:schemeClr val="lt1"/>
+            </a:fontRef>
+          </p:style>
+          <p:txBody>
+            <a:bodyPr rtlCol="0" anchor="ctr"/>
+            <a:lstStyle/>
+            <a:p>
+              <a:pPr algn="ctr"/>
+              <a:endParaRPr lang="en-NZ"/>
+            </a:p>
+          </p:txBody>
+        </p:sp>
+        <p:sp>
+          <p:nvSpPr>
+            <p:cNvPr id="24" name="Oval 15">
+              <a:extLst>
+                <a:ext uri="{FF2B5EF4-FFF2-40B4-BE49-F238E27FC236}">
+                  <a16:creationId xmlns:a16="http://schemas.microsoft.com/office/drawing/2014/main" id="{E105770A-9056-2A88-1BD2-8AA570CEB2C4}"/>
+                </a:ext>
+              </a:extLst>
+            </p:cNvPr>
+            <p:cNvSpPr/>
+            <p:nvPr/>
+          </p:nvSpPr>
+          <p:spPr>
+            <a:xfrm rot="19286828">
+              <a:off x="1922696" y="3037895"/>
+              <a:ext cx="291208" cy="92887"/>
+            </a:xfrm>
+            <a:custGeom>
+              <a:avLst/>
+              <a:gdLst>
+                <a:gd name="csX0" fmla="*/ 0 w 525294"/>
+                <a:gd name="csY0" fmla="*/ 94034 h 188068"/>
+                <a:gd name="csX1" fmla="*/ 262647 w 525294"/>
+                <a:gd name="csY1" fmla="*/ 0 h 188068"/>
+                <a:gd name="csX2" fmla="*/ 525294 w 525294"/>
+                <a:gd name="csY2" fmla="*/ 94034 h 188068"/>
+                <a:gd name="csX3" fmla="*/ 262647 w 525294"/>
+                <a:gd name="csY3" fmla="*/ 188068 h 188068"/>
+                <a:gd name="csX4" fmla="*/ 0 w 525294"/>
+                <a:gd name="csY4" fmla="*/ 94034 h 188068"/>
+                <a:gd name="csX0" fmla="*/ 0 w 623481"/>
+                <a:gd name="csY0" fmla="*/ 94831 h 189220"/>
+                <a:gd name="csX1" fmla="*/ 262647 w 623481"/>
+                <a:gd name="csY1" fmla="*/ 797 h 189220"/>
+                <a:gd name="csX2" fmla="*/ 623481 w 623481"/>
+                <a:gd name="csY2" fmla="*/ 65276 h 189220"/>
+                <a:gd name="csX3" fmla="*/ 262647 w 623481"/>
+                <a:gd name="csY3" fmla="*/ 188865 h 189220"/>
+                <a:gd name="csX4" fmla="*/ 0 w 623481"/>
+                <a:gd name="csY4" fmla="*/ 94831 h 189220"/>
+              </a:gdLst>
+              <a:ahLst/>
+              <a:cxnLst>
+                <a:cxn ang="0">
+                  <a:pos x="csX0" y="csY0"/>
+                </a:cxn>
+                <a:cxn ang="0">
+                  <a:pos x="csX1" y="csY1"/>
+                </a:cxn>
+                <a:cxn ang="0">
+                  <a:pos x="csX2" y="csY2"/>
+                </a:cxn>
+                <a:cxn ang="0">
+                  <a:pos x="csX3" y="csY3"/>
+                </a:cxn>
+                <a:cxn ang="0">
+                  <a:pos x="csX4" y="csY4"/>
+                </a:cxn>
+              </a:cxnLst>
+              <a:rect l="l" t="t" r="r" b="b"/>
+              <a:pathLst>
+                <a:path w="623481" h="189220">
+                  <a:moveTo>
+                    <a:pt x="0" y="94831"/>
+                  </a:moveTo>
+                  <a:cubicBezTo>
+                    <a:pt x="0" y="42897"/>
+                    <a:pt x="158734" y="5723"/>
+                    <a:pt x="262647" y="797"/>
+                  </a:cubicBezTo>
+                  <a:cubicBezTo>
+                    <a:pt x="366560" y="-4129"/>
+                    <a:pt x="623481" y="13342"/>
+                    <a:pt x="623481" y="65276"/>
+                  </a:cubicBezTo>
+                  <a:cubicBezTo>
+                    <a:pt x="623481" y="117210"/>
+                    <a:pt x="366560" y="183939"/>
+                    <a:pt x="262647" y="188865"/>
+                  </a:cubicBezTo>
+                  <a:cubicBezTo>
+                    <a:pt x="158734" y="193791"/>
+                    <a:pt x="0" y="146765"/>
+                    <a:pt x="0" y="94831"/>
+                  </a:cubicBezTo>
+                  <a:close/>
+                </a:path>
+              </a:pathLst>
+            </a:custGeom>
+            <a:solidFill>
+              <a:schemeClr val="accent6">
+                <a:lumMod val="75000"/>
+              </a:schemeClr>
+            </a:solidFill>
+            <a:ln>
+              <a:solidFill>
+                <a:schemeClr val="accent6">
+                  <a:lumMod val="75000"/>
+                </a:schemeClr>
+              </a:solidFill>
+            </a:ln>
+          </p:spPr>
+          <p:style>
+            <a:lnRef idx="2">
+              <a:schemeClr val="accent6">
+                <a:shade val="15000"/>
+              </a:schemeClr>
+            </a:lnRef>
+            <a:fillRef idx="1">
+              <a:schemeClr val="accent6"/>
+            </a:fillRef>
+            <a:effectRef idx="0">
+              <a:schemeClr val="accent6"/>
+            </a:effectRef>
+            <a:fontRef idx="minor">
+              <a:schemeClr val="lt1"/>
+            </a:fontRef>
+          </p:style>
+          <p:txBody>
+            <a:bodyPr rtlCol="0" anchor="ctr"/>
+            <a:lstStyle/>
+            <a:p>
+              <a:pPr algn="ctr"/>
+              <a:endParaRPr lang="en-NZ"/>
+            </a:p>
+          </p:txBody>
+        </p:sp>
+        <p:sp>
+          <p:nvSpPr>
+            <p:cNvPr id="25" name="Oval 15">
+              <a:extLst>
+                <a:ext uri="{FF2B5EF4-FFF2-40B4-BE49-F238E27FC236}">
+                  <a16:creationId xmlns:a16="http://schemas.microsoft.com/office/drawing/2014/main" id="{154C2E07-DD2C-A828-0D0C-3449A159D70D}"/>
+                </a:ext>
+              </a:extLst>
+            </p:cNvPr>
+            <p:cNvSpPr/>
+            <p:nvPr/>
+          </p:nvSpPr>
+          <p:spPr>
+            <a:xfrm rot="3067841" flipH="1">
+              <a:off x="1649247" y="3704167"/>
+              <a:ext cx="428121" cy="76467"/>
+            </a:xfrm>
+            <a:custGeom>
+              <a:avLst/>
+              <a:gdLst>
+                <a:gd name="csX0" fmla="*/ 0 w 525294"/>
+                <a:gd name="csY0" fmla="*/ 94034 h 188068"/>
+                <a:gd name="csX1" fmla="*/ 262647 w 525294"/>
+                <a:gd name="csY1" fmla="*/ 0 h 188068"/>
+                <a:gd name="csX2" fmla="*/ 525294 w 525294"/>
+                <a:gd name="csY2" fmla="*/ 94034 h 188068"/>
+                <a:gd name="csX3" fmla="*/ 262647 w 525294"/>
+                <a:gd name="csY3" fmla="*/ 188068 h 188068"/>
+                <a:gd name="csX4" fmla="*/ 0 w 525294"/>
+                <a:gd name="csY4" fmla="*/ 94034 h 188068"/>
+                <a:gd name="csX0" fmla="*/ 0 w 623481"/>
+                <a:gd name="csY0" fmla="*/ 94831 h 189220"/>
+                <a:gd name="csX1" fmla="*/ 262647 w 623481"/>
+                <a:gd name="csY1" fmla="*/ 797 h 189220"/>
+                <a:gd name="csX2" fmla="*/ 623481 w 623481"/>
+                <a:gd name="csY2" fmla="*/ 65276 h 189220"/>
+                <a:gd name="csX3" fmla="*/ 262647 w 623481"/>
+                <a:gd name="csY3" fmla="*/ 188865 h 189220"/>
+                <a:gd name="csX4" fmla="*/ 0 w 623481"/>
+                <a:gd name="csY4" fmla="*/ 94831 h 189220"/>
+              </a:gdLst>
+              <a:ahLst/>
+              <a:cxnLst>
+                <a:cxn ang="0">
+                  <a:pos x="csX0" y="csY0"/>
+                </a:cxn>
+                <a:cxn ang="0">
+                  <a:pos x="csX1" y="csY1"/>
+                </a:cxn>
+                <a:cxn ang="0">
+                  <a:pos x="csX2" y="csY2"/>
+                </a:cxn>
+                <a:cxn ang="0">
+                  <a:pos x="csX3" y="csY3"/>
+                </a:cxn>
+                <a:cxn ang="0">
+                  <a:pos x="csX4" y="csY4"/>
+                </a:cxn>
+              </a:cxnLst>
+              <a:rect l="l" t="t" r="r" b="b"/>
+              <a:pathLst>
+                <a:path w="623481" h="189220">
+                  <a:moveTo>
+                    <a:pt x="0" y="94831"/>
+                  </a:moveTo>
+                  <a:cubicBezTo>
+                    <a:pt x="0" y="42897"/>
+                    <a:pt x="158734" y="5723"/>
+                    <a:pt x="262647" y="797"/>
+                  </a:cubicBezTo>
+                  <a:cubicBezTo>
+                    <a:pt x="366560" y="-4129"/>
+                    <a:pt x="623481" y="13342"/>
+                    <a:pt x="623481" y="65276"/>
+                  </a:cubicBezTo>
+                  <a:cubicBezTo>
+                    <a:pt x="623481" y="117210"/>
+                    <a:pt x="366560" y="183939"/>
+                    <a:pt x="262647" y="188865"/>
+                  </a:cubicBezTo>
+                  <a:cubicBezTo>
+                    <a:pt x="158734" y="193791"/>
+                    <a:pt x="0" y="146765"/>
+                    <a:pt x="0" y="94831"/>
+                  </a:cubicBezTo>
+                  <a:close/>
+                </a:path>
+              </a:pathLst>
+            </a:custGeom>
+            <a:solidFill>
+              <a:schemeClr val="accent6">
+                <a:lumMod val="75000"/>
+              </a:schemeClr>
+            </a:solidFill>
+            <a:ln>
+              <a:solidFill>
+                <a:schemeClr val="accent6">
+                  <a:lumMod val="75000"/>
+                </a:schemeClr>
+              </a:solidFill>
+            </a:ln>
+          </p:spPr>
+          <p:style>
+            <a:lnRef idx="2">
+              <a:schemeClr val="accent6">
+                <a:shade val="15000"/>
+              </a:schemeClr>
+            </a:lnRef>
+            <a:fillRef idx="1">
+              <a:schemeClr val="accent6"/>
+            </a:fillRef>
+            <a:effectRef idx="0">
+              <a:schemeClr val="accent6"/>
+            </a:effectRef>
+            <a:fontRef idx="minor">
+              <a:schemeClr val="lt1"/>
+            </a:fontRef>
+          </p:style>
+          <p:txBody>
+            <a:bodyPr rtlCol="0" anchor="ctr"/>
+            <a:lstStyle/>
+            <a:p>
+              <a:pPr algn="ctr"/>
+              <a:endParaRPr lang="en-NZ"/>
+            </a:p>
+          </p:txBody>
+        </p:sp>
+      </p:grpSp>
+      <p:grpSp>
+        <p:nvGrpSpPr>
+          <p:cNvPr id="5" name="Group 4">
+            <a:extLst>
+              <a:ext uri="{FF2B5EF4-FFF2-40B4-BE49-F238E27FC236}">
+                <a16:creationId xmlns:a16="http://schemas.microsoft.com/office/drawing/2014/main" id="{C200921B-1E7D-3799-E25E-E5C8780D9491}"/>
+              </a:ext>
+            </a:extLst>
+          </p:cNvPr>
+          <p:cNvGrpSpPr/>
+          <p:nvPr/>
+        </p:nvGrpSpPr>
+        <p:grpSpPr>
+          <a:xfrm flipH="1">
+            <a:off x="4608218" y="1769337"/>
+            <a:ext cx="591053" cy="2470190"/>
+            <a:chOff x="1763631" y="2008038"/>
+            <a:chExt cx="591053" cy="2470190"/>
+          </a:xfrm>
+        </p:grpSpPr>
+        <p:sp>
+          <p:nvSpPr>
+            <p:cNvPr id="6" name="Freeform: Shape 5">
+              <a:extLst>
+                <a:ext uri="{FF2B5EF4-FFF2-40B4-BE49-F238E27FC236}">
+                  <a16:creationId xmlns:a16="http://schemas.microsoft.com/office/drawing/2014/main" id="{FC6A4458-CD6F-0726-DC83-5AA635EFDDBA}"/>
+                </a:ext>
+              </a:extLst>
+            </p:cNvPr>
+            <p:cNvSpPr/>
+            <p:nvPr/>
+          </p:nvSpPr>
+          <p:spPr>
+            <a:xfrm>
+              <a:off x="1923562" y="2302743"/>
+              <a:ext cx="257713" cy="2175485"/>
+            </a:xfrm>
+            <a:custGeom>
+              <a:avLst/>
+              <a:gdLst>
+                <a:gd name="csX0" fmla="*/ 571913 w 708101"/>
+                <a:gd name="csY0" fmla="*/ 2341123 h 2341123"/>
+                <a:gd name="csX1" fmla="*/ 1224 w 708101"/>
+                <a:gd name="csY1" fmla="*/ 1063557 h 2341123"/>
+                <a:gd name="csX2" fmla="*/ 708101 w 708101"/>
+                <a:gd name="csY2" fmla="*/ 0 h 2341123"/>
+                <a:gd name="csX3" fmla="*/ 708101 w 708101"/>
+                <a:gd name="csY3" fmla="*/ 0 h 2341123"/>
+              </a:gdLst>
+              <a:ahLst/>
+              <a:cxnLst>
+                <a:cxn ang="0">
+                  <a:pos x="csX0" y="csY0"/>
+                </a:cxn>
+                <a:cxn ang="0">
+                  <a:pos x="csX1" y="csY1"/>
+                </a:cxn>
+                <a:cxn ang="0">
+                  <a:pos x="csX2" y="csY2"/>
+                </a:cxn>
+                <a:cxn ang="0">
+                  <a:pos x="csX3" y="csY3"/>
+                </a:cxn>
+              </a:cxnLst>
+              <a:rect l="l" t="t" r="r" b="b"/>
+              <a:pathLst>
+                <a:path w="708101" h="2341123">
+                  <a:moveTo>
+                    <a:pt x="571913" y="2341123"/>
+                  </a:moveTo>
+                  <a:cubicBezTo>
+                    <a:pt x="275219" y="1897433"/>
+                    <a:pt x="-21474" y="1453744"/>
+                    <a:pt x="1224" y="1063557"/>
+                  </a:cubicBezTo>
+                  <a:cubicBezTo>
+                    <a:pt x="23922" y="673370"/>
+                    <a:pt x="708101" y="0"/>
+                    <a:pt x="708101" y="0"/>
+                  </a:cubicBezTo>
+                  <a:lnTo>
+                    <a:pt x="708101" y="0"/>
+                  </a:lnTo>
+                </a:path>
+              </a:pathLst>
+            </a:custGeom>
+            <a:ln w="38100">
+              <a:solidFill>
+                <a:schemeClr val="accent6">
+                  <a:lumMod val="50000"/>
+                </a:schemeClr>
+              </a:solidFill>
+            </a:ln>
+          </p:spPr>
+          <p:style>
+            <a:lnRef idx="1">
+              <a:schemeClr val="accent6"/>
+            </a:lnRef>
+            <a:fillRef idx="0">
+              <a:schemeClr val="accent6"/>
+            </a:fillRef>
+            <a:effectRef idx="0">
+              <a:schemeClr val="accent6"/>
+            </a:effectRef>
+            <a:fontRef idx="minor">
+              <a:schemeClr val="tx1"/>
+            </a:fontRef>
+          </p:style>
+          <p:txBody>
+            <a:bodyPr rtlCol="0" anchor="ctr"/>
+            <a:lstStyle/>
+            <a:p>
+              <a:pPr algn="ctr"/>
+              <a:endParaRPr lang="en-NZ"/>
+            </a:p>
+          </p:txBody>
+        </p:sp>
+        <p:sp>
+          <p:nvSpPr>
+            <p:cNvPr id="7" name="Oval 15">
+              <a:extLst>
+                <a:ext uri="{FF2B5EF4-FFF2-40B4-BE49-F238E27FC236}">
+                  <a16:creationId xmlns:a16="http://schemas.microsoft.com/office/drawing/2014/main" id="{560E5E27-0BF2-9C0F-4CB8-5B4A8C728CC0}"/>
+                </a:ext>
+              </a:extLst>
+            </p:cNvPr>
+            <p:cNvSpPr/>
+            <p:nvPr/>
+          </p:nvSpPr>
+          <p:spPr>
+            <a:xfrm rot="19286828">
+              <a:off x="1996100" y="3897440"/>
+              <a:ext cx="358584" cy="83907"/>
+            </a:xfrm>
+            <a:custGeom>
+              <a:avLst/>
+              <a:gdLst>
+                <a:gd name="csX0" fmla="*/ 0 w 525294"/>
+                <a:gd name="csY0" fmla="*/ 94034 h 188068"/>
+                <a:gd name="csX1" fmla="*/ 262647 w 525294"/>
+                <a:gd name="csY1" fmla="*/ 0 h 188068"/>
+                <a:gd name="csX2" fmla="*/ 525294 w 525294"/>
+                <a:gd name="csY2" fmla="*/ 94034 h 188068"/>
+                <a:gd name="csX3" fmla="*/ 262647 w 525294"/>
+                <a:gd name="csY3" fmla="*/ 188068 h 188068"/>
+                <a:gd name="csX4" fmla="*/ 0 w 525294"/>
+                <a:gd name="csY4" fmla="*/ 94034 h 188068"/>
+                <a:gd name="csX0" fmla="*/ 0 w 623481"/>
+                <a:gd name="csY0" fmla="*/ 94831 h 189220"/>
+                <a:gd name="csX1" fmla="*/ 262647 w 623481"/>
+                <a:gd name="csY1" fmla="*/ 797 h 189220"/>
+                <a:gd name="csX2" fmla="*/ 623481 w 623481"/>
+                <a:gd name="csY2" fmla="*/ 65276 h 189220"/>
+                <a:gd name="csX3" fmla="*/ 262647 w 623481"/>
+                <a:gd name="csY3" fmla="*/ 188865 h 189220"/>
+                <a:gd name="csX4" fmla="*/ 0 w 623481"/>
+                <a:gd name="csY4" fmla="*/ 94831 h 189220"/>
+              </a:gdLst>
+              <a:ahLst/>
+              <a:cxnLst>
+                <a:cxn ang="0">
+                  <a:pos x="csX0" y="csY0"/>
+                </a:cxn>
+                <a:cxn ang="0">
+                  <a:pos x="csX1" y="csY1"/>
+                </a:cxn>
+                <a:cxn ang="0">
+                  <a:pos x="csX2" y="csY2"/>
+                </a:cxn>
+                <a:cxn ang="0">
+                  <a:pos x="csX3" y="csY3"/>
+                </a:cxn>
+                <a:cxn ang="0">
+                  <a:pos x="csX4" y="csY4"/>
+                </a:cxn>
+              </a:cxnLst>
+              <a:rect l="l" t="t" r="r" b="b"/>
+              <a:pathLst>
+                <a:path w="623481" h="189220">
+                  <a:moveTo>
+                    <a:pt x="0" y="94831"/>
+                  </a:moveTo>
+                  <a:cubicBezTo>
+                    <a:pt x="0" y="42897"/>
+                    <a:pt x="158734" y="5723"/>
+                    <a:pt x="262647" y="797"/>
+                  </a:cubicBezTo>
+                  <a:cubicBezTo>
+                    <a:pt x="366560" y="-4129"/>
+                    <a:pt x="623481" y="13342"/>
+                    <a:pt x="623481" y="65276"/>
+                  </a:cubicBezTo>
+                  <a:cubicBezTo>
+                    <a:pt x="623481" y="117210"/>
+                    <a:pt x="366560" y="183939"/>
+                    <a:pt x="262647" y="188865"/>
+                  </a:cubicBezTo>
+                  <a:cubicBezTo>
+                    <a:pt x="158734" y="193791"/>
+                    <a:pt x="0" y="146765"/>
+                    <a:pt x="0" y="94831"/>
+                  </a:cubicBezTo>
+                  <a:close/>
+                </a:path>
+              </a:pathLst>
+            </a:custGeom>
+            <a:solidFill>
+              <a:schemeClr val="accent6">
+                <a:lumMod val="75000"/>
+              </a:schemeClr>
+            </a:solidFill>
+            <a:ln>
+              <a:solidFill>
+                <a:schemeClr val="accent6">
+                  <a:lumMod val="75000"/>
+                </a:schemeClr>
+              </a:solidFill>
+            </a:ln>
+          </p:spPr>
+          <p:style>
+            <a:lnRef idx="2">
+              <a:schemeClr val="accent6">
+                <a:shade val="15000"/>
+              </a:schemeClr>
+            </a:lnRef>
+            <a:fillRef idx="1">
+              <a:schemeClr val="accent6"/>
+            </a:fillRef>
+            <a:effectRef idx="0">
+              <a:schemeClr val="accent6"/>
+            </a:effectRef>
+            <a:fontRef idx="minor">
+              <a:schemeClr val="lt1"/>
+            </a:fontRef>
+          </p:style>
+          <p:txBody>
+            <a:bodyPr rtlCol="0" anchor="ctr"/>
+            <a:lstStyle/>
+            <a:p>
+              <a:pPr algn="ctr"/>
+              <a:endParaRPr lang="en-NZ"/>
+            </a:p>
+          </p:txBody>
+        </p:sp>
+        <p:sp>
+          <p:nvSpPr>
+            <p:cNvPr id="8" name="Oval 15">
+              <a:extLst>
+                <a:ext uri="{FF2B5EF4-FFF2-40B4-BE49-F238E27FC236}">
+                  <a16:creationId xmlns:a16="http://schemas.microsoft.com/office/drawing/2014/main" id="{416E10B5-B76C-8E81-93D3-2329A00703E4}"/>
+                </a:ext>
+              </a:extLst>
+            </p:cNvPr>
+            <p:cNvSpPr/>
+            <p:nvPr/>
+          </p:nvSpPr>
+          <p:spPr>
+            <a:xfrm rot="18624200">
+              <a:off x="2118585" y="2148778"/>
+              <a:ext cx="327199" cy="45719"/>
+            </a:xfrm>
+            <a:custGeom>
+              <a:avLst/>
+              <a:gdLst>
+                <a:gd name="csX0" fmla="*/ 0 w 525294"/>
+                <a:gd name="csY0" fmla="*/ 94034 h 188068"/>
+                <a:gd name="csX1" fmla="*/ 262647 w 525294"/>
+                <a:gd name="csY1" fmla="*/ 0 h 188068"/>
+                <a:gd name="csX2" fmla="*/ 525294 w 525294"/>
+                <a:gd name="csY2" fmla="*/ 94034 h 188068"/>
+                <a:gd name="csX3" fmla="*/ 262647 w 525294"/>
+                <a:gd name="csY3" fmla="*/ 188068 h 188068"/>
+                <a:gd name="csX4" fmla="*/ 0 w 525294"/>
+                <a:gd name="csY4" fmla="*/ 94034 h 188068"/>
+                <a:gd name="csX0" fmla="*/ 0 w 623481"/>
+                <a:gd name="csY0" fmla="*/ 94831 h 189220"/>
+                <a:gd name="csX1" fmla="*/ 262647 w 623481"/>
+                <a:gd name="csY1" fmla="*/ 797 h 189220"/>
+                <a:gd name="csX2" fmla="*/ 623481 w 623481"/>
+                <a:gd name="csY2" fmla="*/ 65276 h 189220"/>
+                <a:gd name="csX3" fmla="*/ 262647 w 623481"/>
+                <a:gd name="csY3" fmla="*/ 188865 h 189220"/>
+                <a:gd name="csX4" fmla="*/ 0 w 623481"/>
+                <a:gd name="csY4" fmla="*/ 94831 h 189220"/>
+              </a:gdLst>
+              <a:ahLst/>
+              <a:cxnLst>
+                <a:cxn ang="0">
+                  <a:pos x="csX0" y="csY0"/>
+                </a:cxn>
+                <a:cxn ang="0">
+                  <a:pos x="csX1" y="csY1"/>
+                </a:cxn>
+                <a:cxn ang="0">
+                  <a:pos x="csX2" y="csY2"/>
+                </a:cxn>
+                <a:cxn ang="0">
+                  <a:pos x="csX3" y="csY3"/>
+                </a:cxn>
+                <a:cxn ang="0">
+                  <a:pos x="csX4" y="csY4"/>
+                </a:cxn>
+              </a:cxnLst>
+              <a:rect l="l" t="t" r="r" b="b"/>
+              <a:pathLst>
+                <a:path w="623481" h="189220">
+                  <a:moveTo>
+                    <a:pt x="0" y="94831"/>
+                  </a:moveTo>
+                  <a:cubicBezTo>
+                    <a:pt x="0" y="42897"/>
+                    <a:pt x="158734" y="5723"/>
+                    <a:pt x="262647" y="797"/>
+                  </a:cubicBezTo>
+                  <a:cubicBezTo>
+                    <a:pt x="366560" y="-4129"/>
+                    <a:pt x="623481" y="13342"/>
+                    <a:pt x="623481" y="65276"/>
+                  </a:cubicBezTo>
+                  <a:cubicBezTo>
+                    <a:pt x="623481" y="117210"/>
+                    <a:pt x="366560" y="183939"/>
+                    <a:pt x="262647" y="188865"/>
+                  </a:cubicBezTo>
+                  <a:cubicBezTo>
+                    <a:pt x="158734" y="193791"/>
+                    <a:pt x="0" y="146765"/>
+                    <a:pt x="0" y="94831"/>
+                  </a:cubicBezTo>
+                  <a:close/>
+                </a:path>
+              </a:pathLst>
+            </a:custGeom>
+            <a:solidFill>
+              <a:schemeClr val="accent6">
+                <a:lumMod val="75000"/>
+              </a:schemeClr>
+            </a:solidFill>
+            <a:ln>
+              <a:solidFill>
+                <a:schemeClr val="accent6">
+                  <a:lumMod val="75000"/>
+                </a:schemeClr>
+              </a:solidFill>
+            </a:ln>
+          </p:spPr>
+          <p:style>
+            <a:lnRef idx="2">
+              <a:schemeClr val="accent6">
+                <a:shade val="15000"/>
+              </a:schemeClr>
+            </a:lnRef>
+            <a:fillRef idx="1">
+              <a:schemeClr val="accent6"/>
+            </a:fillRef>
+            <a:effectRef idx="0">
+              <a:schemeClr val="accent6"/>
+            </a:effectRef>
+            <a:fontRef idx="minor">
+              <a:schemeClr val="lt1"/>
+            </a:fontRef>
+          </p:style>
+          <p:txBody>
+            <a:bodyPr rtlCol="0" anchor="ctr"/>
+            <a:lstStyle/>
+            <a:p>
+              <a:pPr algn="ctr"/>
+              <a:endParaRPr lang="en-NZ"/>
+            </a:p>
+          </p:txBody>
+        </p:sp>
+        <p:sp>
+          <p:nvSpPr>
+            <p:cNvPr id="9" name="Oval 15">
+              <a:extLst>
+                <a:ext uri="{FF2B5EF4-FFF2-40B4-BE49-F238E27FC236}">
+                  <a16:creationId xmlns:a16="http://schemas.microsoft.com/office/drawing/2014/main" id="{D462A577-85BF-92C7-1F91-7BAEBD2A8C4F}"/>
+                </a:ext>
+              </a:extLst>
+            </p:cNvPr>
+            <p:cNvSpPr/>
+            <p:nvPr/>
+          </p:nvSpPr>
+          <p:spPr>
+            <a:xfrm rot="3067841" flipH="1">
+              <a:off x="1587804" y="3263939"/>
+              <a:ext cx="428121" cy="76467"/>
+            </a:xfrm>
+            <a:custGeom>
+              <a:avLst/>
+              <a:gdLst>
+                <a:gd name="csX0" fmla="*/ 0 w 525294"/>
+                <a:gd name="csY0" fmla="*/ 94034 h 188068"/>
+                <a:gd name="csX1" fmla="*/ 262647 w 525294"/>
+                <a:gd name="csY1" fmla="*/ 0 h 188068"/>
+                <a:gd name="csX2" fmla="*/ 525294 w 525294"/>
+                <a:gd name="csY2" fmla="*/ 94034 h 188068"/>
+                <a:gd name="csX3" fmla="*/ 262647 w 525294"/>
+                <a:gd name="csY3" fmla="*/ 188068 h 188068"/>
+                <a:gd name="csX4" fmla="*/ 0 w 525294"/>
+                <a:gd name="csY4" fmla="*/ 94034 h 188068"/>
+                <a:gd name="csX0" fmla="*/ 0 w 623481"/>
+                <a:gd name="csY0" fmla="*/ 94831 h 189220"/>
+                <a:gd name="csX1" fmla="*/ 262647 w 623481"/>
+                <a:gd name="csY1" fmla="*/ 797 h 189220"/>
+                <a:gd name="csX2" fmla="*/ 623481 w 623481"/>
+                <a:gd name="csY2" fmla="*/ 65276 h 189220"/>
+                <a:gd name="csX3" fmla="*/ 262647 w 623481"/>
+                <a:gd name="csY3" fmla="*/ 188865 h 189220"/>
+                <a:gd name="csX4" fmla="*/ 0 w 623481"/>
+                <a:gd name="csY4" fmla="*/ 94831 h 189220"/>
+              </a:gdLst>
+              <a:ahLst/>
+              <a:cxnLst>
+                <a:cxn ang="0">
+                  <a:pos x="csX0" y="csY0"/>
+                </a:cxn>
+                <a:cxn ang="0">
+                  <a:pos x="csX1" y="csY1"/>
+                </a:cxn>
+                <a:cxn ang="0">
+                  <a:pos x="csX2" y="csY2"/>
+                </a:cxn>
+                <a:cxn ang="0">
+                  <a:pos x="csX3" y="csY3"/>
+                </a:cxn>
+                <a:cxn ang="0">
+                  <a:pos x="csX4" y="csY4"/>
+                </a:cxn>
+              </a:cxnLst>
+              <a:rect l="l" t="t" r="r" b="b"/>
+              <a:pathLst>
+                <a:path w="623481" h="189220">
+                  <a:moveTo>
+                    <a:pt x="0" y="94831"/>
+                  </a:moveTo>
+                  <a:cubicBezTo>
+                    <a:pt x="0" y="42897"/>
+                    <a:pt x="158734" y="5723"/>
+                    <a:pt x="262647" y="797"/>
+                  </a:cubicBezTo>
+                  <a:cubicBezTo>
+                    <a:pt x="366560" y="-4129"/>
+                    <a:pt x="623481" y="13342"/>
+                    <a:pt x="623481" y="65276"/>
+                  </a:cubicBezTo>
+                  <a:cubicBezTo>
+                    <a:pt x="623481" y="117210"/>
+                    <a:pt x="366560" y="183939"/>
+                    <a:pt x="262647" y="188865"/>
+                  </a:cubicBezTo>
+                  <a:cubicBezTo>
+                    <a:pt x="158734" y="193791"/>
+                    <a:pt x="0" y="146765"/>
+                    <a:pt x="0" y="94831"/>
+                  </a:cubicBezTo>
+                  <a:close/>
+                </a:path>
+              </a:pathLst>
+            </a:custGeom>
+            <a:solidFill>
+              <a:schemeClr val="accent6">
+                <a:lumMod val="75000"/>
+              </a:schemeClr>
+            </a:solidFill>
+            <a:ln>
+              <a:solidFill>
+                <a:schemeClr val="accent6">
+                  <a:lumMod val="75000"/>
+                </a:schemeClr>
+              </a:solidFill>
+            </a:ln>
+          </p:spPr>
+          <p:style>
+            <a:lnRef idx="2">
+              <a:schemeClr val="accent6">
+                <a:shade val="15000"/>
+              </a:schemeClr>
+            </a:lnRef>
+            <a:fillRef idx="1">
+              <a:schemeClr val="accent6"/>
+            </a:fillRef>
+            <a:effectRef idx="0">
+              <a:schemeClr val="accent6"/>
+            </a:effectRef>
+            <a:fontRef idx="minor">
+              <a:schemeClr val="lt1"/>
+            </a:fontRef>
+          </p:style>
+          <p:txBody>
+            <a:bodyPr rtlCol="0" anchor="ctr"/>
+            <a:lstStyle/>
+            <a:p>
+              <a:pPr algn="ctr"/>
+              <a:endParaRPr lang="en-NZ"/>
+            </a:p>
+          </p:txBody>
+        </p:sp>
+        <p:sp>
+          <p:nvSpPr>
+            <p:cNvPr id="10" name="Oval 15">
+              <a:extLst>
+                <a:ext uri="{FF2B5EF4-FFF2-40B4-BE49-F238E27FC236}">
+                  <a16:creationId xmlns:a16="http://schemas.microsoft.com/office/drawing/2014/main" id="{02BFBBF8-8FE2-87A9-F89E-CFF83199DCE0}"/>
+                </a:ext>
+              </a:extLst>
+            </p:cNvPr>
+            <p:cNvSpPr/>
+            <p:nvPr/>
+          </p:nvSpPr>
+          <p:spPr>
+            <a:xfrm rot="3683002" flipH="1">
+              <a:off x="1680082" y="2801327"/>
+              <a:ext cx="384004" cy="56911"/>
+            </a:xfrm>
+            <a:custGeom>
+              <a:avLst/>
+              <a:gdLst>
+                <a:gd name="csX0" fmla="*/ 0 w 525294"/>
+                <a:gd name="csY0" fmla="*/ 94034 h 188068"/>
+                <a:gd name="csX1" fmla="*/ 262647 w 525294"/>
+                <a:gd name="csY1" fmla="*/ 0 h 188068"/>
+                <a:gd name="csX2" fmla="*/ 525294 w 525294"/>
+                <a:gd name="csY2" fmla="*/ 94034 h 188068"/>
+                <a:gd name="csX3" fmla="*/ 262647 w 525294"/>
+                <a:gd name="csY3" fmla="*/ 188068 h 188068"/>
+                <a:gd name="csX4" fmla="*/ 0 w 525294"/>
+                <a:gd name="csY4" fmla="*/ 94034 h 188068"/>
+                <a:gd name="csX0" fmla="*/ 0 w 623481"/>
+                <a:gd name="csY0" fmla="*/ 94831 h 189220"/>
+                <a:gd name="csX1" fmla="*/ 262647 w 623481"/>
+                <a:gd name="csY1" fmla="*/ 797 h 189220"/>
+                <a:gd name="csX2" fmla="*/ 623481 w 623481"/>
+                <a:gd name="csY2" fmla="*/ 65276 h 189220"/>
+                <a:gd name="csX3" fmla="*/ 262647 w 623481"/>
+                <a:gd name="csY3" fmla="*/ 188865 h 189220"/>
+                <a:gd name="csX4" fmla="*/ 0 w 623481"/>
+                <a:gd name="csY4" fmla="*/ 94831 h 189220"/>
+              </a:gdLst>
+              <a:ahLst/>
+              <a:cxnLst>
+                <a:cxn ang="0">
+                  <a:pos x="csX0" y="csY0"/>
+                </a:cxn>
+                <a:cxn ang="0">
+                  <a:pos x="csX1" y="csY1"/>
+                </a:cxn>
+                <a:cxn ang="0">
+                  <a:pos x="csX2" y="csY2"/>
+                </a:cxn>
+                <a:cxn ang="0">
+                  <a:pos x="csX3" y="csY3"/>
+                </a:cxn>
+                <a:cxn ang="0">
+                  <a:pos x="csX4" y="csY4"/>
+                </a:cxn>
+              </a:cxnLst>
+              <a:rect l="l" t="t" r="r" b="b"/>
+              <a:pathLst>
+                <a:path w="623481" h="189220">
+                  <a:moveTo>
+                    <a:pt x="0" y="94831"/>
+                  </a:moveTo>
+                  <a:cubicBezTo>
+                    <a:pt x="0" y="42897"/>
+                    <a:pt x="158734" y="5723"/>
+                    <a:pt x="262647" y="797"/>
+                  </a:cubicBezTo>
+                  <a:cubicBezTo>
+                    <a:pt x="366560" y="-4129"/>
+                    <a:pt x="623481" y="13342"/>
+                    <a:pt x="623481" y="65276"/>
+                  </a:cubicBezTo>
+                  <a:cubicBezTo>
+                    <a:pt x="623481" y="117210"/>
+                    <a:pt x="366560" y="183939"/>
+                    <a:pt x="262647" y="188865"/>
+                  </a:cubicBezTo>
+                  <a:cubicBezTo>
+                    <a:pt x="158734" y="193791"/>
+                    <a:pt x="0" y="146765"/>
+                    <a:pt x="0" y="94831"/>
+                  </a:cubicBezTo>
+                  <a:close/>
+                </a:path>
+              </a:pathLst>
+            </a:custGeom>
+            <a:solidFill>
+              <a:schemeClr val="accent6">
+                <a:lumMod val="75000"/>
+              </a:schemeClr>
+            </a:solidFill>
+            <a:ln>
+              <a:solidFill>
+                <a:schemeClr val="accent6">
+                  <a:lumMod val="75000"/>
+                </a:schemeClr>
+              </a:solidFill>
+            </a:ln>
+          </p:spPr>
+          <p:style>
+            <a:lnRef idx="2">
+              <a:schemeClr val="accent6">
+                <a:shade val="15000"/>
+              </a:schemeClr>
+            </a:lnRef>
+            <a:fillRef idx="1">
+              <a:schemeClr val="accent6"/>
+            </a:fillRef>
+            <a:effectRef idx="0">
+              <a:schemeClr val="accent6"/>
+            </a:effectRef>
+            <a:fontRef idx="minor">
+              <a:schemeClr val="lt1"/>
+            </a:fontRef>
+          </p:style>
+          <p:txBody>
+            <a:bodyPr rtlCol="0" anchor="ctr"/>
+            <a:lstStyle/>
+            <a:p>
+              <a:pPr algn="ctr"/>
+              <a:endParaRPr lang="en-NZ"/>
+            </a:p>
+          </p:txBody>
+        </p:sp>
+        <p:sp>
+          <p:nvSpPr>
+            <p:cNvPr id="11" name="Oval 15">
+              <a:extLst>
+                <a:ext uri="{FF2B5EF4-FFF2-40B4-BE49-F238E27FC236}">
+                  <a16:creationId xmlns:a16="http://schemas.microsoft.com/office/drawing/2014/main" id="{B498B740-0E5D-1DB7-98BF-C694AF75741E}"/>
+                </a:ext>
+              </a:extLst>
+            </p:cNvPr>
+            <p:cNvSpPr/>
+            <p:nvPr/>
+          </p:nvSpPr>
+          <p:spPr>
+            <a:xfrm rot="5158366" flipH="1">
+              <a:off x="1928466" y="2389480"/>
+              <a:ext cx="271936" cy="55089"/>
+            </a:xfrm>
+            <a:custGeom>
+              <a:avLst/>
+              <a:gdLst>
+                <a:gd name="csX0" fmla="*/ 0 w 525294"/>
+                <a:gd name="csY0" fmla="*/ 94034 h 188068"/>
+                <a:gd name="csX1" fmla="*/ 262647 w 525294"/>
+                <a:gd name="csY1" fmla="*/ 0 h 188068"/>
+                <a:gd name="csX2" fmla="*/ 525294 w 525294"/>
+                <a:gd name="csY2" fmla="*/ 94034 h 188068"/>
+                <a:gd name="csX3" fmla="*/ 262647 w 525294"/>
+                <a:gd name="csY3" fmla="*/ 188068 h 188068"/>
+                <a:gd name="csX4" fmla="*/ 0 w 525294"/>
+                <a:gd name="csY4" fmla="*/ 94034 h 188068"/>
+                <a:gd name="csX0" fmla="*/ 0 w 623481"/>
+                <a:gd name="csY0" fmla="*/ 94831 h 189220"/>
+                <a:gd name="csX1" fmla="*/ 262647 w 623481"/>
+                <a:gd name="csY1" fmla="*/ 797 h 189220"/>
+                <a:gd name="csX2" fmla="*/ 623481 w 623481"/>
+                <a:gd name="csY2" fmla="*/ 65276 h 189220"/>
+                <a:gd name="csX3" fmla="*/ 262647 w 623481"/>
+                <a:gd name="csY3" fmla="*/ 188865 h 189220"/>
+                <a:gd name="csX4" fmla="*/ 0 w 623481"/>
+                <a:gd name="csY4" fmla="*/ 94831 h 189220"/>
+              </a:gdLst>
+              <a:ahLst/>
+              <a:cxnLst>
+                <a:cxn ang="0">
+                  <a:pos x="csX0" y="csY0"/>
+                </a:cxn>
+                <a:cxn ang="0">
+                  <a:pos x="csX1" y="csY1"/>
+                </a:cxn>
+                <a:cxn ang="0">
+                  <a:pos x="csX2" y="csY2"/>
+                </a:cxn>
+                <a:cxn ang="0">
+                  <a:pos x="csX3" y="csY3"/>
+                </a:cxn>
+                <a:cxn ang="0">
+                  <a:pos x="csX4" y="csY4"/>
+                </a:cxn>
+              </a:cxnLst>
+              <a:rect l="l" t="t" r="r" b="b"/>
+              <a:pathLst>
+                <a:path w="623481" h="189220">
+                  <a:moveTo>
+                    <a:pt x="0" y="94831"/>
+                  </a:moveTo>
+                  <a:cubicBezTo>
+                    <a:pt x="0" y="42897"/>
+                    <a:pt x="158734" y="5723"/>
+                    <a:pt x="262647" y="797"/>
+                  </a:cubicBezTo>
+                  <a:cubicBezTo>
+                    <a:pt x="366560" y="-4129"/>
+                    <a:pt x="623481" y="13342"/>
+                    <a:pt x="623481" y="65276"/>
+                  </a:cubicBezTo>
+                  <a:cubicBezTo>
+                    <a:pt x="623481" y="117210"/>
+                    <a:pt x="366560" y="183939"/>
+                    <a:pt x="262647" y="188865"/>
+                  </a:cubicBezTo>
+                  <a:cubicBezTo>
+                    <a:pt x="158734" y="193791"/>
+                    <a:pt x="0" y="146765"/>
+                    <a:pt x="0" y="94831"/>
+                  </a:cubicBezTo>
+                  <a:close/>
+                </a:path>
+              </a:pathLst>
+            </a:custGeom>
+            <a:solidFill>
+              <a:schemeClr val="accent6">
+                <a:lumMod val="75000"/>
+              </a:schemeClr>
+            </a:solidFill>
+            <a:ln>
+              <a:solidFill>
+                <a:schemeClr val="accent6">
+                  <a:lumMod val="75000"/>
+                </a:schemeClr>
+              </a:solidFill>
+            </a:ln>
+          </p:spPr>
+          <p:style>
+            <a:lnRef idx="2">
+              <a:schemeClr val="accent6">
+                <a:shade val="15000"/>
+              </a:schemeClr>
+            </a:lnRef>
+            <a:fillRef idx="1">
+              <a:schemeClr val="accent6"/>
+            </a:fillRef>
+            <a:effectRef idx="0">
+              <a:schemeClr val="accent6"/>
+            </a:effectRef>
+            <a:fontRef idx="minor">
+              <a:schemeClr val="lt1"/>
+            </a:fontRef>
+          </p:style>
+          <p:txBody>
+            <a:bodyPr rtlCol="0" anchor="ctr"/>
+            <a:lstStyle/>
+            <a:p>
+              <a:pPr algn="ctr"/>
+              <a:endParaRPr lang="en-NZ"/>
+            </a:p>
+          </p:txBody>
+        </p:sp>
+        <p:sp>
+          <p:nvSpPr>
+            <p:cNvPr id="12" name="Oval 15">
+              <a:extLst>
+                <a:ext uri="{FF2B5EF4-FFF2-40B4-BE49-F238E27FC236}">
+                  <a16:creationId xmlns:a16="http://schemas.microsoft.com/office/drawing/2014/main" id="{03BB4A5F-0979-6AD2-E4A2-AF7003E0029E}"/>
+                </a:ext>
+              </a:extLst>
+            </p:cNvPr>
+            <p:cNvSpPr/>
+            <p:nvPr/>
+          </p:nvSpPr>
+          <p:spPr>
+            <a:xfrm rot="19286828">
+              <a:off x="1907716" y="3497653"/>
+              <a:ext cx="368562" cy="86250"/>
+            </a:xfrm>
+            <a:custGeom>
+              <a:avLst/>
+              <a:gdLst>
+                <a:gd name="csX0" fmla="*/ 0 w 525294"/>
+                <a:gd name="csY0" fmla="*/ 94034 h 188068"/>
+                <a:gd name="csX1" fmla="*/ 262647 w 525294"/>
+                <a:gd name="csY1" fmla="*/ 0 h 188068"/>
+                <a:gd name="csX2" fmla="*/ 525294 w 525294"/>
+                <a:gd name="csY2" fmla="*/ 94034 h 188068"/>
+                <a:gd name="csX3" fmla="*/ 262647 w 525294"/>
+                <a:gd name="csY3" fmla="*/ 188068 h 188068"/>
+                <a:gd name="csX4" fmla="*/ 0 w 525294"/>
+                <a:gd name="csY4" fmla="*/ 94034 h 188068"/>
+                <a:gd name="csX0" fmla="*/ 0 w 623481"/>
+                <a:gd name="csY0" fmla="*/ 94831 h 189220"/>
+                <a:gd name="csX1" fmla="*/ 262647 w 623481"/>
+                <a:gd name="csY1" fmla="*/ 797 h 189220"/>
+                <a:gd name="csX2" fmla="*/ 623481 w 623481"/>
+                <a:gd name="csY2" fmla="*/ 65276 h 189220"/>
+                <a:gd name="csX3" fmla="*/ 262647 w 623481"/>
+                <a:gd name="csY3" fmla="*/ 188865 h 189220"/>
+                <a:gd name="csX4" fmla="*/ 0 w 623481"/>
+                <a:gd name="csY4" fmla="*/ 94831 h 189220"/>
+              </a:gdLst>
+              <a:ahLst/>
+              <a:cxnLst>
+                <a:cxn ang="0">
+                  <a:pos x="csX0" y="csY0"/>
+                </a:cxn>
+                <a:cxn ang="0">
+                  <a:pos x="csX1" y="csY1"/>
+                </a:cxn>
+                <a:cxn ang="0">
+                  <a:pos x="csX2" y="csY2"/>
+                </a:cxn>
+                <a:cxn ang="0">
+                  <a:pos x="csX3" y="csY3"/>
+                </a:cxn>
+                <a:cxn ang="0">
+                  <a:pos x="csX4" y="csY4"/>
+                </a:cxn>
+              </a:cxnLst>
+              <a:rect l="l" t="t" r="r" b="b"/>
+              <a:pathLst>
+                <a:path w="623481" h="189220">
+                  <a:moveTo>
+                    <a:pt x="0" y="94831"/>
+                  </a:moveTo>
+                  <a:cubicBezTo>
+                    <a:pt x="0" y="42897"/>
+                    <a:pt x="158734" y="5723"/>
+                    <a:pt x="262647" y="797"/>
+                  </a:cubicBezTo>
+                  <a:cubicBezTo>
+                    <a:pt x="366560" y="-4129"/>
+                    <a:pt x="623481" y="13342"/>
+                    <a:pt x="623481" y="65276"/>
+                  </a:cubicBezTo>
+                  <a:cubicBezTo>
+                    <a:pt x="623481" y="117210"/>
+                    <a:pt x="366560" y="183939"/>
+                    <a:pt x="262647" y="188865"/>
+                  </a:cubicBezTo>
+                  <a:cubicBezTo>
+                    <a:pt x="158734" y="193791"/>
+                    <a:pt x="0" y="146765"/>
+                    <a:pt x="0" y="94831"/>
+                  </a:cubicBezTo>
+                  <a:close/>
+                </a:path>
+              </a:pathLst>
+            </a:custGeom>
+            <a:solidFill>
+              <a:schemeClr val="accent6">
+                <a:lumMod val="75000"/>
+              </a:schemeClr>
+            </a:solidFill>
+            <a:ln>
+              <a:solidFill>
+                <a:schemeClr val="accent6">
+                  <a:lumMod val="75000"/>
+                </a:schemeClr>
+              </a:solidFill>
+            </a:ln>
+          </p:spPr>
+          <p:style>
+            <a:lnRef idx="2">
+              <a:schemeClr val="accent6">
+                <a:shade val="15000"/>
+              </a:schemeClr>
+            </a:lnRef>
+            <a:fillRef idx="1">
+              <a:schemeClr val="accent6"/>
+            </a:fillRef>
+            <a:effectRef idx="0">
+              <a:schemeClr val="accent6"/>
+            </a:effectRef>
+            <a:fontRef idx="minor">
+              <a:schemeClr val="lt1"/>
+            </a:fontRef>
+          </p:style>
+          <p:txBody>
+            <a:bodyPr rtlCol="0" anchor="ctr"/>
+            <a:lstStyle/>
+            <a:p>
+              <a:pPr algn="ctr"/>
+              <a:endParaRPr lang="en-NZ"/>
+            </a:p>
+          </p:txBody>
+        </p:sp>
+        <p:sp>
+          <p:nvSpPr>
+            <p:cNvPr id="13" name="Oval 15">
+              <a:extLst>
+                <a:ext uri="{FF2B5EF4-FFF2-40B4-BE49-F238E27FC236}">
+                  <a16:creationId xmlns:a16="http://schemas.microsoft.com/office/drawing/2014/main" id="{9BF6CBA4-7BD2-0936-DBCC-606C7599A1E3}"/>
+                </a:ext>
+              </a:extLst>
+            </p:cNvPr>
+            <p:cNvSpPr/>
+            <p:nvPr/>
+          </p:nvSpPr>
+          <p:spPr>
+            <a:xfrm rot="19286828">
+              <a:off x="2004759" y="2607654"/>
+              <a:ext cx="291208" cy="92887"/>
+            </a:xfrm>
+            <a:custGeom>
+              <a:avLst/>
+              <a:gdLst>
+                <a:gd name="csX0" fmla="*/ 0 w 525294"/>
+                <a:gd name="csY0" fmla="*/ 94034 h 188068"/>
+                <a:gd name="csX1" fmla="*/ 262647 w 525294"/>
+                <a:gd name="csY1" fmla="*/ 0 h 188068"/>
+                <a:gd name="csX2" fmla="*/ 525294 w 525294"/>
+                <a:gd name="csY2" fmla="*/ 94034 h 188068"/>
+                <a:gd name="csX3" fmla="*/ 262647 w 525294"/>
+                <a:gd name="csY3" fmla="*/ 188068 h 188068"/>
+                <a:gd name="csX4" fmla="*/ 0 w 525294"/>
+                <a:gd name="csY4" fmla="*/ 94034 h 188068"/>
+                <a:gd name="csX0" fmla="*/ 0 w 623481"/>
+                <a:gd name="csY0" fmla="*/ 94831 h 189220"/>
+                <a:gd name="csX1" fmla="*/ 262647 w 623481"/>
+                <a:gd name="csY1" fmla="*/ 797 h 189220"/>
+                <a:gd name="csX2" fmla="*/ 623481 w 623481"/>
+                <a:gd name="csY2" fmla="*/ 65276 h 189220"/>
+                <a:gd name="csX3" fmla="*/ 262647 w 623481"/>
+                <a:gd name="csY3" fmla="*/ 188865 h 189220"/>
+                <a:gd name="csX4" fmla="*/ 0 w 623481"/>
+                <a:gd name="csY4" fmla="*/ 94831 h 189220"/>
+              </a:gdLst>
+              <a:ahLst/>
+              <a:cxnLst>
+                <a:cxn ang="0">
+                  <a:pos x="csX0" y="csY0"/>
+                </a:cxn>
+                <a:cxn ang="0">
+                  <a:pos x="csX1" y="csY1"/>
+                </a:cxn>
+                <a:cxn ang="0">
+                  <a:pos x="csX2" y="csY2"/>
+                </a:cxn>
+                <a:cxn ang="0">
+                  <a:pos x="csX3" y="csY3"/>
+                </a:cxn>
+                <a:cxn ang="0">
+                  <a:pos x="csX4" y="csY4"/>
+                </a:cxn>
+              </a:cxnLst>
+              <a:rect l="l" t="t" r="r" b="b"/>
+              <a:pathLst>
+                <a:path w="623481" h="189220">
+                  <a:moveTo>
+                    <a:pt x="0" y="94831"/>
+                  </a:moveTo>
+                  <a:cubicBezTo>
+                    <a:pt x="0" y="42897"/>
+                    <a:pt x="158734" y="5723"/>
+                    <a:pt x="262647" y="797"/>
+                  </a:cubicBezTo>
+                  <a:cubicBezTo>
+                    <a:pt x="366560" y="-4129"/>
+                    <a:pt x="623481" y="13342"/>
+                    <a:pt x="623481" y="65276"/>
+                  </a:cubicBezTo>
+                  <a:cubicBezTo>
+                    <a:pt x="623481" y="117210"/>
+                    <a:pt x="366560" y="183939"/>
+                    <a:pt x="262647" y="188865"/>
+                  </a:cubicBezTo>
+                  <a:cubicBezTo>
+                    <a:pt x="158734" y="193791"/>
+                    <a:pt x="0" y="146765"/>
+                    <a:pt x="0" y="94831"/>
+                  </a:cubicBezTo>
+                  <a:close/>
+                </a:path>
+              </a:pathLst>
+            </a:custGeom>
+            <a:solidFill>
+              <a:schemeClr val="accent6">
+                <a:lumMod val="75000"/>
+              </a:schemeClr>
+            </a:solidFill>
+            <a:ln>
+              <a:solidFill>
+                <a:schemeClr val="accent6">
+                  <a:lumMod val="75000"/>
+                </a:schemeClr>
+              </a:solidFill>
+            </a:ln>
+          </p:spPr>
+          <p:style>
+            <a:lnRef idx="2">
+              <a:schemeClr val="accent6">
+                <a:shade val="15000"/>
+              </a:schemeClr>
+            </a:lnRef>
+            <a:fillRef idx="1">
+              <a:schemeClr val="accent6"/>
+            </a:fillRef>
+            <a:effectRef idx="0">
+              <a:schemeClr val="accent6"/>
+            </a:effectRef>
+            <a:fontRef idx="minor">
+              <a:schemeClr val="lt1"/>
+            </a:fontRef>
+          </p:style>
+          <p:txBody>
+            <a:bodyPr rtlCol="0" anchor="ctr"/>
+            <a:lstStyle/>
+            <a:p>
+              <a:pPr algn="ctr"/>
+              <a:endParaRPr lang="en-NZ"/>
+            </a:p>
+          </p:txBody>
+        </p:sp>
+        <p:sp>
+          <p:nvSpPr>
+            <p:cNvPr id="14" name="Oval 15">
+              <a:extLst>
+                <a:ext uri="{FF2B5EF4-FFF2-40B4-BE49-F238E27FC236}">
+                  <a16:creationId xmlns:a16="http://schemas.microsoft.com/office/drawing/2014/main" id="{5B13FEB0-8D5A-11A7-E53E-7034B0B56677}"/>
+                </a:ext>
+              </a:extLst>
+            </p:cNvPr>
+            <p:cNvSpPr/>
+            <p:nvPr/>
+          </p:nvSpPr>
+          <p:spPr>
+            <a:xfrm rot="19286828">
+              <a:off x="1922696" y="3037895"/>
+              <a:ext cx="291208" cy="92887"/>
+            </a:xfrm>
+            <a:custGeom>
+              <a:avLst/>
+              <a:gdLst>
+                <a:gd name="csX0" fmla="*/ 0 w 525294"/>
+                <a:gd name="csY0" fmla="*/ 94034 h 188068"/>
+                <a:gd name="csX1" fmla="*/ 262647 w 525294"/>
+                <a:gd name="csY1" fmla="*/ 0 h 188068"/>
+                <a:gd name="csX2" fmla="*/ 525294 w 525294"/>
+                <a:gd name="csY2" fmla="*/ 94034 h 188068"/>
+                <a:gd name="csX3" fmla="*/ 262647 w 525294"/>
+                <a:gd name="csY3" fmla="*/ 188068 h 188068"/>
+                <a:gd name="csX4" fmla="*/ 0 w 525294"/>
+                <a:gd name="csY4" fmla="*/ 94034 h 188068"/>
+                <a:gd name="csX0" fmla="*/ 0 w 623481"/>
+                <a:gd name="csY0" fmla="*/ 94831 h 189220"/>
+                <a:gd name="csX1" fmla="*/ 262647 w 623481"/>
+                <a:gd name="csY1" fmla="*/ 797 h 189220"/>
+                <a:gd name="csX2" fmla="*/ 623481 w 623481"/>
+                <a:gd name="csY2" fmla="*/ 65276 h 189220"/>
+                <a:gd name="csX3" fmla="*/ 262647 w 623481"/>
+                <a:gd name="csY3" fmla="*/ 188865 h 189220"/>
+                <a:gd name="csX4" fmla="*/ 0 w 623481"/>
+                <a:gd name="csY4" fmla="*/ 94831 h 189220"/>
+              </a:gdLst>
+              <a:ahLst/>
+              <a:cxnLst>
+                <a:cxn ang="0">
+                  <a:pos x="csX0" y="csY0"/>
+                </a:cxn>
+                <a:cxn ang="0">
+                  <a:pos x="csX1" y="csY1"/>
+                </a:cxn>
+                <a:cxn ang="0">
+                  <a:pos x="csX2" y="csY2"/>
+                </a:cxn>
+                <a:cxn ang="0">
+                  <a:pos x="csX3" y="csY3"/>
+                </a:cxn>
+                <a:cxn ang="0">
+                  <a:pos x="csX4" y="csY4"/>
+                </a:cxn>
+              </a:cxnLst>
+              <a:rect l="l" t="t" r="r" b="b"/>
+              <a:pathLst>
+                <a:path w="623481" h="189220">
+                  <a:moveTo>
+                    <a:pt x="0" y="94831"/>
+                  </a:moveTo>
+                  <a:cubicBezTo>
+                    <a:pt x="0" y="42897"/>
+                    <a:pt x="158734" y="5723"/>
+                    <a:pt x="262647" y="797"/>
+                  </a:cubicBezTo>
+                  <a:cubicBezTo>
+                    <a:pt x="366560" y="-4129"/>
+                    <a:pt x="623481" y="13342"/>
+                    <a:pt x="623481" y="65276"/>
+                  </a:cubicBezTo>
+                  <a:cubicBezTo>
+                    <a:pt x="623481" y="117210"/>
+                    <a:pt x="366560" y="183939"/>
+                    <a:pt x="262647" y="188865"/>
+                  </a:cubicBezTo>
+                  <a:cubicBezTo>
+                    <a:pt x="158734" y="193791"/>
+                    <a:pt x="0" y="146765"/>
+                    <a:pt x="0" y="94831"/>
+                  </a:cubicBezTo>
+                  <a:close/>
+                </a:path>
+              </a:pathLst>
+            </a:custGeom>
+            <a:solidFill>
+              <a:schemeClr val="accent6">
+                <a:lumMod val="75000"/>
+              </a:schemeClr>
+            </a:solidFill>
+            <a:ln>
+              <a:solidFill>
+                <a:schemeClr val="accent6">
+                  <a:lumMod val="75000"/>
+                </a:schemeClr>
+              </a:solidFill>
+            </a:ln>
+          </p:spPr>
+          <p:style>
+            <a:lnRef idx="2">
+              <a:schemeClr val="accent6">
+                <a:shade val="15000"/>
+              </a:schemeClr>
+            </a:lnRef>
+            <a:fillRef idx="1">
+              <a:schemeClr val="accent6"/>
+            </a:fillRef>
+            <a:effectRef idx="0">
+              <a:schemeClr val="accent6"/>
+            </a:effectRef>
+            <a:fontRef idx="minor">
+              <a:schemeClr val="lt1"/>
+            </a:fontRef>
+          </p:style>
+          <p:txBody>
+            <a:bodyPr rtlCol="0" anchor="ctr"/>
+            <a:lstStyle/>
+            <a:p>
+              <a:pPr algn="ctr"/>
+              <a:endParaRPr lang="en-NZ"/>
+            </a:p>
+          </p:txBody>
+        </p:sp>
+        <p:sp>
+          <p:nvSpPr>
+            <p:cNvPr id="15" name="Oval 15">
+              <a:extLst>
+                <a:ext uri="{FF2B5EF4-FFF2-40B4-BE49-F238E27FC236}">
+                  <a16:creationId xmlns:a16="http://schemas.microsoft.com/office/drawing/2014/main" id="{292824B0-FD73-A4BE-4CEC-623EA8FC9F06}"/>
+                </a:ext>
+              </a:extLst>
+            </p:cNvPr>
+            <p:cNvSpPr/>
+            <p:nvPr/>
+          </p:nvSpPr>
+          <p:spPr>
+            <a:xfrm rot="3067841" flipH="1">
+              <a:off x="1649247" y="3704167"/>
+              <a:ext cx="428121" cy="76467"/>
+            </a:xfrm>
+            <a:custGeom>
+              <a:avLst/>
+              <a:gdLst>
+                <a:gd name="csX0" fmla="*/ 0 w 525294"/>
+                <a:gd name="csY0" fmla="*/ 94034 h 188068"/>
+                <a:gd name="csX1" fmla="*/ 262647 w 525294"/>
+                <a:gd name="csY1" fmla="*/ 0 h 188068"/>
+                <a:gd name="csX2" fmla="*/ 525294 w 525294"/>
+                <a:gd name="csY2" fmla="*/ 94034 h 188068"/>
+                <a:gd name="csX3" fmla="*/ 262647 w 525294"/>
+                <a:gd name="csY3" fmla="*/ 188068 h 188068"/>
+                <a:gd name="csX4" fmla="*/ 0 w 525294"/>
+                <a:gd name="csY4" fmla="*/ 94034 h 188068"/>
+                <a:gd name="csX0" fmla="*/ 0 w 623481"/>
+                <a:gd name="csY0" fmla="*/ 94831 h 189220"/>
+                <a:gd name="csX1" fmla="*/ 262647 w 623481"/>
+                <a:gd name="csY1" fmla="*/ 797 h 189220"/>
+                <a:gd name="csX2" fmla="*/ 623481 w 623481"/>
+                <a:gd name="csY2" fmla="*/ 65276 h 189220"/>
+                <a:gd name="csX3" fmla="*/ 262647 w 623481"/>
+                <a:gd name="csY3" fmla="*/ 188865 h 189220"/>
+                <a:gd name="csX4" fmla="*/ 0 w 623481"/>
+                <a:gd name="csY4" fmla="*/ 94831 h 189220"/>
+              </a:gdLst>
+              <a:ahLst/>
+              <a:cxnLst>
+                <a:cxn ang="0">
+                  <a:pos x="csX0" y="csY0"/>
+                </a:cxn>
+                <a:cxn ang="0">
+                  <a:pos x="csX1" y="csY1"/>
+                </a:cxn>
+                <a:cxn ang="0">
+                  <a:pos x="csX2" y="csY2"/>
+                </a:cxn>
+                <a:cxn ang="0">
+                  <a:pos x="csX3" y="csY3"/>
+                </a:cxn>
+                <a:cxn ang="0">
+                  <a:pos x="csX4" y="csY4"/>
+                </a:cxn>
+              </a:cxnLst>
+              <a:rect l="l" t="t" r="r" b="b"/>
+              <a:pathLst>
+                <a:path w="623481" h="189220">
+                  <a:moveTo>
+                    <a:pt x="0" y="94831"/>
+                  </a:moveTo>
+                  <a:cubicBezTo>
+                    <a:pt x="0" y="42897"/>
+                    <a:pt x="158734" y="5723"/>
+                    <a:pt x="262647" y="797"/>
+                  </a:cubicBezTo>
+                  <a:cubicBezTo>
+                    <a:pt x="366560" y="-4129"/>
+                    <a:pt x="623481" y="13342"/>
+                    <a:pt x="623481" y="65276"/>
+                  </a:cubicBezTo>
+                  <a:cubicBezTo>
+                    <a:pt x="623481" y="117210"/>
+                    <a:pt x="366560" y="183939"/>
+                    <a:pt x="262647" y="188865"/>
+                  </a:cubicBezTo>
+                  <a:cubicBezTo>
+                    <a:pt x="158734" y="193791"/>
+                    <a:pt x="0" y="146765"/>
+                    <a:pt x="0" y="94831"/>
+                  </a:cubicBezTo>
+                  <a:close/>
+                </a:path>
+              </a:pathLst>
+            </a:custGeom>
+            <a:solidFill>
+              <a:schemeClr val="accent6">
+                <a:lumMod val="75000"/>
+              </a:schemeClr>
+            </a:solidFill>
+            <a:ln>
+              <a:solidFill>
+                <a:schemeClr val="accent6">
+                  <a:lumMod val="75000"/>
+                </a:schemeClr>
+              </a:solidFill>
+            </a:ln>
+          </p:spPr>
+          <p:style>
+            <a:lnRef idx="2">
+              <a:schemeClr val="accent6">
+                <a:shade val="15000"/>
+              </a:schemeClr>
+            </a:lnRef>
+            <a:fillRef idx="1">
+              <a:schemeClr val="accent6"/>
+            </a:fillRef>
+            <a:effectRef idx="0">
+              <a:schemeClr val="accent6"/>
+            </a:effectRef>
+            <a:fontRef idx="minor">
+              <a:schemeClr val="lt1"/>
+            </a:fontRef>
+          </p:style>
+          <p:txBody>
+            <a:bodyPr rtlCol="0" anchor="ctr"/>
+            <a:lstStyle/>
+            <a:p>
+              <a:pPr algn="ctr"/>
+              <a:endParaRPr lang="en-NZ"/>
+            </a:p>
+          </p:txBody>
+        </p:sp>
+      </p:grpSp>
+    </p:spTree>
+    <p:extLst>
+      <p:ext uri="{BB962C8B-B14F-4D97-AF65-F5344CB8AC3E}">
+        <p14:creationId xmlns:p14="http://schemas.microsoft.com/office/powerpoint/2010/main" val="1968650738"/>
       </p:ext>
     </p:extLst>
   </p:cSld>
